--- a/V2授课PPT/W11-第22次课-从虚拟设备采数到云端上报.pptx
+++ b/V2授课PPT/W11-第22次课-从虚拟设备采数到云端上报.pptx
@@ -6,6 +6,7 @@
   </p:sldMasterIdLst>
   <p:sldIdLst>
     <p:sldId id="256" r:id="rId7"/>
+    <p:sldId id="366" r:id="rId16"/>
     <p:sldId id="280" r:id="rId32"/>
     <p:sldId id="310" r:id="rId62"/>
     <p:sldId id="316" r:id="rId68"/>
@@ -13,6 +14,8 @@
     <p:sldId id="337" r:id="rId89"/>
     <p:sldId id="364" r:id="rId116"/>
     <p:sldId id="365" r:id="rId117"/>
+    <p:sldId id="367" r:id="rId17"/>
+    <p:sldId id="368" r:id="rId18"/>
   </p:sldIdLst>
   <p:sldSz cx="12192000" cy="6858000" type="screen4x3"/>
   <p:notesSz cx="6858000" cy="9144000"/>
@@ -4380,6 +4383,234 @@
 </p:sld>
 </file>
 
+<file path=ppt/slides/slide10.xml><?xml version="1.0" encoding="utf-8"?>
+<p:sld xmlns:a="http://schemas.openxmlformats.org/drawingml/2006/main" xmlns:p="http://schemas.openxmlformats.org/presentationml/2006/main" xmlns:r="http://schemas.openxmlformats.org/officeDocument/2006/relationships">
+  <p:cSld>
+    <p:spTree>
+      <p:nvGrpSpPr>
+        <p:cNvPr id="1" name=""/>
+        <p:cNvGrpSpPr/>
+        <p:nvPr/>
+      </p:nvGrpSpPr>
+      <p:grpSpPr/>
+      <p:sp>
+        <p:nvSpPr>
+          <p:cNvPr id="2" name="TextBox 1"/>
+          <p:cNvSpPr txBox="1"/>
+          <p:nvPr/>
+        </p:nvSpPr>
+        <p:spPr>
+          <a:xfrm>
+            <a:off x="548640" y="320040"/>
+            <a:ext cx="11094720" cy="914400"/>
+          </a:xfrm>
+          <a:prstGeom prst="rect">
+            <a:avLst/>
+          </a:prstGeom>
+          <a:noFill/>
+        </p:spPr>
+        <p:txBody>
+          <a:bodyPr wrap="none">
+            <a:spAutoFit/>
+          </a:bodyPr>
+          <a:lstStyle/>
+          <a:p>
+            <a:r>
+              <a:rPr sz="3000" b="1"/>
+              <a:t>本任务六步法导航</a:t>
+            </a:r>
+          </a:p>
+        </p:txBody>
+      </p:sp>
+      <p:sp>
+        <p:nvSpPr>
+          <p:cNvPr id="3" name="TextBox 2"/>
+          <p:cNvSpPr txBox="1"/>
+          <p:nvPr/>
+        </p:nvSpPr>
+        <p:spPr>
+          <a:xfrm>
+            <a:off x="731520" y="1371600"/>
+            <a:ext cx="10728960" cy="4663440"/>
+          </a:xfrm>
+          <a:prstGeom prst="rect">
+            <a:avLst/>
+          </a:prstGeom>
+          <a:noFill/>
+        </p:spPr>
+        <p:txBody>
+          <a:bodyPr wrap="square">
+            <a:spAutoFit/>
+          </a:bodyPr>
+          <a:lstStyle/>
+          <a:p>
+            <a:pPr>
+              <a:spcAft>
+                <a:spcPts val="1000"/>
+              </a:spcAft>
+            </a:pPr>
+            <a:r>
+              <a:rPr sz="1800"/>
+              <a:t>六步法：资讯 → 计划 → 决策 → 实施 → 检查 → 评估</a:t>
+            </a:r>
+          </a:p>
+          <a:p>
+            <a:pPr>
+              <a:spcAft>
+                <a:spcPts val="1000"/>
+              </a:spcAft>
+            </a:pPr>
+            <a:r>
+              <a:rPr sz="1800"/>
+              <a:t>本讲对应工单：《程序设计基础》分层任务工单</a:t>
+            </a:r>
+          </a:p>
+          <a:p>
+            <a:pPr>
+              <a:spcAft>
+                <a:spcPts val="1000"/>
+              </a:spcAft>
+            </a:pPr>
+            <a:r>
+              <a:rPr sz="1800"/>
+              <a:t>课堂产出：工单第六节实施记录须当堂填写，含操作前安全打勾与学生本人签字。</a:t>
+            </a:r>
+          </a:p>
+          <a:p>
+            <a:pPr>
+              <a:spcAft>
+                <a:spcPts val="1000"/>
+              </a:spcAft>
+            </a:pPr>
+            <a:r>
+              <a:rPr sz="1800"/>
+              <a:t>课后交付：班组长／操作员／教师三方联签后交回，缺签视为未交付。</a:t>
+            </a:r>
+          </a:p>
+        </p:txBody>
+      </p:sp>
+    </p:spTree>
+  </p:cSld>
+  <p:clrMapOvr>
+    <a:masterClrMapping/>
+  </p:clrMapOvr>
+</p:sld>
+</file>
+
+<file path=ppt/slides/slide11.xml><?xml version="1.0" encoding="utf-8"?>
+<p:sld xmlns:a="http://schemas.openxmlformats.org/drawingml/2006/main" xmlns:p="http://schemas.openxmlformats.org/presentationml/2006/main" xmlns:r="http://schemas.openxmlformats.org/officeDocument/2006/relationships">
+  <p:cSld>
+    <p:spTree>
+      <p:nvGrpSpPr>
+        <p:cNvPr id="1" name=""/>
+        <p:cNvGrpSpPr/>
+        <p:nvPr/>
+      </p:nvGrpSpPr>
+      <p:grpSpPr/>
+      <p:sp>
+        <p:nvSpPr>
+          <p:cNvPr id="2" name="TextBox 1"/>
+          <p:cNvSpPr txBox="1"/>
+          <p:nvPr/>
+        </p:nvSpPr>
+        <p:spPr>
+          <a:xfrm>
+            <a:off x="548640" y="320040"/>
+            <a:ext cx="11094720" cy="914400"/>
+          </a:xfrm>
+          <a:prstGeom prst="rect">
+            <a:avLst/>
+          </a:prstGeom>
+          <a:noFill/>
+        </p:spPr>
+        <p:txBody>
+          <a:bodyPr wrap="none">
+            <a:spAutoFit/>
+          </a:bodyPr>
+          <a:lstStyle/>
+          <a:p>
+            <a:r>
+              <a:rPr sz="3000" b="1"/>
+              <a:t>本讲与岗位任务单的衔接</a:t>
+            </a:r>
+          </a:p>
+        </p:txBody>
+      </p:sp>
+      <p:sp>
+        <p:nvSpPr>
+          <p:cNvPr id="3" name="TextBox 2"/>
+          <p:cNvSpPr txBox="1"/>
+          <p:nvPr/>
+        </p:nvSpPr>
+        <p:spPr>
+          <a:xfrm>
+            <a:off x="731520" y="1371600"/>
+            <a:ext cx="10728960" cy="4663440"/>
+          </a:xfrm>
+          <a:prstGeom prst="rect">
+            <a:avLst/>
+          </a:prstGeom>
+          <a:noFill/>
+        </p:spPr>
+        <p:txBody>
+          <a:bodyPr wrap="square">
+            <a:spAutoFit/>
+          </a:bodyPr>
+          <a:lstStyle/>
+          <a:p>
+            <a:pPr>
+              <a:spcAft>
+                <a:spcPts val="1000"/>
+              </a:spcAft>
+            </a:pPr>
+            <a:r>
+              <a:rPr sz="1800"/>
+              <a:t>本讲在工作过程系统化课程中承担的任务环节：任务实施</a:t>
+            </a:r>
+          </a:p>
+          <a:p>
+            <a:pPr>
+              <a:spcAft>
+                <a:spcPts val="1000"/>
+              </a:spcAft>
+            </a:pPr>
+            <a:r>
+              <a:rPr sz="1800"/>
+              <a:t>考核对齐：过程性成绩取自本讲工单第六节各模块得分合计（满分 100）。</a:t>
+            </a:r>
+          </a:p>
+          <a:p>
+            <a:pPr>
+              <a:spcAft>
+                <a:spcPts val="1000"/>
+              </a:spcAft>
+            </a:pPr>
+            <a:r>
+              <a:rPr sz="1800"/>
+              <a:t>达标线：综合成绩≥60 分，且无安全红线一票否决记录</a:t>
+            </a:r>
+          </a:p>
+          <a:p>
+            <a:pPr>
+              <a:spcAft>
+                <a:spcPts val="1000"/>
+              </a:spcAft>
+            </a:pPr>
+            <a:r>
+              <a:rPr sz="1800"/>
+              <a:t>无效工单判定：未打安全勾、无本人签字、无三方联签。</a:t>
+            </a:r>
+          </a:p>
+        </p:txBody>
+      </p:sp>
+    </p:spTree>
+  </p:cSld>
+  <p:clrMapOvr>
+    <a:masterClrMapping/>
+  </p:clrMapOvr>
+</p:sld>
+</file>
+
 <file path=ppt/slides/slide2.xml><?xml version="1.0" encoding="utf-8"?>
 <p:sld xmlns:a="http://schemas.openxmlformats.org/drawingml/2006/main" xmlns:p="http://schemas.openxmlformats.org/presentationml/2006/main" xmlns:r="http://schemas.openxmlformats.org/officeDocument/2006/relationships">
   <p:cSld>
@@ -8326,6 +8557,137 @@
                 <a:latin typeface="微软雅黑"/>
               </a:rPr>
               <a:t>带着问题来上课——Predict先于Run</a:t>
+            </a:r>
+          </a:p>
+        </p:txBody>
+      </p:sp>
+    </p:spTree>
+  </p:cSld>
+  <p:clrMapOvr>
+    <a:masterClrMapping/>
+  </p:clrMapOvr>
+</p:sld>
+</file>
+
+<file path=ppt/slides/slide9.xml><?xml version="1.0" encoding="utf-8"?>
+<p:sld xmlns:a="http://schemas.openxmlformats.org/drawingml/2006/main" xmlns:p="http://schemas.openxmlformats.org/presentationml/2006/main" xmlns:r="http://schemas.openxmlformats.org/officeDocument/2006/relationships">
+  <p:cSld>
+    <p:spTree>
+      <p:nvGrpSpPr>
+        <p:cNvPr id="1" name=""/>
+        <p:cNvGrpSpPr/>
+        <p:nvPr/>
+      </p:nvGrpSpPr>
+      <p:grpSpPr/>
+      <p:sp>
+        <p:nvSpPr>
+          <p:cNvPr id="2" name="TextBox 1"/>
+          <p:cNvSpPr txBox="1"/>
+          <p:nvPr/>
+        </p:nvSpPr>
+        <p:spPr>
+          <a:xfrm>
+            <a:off x="548640" y="320040"/>
+            <a:ext cx="11094720" cy="914400"/>
+          </a:xfrm>
+          <a:prstGeom prst="rect">
+            <a:avLst/>
+          </a:prstGeom>
+          <a:noFill/>
+        </p:spPr>
+        <p:txBody>
+          <a:bodyPr wrap="none">
+            <a:spAutoFit/>
+          </a:bodyPr>
+          <a:lstStyle/>
+          <a:p>
+            <a:r>
+              <a:rPr sz="3000" b="1"/>
+              <a:t>安全与合规警示（操作前必读）</a:t>
+            </a:r>
+          </a:p>
+        </p:txBody>
+      </p:sp>
+      <p:sp>
+        <p:nvSpPr>
+          <p:cNvPr id="3" name="TextBox 2"/>
+          <p:cNvSpPr txBox="1"/>
+          <p:nvPr/>
+        </p:nvSpPr>
+        <p:spPr>
+          <a:xfrm>
+            <a:off x="731520" y="1371600"/>
+            <a:ext cx="10728960" cy="4663440"/>
+          </a:xfrm>
+          <a:prstGeom prst="rect">
+            <a:avLst/>
+          </a:prstGeom>
+          <a:noFill/>
+        </p:spPr>
+        <p:txBody>
+          <a:bodyPr wrap="square">
+            <a:spAutoFit/>
+          </a:bodyPr>
+          <a:lstStyle/>
+          <a:p>
+            <a:pPr>
+              <a:spcAft>
+                <a:spcPts val="1000"/>
+              </a:spcAft>
+            </a:pPr>
+            <a:r>
+              <a:rPr sz="1800"/>
+              <a:t>1. 上机前确认本工位电源开关与急停位置，确认设备处于安全状态。</a:t>
+            </a:r>
+          </a:p>
+          <a:p>
+            <a:pPr>
+              <a:spcAft>
+                <a:spcPts val="1000"/>
+              </a:spcAft>
+            </a:pPr>
+            <a:r>
+              <a:rPr sz="1800"/>
+              <a:t>2. 涉及接线的操作一律先断电、后验电、再作业，禁止带电插拔。</a:t>
+            </a:r>
+          </a:p>
+          <a:p>
+            <a:pPr>
+              <a:spcAft>
+                <a:spcPts val="1000"/>
+              </a:spcAft>
+            </a:pPr>
+            <a:r>
+              <a:rPr sz="1800"/>
+              <a:t>3. 身体任何部位不进入设备运动/散热区域，长发束起，不佩戴悬垂饰物。</a:t>
+            </a:r>
+          </a:p>
+          <a:p>
+            <a:pPr>
+              <a:spcAft>
+                <a:spcPts val="1000"/>
+              </a:spcAft>
+            </a:pPr>
+            <a:r>
+              <a:rPr sz="1800"/>
+              <a:t>4. 调试程序前先静态检查、再低速小样本试运行，确认无异常后放大规模。</a:t>
+            </a:r>
+          </a:p>
+          <a:p>
+            <a:pPr>
+              <a:spcAft>
+                <a:spcPts val="1000"/>
+              </a:spcAft>
+            </a:pPr>
+            <a:r>
+              <a:rPr sz="1800"/>
+              <a:t>5. 任何不确定或异常情况，立即停止操作并报告指导教师，不擅自处置。</a:t>
+            </a:r>
+          </a:p>
+          <a:p>
+            <a:r>
+              <a:rPr sz="1400" b="1"/>
+              <a:t>以上任一条违反，本次任务按课程标准「安全规范一票否决」条款记 0 分并中止实训。</a:t>
             </a:r>
           </a:p>
         </p:txBody>

--- a/V2授课PPT/W11-第22次课-从虚拟设备采数到云端上报.pptx
+++ b/V2授课PPT/W11-第22次课-从虚拟设备采数到云端上报.pptx
@@ -10,6 +10,9 @@
     <p:sldId id="280" r:id="rId32"/>
     <p:sldId id="310" r:id="rId62"/>
     <p:sldId id="316" r:id="rId68"/>
+    <p:sldId id="369" r:id="rId19"/>
+    <p:sldId id="370" r:id="rId20"/>
+    <p:sldId id="371" r:id="rId21"/>
     <p:sldId id="318" r:id="rId70"/>
     <p:sldId id="337" r:id="rId89"/>
     <p:sldId id="364" r:id="rId116"/>
@@ -4611,6 +4614,3259 @@
 </p:sld>
 </file>
 
+<file path=ppt/slides/slide12.xml><?xml version="1.0" encoding="utf-8"?>
+<p:sld xmlns:a="http://schemas.openxmlformats.org/drawingml/2006/main" xmlns:p="http://schemas.openxmlformats.org/presentationml/2006/main" xmlns:r="http://schemas.openxmlformats.org/officeDocument/2006/relationships">
+  <p:cSld>
+    <p:spTree>
+      <p:nvGrpSpPr>
+        <p:cNvPr id="1" name=""/>
+        <p:cNvGrpSpPr/>
+        <p:nvPr/>
+      </p:nvGrpSpPr>
+      <p:grpSpPr/>
+      <p:sp>
+        <p:nvSpPr>
+          <p:cNvPr id="2" name="Rectangle 1"/>
+          <p:cNvSpPr/>
+          <p:nvPr/>
+        </p:nvSpPr>
+        <p:spPr>
+          <a:xfrm>
+            <a:off x="0" y="0"/>
+            <a:ext cx="12192000" cy="1150000"/>
+          </a:xfrm>
+          <a:prstGeom prst="rect">
+            <a:avLst/>
+          </a:prstGeom>
+          <a:solidFill>
+            <a:srgbClr val="010328"/>
+          </a:solidFill>
+          <a:ln>
+            <a:noFill/>
+          </a:ln>
+          <a:effectLst/>
+        </p:spPr>
+        <p:style>
+          <a:lnRef idx="1">
+            <a:schemeClr val="accent1"/>
+          </a:lnRef>
+          <a:fillRef idx="3">
+            <a:schemeClr val="accent1"/>
+          </a:fillRef>
+          <a:effectRef idx="2">
+            <a:schemeClr val="accent1"/>
+          </a:effectRef>
+          <a:fontRef idx="minor">
+            <a:schemeClr val="lt1"/>
+          </a:fontRef>
+        </p:style>
+        <p:txBody>
+          <a:bodyPr rtlCol="0" anchor="ctr"/>
+          <a:lstStyle/>
+          <a:p>
+            <a:pPr algn="ctr"/>
+          </a:p>
+        </p:txBody>
+      </p:sp>
+      <p:sp>
+        <p:nvSpPr>
+          <p:cNvPr id="3" name="Rectangle 2"/>
+          <p:cNvSpPr/>
+          <p:nvPr/>
+        </p:nvSpPr>
+        <p:spPr>
+          <a:xfrm>
+            <a:off x="0" y="1150000"/>
+            <a:ext cx="2600000" cy="70000"/>
+          </a:xfrm>
+          <a:prstGeom prst="rect">
+            <a:avLst/>
+          </a:prstGeom>
+          <a:solidFill>
+            <a:srgbClr val="F5670F"/>
+          </a:solidFill>
+          <a:ln>
+            <a:noFill/>
+          </a:ln>
+          <a:effectLst/>
+        </p:spPr>
+        <p:style>
+          <a:lnRef idx="1">
+            <a:schemeClr val="accent1"/>
+          </a:lnRef>
+          <a:fillRef idx="3">
+            <a:schemeClr val="accent1"/>
+          </a:fillRef>
+          <a:effectRef idx="2">
+            <a:schemeClr val="accent1"/>
+          </a:effectRef>
+          <a:fontRef idx="minor">
+            <a:schemeClr val="lt1"/>
+          </a:fontRef>
+        </p:style>
+        <p:txBody>
+          <a:bodyPr rtlCol="0" anchor="ctr"/>
+          <a:lstStyle/>
+          <a:p>
+            <a:pPr algn="ctr"/>
+          </a:p>
+        </p:txBody>
+      </p:sp>
+      <p:sp>
+        <p:nvSpPr>
+          <p:cNvPr id="4" name="TextBox 3"/>
+          <p:cNvSpPr txBox="1"/>
+          <p:nvPr/>
+        </p:nvSpPr>
+        <p:spPr>
+          <a:xfrm>
+            <a:off x="700000" y="300000"/>
+            <a:ext cx="10792000" cy="700000"/>
+          </a:xfrm>
+          <a:prstGeom prst="rect">
+            <a:avLst/>
+          </a:prstGeom>
+          <a:noFill/>
+        </p:spPr>
+        <p:txBody>
+          <a:bodyPr wrap="square" anchor="ctr">
+            <a:spAutoFit/>
+          </a:bodyPr>
+          <a:lstStyle/>
+          <a:p>
+            <a:pPr algn="l">
+              <a:lnSpc>
+                <a:spcPct val="110000"/>
+              </a:lnSpc>
+              <a:spcAft>
+                <a:spcPts val="600"/>
+              </a:spcAft>
+            </a:pPr>
+            <a:r>
+              <a:rPr sz="2400" b="1">
+                <a:solidFill>
+                  <a:srgbClr val="FFFFFF"/>
+                </a:solidFill>
+                <a:latin typeface="微软雅黑"/>
+              </a:rPr>
+              <a:t>本课重难点地图 · 老师划重点（动手前必看）</a:t>
+            </a:r>
+          </a:p>
+        </p:txBody>
+      </p:sp>
+      <p:sp>
+        <p:nvSpPr>
+          <p:cNvPr id="18" name="Rectangle 17"/>
+          <p:cNvSpPr/>
+          <p:nvPr/>
+        </p:nvSpPr>
+        <p:spPr>
+          <a:xfrm>
+            <a:off x="500000" y="6500000"/>
+            <a:ext cx="11100000" cy="20000"/>
+          </a:xfrm>
+          <a:prstGeom prst="rect">
+            <a:avLst/>
+          </a:prstGeom>
+          <a:solidFill>
+            <a:srgbClr val="C9D4EE"/>
+          </a:solidFill>
+          <a:ln>
+            <a:noFill/>
+          </a:ln>
+          <a:effectLst/>
+        </p:spPr>
+        <p:style>
+          <a:lnRef idx="1">
+            <a:schemeClr val="accent1"/>
+          </a:lnRef>
+          <a:fillRef idx="3">
+            <a:schemeClr val="accent1"/>
+          </a:fillRef>
+          <a:effectRef idx="2">
+            <a:schemeClr val="accent1"/>
+          </a:effectRef>
+          <a:fontRef idx="minor">
+            <a:schemeClr val="lt1"/>
+          </a:fontRef>
+        </p:style>
+        <p:txBody>
+          <a:bodyPr rtlCol="0" anchor="ctr"/>
+          <a:lstStyle/>
+          <a:p>
+            <a:pPr algn="ctr"/>
+          </a:p>
+        </p:txBody>
+      </p:sp>
+      <p:sp>
+        <p:nvSpPr>
+          <p:cNvPr id="19" name="TextBox 18"/>
+          <p:cNvSpPr txBox="1"/>
+          <p:nvPr/>
+        </p:nvSpPr>
+        <p:spPr>
+          <a:xfrm>
+            <a:off x="500000" y="6540000"/>
+            <a:ext cx="7000000" cy="300000"/>
+          </a:xfrm>
+          <a:prstGeom prst="rect">
+            <a:avLst/>
+          </a:prstGeom>
+          <a:noFill/>
+        </p:spPr>
+        <p:txBody>
+          <a:bodyPr wrap="square" anchor="t">
+            <a:spAutoFit/>
+          </a:bodyPr>
+          <a:lstStyle/>
+          <a:p>
+            <a:pPr algn="l">
+              <a:lnSpc>
+                <a:spcPct val="110000"/>
+              </a:lnSpc>
+              <a:spcAft>
+                <a:spcPts val="600"/>
+              </a:spcAft>
+            </a:pPr>
+            <a:r>
+              <a:rPr sz="1000" b="0">
+                <a:solidFill>
+                  <a:srgbClr val="8A97B5"/>
+                </a:solidFill>
+                <a:latin typeface="微软雅黑"/>
+              </a:rPr>
+              <a:t>两江智造集团 · Python编程基础</a:t>
+            </a:r>
+          </a:p>
+        </p:txBody>
+      </p:sp>
+      <p:sp>
+        <p:nvSpPr>
+          <p:cNvPr id="20" name="TextBox 19"/>
+          <p:cNvSpPr txBox="1"/>
+          <p:nvPr/>
+        </p:nvSpPr>
+        <p:spPr>
+          <a:xfrm>
+            <a:off x="10600000" y="6540000"/>
+            <a:ext cx="1000000" cy="300000"/>
+          </a:xfrm>
+          <a:prstGeom prst="rect">
+            <a:avLst/>
+          </a:prstGeom>
+          <a:noFill/>
+        </p:spPr>
+        <p:txBody>
+          <a:bodyPr wrap="square" anchor="t">
+            <a:spAutoFit/>
+          </a:bodyPr>
+          <a:lstStyle/>
+          <a:p>
+            <a:pPr algn="r">
+              <a:lnSpc>
+                <a:spcPct val="110000"/>
+              </a:lnSpc>
+              <a:spcAft>
+                <a:spcPts val="600"/>
+              </a:spcAft>
+            </a:pPr>
+            <a:r>
+              <a:rPr sz="1000" b="0">
+                <a:solidFill>
+                  <a:srgbClr val="8A97B5"/>
+                </a:solidFill>
+                <a:latin typeface="微软雅黑"/>
+              </a:rPr>
+              <a:t>6 / 14</a:t>
+            </a:r>
+          </a:p>
+        </p:txBody>
+      </p:sp>
+      <p:sp>
+        <p:nvSpPr>
+          <p:cNvPr id="21" name="TextBox 20"/>
+          <p:cNvSpPr txBox="1"/>
+          <p:nvPr/>
+        </p:nvSpPr>
+        <p:spPr>
+          <a:xfrm>
+            <a:off x="457200" y="1389888"/>
+            <a:ext cx="11274552" cy="274320"/>
+          </a:xfrm>
+          <a:prstGeom prst="rect">
+            <a:avLst/>
+          </a:prstGeom>
+          <a:noFill/>
+        </p:spPr>
+        <p:txBody>
+          <a:bodyPr wrap="square">
+            <a:spAutoFit/>
+          </a:bodyPr>
+          <a:lstStyle/>
+          <a:p>
+            <a:r>
+              <a:rPr sz="1050" b="0">
+                <a:solidFill>
+                  <a:srgbClr val="6B7280"/>
+                </a:solidFill>
+                <a:latin typeface="微软雅黑"/>
+              </a:rPr>
+              <a:t>动手前先看这页：重点要会什么、难点会卡在哪、哪里最容易错、学没学会怎么自测。</a:t>
+            </a:r>
+          </a:p>
+        </p:txBody>
+      </p:sp>
+      <p:sp>
+        <p:nvSpPr>
+          <p:cNvPr id="22" name="Rectangle 21"/>
+          <p:cNvSpPr/>
+          <p:nvPr/>
+        </p:nvSpPr>
+        <p:spPr>
+          <a:xfrm>
+            <a:off x="457200" y="1783080"/>
+            <a:ext cx="5532120" cy="3127248"/>
+          </a:xfrm>
+          <a:prstGeom prst="rect">
+            <a:avLst/>
+          </a:prstGeom>
+          <a:solidFill>
+            <a:srgbClr val="FFFFFF"/>
+          </a:solidFill>
+          <a:ln>
+            <a:solidFill>
+              <a:srgbClr val="D6DCE4"/>
+            </a:solidFill>
+          </a:ln>
+          <a:effectLst/>
+        </p:spPr>
+        <p:style>
+          <a:lnRef idx="1">
+            <a:schemeClr val="accent1"/>
+          </a:lnRef>
+          <a:fillRef idx="3">
+            <a:schemeClr val="accent1"/>
+          </a:fillRef>
+          <a:effectRef idx="2">
+            <a:schemeClr val="accent1"/>
+          </a:effectRef>
+          <a:fontRef idx="minor">
+            <a:schemeClr val="lt1"/>
+          </a:fontRef>
+        </p:style>
+        <p:txBody>
+          <a:bodyPr rtlCol="0" anchor="ctr" wrap="square"/>
+          <a:lstStyle/>
+          <a:p>
+            <a:pPr algn="ctr"/>
+          </a:p>
+        </p:txBody>
+      </p:sp>
+      <p:sp>
+        <p:nvSpPr>
+          <p:cNvPr id="23" name="Rectangle 22"/>
+          <p:cNvSpPr/>
+          <p:nvPr/>
+        </p:nvSpPr>
+        <p:spPr>
+          <a:xfrm>
+            <a:off x="457200" y="1783080"/>
+            <a:ext cx="5532120" cy="365760"/>
+          </a:xfrm>
+          <a:prstGeom prst="rect">
+            <a:avLst/>
+          </a:prstGeom>
+          <a:solidFill>
+            <a:srgbClr val="2F5D8C"/>
+          </a:solidFill>
+          <a:ln>
+            <a:noFill/>
+          </a:ln>
+          <a:effectLst/>
+        </p:spPr>
+        <p:style>
+          <a:lnRef idx="1">
+            <a:schemeClr val="accent1"/>
+          </a:lnRef>
+          <a:fillRef idx="3">
+            <a:schemeClr val="accent1"/>
+          </a:fillRef>
+          <a:effectRef idx="2">
+            <a:schemeClr val="accent1"/>
+          </a:effectRef>
+          <a:fontRef idx="minor">
+            <a:schemeClr val="lt1"/>
+          </a:fontRef>
+        </p:style>
+        <p:txBody>
+          <a:bodyPr rtlCol="0" anchor="ctr" wrap="square"/>
+          <a:lstStyle/>
+          <a:p>
+            <a:pPr algn="ctr"/>
+          </a:p>
+        </p:txBody>
+      </p:sp>
+      <p:sp>
+        <p:nvSpPr>
+          <p:cNvPr id="24" name="TextBox 23"/>
+          <p:cNvSpPr txBox="1"/>
+          <p:nvPr/>
+        </p:nvSpPr>
+        <p:spPr>
+          <a:xfrm>
+            <a:off x="566928" y="1819656"/>
+            <a:ext cx="5312664" cy="292608"/>
+          </a:xfrm>
+          <a:prstGeom prst="rect">
+            <a:avLst/>
+          </a:prstGeom>
+          <a:noFill/>
+        </p:spPr>
+        <p:txBody>
+          <a:bodyPr wrap="square">
+            <a:spAutoFit/>
+          </a:bodyPr>
+          <a:lstStyle/>
+          <a:p>
+            <a:r>
+              <a:rPr sz="1150" b="1">
+                <a:solidFill>
+                  <a:srgbClr val="FFFFFF"/>
+                </a:solidFill>
+                <a:latin typeface="微软雅黑"/>
+              </a:rPr>
+              <a:t>重点 · 必会必考（本课知识点全景）</a:t>
+            </a:r>
+          </a:p>
+        </p:txBody>
+      </p:sp>
+      <p:sp>
+        <p:nvSpPr>
+          <p:cNvPr id="25" name="TextBox 24"/>
+          <p:cNvSpPr txBox="1"/>
+          <p:nvPr/>
+        </p:nvSpPr>
+        <p:spPr>
+          <a:xfrm>
+            <a:off x="621792" y="2267712"/>
+            <a:ext cx="5257800" cy="2560320"/>
+          </a:xfrm>
+          <a:prstGeom prst="rect">
+            <a:avLst/>
+          </a:prstGeom>
+          <a:noFill/>
+        </p:spPr>
+        <p:txBody>
+          <a:bodyPr wrap="square">
+            <a:spAutoFit/>
+          </a:bodyPr>
+          <a:lstStyle/>
+          <a:p>
+            <a:r>
+              <a:rPr sz="950" b="0">
+                <a:solidFill>
+                  <a:srgbClr val="2B2F36"/>
+                </a:solidFill>
+                <a:latin typeface="微软雅黑"/>
+              </a:rPr>
+              <a:t>◆ B01 Modbus寄存器｜寄存器=PLC的储物柜编号：40001起按地址读数</a:t>
+            </a:r>
+          </a:p>
+          <a:p>
+            <a:r>
+              <a:rPr sz="950" b="0">
+                <a:solidFill>
+                  <a:srgbClr val="2B2F36"/>
+                </a:solidFill>
+                <a:latin typeface="微软雅黑"/>
+              </a:rPr>
+              <a:t>◆ B02 定点存储约定｜定点=小数×10存整数：678其实是67.8℃——PLC不存小数</a:t>
+            </a:r>
+          </a:p>
+          <a:p>
+            <a:r>
+              <a:rPr sz="950" b="0">
+                <a:solidFill>
+                  <a:srgbClr val="2B2F36"/>
+                </a:solidFill>
+                <a:latin typeface="微软雅黑"/>
+              </a:rPr>
+              <a:t>◆ B03 pymodbus读寄存器｜pymodbus=Python的Modbus翻译官——一行读PLC…</a:t>
+            </a:r>
+          </a:p>
+          <a:p>
+            <a:r>
+              <a:rPr sz="950" b="0">
+                <a:solidFill>
+                  <a:srgbClr val="2B2F36"/>
+                </a:solidFill>
+                <a:latin typeface="微软雅黑"/>
+              </a:rPr>
+              <a:t>◆ B04 MQTT主题路由｜MQTT=广播电台：主题=频道，发布订阅各取所需</a:t>
+            </a:r>
+          </a:p>
+          <a:p>
+            <a:r>
+              <a:rPr sz="950" b="0">
+                <a:solidFill>
+                  <a:srgbClr val="2B2F36"/>
+                </a:solidFill>
+                <a:latin typeface="微软雅黑"/>
+              </a:rPr>
+              <a:t>◆ B05 JSON消息含时间戳｜ts时间戳=消息的出生证明——排序追溯全靠它</a:t>
+            </a:r>
+          </a:p>
+          <a:p>
+            <a:r>
+              <a:rPr sz="950" b="0">
+                <a:solidFill>
+                  <a:srgbClr val="2B2F36"/>
+                </a:solidFill>
+                <a:latin typeface="微软雅黑"/>
+              </a:rPr>
+              <a:t>◆ B06 排错三步法｜排错三步=从外到内剥洋葱：ping通→端口通→代码通</a:t>
+            </a:r>
+          </a:p>
+        </p:txBody>
+      </p:sp>
+      <p:sp>
+        <p:nvSpPr>
+          <p:cNvPr id="26" name="Rectangle 25"/>
+          <p:cNvSpPr/>
+          <p:nvPr/>
+        </p:nvSpPr>
+        <p:spPr>
+          <a:xfrm>
+            <a:off x="6144768" y="1783080"/>
+            <a:ext cx="5586984" cy="1481328"/>
+          </a:xfrm>
+          <a:prstGeom prst="rect">
+            <a:avLst/>
+          </a:prstGeom>
+          <a:solidFill>
+            <a:srgbClr val="FFFFFF"/>
+          </a:solidFill>
+          <a:ln>
+            <a:solidFill>
+              <a:srgbClr val="D6DCE4"/>
+            </a:solidFill>
+          </a:ln>
+          <a:effectLst/>
+        </p:spPr>
+        <p:style>
+          <a:lnRef idx="1">
+            <a:schemeClr val="accent1"/>
+          </a:lnRef>
+          <a:fillRef idx="3">
+            <a:schemeClr val="accent1"/>
+          </a:fillRef>
+          <a:effectRef idx="2">
+            <a:schemeClr val="accent1"/>
+          </a:effectRef>
+          <a:fontRef idx="minor">
+            <a:schemeClr val="lt1"/>
+          </a:fontRef>
+        </p:style>
+        <p:txBody>
+          <a:bodyPr rtlCol="0" anchor="ctr" wrap="square"/>
+          <a:lstStyle/>
+          <a:p>
+            <a:pPr algn="ctr"/>
+          </a:p>
+        </p:txBody>
+      </p:sp>
+      <p:sp>
+        <p:nvSpPr>
+          <p:cNvPr id="27" name="Rectangle 26"/>
+          <p:cNvSpPr/>
+          <p:nvPr/>
+        </p:nvSpPr>
+        <p:spPr>
+          <a:xfrm>
+            <a:off x="6144768" y="1783080"/>
+            <a:ext cx="5586984" cy="365760"/>
+          </a:xfrm>
+          <a:prstGeom prst="rect">
+            <a:avLst/>
+          </a:prstGeom>
+          <a:solidFill>
+            <a:srgbClr val="8A4B2D"/>
+          </a:solidFill>
+          <a:ln>
+            <a:noFill/>
+          </a:ln>
+          <a:effectLst/>
+        </p:spPr>
+        <p:style>
+          <a:lnRef idx="1">
+            <a:schemeClr val="accent1"/>
+          </a:lnRef>
+          <a:fillRef idx="3">
+            <a:schemeClr val="accent1"/>
+          </a:fillRef>
+          <a:effectRef idx="2">
+            <a:schemeClr val="accent1"/>
+          </a:effectRef>
+          <a:fontRef idx="minor">
+            <a:schemeClr val="lt1"/>
+          </a:fontRef>
+        </p:style>
+        <p:txBody>
+          <a:bodyPr rtlCol="0" anchor="ctr" wrap="square"/>
+          <a:lstStyle/>
+          <a:p>
+            <a:pPr algn="ctr"/>
+          </a:p>
+        </p:txBody>
+      </p:sp>
+      <p:sp>
+        <p:nvSpPr>
+          <p:cNvPr id="28" name="TextBox 27"/>
+          <p:cNvSpPr txBox="1"/>
+          <p:nvPr/>
+        </p:nvSpPr>
+        <p:spPr>
+          <a:xfrm>
+            <a:off x="6254496" y="1819656"/>
+            <a:ext cx="5367528" cy="292608"/>
+          </a:xfrm>
+          <a:prstGeom prst="rect">
+            <a:avLst/>
+          </a:prstGeom>
+          <a:noFill/>
+        </p:spPr>
+        <p:txBody>
+          <a:bodyPr wrap="square">
+            <a:spAutoFit/>
+          </a:bodyPr>
+          <a:lstStyle/>
+          <a:p>
+            <a:r>
+              <a:rPr sz="1150" b="1">
+                <a:solidFill>
+                  <a:srgbClr val="FFFFFF"/>
+                </a:solidFill>
+                <a:latin typeface="微软雅黑"/>
+              </a:rPr>
+              <a:t>难点 · 易卡壳（下一页逐个击破）</a:t>
+            </a:r>
+          </a:p>
+        </p:txBody>
+      </p:sp>
+      <p:sp>
+        <p:nvSpPr>
+          <p:cNvPr id="29" name="TextBox 28"/>
+          <p:cNvSpPr txBox="1"/>
+          <p:nvPr/>
+        </p:nvSpPr>
+        <p:spPr>
+          <a:xfrm>
+            <a:off x="6309360" y="2231136"/>
+            <a:ext cx="5303520" cy="960120"/>
+          </a:xfrm>
+          <a:prstGeom prst="rect">
+            <a:avLst/>
+          </a:prstGeom>
+          <a:noFill/>
+        </p:spPr>
+        <p:txBody>
+          <a:bodyPr wrap="square">
+            <a:spAutoFit/>
+          </a:bodyPr>
+          <a:lstStyle/>
+          <a:p>
+            <a:r>
+              <a:rPr sz="900" b="0">
+                <a:solidFill>
+                  <a:srgbClr val="2B2F36"/>
+                </a:solidFill>
+                <a:latin typeface="微软雅黑"/>
+              </a:rPr>
+              <a:t>▲ 误区：地址从0还是40001起两派之争——以server文档为准</a:t>
+            </a:r>
+          </a:p>
+          <a:p>
+            <a:r>
+              <a:rPr sz="900" b="0">
+                <a:solidFill>
+                  <a:srgbClr val="2B2F36"/>
+                </a:solidFill>
+                <a:latin typeface="微软雅黑"/>
+              </a:rPr>
+              <a:t>▲ 误区：忘除倍率→温度高10倍——对不上先查约定倍率</a:t>
+            </a:r>
+          </a:p>
+          <a:p>
+            <a:r>
+              <a:rPr sz="900" b="0">
+                <a:solidFill>
+                  <a:srgbClr val="2B2F36"/>
+                </a:solidFill>
+                <a:latin typeface="微软雅黑"/>
+              </a:rPr>
+              <a:t>▲ 误区：3.x必须关键字传参(address=/count=)——照2.x旧码抄报错</a:t>
+            </a:r>
+          </a:p>
+        </p:txBody>
+      </p:sp>
+      <p:sp>
+        <p:nvSpPr>
+          <p:cNvPr id="30" name="Rectangle 29"/>
+          <p:cNvSpPr/>
+          <p:nvPr/>
+        </p:nvSpPr>
+        <p:spPr>
+          <a:xfrm>
+            <a:off x="6144768" y="3401568"/>
+            <a:ext cx="5586984" cy="1508760"/>
+          </a:xfrm>
+          <a:prstGeom prst="rect">
+            <a:avLst/>
+          </a:prstGeom>
+          <a:solidFill>
+            <a:srgbClr val="FFFFFF"/>
+          </a:solidFill>
+          <a:ln>
+            <a:solidFill>
+              <a:srgbClr val="D6DCE4"/>
+            </a:solidFill>
+          </a:ln>
+          <a:effectLst/>
+        </p:spPr>
+        <p:style>
+          <a:lnRef idx="1">
+            <a:schemeClr val="accent1"/>
+          </a:lnRef>
+          <a:fillRef idx="3">
+            <a:schemeClr val="accent1"/>
+          </a:fillRef>
+          <a:effectRef idx="2">
+            <a:schemeClr val="accent1"/>
+          </a:effectRef>
+          <a:fontRef idx="minor">
+            <a:schemeClr val="lt1"/>
+          </a:fontRef>
+        </p:style>
+        <p:txBody>
+          <a:bodyPr rtlCol="0" anchor="ctr" wrap="square"/>
+          <a:lstStyle/>
+          <a:p>
+            <a:pPr algn="ctr"/>
+          </a:p>
+        </p:txBody>
+      </p:sp>
+      <p:sp>
+        <p:nvSpPr>
+          <p:cNvPr id="31" name="Rectangle 30"/>
+          <p:cNvSpPr/>
+          <p:nvPr/>
+        </p:nvSpPr>
+        <p:spPr>
+          <a:xfrm>
+            <a:off x="6144768" y="3401568"/>
+            <a:ext cx="5586984" cy="365760"/>
+          </a:xfrm>
+          <a:prstGeom prst="rect">
+            <a:avLst/>
+          </a:prstGeom>
+          <a:solidFill>
+            <a:srgbClr val="9A3B3B"/>
+          </a:solidFill>
+          <a:ln>
+            <a:noFill/>
+          </a:ln>
+          <a:effectLst/>
+        </p:spPr>
+        <p:style>
+          <a:lnRef idx="1">
+            <a:schemeClr val="accent1"/>
+          </a:lnRef>
+          <a:fillRef idx="3">
+            <a:schemeClr val="accent1"/>
+          </a:fillRef>
+          <a:effectRef idx="2">
+            <a:schemeClr val="accent1"/>
+          </a:effectRef>
+          <a:fontRef idx="minor">
+            <a:schemeClr val="lt1"/>
+          </a:fontRef>
+        </p:style>
+        <p:txBody>
+          <a:bodyPr rtlCol="0" anchor="ctr" wrap="square"/>
+          <a:lstStyle/>
+          <a:p>
+            <a:pPr algn="ctr"/>
+          </a:p>
+        </p:txBody>
+      </p:sp>
+      <p:sp>
+        <p:nvSpPr>
+          <p:cNvPr id="32" name="TextBox 31"/>
+          <p:cNvSpPr txBox="1"/>
+          <p:nvPr/>
+        </p:nvSpPr>
+        <p:spPr>
+          <a:xfrm>
+            <a:off x="6254496" y="3438144"/>
+            <a:ext cx="5367528" cy="292608"/>
+          </a:xfrm>
+          <a:prstGeom prst="rect">
+            <a:avLst/>
+          </a:prstGeom>
+          <a:noFill/>
+        </p:spPr>
+        <p:txBody>
+          <a:bodyPr wrap="square">
+            <a:spAutoFit/>
+          </a:bodyPr>
+          <a:lstStyle/>
+          <a:p>
+            <a:r>
+              <a:rPr sz="1150" b="1">
+                <a:solidFill>
+                  <a:srgbClr val="FFFFFF"/>
+                </a:solidFill>
+                <a:latin typeface="微软雅黑"/>
+              </a:rPr>
+              <a:t>高频易错 · 动手前先记住</a:t>
+            </a:r>
+          </a:p>
+        </p:txBody>
+      </p:sp>
+      <p:sp>
+        <p:nvSpPr>
+          <p:cNvPr id="33" name="TextBox 32"/>
+          <p:cNvSpPr txBox="1"/>
+          <p:nvPr/>
+        </p:nvSpPr>
+        <p:spPr>
+          <a:xfrm>
+            <a:off x="6309360" y="3849624"/>
+            <a:ext cx="5303520" cy="960120"/>
+          </a:xfrm>
+          <a:prstGeom prst="rect">
+            <a:avLst/>
+          </a:prstGeom>
+          <a:noFill/>
+        </p:spPr>
+        <p:txBody>
+          <a:bodyPr wrap="square">
+            <a:spAutoFit/>
+          </a:bodyPr>
+          <a:lstStyle/>
+          <a:p>
+            <a:r>
+              <a:rPr sz="900" b="0">
+                <a:solidFill>
+                  <a:srgbClr val="2B2F36"/>
+                </a:solidFill>
+                <a:latin typeface="微软雅黑"/>
+              </a:rPr>
+              <a:t>✗ 连不上PLC → 先跑虚拟产线--check</a:t>
+            </a:r>
+          </a:p>
+          <a:p>
+            <a:r>
+              <a:rPr sz="900" b="0">
+                <a:solidFill>
+                  <a:srgbClr val="2B2F36"/>
+                </a:solidFill>
+                <a:latin typeface="微软雅黑"/>
+              </a:rPr>
+              <a:t>✗ 数值大10倍 → 寄存器定点换算</a:t>
+            </a:r>
+          </a:p>
+          <a:p>
+            <a:r>
+              <a:rPr sz="900" b="0">
+                <a:solidFill>
+                  <a:srgbClr val="2B2F36"/>
+                </a:solidFill>
+                <a:latin typeface="微软雅黑"/>
+              </a:rPr>
+              <a:t>✗ publish后无消息 → sleep 0.3再退</a:t>
+            </a:r>
+          </a:p>
+        </p:txBody>
+      </p:sp>
+      <p:sp>
+        <p:nvSpPr>
+          <p:cNvPr id="34" name="Rectangle 33"/>
+          <p:cNvSpPr/>
+          <p:nvPr/>
+        </p:nvSpPr>
+        <p:spPr>
+          <a:xfrm>
+            <a:off x="457200" y="5047488"/>
+            <a:ext cx="11274552" cy="1207008"/>
+          </a:xfrm>
+          <a:prstGeom prst="rect">
+            <a:avLst/>
+          </a:prstGeom>
+          <a:solidFill>
+            <a:srgbClr val="FFFFFF"/>
+          </a:solidFill>
+          <a:ln>
+            <a:solidFill>
+              <a:srgbClr val="D6DCE4"/>
+            </a:solidFill>
+          </a:ln>
+          <a:effectLst/>
+        </p:spPr>
+        <p:style>
+          <a:lnRef idx="1">
+            <a:schemeClr val="accent1"/>
+          </a:lnRef>
+          <a:fillRef idx="3">
+            <a:schemeClr val="accent1"/>
+          </a:fillRef>
+          <a:effectRef idx="2">
+            <a:schemeClr val="accent1"/>
+          </a:effectRef>
+          <a:fontRef idx="minor">
+            <a:schemeClr val="lt1"/>
+          </a:fontRef>
+        </p:style>
+        <p:txBody>
+          <a:bodyPr rtlCol="0" anchor="ctr" wrap="square"/>
+          <a:lstStyle/>
+          <a:p>
+            <a:pPr algn="ctr"/>
+          </a:p>
+        </p:txBody>
+      </p:sp>
+      <p:sp>
+        <p:nvSpPr>
+          <p:cNvPr id="35" name="Rectangle 34"/>
+          <p:cNvSpPr/>
+          <p:nvPr/>
+        </p:nvSpPr>
+        <p:spPr>
+          <a:xfrm>
+            <a:off x="457200" y="5047488"/>
+            <a:ext cx="11274552" cy="365760"/>
+          </a:xfrm>
+          <a:prstGeom prst="rect">
+            <a:avLst/>
+          </a:prstGeom>
+          <a:solidFill>
+            <a:srgbClr val="2E7D46"/>
+          </a:solidFill>
+          <a:ln>
+            <a:noFill/>
+          </a:ln>
+          <a:effectLst/>
+        </p:spPr>
+        <p:style>
+          <a:lnRef idx="1">
+            <a:schemeClr val="accent1"/>
+          </a:lnRef>
+          <a:fillRef idx="3">
+            <a:schemeClr val="accent1"/>
+          </a:fillRef>
+          <a:effectRef idx="2">
+            <a:schemeClr val="accent1"/>
+          </a:effectRef>
+          <a:fontRef idx="minor">
+            <a:schemeClr val="lt1"/>
+          </a:fontRef>
+        </p:style>
+        <p:txBody>
+          <a:bodyPr rtlCol="0" anchor="ctr" wrap="square"/>
+          <a:lstStyle/>
+          <a:p>
+            <a:pPr algn="ctr"/>
+          </a:p>
+        </p:txBody>
+      </p:sp>
+      <p:sp>
+        <p:nvSpPr>
+          <p:cNvPr id="36" name="TextBox 35"/>
+          <p:cNvSpPr txBox="1"/>
+          <p:nvPr/>
+        </p:nvSpPr>
+        <p:spPr>
+          <a:xfrm>
+            <a:off x="566928" y="5084064"/>
+            <a:ext cx="11055096" cy="292608"/>
+          </a:xfrm>
+          <a:prstGeom prst="rect">
+            <a:avLst/>
+          </a:prstGeom>
+          <a:noFill/>
+        </p:spPr>
+        <p:txBody>
+          <a:bodyPr wrap="square">
+            <a:spAutoFit/>
+          </a:bodyPr>
+          <a:lstStyle/>
+          <a:p>
+            <a:r>
+              <a:rPr sz="1150" b="1">
+                <a:solidFill>
+                  <a:srgbClr val="FFFFFF"/>
+                </a:solidFill>
+                <a:latin typeface="微软雅黑"/>
+              </a:rPr>
+              <a:t>达标自问 · 学没学会，问自己这四句（当堂评分同口径）</a:t>
+            </a:r>
+          </a:p>
+        </p:txBody>
+      </p:sp>
+      <p:sp>
+        <p:nvSpPr>
+          <p:cNvPr id="37" name="TextBox 36"/>
+          <p:cNvSpPr txBox="1"/>
+          <p:nvPr/>
+        </p:nvSpPr>
+        <p:spPr>
+          <a:xfrm>
+            <a:off x="621792" y="5458968"/>
+            <a:ext cx="10972800" cy="768096"/>
+          </a:xfrm>
+          <a:prstGeom prst="rect">
+            <a:avLst/>
+          </a:prstGeom>
+          <a:noFill/>
+        </p:spPr>
+        <p:txBody>
+          <a:bodyPr wrap="square">
+            <a:spAutoFit/>
+          </a:bodyPr>
+          <a:lstStyle/>
+          <a:p>
+            <a:r>
+              <a:rPr sz="900" b="0">
+                <a:solidFill>
+                  <a:srgbClr val="2B2F36"/>
+                </a:solidFill>
+                <a:latin typeface="微软雅黑"/>
+              </a:rPr>
+              <a:t>① 及格线我能过吗——Modbus读+MQTT发布成功</a:t>
+            </a:r>
+          </a:p>
+          <a:p>
+            <a:r>
+              <a:rPr sz="900" b="0">
+                <a:solidFill>
+                  <a:srgbClr val="2B2F36"/>
+                </a:solidFill>
+                <a:latin typeface="微软雅黑"/>
+              </a:rPr>
+              <a:t>② 优秀线我够吗——断线重连+回环验证+规范率≥90%</a:t>
+            </a:r>
+          </a:p>
+          <a:p>
+            <a:r>
+              <a:rPr sz="900" b="0">
+                <a:solidFill>
+                  <a:srgbClr val="2B2F36"/>
+                </a:solidFill>
+                <a:latin typeface="微软雅黑"/>
+              </a:rPr>
+              <a:t>③ 技能点我能独立做出来吗——连接虚拟PLC读取寄存器；paho-mqtt发布JSON消息</a:t>
+            </a:r>
+          </a:p>
+          <a:p>
+            <a:r>
+              <a:rPr sz="900" b="0">
+                <a:solidFill>
+                  <a:srgbClr val="2B2F36"/>
+                </a:solidFill>
+                <a:latin typeface="微软雅黑"/>
+              </a:rPr>
+              <a:t>④ 报错了先查「常见错误速查」页再举手——错误信息逐字读一遍，八成自己能修</a:t>
+            </a:r>
+          </a:p>
+        </p:txBody>
+      </p:sp>
+      <p:sp>
+        <p:nvSpPr>
+          <p:cNvPr id="38" name="TextBox 37"/>
+          <p:cNvSpPr txBox="1"/>
+          <p:nvPr/>
+        </p:nvSpPr>
+        <p:spPr>
+          <a:xfrm>
+            <a:off x="457200" y="6281928"/>
+            <a:ext cx="9601200" cy="182880"/>
+          </a:xfrm>
+          <a:prstGeom prst="rect">
+            <a:avLst/>
+          </a:prstGeom>
+          <a:noFill/>
+        </p:spPr>
+        <p:txBody>
+          <a:bodyPr wrap="square">
+            <a:spAutoFit/>
+          </a:bodyPr>
+          <a:lstStyle/>
+          <a:p>
+            <a:r>
+              <a:rPr sz="750" b="0">
+                <a:solidFill>
+                  <a:srgbClr val="6B7280"/>
+                </a:solidFill>
+                <a:latin typeface="微软雅黑"/>
+              </a:rPr>
+              <a:t>素材来源：同周《第21次课-设备如何在网络上说话》知识卡与避坑清单（逐字摘录）</a:t>
+            </a:r>
+          </a:p>
+        </p:txBody>
+      </p:sp>
+    </p:spTree>
+  </p:cSld>
+  <p:clrMapOvr>
+    <a:masterClrMapping/>
+  </p:clrMapOvr>
+</p:sld>
+</file>
+
+<file path=ppt/slides/slide13.xml><?xml version="1.0" encoding="utf-8"?>
+<p:sld xmlns:a="http://schemas.openxmlformats.org/drawingml/2006/main" xmlns:p="http://schemas.openxmlformats.org/presentationml/2006/main" xmlns:r="http://schemas.openxmlformats.org/officeDocument/2006/relationships">
+  <p:cSld>
+    <p:spTree>
+      <p:nvGrpSpPr>
+        <p:cNvPr id="1" name=""/>
+        <p:cNvGrpSpPr/>
+        <p:nvPr/>
+      </p:nvGrpSpPr>
+      <p:grpSpPr/>
+      <p:sp>
+        <p:nvSpPr>
+          <p:cNvPr id="2" name="Rectangle 1"/>
+          <p:cNvSpPr/>
+          <p:nvPr/>
+        </p:nvSpPr>
+        <p:spPr>
+          <a:xfrm>
+            <a:off x="0" y="0"/>
+            <a:ext cx="12192000" cy="1150000"/>
+          </a:xfrm>
+          <a:prstGeom prst="rect">
+            <a:avLst/>
+          </a:prstGeom>
+          <a:solidFill>
+            <a:srgbClr val="010328"/>
+          </a:solidFill>
+          <a:ln>
+            <a:noFill/>
+          </a:ln>
+          <a:effectLst/>
+        </p:spPr>
+        <p:style>
+          <a:lnRef idx="1">
+            <a:schemeClr val="accent1"/>
+          </a:lnRef>
+          <a:fillRef idx="3">
+            <a:schemeClr val="accent1"/>
+          </a:fillRef>
+          <a:effectRef idx="2">
+            <a:schemeClr val="accent1"/>
+          </a:effectRef>
+          <a:fontRef idx="minor">
+            <a:schemeClr val="lt1"/>
+          </a:fontRef>
+        </p:style>
+        <p:txBody>
+          <a:bodyPr rtlCol="0" anchor="ctr"/>
+          <a:lstStyle/>
+          <a:p>
+            <a:pPr algn="ctr"/>
+          </a:p>
+        </p:txBody>
+      </p:sp>
+      <p:sp>
+        <p:nvSpPr>
+          <p:cNvPr id="3" name="Rectangle 2"/>
+          <p:cNvSpPr/>
+          <p:nvPr/>
+        </p:nvSpPr>
+        <p:spPr>
+          <a:xfrm>
+            <a:off x="0" y="1150000"/>
+            <a:ext cx="2600000" cy="70000"/>
+          </a:xfrm>
+          <a:prstGeom prst="rect">
+            <a:avLst/>
+          </a:prstGeom>
+          <a:solidFill>
+            <a:srgbClr val="F5670F"/>
+          </a:solidFill>
+          <a:ln>
+            <a:noFill/>
+          </a:ln>
+          <a:effectLst/>
+        </p:spPr>
+        <p:style>
+          <a:lnRef idx="1">
+            <a:schemeClr val="accent1"/>
+          </a:lnRef>
+          <a:fillRef idx="3">
+            <a:schemeClr val="accent1"/>
+          </a:fillRef>
+          <a:effectRef idx="2">
+            <a:schemeClr val="accent1"/>
+          </a:effectRef>
+          <a:fontRef idx="minor">
+            <a:schemeClr val="lt1"/>
+          </a:fontRef>
+        </p:style>
+        <p:txBody>
+          <a:bodyPr rtlCol="0" anchor="ctr"/>
+          <a:lstStyle/>
+          <a:p>
+            <a:pPr algn="ctr"/>
+          </a:p>
+        </p:txBody>
+      </p:sp>
+      <p:sp>
+        <p:nvSpPr>
+          <p:cNvPr id="4" name="TextBox 3"/>
+          <p:cNvSpPr txBox="1"/>
+          <p:nvPr/>
+        </p:nvSpPr>
+        <p:spPr>
+          <a:xfrm>
+            <a:off x="700000" y="300000"/>
+            <a:ext cx="10792000" cy="700000"/>
+          </a:xfrm>
+          <a:prstGeom prst="rect">
+            <a:avLst/>
+          </a:prstGeom>
+          <a:noFill/>
+        </p:spPr>
+        <p:txBody>
+          <a:bodyPr wrap="square" anchor="ctr">
+            <a:spAutoFit/>
+          </a:bodyPr>
+          <a:lstStyle/>
+          <a:p>
+            <a:pPr algn="l">
+              <a:lnSpc>
+                <a:spcPct val="110000"/>
+              </a:lnSpc>
+              <a:spcAft>
+                <a:spcPts val="600"/>
+              </a:spcAft>
+            </a:pPr>
+            <a:r>
+              <a:rPr sz="2400" b="1">
+                <a:solidFill>
+                  <a:srgbClr val="FFFFFF"/>
+                </a:solidFill>
+                <a:latin typeface="微软雅黑"/>
+              </a:rPr>
+              <a:t>难点逐个击破 · 零基础照做就能会</a:t>
+            </a:r>
+          </a:p>
+        </p:txBody>
+      </p:sp>
+      <p:sp>
+        <p:nvSpPr>
+          <p:cNvPr id="18" name="Rectangle 17"/>
+          <p:cNvSpPr/>
+          <p:nvPr/>
+        </p:nvSpPr>
+        <p:spPr>
+          <a:xfrm>
+            <a:off x="500000" y="6500000"/>
+            <a:ext cx="11100000" cy="20000"/>
+          </a:xfrm>
+          <a:prstGeom prst="rect">
+            <a:avLst/>
+          </a:prstGeom>
+          <a:solidFill>
+            <a:srgbClr val="C9D4EE"/>
+          </a:solidFill>
+          <a:ln>
+            <a:noFill/>
+          </a:ln>
+          <a:effectLst/>
+        </p:spPr>
+        <p:style>
+          <a:lnRef idx="1">
+            <a:schemeClr val="accent1"/>
+          </a:lnRef>
+          <a:fillRef idx="3">
+            <a:schemeClr val="accent1"/>
+          </a:fillRef>
+          <a:effectRef idx="2">
+            <a:schemeClr val="accent1"/>
+          </a:effectRef>
+          <a:fontRef idx="minor">
+            <a:schemeClr val="lt1"/>
+          </a:fontRef>
+        </p:style>
+        <p:txBody>
+          <a:bodyPr rtlCol="0" anchor="ctr"/>
+          <a:lstStyle/>
+          <a:p>
+            <a:pPr algn="ctr"/>
+          </a:p>
+        </p:txBody>
+      </p:sp>
+      <p:sp>
+        <p:nvSpPr>
+          <p:cNvPr id="19" name="TextBox 18"/>
+          <p:cNvSpPr txBox="1"/>
+          <p:nvPr/>
+        </p:nvSpPr>
+        <p:spPr>
+          <a:xfrm>
+            <a:off x="500000" y="6540000"/>
+            <a:ext cx="7000000" cy="300000"/>
+          </a:xfrm>
+          <a:prstGeom prst="rect">
+            <a:avLst/>
+          </a:prstGeom>
+          <a:noFill/>
+        </p:spPr>
+        <p:txBody>
+          <a:bodyPr wrap="square" anchor="t">
+            <a:spAutoFit/>
+          </a:bodyPr>
+          <a:lstStyle/>
+          <a:p>
+            <a:pPr algn="l">
+              <a:lnSpc>
+                <a:spcPct val="110000"/>
+              </a:lnSpc>
+              <a:spcAft>
+                <a:spcPts val="600"/>
+              </a:spcAft>
+            </a:pPr>
+            <a:r>
+              <a:rPr sz="1000" b="0">
+                <a:solidFill>
+                  <a:srgbClr val="8A97B5"/>
+                </a:solidFill>
+                <a:latin typeface="微软雅黑"/>
+              </a:rPr>
+              <a:t>两江智造集团 · Python编程基础</a:t>
+            </a:r>
+          </a:p>
+        </p:txBody>
+      </p:sp>
+      <p:sp>
+        <p:nvSpPr>
+          <p:cNvPr id="20" name="TextBox 19"/>
+          <p:cNvSpPr txBox="1"/>
+          <p:nvPr/>
+        </p:nvSpPr>
+        <p:spPr>
+          <a:xfrm>
+            <a:off x="10600000" y="6540000"/>
+            <a:ext cx="1000000" cy="300000"/>
+          </a:xfrm>
+          <a:prstGeom prst="rect">
+            <a:avLst/>
+          </a:prstGeom>
+          <a:noFill/>
+        </p:spPr>
+        <p:txBody>
+          <a:bodyPr wrap="square" anchor="t">
+            <a:spAutoFit/>
+          </a:bodyPr>
+          <a:lstStyle/>
+          <a:p>
+            <a:pPr algn="r">
+              <a:lnSpc>
+                <a:spcPct val="110000"/>
+              </a:lnSpc>
+              <a:spcAft>
+                <a:spcPts val="600"/>
+              </a:spcAft>
+            </a:pPr>
+            <a:r>
+              <a:rPr sz="1000" b="0">
+                <a:solidFill>
+                  <a:srgbClr val="8A97B5"/>
+                </a:solidFill>
+                <a:latin typeface="微软雅黑"/>
+              </a:rPr>
+              <a:t>7 / 14</a:t>
+            </a:r>
+          </a:p>
+        </p:txBody>
+      </p:sp>
+      <p:sp>
+        <p:nvSpPr>
+          <p:cNvPr id="21" name="TextBox 20"/>
+          <p:cNvSpPr txBox="1"/>
+          <p:nvPr/>
+        </p:nvSpPr>
+        <p:spPr>
+          <a:xfrm>
+            <a:off x="457200" y="1389888"/>
+            <a:ext cx="11274552" cy="274320"/>
+          </a:xfrm>
+          <a:prstGeom prst="rect">
+            <a:avLst/>
+          </a:prstGeom>
+          <a:noFill/>
+        </p:spPr>
+        <p:txBody>
+          <a:bodyPr wrap="square">
+            <a:spAutoFit/>
+          </a:bodyPr>
+          <a:lstStyle/>
+          <a:p>
+            <a:r>
+              <a:rPr sz="1050" b="0">
+                <a:solidFill>
+                  <a:srgbClr val="6B7280"/>
+                </a:solidFill>
+                <a:latin typeface="微软雅黑"/>
+              </a:rPr>
+              <a:t>每个难点四步走：先看「为什么容易栽」对号入座 → 记住「一招破解」→ 照「动手验证」做一遍 → 做不出回知识详解页。</a:t>
+            </a:r>
+          </a:p>
+        </p:txBody>
+      </p:sp>
+      <p:sp>
+        <p:nvSpPr>
+          <p:cNvPr id="22" name="Rectangle 21"/>
+          <p:cNvSpPr/>
+          <p:nvPr/>
+        </p:nvSpPr>
+        <p:spPr>
+          <a:xfrm>
+            <a:off x="457200" y="1783080"/>
+            <a:ext cx="11274552" cy="1481328"/>
+          </a:xfrm>
+          <a:prstGeom prst="rect">
+            <a:avLst/>
+          </a:prstGeom>
+          <a:solidFill>
+            <a:srgbClr val="F7F9FC"/>
+          </a:solidFill>
+          <a:ln>
+            <a:solidFill>
+              <a:srgbClr val="D6DCE4"/>
+            </a:solidFill>
+          </a:ln>
+          <a:effectLst/>
+        </p:spPr>
+        <p:style>
+          <a:lnRef idx="1">
+            <a:schemeClr val="accent1"/>
+          </a:lnRef>
+          <a:fillRef idx="3">
+            <a:schemeClr val="accent1"/>
+          </a:fillRef>
+          <a:effectRef idx="2">
+            <a:schemeClr val="accent1"/>
+          </a:effectRef>
+          <a:fontRef idx="minor">
+            <a:schemeClr val="lt1"/>
+          </a:fontRef>
+        </p:style>
+        <p:txBody>
+          <a:bodyPr rtlCol="0" anchor="ctr" wrap="square"/>
+          <a:lstStyle/>
+          <a:p>
+            <a:pPr algn="ctr"/>
+          </a:p>
+        </p:txBody>
+      </p:sp>
+      <p:sp>
+        <p:nvSpPr>
+          <p:cNvPr id="23" name="Rectangle 22"/>
+          <p:cNvSpPr/>
+          <p:nvPr/>
+        </p:nvSpPr>
+        <p:spPr>
+          <a:xfrm>
+            <a:off x="457200" y="1783080"/>
+            <a:ext cx="82296" cy="1481328"/>
+          </a:xfrm>
+          <a:prstGeom prst="rect">
+            <a:avLst/>
+          </a:prstGeom>
+          <a:solidFill>
+            <a:srgbClr val="8A4B2D"/>
+          </a:solidFill>
+          <a:ln>
+            <a:noFill/>
+          </a:ln>
+          <a:effectLst/>
+        </p:spPr>
+        <p:style>
+          <a:lnRef idx="1">
+            <a:schemeClr val="accent1"/>
+          </a:lnRef>
+          <a:fillRef idx="3">
+            <a:schemeClr val="accent1"/>
+          </a:fillRef>
+          <a:effectRef idx="2">
+            <a:schemeClr val="accent1"/>
+          </a:effectRef>
+          <a:fontRef idx="minor">
+            <a:schemeClr val="lt1"/>
+          </a:fontRef>
+        </p:style>
+        <p:txBody>
+          <a:bodyPr rtlCol="0" anchor="ctr" wrap="square"/>
+          <a:lstStyle/>
+          <a:p>
+            <a:pPr algn="ctr"/>
+          </a:p>
+        </p:txBody>
+      </p:sp>
+      <p:sp>
+        <p:nvSpPr>
+          <p:cNvPr id="24" name="TextBox 23"/>
+          <p:cNvSpPr txBox="1"/>
+          <p:nvPr/>
+        </p:nvSpPr>
+        <p:spPr>
+          <a:xfrm>
+            <a:off x="658368" y="1828800"/>
+            <a:ext cx="10972800" cy="274320"/>
+          </a:xfrm>
+          <a:prstGeom prst="rect">
+            <a:avLst/>
+          </a:prstGeom>
+          <a:noFill/>
+        </p:spPr>
+        <p:txBody>
+          <a:bodyPr wrap="square">
+            <a:spAutoFit/>
+          </a:bodyPr>
+          <a:lstStyle/>
+          <a:p>
+            <a:r>
+              <a:rPr sz="1100" b="1">
+                <a:solidFill>
+                  <a:srgbClr val="8A4B2D"/>
+                </a:solidFill>
+                <a:latin typeface="微软雅黑"/>
+              </a:rPr>
+              <a:t>难点1：B01 Modbus寄存器</a:t>
+            </a:r>
+          </a:p>
+        </p:txBody>
+      </p:sp>
+      <p:sp>
+        <p:nvSpPr>
+          <p:cNvPr id="25" name="TextBox 24"/>
+          <p:cNvSpPr txBox="1"/>
+          <p:nvPr/>
+        </p:nvSpPr>
+        <p:spPr>
+          <a:xfrm>
+            <a:off x="658368" y="2148840"/>
+            <a:ext cx="3566160" cy="219456"/>
+          </a:xfrm>
+          <a:prstGeom prst="rect">
+            <a:avLst/>
+          </a:prstGeom>
+          <a:noFill/>
+        </p:spPr>
+        <p:txBody>
+          <a:bodyPr wrap="square">
+            <a:spAutoFit/>
+          </a:bodyPr>
+          <a:lstStyle/>
+          <a:p>
+            <a:r>
+              <a:rPr sz="900" b="1">
+                <a:solidFill>
+                  <a:srgbClr val="B5533A"/>
+                </a:solidFill>
+                <a:latin typeface="微软雅黑"/>
+              </a:rPr>
+              <a:t>为什么容易栽</a:t>
+            </a:r>
+          </a:p>
+        </p:txBody>
+      </p:sp>
+      <p:sp>
+        <p:nvSpPr>
+          <p:cNvPr id="26" name="TextBox 25"/>
+          <p:cNvSpPr txBox="1"/>
+          <p:nvPr/>
+        </p:nvSpPr>
+        <p:spPr>
+          <a:xfrm>
+            <a:off x="658368" y="2386584"/>
+            <a:ext cx="3584448" cy="822960"/>
+          </a:xfrm>
+          <a:prstGeom prst="rect">
+            <a:avLst/>
+          </a:prstGeom>
+          <a:noFill/>
+        </p:spPr>
+        <p:txBody>
+          <a:bodyPr wrap="square">
+            <a:spAutoFit/>
+          </a:bodyPr>
+          <a:lstStyle/>
+          <a:p>
+            <a:r>
+              <a:rPr sz="850" b="0">
+                <a:solidFill>
+                  <a:srgbClr val="2B2F36"/>
+                </a:solidFill>
+                <a:latin typeface="微软雅黑"/>
+              </a:rPr>
+              <a:t>误区：地址从0还是40001起两派之争——以server文档为准</a:t>
+            </a:r>
+          </a:p>
+        </p:txBody>
+      </p:sp>
+      <p:sp>
+        <p:nvSpPr>
+          <p:cNvPr id="27" name="TextBox 26"/>
+          <p:cNvSpPr txBox="1"/>
+          <p:nvPr/>
+        </p:nvSpPr>
+        <p:spPr>
+          <a:xfrm>
+            <a:off x="4334255" y="2148840"/>
+            <a:ext cx="3566160" cy="219456"/>
+          </a:xfrm>
+          <a:prstGeom prst="rect">
+            <a:avLst/>
+          </a:prstGeom>
+          <a:noFill/>
+        </p:spPr>
+        <p:txBody>
+          <a:bodyPr wrap="square">
+            <a:spAutoFit/>
+          </a:bodyPr>
+          <a:lstStyle/>
+          <a:p>
+            <a:r>
+              <a:rPr sz="900" b="1">
+                <a:solidFill>
+                  <a:srgbClr val="2E7D46"/>
+                </a:solidFill>
+                <a:latin typeface="微软雅黑"/>
+              </a:rPr>
+              <a:t>一招破解（记住这句）</a:t>
+            </a:r>
+          </a:p>
+        </p:txBody>
+      </p:sp>
+      <p:sp>
+        <p:nvSpPr>
+          <p:cNvPr id="28" name="TextBox 27"/>
+          <p:cNvSpPr txBox="1"/>
+          <p:nvPr/>
+        </p:nvSpPr>
+        <p:spPr>
+          <a:xfrm>
+            <a:off x="4334255" y="2386584"/>
+            <a:ext cx="3584448" cy="822960"/>
+          </a:xfrm>
+          <a:prstGeom prst="rect">
+            <a:avLst/>
+          </a:prstGeom>
+          <a:noFill/>
+        </p:spPr>
+        <p:txBody>
+          <a:bodyPr wrap="square">
+            <a:spAutoFit/>
+          </a:bodyPr>
+          <a:lstStyle/>
+          <a:p>
+            <a:r>
+              <a:rPr sz="850" b="0">
+                <a:solidFill>
+                  <a:srgbClr val="2B2F36"/>
+                </a:solidFill>
+                <a:latin typeface="微软雅黑"/>
+              </a:rPr>
+              <a:t>寄存器=PLC的储物柜编号：40001起按地址读数</a:t>
+            </a:r>
+          </a:p>
+        </p:txBody>
+      </p:sp>
+      <p:sp>
+        <p:nvSpPr>
+          <p:cNvPr id="29" name="TextBox 28"/>
+          <p:cNvSpPr txBox="1"/>
+          <p:nvPr/>
+        </p:nvSpPr>
+        <p:spPr>
+          <a:xfrm>
+            <a:off x="8010143" y="2148840"/>
+            <a:ext cx="3566160" cy="219456"/>
+          </a:xfrm>
+          <a:prstGeom prst="rect">
+            <a:avLst/>
+          </a:prstGeom>
+          <a:noFill/>
+        </p:spPr>
+        <p:txBody>
+          <a:bodyPr wrap="square">
+            <a:spAutoFit/>
+          </a:bodyPr>
+          <a:lstStyle/>
+          <a:p>
+            <a:r>
+              <a:rPr sz="900" b="1">
+                <a:solidFill>
+                  <a:srgbClr val="35506E"/>
+                </a:solidFill>
+                <a:latin typeface="微软雅黑"/>
+              </a:rPr>
+              <a:t>动手验证（照做一遍）</a:t>
+            </a:r>
+          </a:p>
+        </p:txBody>
+      </p:sp>
+      <p:sp>
+        <p:nvSpPr>
+          <p:cNvPr id="30" name="TextBox 29"/>
+          <p:cNvSpPr txBox="1"/>
+          <p:nvPr/>
+        </p:nvSpPr>
+        <p:spPr>
+          <a:xfrm>
+            <a:off x="8010143" y="2386584"/>
+            <a:ext cx="3584448" cy="822960"/>
+          </a:xfrm>
+          <a:prstGeom prst="rect">
+            <a:avLst/>
+          </a:prstGeom>
+          <a:noFill/>
+        </p:spPr>
+        <p:txBody>
+          <a:bodyPr wrap="square">
+            <a:spAutoFit/>
+          </a:bodyPr>
+          <a:lstStyle/>
+          <a:p>
+            <a:r>
+              <a:rPr sz="850" b="0">
+                <a:solidFill>
+                  <a:srgbClr val="2B2F36"/>
+                </a:solidFill>
+                <a:latin typeface="微软雅黑"/>
+              </a:rPr>
+              <a:t>五测点(温度/压力/振动/转速/状态)固定地址——通信的门牌号 client.read_holding_registers(address=0, count=5)</a:t>
+            </a:r>
+          </a:p>
+        </p:txBody>
+      </p:sp>
+      <p:sp>
+        <p:nvSpPr>
+          <p:cNvPr id="31" name="Rectangle 30"/>
+          <p:cNvSpPr/>
+          <p:nvPr/>
+        </p:nvSpPr>
+        <p:spPr>
+          <a:xfrm>
+            <a:off x="457200" y="3383280"/>
+            <a:ext cx="11274552" cy="1481328"/>
+          </a:xfrm>
+          <a:prstGeom prst="rect">
+            <a:avLst/>
+          </a:prstGeom>
+          <a:solidFill>
+            <a:srgbClr val="F7F9FC"/>
+          </a:solidFill>
+          <a:ln>
+            <a:solidFill>
+              <a:srgbClr val="D6DCE4"/>
+            </a:solidFill>
+          </a:ln>
+          <a:effectLst/>
+        </p:spPr>
+        <p:style>
+          <a:lnRef idx="1">
+            <a:schemeClr val="accent1"/>
+          </a:lnRef>
+          <a:fillRef idx="3">
+            <a:schemeClr val="accent1"/>
+          </a:fillRef>
+          <a:effectRef idx="2">
+            <a:schemeClr val="accent1"/>
+          </a:effectRef>
+          <a:fontRef idx="minor">
+            <a:schemeClr val="lt1"/>
+          </a:fontRef>
+        </p:style>
+        <p:txBody>
+          <a:bodyPr rtlCol="0" anchor="ctr" wrap="square"/>
+          <a:lstStyle/>
+          <a:p>
+            <a:pPr algn="ctr"/>
+          </a:p>
+        </p:txBody>
+      </p:sp>
+      <p:sp>
+        <p:nvSpPr>
+          <p:cNvPr id="32" name="Rectangle 31"/>
+          <p:cNvSpPr/>
+          <p:nvPr/>
+        </p:nvSpPr>
+        <p:spPr>
+          <a:xfrm>
+            <a:off x="457200" y="3383280"/>
+            <a:ext cx="82296" cy="1481328"/>
+          </a:xfrm>
+          <a:prstGeom prst="rect">
+            <a:avLst/>
+          </a:prstGeom>
+          <a:solidFill>
+            <a:srgbClr val="8A4B2D"/>
+          </a:solidFill>
+          <a:ln>
+            <a:noFill/>
+          </a:ln>
+          <a:effectLst/>
+        </p:spPr>
+        <p:style>
+          <a:lnRef idx="1">
+            <a:schemeClr val="accent1"/>
+          </a:lnRef>
+          <a:fillRef idx="3">
+            <a:schemeClr val="accent1"/>
+          </a:fillRef>
+          <a:effectRef idx="2">
+            <a:schemeClr val="accent1"/>
+          </a:effectRef>
+          <a:fontRef idx="minor">
+            <a:schemeClr val="lt1"/>
+          </a:fontRef>
+        </p:style>
+        <p:txBody>
+          <a:bodyPr rtlCol="0" anchor="ctr" wrap="square"/>
+          <a:lstStyle/>
+          <a:p>
+            <a:pPr algn="ctr"/>
+          </a:p>
+        </p:txBody>
+      </p:sp>
+      <p:sp>
+        <p:nvSpPr>
+          <p:cNvPr id="33" name="TextBox 32"/>
+          <p:cNvSpPr txBox="1"/>
+          <p:nvPr/>
+        </p:nvSpPr>
+        <p:spPr>
+          <a:xfrm>
+            <a:off x="658368" y="3429000"/>
+            <a:ext cx="10972800" cy="274320"/>
+          </a:xfrm>
+          <a:prstGeom prst="rect">
+            <a:avLst/>
+          </a:prstGeom>
+          <a:noFill/>
+        </p:spPr>
+        <p:txBody>
+          <a:bodyPr wrap="square">
+            <a:spAutoFit/>
+          </a:bodyPr>
+          <a:lstStyle/>
+          <a:p>
+            <a:r>
+              <a:rPr sz="1100" b="1">
+                <a:solidFill>
+                  <a:srgbClr val="8A4B2D"/>
+                </a:solidFill>
+                <a:latin typeface="微软雅黑"/>
+              </a:rPr>
+              <a:t>难点2：B02 定点存储约定</a:t>
+            </a:r>
+          </a:p>
+        </p:txBody>
+      </p:sp>
+      <p:sp>
+        <p:nvSpPr>
+          <p:cNvPr id="34" name="TextBox 33"/>
+          <p:cNvSpPr txBox="1"/>
+          <p:nvPr/>
+        </p:nvSpPr>
+        <p:spPr>
+          <a:xfrm>
+            <a:off x="658368" y="3749040"/>
+            <a:ext cx="3566160" cy="219456"/>
+          </a:xfrm>
+          <a:prstGeom prst="rect">
+            <a:avLst/>
+          </a:prstGeom>
+          <a:noFill/>
+        </p:spPr>
+        <p:txBody>
+          <a:bodyPr wrap="square">
+            <a:spAutoFit/>
+          </a:bodyPr>
+          <a:lstStyle/>
+          <a:p>
+            <a:r>
+              <a:rPr sz="900" b="1">
+                <a:solidFill>
+                  <a:srgbClr val="B5533A"/>
+                </a:solidFill>
+                <a:latin typeface="微软雅黑"/>
+              </a:rPr>
+              <a:t>为什么容易栽</a:t>
+            </a:r>
+          </a:p>
+        </p:txBody>
+      </p:sp>
+      <p:sp>
+        <p:nvSpPr>
+          <p:cNvPr id="35" name="TextBox 34"/>
+          <p:cNvSpPr txBox="1"/>
+          <p:nvPr/>
+        </p:nvSpPr>
+        <p:spPr>
+          <a:xfrm>
+            <a:off x="658368" y="3986784"/>
+            <a:ext cx="3584448" cy="822960"/>
+          </a:xfrm>
+          <a:prstGeom prst="rect">
+            <a:avLst/>
+          </a:prstGeom>
+          <a:noFill/>
+        </p:spPr>
+        <p:txBody>
+          <a:bodyPr wrap="square">
+            <a:spAutoFit/>
+          </a:bodyPr>
+          <a:lstStyle/>
+          <a:p>
+            <a:r>
+              <a:rPr sz="850" b="0">
+                <a:solidFill>
+                  <a:srgbClr val="2B2F36"/>
+                </a:solidFill>
+                <a:latin typeface="微软雅黑"/>
+              </a:rPr>
+              <a:t>误区：忘除倍率→温度高10倍——对不上先查约定倍率</a:t>
+            </a:r>
+          </a:p>
+        </p:txBody>
+      </p:sp>
+      <p:sp>
+        <p:nvSpPr>
+          <p:cNvPr id="36" name="TextBox 35"/>
+          <p:cNvSpPr txBox="1"/>
+          <p:nvPr/>
+        </p:nvSpPr>
+        <p:spPr>
+          <a:xfrm>
+            <a:off x="4334255" y="3749040"/>
+            <a:ext cx="3566160" cy="219456"/>
+          </a:xfrm>
+          <a:prstGeom prst="rect">
+            <a:avLst/>
+          </a:prstGeom>
+          <a:noFill/>
+        </p:spPr>
+        <p:txBody>
+          <a:bodyPr wrap="square">
+            <a:spAutoFit/>
+          </a:bodyPr>
+          <a:lstStyle/>
+          <a:p>
+            <a:r>
+              <a:rPr sz="900" b="1">
+                <a:solidFill>
+                  <a:srgbClr val="2E7D46"/>
+                </a:solidFill>
+                <a:latin typeface="微软雅黑"/>
+              </a:rPr>
+              <a:t>一招破解（记住这句）</a:t>
+            </a:r>
+          </a:p>
+        </p:txBody>
+      </p:sp>
+      <p:sp>
+        <p:nvSpPr>
+          <p:cNvPr id="37" name="TextBox 36"/>
+          <p:cNvSpPr txBox="1"/>
+          <p:nvPr/>
+        </p:nvSpPr>
+        <p:spPr>
+          <a:xfrm>
+            <a:off x="4334255" y="3986784"/>
+            <a:ext cx="3584448" cy="822960"/>
+          </a:xfrm>
+          <a:prstGeom prst="rect">
+            <a:avLst/>
+          </a:prstGeom>
+          <a:noFill/>
+        </p:spPr>
+        <p:txBody>
+          <a:bodyPr wrap="square">
+            <a:spAutoFit/>
+          </a:bodyPr>
+          <a:lstStyle/>
+          <a:p>
+            <a:r>
+              <a:rPr sz="850" b="0">
+                <a:solidFill>
+                  <a:srgbClr val="2B2F36"/>
+                </a:solidFill>
+                <a:latin typeface="微软雅黑"/>
+              </a:rPr>
+              <a:t>定点=小数×10存整数：678其实是67.8℃——PLC不存小数</a:t>
+            </a:r>
+          </a:p>
+        </p:txBody>
+      </p:sp>
+      <p:sp>
+        <p:nvSpPr>
+          <p:cNvPr id="38" name="TextBox 37"/>
+          <p:cNvSpPr txBox="1"/>
+          <p:nvPr/>
+        </p:nvSpPr>
+        <p:spPr>
+          <a:xfrm>
+            <a:off x="8010143" y="3749040"/>
+            <a:ext cx="3566160" cy="219456"/>
+          </a:xfrm>
+          <a:prstGeom prst="rect">
+            <a:avLst/>
+          </a:prstGeom>
+          <a:noFill/>
+        </p:spPr>
+        <p:txBody>
+          <a:bodyPr wrap="square">
+            <a:spAutoFit/>
+          </a:bodyPr>
+          <a:lstStyle/>
+          <a:p>
+            <a:r>
+              <a:rPr sz="900" b="1">
+                <a:solidFill>
+                  <a:srgbClr val="35506E"/>
+                </a:solidFill>
+                <a:latin typeface="微软雅黑"/>
+              </a:rPr>
+              <a:t>动手验证（照做一遍）</a:t>
+            </a:r>
+          </a:p>
+        </p:txBody>
+      </p:sp>
+      <p:sp>
+        <p:nvSpPr>
+          <p:cNvPr id="39" name="TextBox 38"/>
+          <p:cNvSpPr txBox="1"/>
+          <p:nvPr/>
+        </p:nvSpPr>
+        <p:spPr>
+          <a:xfrm>
+            <a:off x="8010143" y="3986784"/>
+            <a:ext cx="3584448" cy="822960"/>
+          </a:xfrm>
+          <a:prstGeom prst="rect">
+            <a:avLst/>
+          </a:prstGeom>
+          <a:noFill/>
+        </p:spPr>
+        <p:txBody>
+          <a:bodyPr wrap="square">
+            <a:spAutoFit/>
+          </a:bodyPr>
+          <a:lstStyle/>
+          <a:p>
+            <a:r>
+              <a:rPr sz="850" b="0">
+                <a:solidFill>
+                  <a:srgbClr val="2B2F36"/>
+                </a:solidFill>
+                <a:latin typeface="微软雅黑"/>
+              </a:rPr>
+              <a:t>行业惯例：约定小数位，通信只传整数 raw=678 → real=raw/10 → 67.8℃</a:t>
+            </a:r>
+          </a:p>
+        </p:txBody>
+      </p:sp>
+      <p:sp>
+        <p:nvSpPr>
+          <p:cNvPr id="40" name="Rectangle 39"/>
+          <p:cNvSpPr/>
+          <p:nvPr/>
+        </p:nvSpPr>
+        <p:spPr>
+          <a:xfrm>
+            <a:off x="457200" y="4983480"/>
+            <a:ext cx="11274552" cy="1481328"/>
+          </a:xfrm>
+          <a:prstGeom prst="rect">
+            <a:avLst/>
+          </a:prstGeom>
+          <a:solidFill>
+            <a:srgbClr val="F7F9FC"/>
+          </a:solidFill>
+          <a:ln>
+            <a:solidFill>
+              <a:srgbClr val="D6DCE4"/>
+            </a:solidFill>
+          </a:ln>
+          <a:effectLst/>
+        </p:spPr>
+        <p:style>
+          <a:lnRef idx="1">
+            <a:schemeClr val="accent1"/>
+          </a:lnRef>
+          <a:fillRef idx="3">
+            <a:schemeClr val="accent1"/>
+          </a:fillRef>
+          <a:effectRef idx="2">
+            <a:schemeClr val="accent1"/>
+          </a:effectRef>
+          <a:fontRef idx="minor">
+            <a:schemeClr val="lt1"/>
+          </a:fontRef>
+        </p:style>
+        <p:txBody>
+          <a:bodyPr rtlCol="0" anchor="ctr" wrap="square"/>
+          <a:lstStyle/>
+          <a:p>
+            <a:pPr algn="ctr"/>
+          </a:p>
+        </p:txBody>
+      </p:sp>
+      <p:sp>
+        <p:nvSpPr>
+          <p:cNvPr id="41" name="Rectangle 40"/>
+          <p:cNvSpPr/>
+          <p:nvPr/>
+        </p:nvSpPr>
+        <p:spPr>
+          <a:xfrm>
+            <a:off x="457200" y="4983480"/>
+            <a:ext cx="82296" cy="1481328"/>
+          </a:xfrm>
+          <a:prstGeom prst="rect">
+            <a:avLst/>
+          </a:prstGeom>
+          <a:solidFill>
+            <a:srgbClr val="8A4B2D"/>
+          </a:solidFill>
+          <a:ln>
+            <a:noFill/>
+          </a:ln>
+          <a:effectLst/>
+        </p:spPr>
+        <p:style>
+          <a:lnRef idx="1">
+            <a:schemeClr val="accent1"/>
+          </a:lnRef>
+          <a:fillRef idx="3">
+            <a:schemeClr val="accent1"/>
+          </a:fillRef>
+          <a:effectRef idx="2">
+            <a:schemeClr val="accent1"/>
+          </a:effectRef>
+          <a:fontRef idx="minor">
+            <a:schemeClr val="lt1"/>
+          </a:fontRef>
+        </p:style>
+        <p:txBody>
+          <a:bodyPr rtlCol="0" anchor="ctr" wrap="square"/>
+          <a:lstStyle/>
+          <a:p>
+            <a:pPr algn="ctr"/>
+          </a:p>
+        </p:txBody>
+      </p:sp>
+      <p:sp>
+        <p:nvSpPr>
+          <p:cNvPr id="42" name="TextBox 41"/>
+          <p:cNvSpPr txBox="1"/>
+          <p:nvPr/>
+        </p:nvSpPr>
+        <p:spPr>
+          <a:xfrm>
+            <a:off x="658368" y="5029200"/>
+            <a:ext cx="10972800" cy="274320"/>
+          </a:xfrm>
+          <a:prstGeom prst="rect">
+            <a:avLst/>
+          </a:prstGeom>
+          <a:noFill/>
+        </p:spPr>
+        <p:txBody>
+          <a:bodyPr wrap="square">
+            <a:spAutoFit/>
+          </a:bodyPr>
+          <a:lstStyle/>
+          <a:p>
+            <a:r>
+              <a:rPr sz="1100" b="1">
+                <a:solidFill>
+                  <a:srgbClr val="8A4B2D"/>
+                </a:solidFill>
+                <a:latin typeface="微软雅黑"/>
+              </a:rPr>
+              <a:t>难点3：B03 pymodbus读寄存器</a:t>
+            </a:r>
+          </a:p>
+        </p:txBody>
+      </p:sp>
+      <p:sp>
+        <p:nvSpPr>
+          <p:cNvPr id="43" name="TextBox 42"/>
+          <p:cNvSpPr txBox="1"/>
+          <p:nvPr/>
+        </p:nvSpPr>
+        <p:spPr>
+          <a:xfrm>
+            <a:off x="658368" y="5349240"/>
+            <a:ext cx="3566160" cy="219456"/>
+          </a:xfrm>
+          <a:prstGeom prst="rect">
+            <a:avLst/>
+          </a:prstGeom>
+          <a:noFill/>
+        </p:spPr>
+        <p:txBody>
+          <a:bodyPr wrap="square">
+            <a:spAutoFit/>
+          </a:bodyPr>
+          <a:lstStyle/>
+          <a:p>
+            <a:r>
+              <a:rPr sz="900" b="1">
+                <a:solidFill>
+                  <a:srgbClr val="B5533A"/>
+                </a:solidFill>
+                <a:latin typeface="微软雅黑"/>
+              </a:rPr>
+              <a:t>为什么容易栽</a:t>
+            </a:r>
+          </a:p>
+        </p:txBody>
+      </p:sp>
+      <p:sp>
+        <p:nvSpPr>
+          <p:cNvPr id="44" name="TextBox 43"/>
+          <p:cNvSpPr txBox="1"/>
+          <p:nvPr/>
+        </p:nvSpPr>
+        <p:spPr>
+          <a:xfrm>
+            <a:off x="658368" y="5586984"/>
+            <a:ext cx="3584448" cy="822960"/>
+          </a:xfrm>
+          <a:prstGeom prst="rect">
+            <a:avLst/>
+          </a:prstGeom>
+          <a:noFill/>
+        </p:spPr>
+        <p:txBody>
+          <a:bodyPr wrap="square">
+            <a:spAutoFit/>
+          </a:bodyPr>
+          <a:lstStyle/>
+          <a:p>
+            <a:r>
+              <a:rPr sz="850" b="0">
+                <a:solidFill>
+                  <a:srgbClr val="2B2F36"/>
+                </a:solidFill>
+                <a:latin typeface="微软雅黑"/>
+              </a:rPr>
+              <a:t>误区：3.x必须关键字传参(address=/count=)——照2.x旧码抄报错</a:t>
+            </a:r>
+          </a:p>
+        </p:txBody>
+      </p:sp>
+      <p:sp>
+        <p:nvSpPr>
+          <p:cNvPr id="45" name="TextBox 44"/>
+          <p:cNvSpPr txBox="1"/>
+          <p:nvPr/>
+        </p:nvSpPr>
+        <p:spPr>
+          <a:xfrm>
+            <a:off x="4334255" y="5349240"/>
+            <a:ext cx="3566160" cy="219456"/>
+          </a:xfrm>
+          <a:prstGeom prst="rect">
+            <a:avLst/>
+          </a:prstGeom>
+          <a:noFill/>
+        </p:spPr>
+        <p:txBody>
+          <a:bodyPr wrap="square">
+            <a:spAutoFit/>
+          </a:bodyPr>
+          <a:lstStyle/>
+          <a:p>
+            <a:r>
+              <a:rPr sz="900" b="1">
+                <a:solidFill>
+                  <a:srgbClr val="2E7D46"/>
+                </a:solidFill>
+                <a:latin typeface="微软雅黑"/>
+              </a:rPr>
+              <a:t>一招破解（记住这句）</a:t>
+            </a:r>
+          </a:p>
+        </p:txBody>
+      </p:sp>
+      <p:sp>
+        <p:nvSpPr>
+          <p:cNvPr id="46" name="TextBox 45"/>
+          <p:cNvSpPr txBox="1"/>
+          <p:nvPr/>
+        </p:nvSpPr>
+        <p:spPr>
+          <a:xfrm>
+            <a:off x="4334255" y="5586984"/>
+            <a:ext cx="3584448" cy="822960"/>
+          </a:xfrm>
+          <a:prstGeom prst="rect">
+            <a:avLst/>
+          </a:prstGeom>
+          <a:noFill/>
+        </p:spPr>
+        <p:txBody>
+          <a:bodyPr wrap="square">
+            <a:spAutoFit/>
+          </a:bodyPr>
+          <a:lstStyle/>
+          <a:p>
+            <a:r>
+              <a:rPr sz="850" b="0">
+                <a:solidFill>
+                  <a:srgbClr val="2B2F36"/>
+                </a:solidFill>
+                <a:latin typeface="微软雅黑"/>
+              </a:rPr>
+              <a:t>pymodbus=Python的Modbus翻译官——一行读PLC寄存器</a:t>
+            </a:r>
+          </a:p>
+        </p:txBody>
+      </p:sp>
+      <p:sp>
+        <p:nvSpPr>
+          <p:cNvPr id="47" name="TextBox 46"/>
+          <p:cNvSpPr txBox="1"/>
+          <p:nvPr/>
+        </p:nvSpPr>
+        <p:spPr>
+          <a:xfrm>
+            <a:off x="8010143" y="5349240"/>
+            <a:ext cx="3566160" cy="219456"/>
+          </a:xfrm>
+          <a:prstGeom prst="rect">
+            <a:avLst/>
+          </a:prstGeom>
+          <a:noFill/>
+        </p:spPr>
+        <p:txBody>
+          <a:bodyPr wrap="square">
+            <a:spAutoFit/>
+          </a:bodyPr>
+          <a:lstStyle/>
+          <a:p>
+            <a:r>
+              <a:rPr sz="900" b="1">
+                <a:solidFill>
+                  <a:srgbClr val="35506E"/>
+                </a:solidFill>
+                <a:latin typeface="微软雅黑"/>
+              </a:rPr>
+              <a:t>动手验证（照做一遍）</a:t>
+            </a:r>
+          </a:p>
+        </p:txBody>
+      </p:sp>
+      <p:sp>
+        <p:nvSpPr>
+          <p:cNvPr id="48" name="TextBox 47"/>
+          <p:cNvSpPr txBox="1"/>
+          <p:nvPr/>
+        </p:nvSpPr>
+        <p:spPr>
+          <a:xfrm>
+            <a:off x="8010143" y="5586984"/>
+            <a:ext cx="3584448" cy="822960"/>
+          </a:xfrm>
+          <a:prstGeom prst="rect">
+            <a:avLst/>
+          </a:prstGeom>
+          <a:noFill/>
+        </p:spPr>
+        <p:txBody>
+          <a:bodyPr wrap="square">
+            <a:spAutoFit/>
+          </a:bodyPr>
+          <a:lstStyle/>
+          <a:p>
+            <a:r>
+              <a:rPr sz="850" b="0">
+                <a:solidFill>
+                  <a:srgbClr val="2B2F36"/>
+                </a:solidFill>
+                <a:latin typeface="微软雅黑"/>
+              </a:rPr>
+              <a:t>Modbus TCP读PLC保持寄存器——采集主链路 rr = client.read_holding_registers(0,5)</a:t>
+            </a:r>
+          </a:p>
+        </p:txBody>
+      </p:sp>
+    </p:spTree>
+  </p:cSld>
+  <p:clrMapOvr>
+    <a:masterClrMapping/>
+  </p:clrMapOvr>
+</p:sld>
+</file>
+
+<file path=ppt/slides/slide14.xml><?xml version="1.0" encoding="utf-8"?>
+<p:sld xmlns:a="http://schemas.openxmlformats.org/drawingml/2006/main" xmlns:p="http://schemas.openxmlformats.org/presentationml/2006/main" xmlns:r="http://schemas.openxmlformats.org/officeDocument/2006/relationships">
+  <p:cSld>
+    <p:spTree>
+      <p:nvGrpSpPr>
+        <p:cNvPr id="1" name=""/>
+        <p:cNvGrpSpPr/>
+        <p:nvPr/>
+      </p:nvGrpSpPr>
+      <p:grpSpPr/>
+      <p:sp>
+        <p:nvSpPr>
+          <p:cNvPr id="2" name="Rectangle 1"/>
+          <p:cNvSpPr/>
+          <p:nvPr/>
+        </p:nvSpPr>
+        <p:spPr>
+          <a:xfrm>
+            <a:off x="0" y="0"/>
+            <a:ext cx="12192000" cy="1150000"/>
+          </a:xfrm>
+          <a:prstGeom prst="rect">
+            <a:avLst/>
+          </a:prstGeom>
+          <a:solidFill>
+            <a:srgbClr val="010328"/>
+          </a:solidFill>
+          <a:ln>
+            <a:noFill/>
+          </a:ln>
+          <a:effectLst/>
+        </p:spPr>
+        <p:style>
+          <a:lnRef idx="1">
+            <a:schemeClr val="accent1"/>
+          </a:lnRef>
+          <a:fillRef idx="3">
+            <a:schemeClr val="accent1"/>
+          </a:fillRef>
+          <a:effectRef idx="2">
+            <a:schemeClr val="accent1"/>
+          </a:effectRef>
+          <a:fontRef idx="minor">
+            <a:schemeClr val="lt1"/>
+          </a:fontRef>
+        </p:style>
+        <p:txBody>
+          <a:bodyPr rtlCol="0" anchor="ctr"/>
+          <a:lstStyle/>
+          <a:p>
+            <a:pPr algn="ctr"/>
+          </a:p>
+        </p:txBody>
+      </p:sp>
+      <p:sp>
+        <p:nvSpPr>
+          <p:cNvPr id="3" name="Rectangle 2"/>
+          <p:cNvSpPr/>
+          <p:nvPr/>
+        </p:nvSpPr>
+        <p:spPr>
+          <a:xfrm>
+            <a:off x="0" y="1150000"/>
+            <a:ext cx="2600000" cy="70000"/>
+          </a:xfrm>
+          <a:prstGeom prst="rect">
+            <a:avLst/>
+          </a:prstGeom>
+          <a:solidFill>
+            <a:srgbClr val="F5670F"/>
+          </a:solidFill>
+          <a:ln>
+            <a:noFill/>
+          </a:ln>
+          <a:effectLst/>
+        </p:spPr>
+        <p:style>
+          <a:lnRef idx="1">
+            <a:schemeClr val="accent1"/>
+          </a:lnRef>
+          <a:fillRef idx="3">
+            <a:schemeClr val="accent1"/>
+          </a:fillRef>
+          <a:effectRef idx="2">
+            <a:schemeClr val="accent1"/>
+          </a:effectRef>
+          <a:fontRef idx="minor">
+            <a:schemeClr val="lt1"/>
+          </a:fontRef>
+        </p:style>
+        <p:txBody>
+          <a:bodyPr rtlCol="0" anchor="ctr"/>
+          <a:lstStyle/>
+          <a:p>
+            <a:pPr algn="ctr"/>
+          </a:p>
+        </p:txBody>
+      </p:sp>
+      <p:sp>
+        <p:nvSpPr>
+          <p:cNvPr id="4" name="TextBox 3"/>
+          <p:cNvSpPr txBox="1"/>
+          <p:nvPr/>
+        </p:nvSpPr>
+        <p:spPr>
+          <a:xfrm>
+            <a:off x="700000" y="300000"/>
+            <a:ext cx="10792000" cy="700000"/>
+          </a:xfrm>
+          <a:prstGeom prst="rect">
+            <a:avLst/>
+          </a:prstGeom>
+          <a:noFill/>
+        </p:spPr>
+        <p:txBody>
+          <a:bodyPr wrap="square" anchor="ctr">
+            <a:spAutoFit/>
+          </a:bodyPr>
+          <a:lstStyle/>
+          <a:p>
+            <a:pPr algn="l">
+              <a:lnSpc>
+                <a:spcPct val="110000"/>
+              </a:lnSpc>
+              <a:spcAft>
+                <a:spcPts val="600"/>
+              </a:spcAft>
+            </a:pPr>
+            <a:r>
+              <a:rPr sz="2400" b="1">
+                <a:solidFill>
+                  <a:srgbClr val="FFFFFF"/>
+                </a:solidFill>
+                <a:latin typeface="微软雅黑"/>
+              </a:rPr>
+              <a:t>承上启下 · 动手前避坑清单</a:t>
+            </a:r>
+          </a:p>
+        </p:txBody>
+      </p:sp>
+      <p:sp>
+        <p:nvSpPr>
+          <p:cNvPr id="18" name="Rectangle 17"/>
+          <p:cNvSpPr/>
+          <p:nvPr/>
+        </p:nvSpPr>
+        <p:spPr>
+          <a:xfrm>
+            <a:off x="500000" y="6500000"/>
+            <a:ext cx="11100000" cy="20000"/>
+          </a:xfrm>
+          <a:prstGeom prst="rect">
+            <a:avLst/>
+          </a:prstGeom>
+          <a:solidFill>
+            <a:srgbClr val="C9D4EE"/>
+          </a:solidFill>
+          <a:ln>
+            <a:noFill/>
+          </a:ln>
+          <a:effectLst/>
+        </p:spPr>
+        <p:style>
+          <a:lnRef idx="1">
+            <a:schemeClr val="accent1"/>
+          </a:lnRef>
+          <a:fillRef idx="3">
+            <a:schemeClr val="accent1"/>
+          </a:fillRef>
+          <a:effectRef idx="2">
+            <a:schemeClr val="accent1"/>
+          </a:effectRef>
+          <a:fontRef idx="minor">
+            <a:schemeClr val="lt1"/>
+          </a:fontRef>
+        </p:style>
+        <p:txBody>
+          <a:bodyPr rtlCol="0" anchor="ctr"/>
+          <a:lstStyle/>
+          <a:p>
+            <a:pPr algn="ctr"/>
+          </a:p>
+        </p:txBody>
+      </p:sp>
+      <p:sp>
+        <p:nvSpPr>
+          <p:cNvPr id="19" name="TextBox 18"/>
+          <p:cNvSpPr txBox="1"/>
+          <p:nvPr/>
+        </p:nvSpPr>
+        <p:spPr>
+          <a:xfrm>
+            <a:off x="500000" y="6540000"/>
+            <a:ext cx="7000000" cy="300000"/>
+          </a:xfrm>
+          <a:prstGeom prst="rect">
+            <a:avLst/>
+          </a:prstGeom>
+          <a:noFill/>
+        </p:spPr>
+        <p:txBody>
+          <a:bodyPr wrap="square" anchor="t">
+            <a:spAutoFit/>
+          </a:bodyPr>
+          <a:lstStyle/>
+          <a:p>
+            <a:pPr algn="l">
+              <a:lnSpc>
+                <a:spcPct val="110000"/>
+              </a:lnSpc>
+              <a:spcAft>
+                <a:spcPts val="600"/>
+              </a:spcAft>
+            </a:pPr>
+            <a:r>
+              <a:rPr sz="1000" b="0">
+                <a:solidFill>
+                  <a:srgbClr val="8A97B5"/>
+                </a:solidFill>
+                <a:latin typeface="微软雅黑"/>
+              </a:rPr>
+              <a:t>两江智造集团 · Python编程基础</a:t>
+            </a:r>
+          </a:p>
+        </p:txBody>
+      </p:sp>
+      <p:sp>
+        <p:nvSpPr>
+          <p:cNvPr id="20" name="TextBox 19"/>
+          <p:cNvSpPr txBox="1"/>
+          <p:nvPr/>
+        </p:nvSpPr>
+        <p:spPr>
+          <a:xfrm>
+            <a:off x="10600000" y="6540000"/>
+            <a:ext cx="1000000" cy="300000"/>
+          </a:xfrm>
+          <a:prstGeom prst="rect">
+            <a:avLst/>
+          </a:prstGeom>
+          <a:noFill/>
+        </p:spPr>
+        <p:txBody>
+          <a:bodyPr wrap="square" anchor="t">
+            <a:spAutoFit/>
+          </a:bodyPr>
+          <a:lstStyle/>
+          <a:p>
+            <a:pPr algn="r">
+              <a:lnSpc>
+                <a:spcPct val="110000"/>
+              </a:lnSpc>
+              <a:spcAft>
+                <a:spcPts val="600"/>
+              </a:spcAft>
+            </a:pPr>
+            <a:r>
+              <a:rPr sz="1000" b="0">
+                <a:solidFill>
+                  <a:srgbClr val="8A97B5"/>
+                </a:solidFill>
+                <a:latin typeface="微软雅黑"/>
+              </a:rPr>
+              <a:t>8 / 14</a:t>
+            </a:r>
+          </a:p>
+        </p:txBody>
+      </p:sp>
+      <p:sp>
+        <p:nvSpPr>
+          <p:cNvPr id="21" name="TextBox 20"/>
+          <p:cNvSpPr txBox="1"/>
+          <p:nvPr/>
+        </p:nvSpPr>
+        <p:spPr>
+          <a:xfrm>
+            <a:off x="457200" y="1389888"/>
+            <a:ext cx="11274552" cy="274320"/>
+          </a:xfrm>
+          <a:prstGeom prst="rect">
+            <a:avLst/>
+          </a:prstGeom>
+          <a:noFill/>
+        </p:spPr>
+        <p:txBody>
+          <a:bodyPr wrap="square">
+            <a:spAutoFit/>
+          </a:bodyPr>
+          <a:lstStyle/>
+          <a:p>
+            <a:r>
+              <a:rPr sz="1050" b="0">
+                <a:solidFill>
+                  <a:srgbClr val="6B7280"/>
+                </a:solidFill>
+                <a:latin typeface="微软雅黑"/>
+              </a:rPr>
+              <a:t>本讲是动手冲刺课：先把上周完整讲解里的高频翻车点过一遍，再开工——每条都是历届学生真实踩过的坑。</a:t>
+            </a:r>
+          </a:p>
+        </p:txBody>
+      </p:sp>
+      <p:sp>
+        <p:nvSpPr>
+          <p:cNvPr id="22" name="Rectangle 21"/>
+          <p:cNvSpPr/>
+          <p:nvPr/>
+        </p:nvSpPr>
+        <p:spPr>
+          <a:xfrm>
+            <a:off x="457200" y="1783080"/>
+            <a:ext cx="5532120" cy="2061972"/>
+          </a:xfrm>
+          <a:prstGeom prst="rect">
+            <a:avLst/>
+          </a:prstGeom>
+          <a:solidFill>
+            <a:srgbClr val="FFFFFF"/>
+          </a:solidFill>
+          <a:ln>
+            <a:solidFill>
+              <a:srgbClr val="D6DCE4"/>
+            </a:solidFill>
+          </a:ln>
+          <a:effectLst/>
+        </p:spPr>
+        <p:style>
+          <a:lnRef idx="1">
+            <a:schemeClr val="accent1"/>
+          </a:lnRef>
+          <a:fillRef idx="3">
+            <a:schemeClr val="accent1"/>
+          </a:fillRef>
+          <a:effectRef idx="2">
+            <a:schemeClr val="accent1"/>
+          </a:effectRef>
+          <a:fontRef idx="minor">
+            <a:schemeClr val="lt1"/>
+          </a:fontRef>
+        </p:style>
+        <p:txBody>
+          <a:bodyPr rtlCol="0" anchor="ctr" wrap="square"/>
+          <a:lstStyle/>
+          <a:p>
+            <a:pPr algn="ctr"/>
+          </a:p>
+        </p:txBody>
+      </p:sp>
+      <p:sp>
+        <p:nvSpPr>
+          <p:cNvPr id="23" name="Rectangle 22"/>
+          <p:cNvSpPr/>
+          <p:nvPr/>
+        </p:nvSpPr>
+        <p:spPr>
+          <a:xfrm>
+            <a:off x="457200" y="1783080"/>
+            <a:ext cx="82296" cy="2061972"/>
+          </a:xfrm>
+          <a:prstGeom prst="rect">
+            <a:avLst/>
+          </a:prstGeom>
+          <a:solidFill>
+            <a:srgbClr val="9A3B3B"/>
+          </a:solidFill>
+          <a:ln>
+            <a:noFill/>
+          </a:ln>
+          <a:effectLst/>
+        </p:spPr>
+        <p:style>
+          <a:lnRef idx="1">
+            <a:schemeClr val="accent1"/>
+          </a:lnRef>
+          <a:fillRef idx="3">
+            <a:schemeClr val="accent1"/>
+          </a:fillRef>
+          <a:effectRef idx="2">
+            <a:schemeClr val="accent1"/>
+          </a:effectRef>
+          <a:fontRef idx="minor">
+            <a:schemeClr val="lt1"/>
+          </a:fontRef>
+        </p:style>
+        <p:txBody>
+          <a:bodyPr rtlCol="0" anchor="ctr" wrap="square"/>
+          <a:lstStyle/>
+          <a:p>
+            <a:pPr algn="ctr"/>
+          </a:p>
+        </p:txBody>
+      </p:sp>
+      <p:sp>
+        <p:nvSpPr>
+          <p:cNvPr id="24" name="TextBox 23"/>
+          <p:cNvSpPr txBox="1"/>
+          <p:nvPr/>
+        </p:nvSpPr>
+        <p:spPr>
+          <a:xfrm>
+            <a:off x="658368" y="1847088"/>
+            <a:ext cx="5166359" cy="274320"/>
+          </a:xfrm>
+          <a:prstGeom prst="rect">
+            <a:avLst/>
+          </a:prstGeom>
+          <a:noFill/>
+        </p:spPr>
+        <p:txBody>
+          <a:bodyPr wrap="square">
+            <a:spAutoFit/>
+          </a:bodyPr>
+          <a:lstStyle/>
+          <a:p>
+            <a:r>
+              <a:rPr sz="1050" b="1">
+                <a:solidFill>
+                  <a:srgbClr val="B5533A"/>
+                </a:solidFill>
+                <a:latin typeface="微软雅黑"/>
+              </a:rPr>
+              <a:t>✗ 连不上PLC</a:t>
+            </a:r>
+          </a:p>
+        </p:txBody>
+      </p:sp>
+      <p:sp>
+        <p:nvSpPr>
+          <p:cNvPr id="25" name="TextBox 24"/>
+          <p:cNvSpPr txBox="1"/>
+          <p:nvPr/>
+        </p:nvSpPr>
+        <p:spPr>
+          <a:xfrm>
+            <a:off x="658368" y="2167128"/>
+            <a:ext cx="5166359" cy="868680"/>
+          </a:xfrm>
+          <a:prstGeom prst="rect">
+            <a:avLst/>
+          </a:prstGeom>
+          <a:noFill/>
+        </p:spPr>
+        <p:txBody>
+          <a:bodyPr wrap="square">
+            <a:spAutoFit/>
+          </a:bodyPr>
+          <a:lstStyle/>
+          <a:p>
+            <a:r>
+              <a:rPr sz="900" b="0">
+                <a:solidFill>
+                  <a:srgbClr val="2B2F36"/>
+                </a:solidFill>
+                <a:latin typeface="微软雅黑"/>
+              </a:rPr>
+              <a:t>原因：模拟器没启动</a:t>
+            </a:r>
+          </a:p>
+          <a:p>
+            <a:r>
+              <a:rPr sz="900" b="0">
+                <a:solidFill>
+                  <a:srgbClr val="2B2F36"/>
+                </a:solidFill>
+                <a:latin typeface="微软雅黑"/>
+              </a:rPr>
+              <a:t>✔ 解决：先跑虚拟产线--check</a:t>
+            </a:r>
+          </a:p>
+        </p:txBody>
+      </p:sp>
+      <p:sp>
+        <p:nvSpPr>
+          <p:cNvPr id="26" name="Rectangle 25"/>
+          <p:cNvSpPr/>
+          <p:nvPr/>
+        </p:nvSpPr>
+        <p:spPr>
+          <a:xfrm>
+            <a:off x="6199632" y="1783080"/>
+            <a:ext cx="5532120" cy="2061972"/>
+          </a:xfrm>
+          <a:prstGeom prst="rect">
+            <a:avLst/>
+          </a:prstGeom>
+          <a:solidFill>
+            <a:srgbClr val="FFFFFF"/>
+          </a:solidFill>
+          <a:ln>
+            <a:solidFill>
+              <a:srgbClr val="D6DCE4"/>
+            </a:solidFill>
+          </a:ln>
+          <a:effectLst/>
+        </p:spPr>
+        <p:style>
+          <a:lnRef idx="1">
+            <a:schemeClr val="accent1"/>
+          </a:lnRef>
+          <a:fillRef idx="3">
+            <a:schemeClr val="accent1"/>
+          </a:fillRef>
+          <a:effectRef idx="2">
+            <a:schemeClr val="accent1"/>
+          </a:effectRef>
+          <a:fontRef idx="minor">
+            <a:schemeClr val="lt1"/>
+          </a:fontRef>
+        </p:style>
+        <p:txBody>
+          <a:bodyPr rtlCol="0" anchor="ctr" wrap="square"/>
+          <a:lstStyle/>
+          <a:p>
+            <a:pPr algn="ctr"/>
+          </a:p>
+        </p:txBody>
+      </p:sp>
+      <p:sp>
+        <p:nvSpPr>
+          <p:cNvPr id="27" name="Rectangle 26"/>
+          <p:cNvSpPr/>
+          <p:nvPr/>
+        </p:nvSpPr>
+        <p:spPr>
+          <a:xfrm>
+            <a:off x="6199632" y="1783080"/>
+            <a:ext cx="82296" cy="2061972"/>
+          </a:xfrm>
+          <a:prstGeom prst="rect">
+            <a:avLst/>
+          </a:prstGeom>
+          <a:solidFill>
+            <a:srgbClr val="9A3B3B"/>
+          </a:solidFill>
+          <a:ln>
+            <a:noFill/>
+          </a:ln>
+          <a:effectLst/>
+        </p:spPr>
+        <p:style>
+          <a:lnRef idx="1">
+            <a:schemeClr val="accent1"/>
+          </a:lnRef>
+          <a:fillRef idx="3">
+            <a:schemeClr val="accent1"/>
+          </a:fillRef>
+          <a:effectRef idx="2">
+            <a:schemeClr val="accent1"/>
+          </a:effectRef>
+          <a:fontRef idx="minor">
+            <a:schemeClr val="lt1"/>
+          </a:fontRef>
+        </p:style>
+        <p:txBody>
+          <a:bodyPr rtlCol="0" anchor="ctr" wrap="square"/>
+          <a:lstStyle/>
+          <a:p>
+            <a:pPr algn="ctr"/>
+          </a:p>
+        </p:txBody>
+      </p:sp>
+      <p:sp>
+        <p:nvSpPr>
+          <p:cNvPr id="28" name="TextBox 27"/>
+          <p:cNvSpPr txBox="1"/>
+          <p:nvPr/>
+        </p:nvSpPr>
+        <p:spPr>
+          <a:xfrm>
+            <a:off x="6400800" y="1847088"/>
+            <a:ext cx="5166359" cy="274320"/>
+          </a:xfrm>
+          <a:prstGeom prst="rect">
+            <a:avLst/>
+          </a:prstGeom>
+          <a:noFill/>
+        </p:spPr>
+        <p:txBody>
+          <a:bodyPr wrap="square">
+            <a:spAutoFit/>
+          </a:bodyPr>
+          <a:lstStyle/>
+          <a:p>
+            <a:r>
+              <a:rPr sz="1050" b="1">
+                <a:solidFill>
+                  <a:srgbClr val="B5533A"/>
+                </a:solidFill>
+                <a:latin typeface="微软雅黑"/>
+              </a:rPr>
+              <a:t>✗ 数值大10倍</a:t>
+            </a:r>
+          </a:p>
+        </p:txBody>
+      </p:sp>
+      <p:sp>
+        <p:nvSpPr>
+          <p:cNvPr id="29" name="TextBox 28"/>
+          <p:cNvSpPr txBox="1"/>
+          <p:nvPr/>
+        </p:nvSpPr>
+        <p:spPr>
+          <a:xfrm>
+            <a:off x="6400800" y="2167128"/>
+            <a:ext cx="5166359" cy="868680"/>
+          </a:xfrm>
+          <a:prstGeom prst="rect">
+            <a:avLst/>
+          </a:prstGeom>
+          <a:noFill/>
+        </p:spPr>
+        <p:txBody>
+          <a:bodyPr wrap="square">
+            <a:spAutoFit/>
+          </a:bodyPr>
+          <a:lstStyle/>
+          <a:p>
+            <a:r>
+              <a:rPr sz="900" b="0">
+                <a:solidFill>
+                  <a:srgbClr val="2B2F36"/>
+                </a:solidFill>
+                <a:latin typeface="微软雅黑"/>
+              </a:rPr>
+              <a:t>原因：忘了÷10</a:t>
+            </a:r>
+          </a:p>
+          <a:p>
+            <a:r>
+              <a:rPr sz="900" b="0">
+                <a:solidFill>
+                  <a:srgbClr val="2B2F36"/>
+                </a:solidFill>
+                <a:latin typeface="微软雅黑"/>
+              </a:rPr>
+              <a:t>✔ 解决：寄存器定点换算</a:t>
+            </a:r>
+          </a:p>
+        </p:txBody>
+      </p:sp>
+      <p:sp>
+        <p:nvSpPr>
+          <p:cNvPr id="30" name="Rectangle 29"/>
+          <p:cNvSpPr/>
+          <p:nvPr/>
+        </p:nvSpPr>
+        <p:spPr>
+          <a:xfrm>
+            <a:off x="457200" y="3973068"/>
+            <a:ext cx="5532120" cy="2061972"/>
+          </a:xfrm>
+          <a:prstGeom prst="rect">
+            <a:avLst/>
+          </a:prstGeom>
+          <a:solidFill>
+            <a:srgbClr val="FFFFFF"/>
+          </a:solidFill>
+          <a:ln>
+            <a:solidFill>
+              <a:srgbClr val="D6DCE4"/>
+            </a:solidFill>
+          </a:ln>
+          <a:effectLst/>
+        </p:spPr>
+        <p:style>
+          <a:lnRef idx="1">
+            <a:schemeClr val="accent1"/>
+          </a:lnRef>
+          <a:fillRef idx="3">
+            <a:schemeClr val="accent1"/>
+          </a:fillRef>
+          <a:effectRef idx="2">
+            <a:schemeClr val="accent1"/>
+          </a:effectRef>
+          <a:fontRef idx="minor">
+            <a:schemeClr val="lt1"/>
+          </a:fontRef>
+        </p:style>
+        <p:txBody>
+          <a:bodyPr rtlCol="0" anchor="ctr" wrap="square"/>
+          <a:lstStyle/>
+          <a:p>
+            <a:pPr algn="ctr"/>
+          </a:p>
+        </p:txBody>
+      </p:sp>
+      <p:sp>
+        <p:nvSpPr>
+          <p:cNvPr id="31" name="Rectangle 30"/>
+          <p:cNvSpPr/>
+          <p:nvPr/>
+        </p:nvSpPr>
+        <p:spPr>
+          <a:xfrm>
+            <a:off x="457200" y="3973068"/>
+            <a:ext cx="82296" cy="2061972"/>
+          </a:xfrm>
+          <a:prstGeom prst="rect">
+            <a:avLst/>
+          </a:prstGeom>
+          <a:solidFill>
+            <a:srgbClr val="9A3B3B"/>
+          </a:solidFill>
+          <a:ln>
+            <a:noFill/>
+          </a:ln>
+          <a:effectLst/>
+        </p:spPr>
+        <p:style>
+          <a:lnRef idx="1">
+            <a:schemeClr val="accent1"/>
+          </a:lnRef>
+          <a:fillRef idx="3">
+            <a:schemeClr val="accent1"/>
+          </a:fillRef>
+          <a:effectRef idx="2">
+            <a:schemeClr val="accent1"/>
+          </a:effectRef>
+          <a:fontRef idx="minor">
+            <a:schemeClr val="lt1"/>
+          </a:fontRef>
+        </p:style>
+        <p:txBody>
+          <a:bodyPr rtlCol="0" anchor="ctr" wrap="square"/>
+          <a:lstStyle/>
+          <a:p>
+            <a:pPr algn="ctr"/>
+          </a:p>
+        </p:txBody>
+      </p:sp>
+      <p:sp>
+        <p:nvSpPr>
+          <p:cNvPr id="32" name="TextBox 31"/>
+          <p:cNvSpPr txBox="1"/>
+          <p:nvPr/>
+        </p:nvSpPr>
+        <p:spPr>
+          <a:xfrm>
+            <a:off x="658368" y="4037076"/>
+            <a:ext cx="5166359" cy="274320"/>
+          </a:xfrm>
+          <a:prstGeom prst="rect">
+            <a:avLst/>
+          </a:prstGeom>
+          <a:noFill/>
+        </p:spPr>
+        <p:txBody>
+          <a:bodyPr wrap="square">
+            <a:spAutoFit/>
+          </a:bodyPr>
+          <a:lstStyle/>
+          <a:p>
+            <a:r>
+              <a:rPr sz="1050" b="1">
+                <a:solidFill>
+                  <a:srgbClr val="B5533A"/>
+                </a:solidFill>
+                <a:latin typeface="微软雅黑"/>
+              </a:rPr>
+              <a:t>✗ publish后无消息</a:t>
+            </a:r>
+          </a:p>
+        </p:txBody>
+      </p:sp>
+      <p:sp>
+        <p:nvSpPr>
+          <p:cNvPr id="33" name="TextBox 32"/>
+          <p:cNvSpPr txBox="1"/>
+          <p:nvPr/>
+        </p:nvSpPr>
+        <p:spPr>
+          <a:xfrm>
+            <a:off x="658368" y="4357116"/>
+            <a:ext cx="5166359" cy="868680"/>
+          </a:xfrm>
+          <a:prstGeom prst="rect">
+            <a:avLst/>
+          </a:prstGeom>
+          <a:noFill/>
+        </p:spPr>
+        <p:txBody>
+          <a:bodyPr wrap="square">
+            <a:spAutoFit/>
+          </a:bodyPr>
+          <a:lstStyle/>
+          <a:p>
+            <a:r>
+              <a:rPr sz="900" b="0">
+                <a:solidFill>
+                  <a:srgbClr val="2B2F36"/>
+                </a:solidFill>
+                <a:latin typeface="微软雅黑"/>
+              </a:rPr>
+              <a:t>原因：立刻退出</a:t>
+            </a:r>
+          </a:p>
+          <a:p>
+            <a:r>
+              <a:rPr sz="900" b="0">
+                <a:solidFill>
+                  <a:srgbClr val="2B2F36"/>
+                </a:solidFill>
+                <a:latin typeface="微软雅黑"/>
+              </a:rPr>
+              <a:t>✔ 解决：sleep 0.3再退</a:t>
+            </a:r>
+          </a:p>
+        </p:txBody>
+      </p:sp>
+      <p:sp>
+        <p:nvSpPr>
+          <p:cNvPr id="34" name="TextBox 33"/>
+          <p:cNvSpPr txBox="1"/>
+          <p:nvPr/>
+        </p:nvSpPr>
+        <p:spPr>
+          <a:xfrm>
+            <a:off x="457200" y="6281928"/>
+            <a:ext cx="9601200" cy="182880"/>
+          </a:xfrm>
+          <a:prstGeom prst="rect">
+            <a:avLst/>
+          </a:prstGeom>
+          <a:noFill/>
+        </p:spPr>
+        <p:txBody>
+          <a:bodyPr wrap="square">
+            <a:spAutoFit/>
+          </a:bodyPr>
+          <a:lstStyle/>
+          <a:p>
+            <a:r>
+              <a:rPr sz="750" b="0">
+                <a:solidFill>
+                  <a:srgbClr val="6B7280"/>
+                </a:solidFill>
+                <a:latin typeface="微软雅黑"/>
+              </a:rPr>
+              <a:t>素材来源：同周《第21次课-设备如何在网络上说话》知识卡与避坑清单（逐字摘录）</a:t>
+            </a:r>
+          </a:p>
+        </p:txBody>
+      </p:sp>
+    </p:spTree>
+  </p:cSld>
+  <p:clrMapOvr>
+    <a:masterClrMapping/>
+  </p:clrMapOvr>
+</p:sld>
+</file>
+
 <file path=ppt/slides/slide2.xml><?xml version="1.0" encoding="utf-8"?>
 <p:sld xmlns:a="http://schemas.openxmlformats.org/drawingml/2006/main" xmlns:p="http://schemas.openxmlformats.org/presentationml/2006/main" xmlns:r="http://schemas.openxmlformats.org/officeDocument/2006/relationships">
   <p:cSld>
@@ -4623,102 +7879,14 @@
       <p:grpSpPr/>
       <p:sp>
         <p:nvSpPr>
-          <p:cNvPr id="2" name="Rectangle 1"/>
-          <p:cNvSpPr/>
-          <p:nvPr/>
-        </p:nvSpPr>
-        <p:spPr>
-          <a:xfrm>
-            <a:off x="0" y="0"/>
-            <a:ext cx="12192000" cy="1150000"/>
-          </a:xfrm>
-          <a:prstGeom prst="rect">
-            <a:avLst/>
-          </a:prstGeom>
-          <a:solidFill>
-            <a:srgbClr val="010328"/>
-          </a:solidFill>
-          <a:ln>
-            <a:noFill/>
-          </a:ln>
-          <a:effectLst/>
-        </p:spPr>
-        <p:style>
-          <a:lnRef idx="1">
-            <a:schemeClr val="accent1"/>
-          </a:lnRef>
-          <a:fillRef idx="3">
-            <a:schemeClr val="accent1"/>
-          </a:fillRef>
-          <a:effectRef idx="2">
-            <a:schemeClr val="accent1"/>
-          </a:effectRef>
-          <a:fontRef idx="minor">
-            <a:schemeClr val="lt1"/>
-          </a:fontRef>
-        </p:style>
-        <p:txBody>
-          <a:bodyPr rtlCol="0" anchor="ctr"/>
-          <a:lstStyle/>
-          <a:p>
-            <a:pPr algn="ctr"/>
-          </a:p>
-        </p:txBody>
-      </p:sp>
-      <p:sp>
-        <p:nvSpPr>
-          <p:cNvPr id="3" name="Rectangle 2"/>
-          <p:cNvSpPr/>
-          <p:nvPr/>
-        </p:nvSpPr>
-        <p:spPr>
-          <a:xfrm>
-            <a:off x="0" y="1150000"/>
-            <a:ext cx="2600000" cy="70000"/>
-          </a:xfrm>
-          <a:prstGeom prst="rect">
-            <a:avLst/>
-          </a:prstGeom>
-          <a:solidFill>
-            <a:srgbClr val="F5670F"/>
-          </a:solidFill>
-          <a:ln>
-            <a:noFill/>
-          </a:ln>
-          <a:effectLst/>
-        </p:spPr>
-        <p:style>
-          <a:lnRef idx="1">
-            <a:schemeClr val="accent1"/>
-          </a:lnRef>
-          <a:fillRef idx="3">
-            <a:schemeClr val="accent1"/>
-          </a:fillRef>
-          <a:effectRef idx="2">
-            <a:schemeClr val="accent1"/>
-          </a:effectRef>
-          <a:fontRef idx="minor">
-            <a:schemeClr val="lt1"/>
-          </a:fontRef>
-        </p:style>
-        <p:txBody>
-          <a:bodyPr rtlCol="0" anchor="ctr"/>
-          <a:lstStyle/>
-          <a:p>
-            <a:pPr algn="ctr"/>
-          </a:p>
-        </p:txBody>
-      </p:sp>
-      <p:sp>
-        <p:nvSpPr>
-          <p:cNvPr id="4" name="TextBox 3"/>
+          <p:cNvPr id="2" name="TextBox 1"/>
           <p:cNvSpPr txBox="1"/>
           <p:nvPr/>
         </p:nvSpPr>
         <p:spPr>
           <a:xfrm>
-            <a:off x="700000" y="300000"/>
-            <a:ext cx="10792000" cy="700000"/>
+            <a:off x="548640" y="320040"/>
+            <a:ext cx="11094720" cy="914400"/>
           </a:xfrm>
           <a:prstGeom prst="rect">
             <a:avLst/>
@@ -4726,353 +7894,98 @@
           <a:noFill/>
         </p:spPr>
         <p:txBody>
-          <a:bodyPr wrap="square" anchor="t">
+          <a:bodyPr wrap="none">
             <a:spAutoFit/>
           </a:bodyPr>
           <a:lstStyle/>
           <a:p>
-            <a:pPr algn="l">
-              <a:lnSpc>
-                <a:spcPct val="110000"/>
-              </a:lnSpc>
+            <a:r>
+              <a:rPr sz="3000" b="1"/>
+              <a:t>安全与合规警示（操作前必读）</a:t>
+            </a:r>
+          </a:p>
+        </p:txBody>
+      </p:sp>
+      <p:sp>
+        <p:nvSpPr>
+          <p:cNvPr id="3" name="TextBox 2"/>
+          <p:cNvSpPr txBox="1"/>
+          <p:nvPr/>
+        </p:nvSpPr>
+        <p:spPr>
+          <a:xfrm>
+            <a:off x="731520" y="1371600"/>
+            <a:ext cx="10728960" cy="4663440"/>
+          </a:xfrm>
+          <a:prstGeom prst="rect">
+            <a:avLst/>
+          </a:prstGeom>
+          <a:noFill/>
+        </p:spPr>
+        <p:txBody>
+          <a:bodyPr wrap="square">
+            <a:spAutoFit/>
+          </a:bodyPr>
+          <a:lstStyle/>
+          <a:p>
+            <a:pPr>
               <a:spcAft>
-                <a:spcPts val="600"/>
+                <a:spcPts val="1000"/>
               </a:spcAft>
             </a:pPr>
             <a:r>
-              <a:rPr sz="2400" b="1">
-                <a:solidFill>
-                  <a:srgbClr val="FFFFFF"/>
-                </a:solidFill>
-                <a:latin typeface="微软雅黑"/>
-              </a:rPr>
-              <a:t>任务情境（集团项目案例）</a:t>
-            </a:r>
-          </a:p>
-        </p:txBody>
-      </p:sp>
-      <p:sp>
-        <p:nvSpPr>
-          <p:cNvPr id="5" name="Rectangle 4"/>
-          <p:cNvSpPr/>
-          <p:nvPr/>
-        </p:nvSpPr>
-        <p:spPr>
-          <a:xfrm>
-            <a:off x="800000" y="1780000"/>
-            <a:ext cx="10600000" cy="700000"/>
-          </a:xfrm>
-          <a:prstGeom prst="rect">
-            <a:avLst/>
-          </a:prstGeom>
-          <a:solidFill>
-            <a:srgbClr val="010328"/>
-          </a:solidFill>
-          <a:ln>
-            <a:noFill/>
-          </a:ln>
-          <a:effectLst/>
-        </p:spPr>
-        <p:style>
-          <a:lnRef idx="1">
-            <a:schemeClr val="accent1"/>
-          </a:lnRef>
-          <a:fillRef idx="3">
-            <a:schemeClr val="accent1"/>
-          </a:fillRef>
-          <a:effectRef idx="2">
-            <a:schemeClr val="accent1"/>
-          </a:effectRef>
-          <a:fontRef idx="minor">
-            <a:schemeClr val="lt1"/>
-          </a:fontRef>
-        </p:style>
-        <p:txBody>
-          <a:bodyPr rtlCol="0" anchor="ctr"/>
-          <a:lstStyle/>
-          <a:p>
-            <a:pPr algn="ctr"/>
-          </a:p>
-        </p:txBody>
-      </p:sp>
-      <p:sp>
-        <p:nvSpPr>
-          <p:cNvPr id="6" name="TextBox 5"/>
-          <p:cNvSpPr txBox="1"/>
-          <p:nvPr/>
-        </p:nvSpPr>
-        <p:spPr>
-          <a:xfrm>
-            <a:off x="1000000" y="1880000"/>
-            <a:ext cx="10200000" cy="520000"/>
-          </a:xfrm>
-          <a:prstGeom prst="rect">
-            <a:avLst/>
-          </a:prstGeom>
-          <a:noFill/>
-        </p:spPr>
-        <p:txBody>
-          <a:bodyPr wrap="square" anchor="t">
-            <a:spAutoFit/>
-          </a:bodyPr>
-          <a:lstStyle/>
-          <a:p>
-            <a:pPr algn="l">
-              <a:lnSpc>
-                <a:spcPct val="110000"/>
-              </a:lnSpc>
+              <a:rPr sz="1800"/>
+              <a:t>1. 上机前确认本工位电源开关与急停位置，确认设备处于安全状态。</a:t>
+            </a:r>
+          </a:p>
+          <a:p>
+            <a:pPr>
               <a:spcAft>
-                <a:spcPts val="600"/>
+                <a:spcPts val="1000"/>
               </a:spcAft>
             </a:pPr>
             <a:r>
-              <a:rPr sz="1400" b="1">
-                <a:solidFill>
-                  <a:srgbClr val="FFFFFF"/>
-                </a:solidFill>
-                <a:latin typeface="微软雅黑"/>
-              </a:rPr>
-              <a:t>◆ 重庆两江智造集团 · 精密制造事业部</a:t>
-            </a:r>
-          </a:p>
-        </p:txBody>
-      </p:sp>
-      <p:sp>
-        <p:nvSpPr>
-          <p:cNvPr id="7" name="Rectangle 6"/>
-          <p:cNvSpPr/>
-          <p:nvPr/>
-        </p:nvSpPr>
-        <p:spPr>
-          <a:xfrm>
-            <a:off x="800000" y="2580000"/>
-            <a:ext cx="6300000" cy="3600000"/>
-          </a:xfrm>
-          <a:prstGeom prst="rect">
-            <a:avLst/>
-          </a:prstGeom>
-          <a:solidFill>
-            <a:srgbClr val="F7F9FD"/>
-          </a:solidFill>
-          <a:ln>
-            <a:solidFill>
-              <a:srgbClr val="0545E8"/>
-            </a:solidFill>
-          </a:ln>
-          <a:effectLst/>
-        </p:spPr>
-        <p:style>
-          <a:lnRef idx="1">
-            <a:schemeClr val="accent1"/>
-          </a:lnRef>
-          <a:fillRef idx="3">
-            <a:schemeClr val="accent1"/>
-          </a:fillRef>
-          <a:effectRef idx="2">
-            <a:schemeClr val="accent1"/>
-          </a:effectRef>
-          <a:fontRef idx="minor">
-            <a:schemeClr val="lt1"/>
-          </a:fontRef>
-        </p:style>
-        <p:txBody>
-          <a:bodyPr rtlCol="0" anchor="ctr"/>
-          <a:lstStyle/>
-          <a:p>
-            <a:pPr algn="ctr"/>
-          </a:p>
-        </p:txBody>
-      </p:sp>
-      <p:sp>
-        <p:nvSpPr>
-          <p:cNvPr id="8" name="TextBox 7"/>
-          <p:cNvSpPr txBox="1"/>
-          <p:nvPr/>
-        </p:nvSpPr>
-        <p:spPr>
-          <a:xfrm>
-            <a:off x="1000000" y="2740000"/>
-            <a:ext cx="5900000" cy="3300000"/>
-          </a:xfrm>
-          <a:prstGeom prst="rect">
-            <a:avLst/>
-          </a:prstGeom>
-          <a:noFill/>
-        </p:spPr>
-        <p:txBody>
-          <a:bodyPr wrap="square" anchor="t">
-            <a:spAutoFit/>
-          </a:bodyPr>
-          <a:lstStyle/>
-          <a:p>
-            <a:pPr algn="l">
-              <a:lnSpc>
-                <a:spcPct val="130000"/>
-              </a:lnSpc>
+              <a:rPr sz="1800"/>
+              <a:t>2. 涉及接线的操作一律先断电、后验电、再作业，禁止带电插拔。</a:t>
+            </a:r>
+          </a:p>
+          <a:p>
+            <a:pPr>
               <a:spcAft>
-                <a:spcPts val="600"/>
+                <a:spcPts val="1000"/>
               </a:spcAft>
             </a:pPr>
             <a:r>
-              <a:rPr sz="1450" b="0">
-                <a:solidFill>
-                  <a:srgbClr val="010328"/>
-                </a:solidFill>
-                <a:latin typeface="微软雅黑"/>
-              </a:rPr>
-              <a:t>数字化转型办终于把边缘网关接到了车间，Modbus口和MQTT通道都通了（本地模拟环境）。'最后一公里交给你。'——工单1.5：把设备数据从现场采上来、报上去；综合项目同步启动。</a:t>
-            </a:r>
-          </a:p>
-        </p:txBody>
-      </p:sp>
-      <p:pic>
-        <p:nvPicPr>
-          <p:cNvPr id="9" name="Picture 8" descr="W11_场景.png"/>
-          <p:cNvPicPr>
-            <a:picLocks noChangeAspect="1"/>
-          </p:cNvPicPr>
-          <p:nvPr/>
-        </p:nvPicPr>
-        <p:blipFill>
-          <a:blip r:embed="rId2"/>
-          <a:stretch>
-            <a:fillRect/>
-          </a:stretch>
-        </p:blipFill>
-        <p:spPr>
-          <a:xfrm>
-            <a:off x="7250000" y="2580000"/>
-            <a:ext cx="4150000" cy="3600000"/>
-          </a:xfrm>
-          <a:prstGeom prst="rect">
-            <a:avLst/>
-          </a:prstGeom>
-        </p:spPr>
-      </p:pic>
-      <p:sp>
-        <p:nvSpPr>
-          <p:cNvPr id="10" name="Rectangle 9"/>
-          <p:cNvSpPr/>
-          <p:nvPr/>
-        </p:nvSpPr>
-        <p:spPr>
-          <a:xfrm>
-            <a:off x="500000" y="6500000"/>
-            <a:ext cx="11100000" cy="20000"/>
-          </a:xfrm>
-          <a:prstGeom prst="rect">
-            <a:avLst/>
-          </a:prstGeom>
-          <a:solidFill>
-            <a:srgbClr val="C9D4EE"/>
-          </a:solidFill>
-          <a:ln>
-            <a:noFill/>
-          </a:ln>
-          <a:effectLst/>
-        </p:spPr>
-        <p:style>
-          <a:lnRef idx="1">
-            <a:schemeClr val="accent1"/>
-          </a:lnRef>
-          <a:fillRef idx="3">
-            <a:schemeClr val="accent1"/>
-          </a:fillRef>
-          <a:effectRef idx="2">
-            <a:schemeClr val="accent1"/>
-          </a:effectRef>
-          <a:fontRef idx="minor">
-            <a:schemeClr val="lt1"/>
-          </a:fontRef>
-        </p:style>
-        <p:txBody>
-          <a:bodyPr rtlCol="0" anchor="ctr"/>
-          <a:lstStyle/>
-          <a:p>
-            <a:pPr algn="ctr"/>
-          </a:p>
-        </p:txBody>
-      </p:sp>
-      <p:sp>
-        <p:nvSpPr>
-          <p:cNvPr id="11" name="TextBox 10"/>
-          <p:cNvSpPr txBox="1"/>
-          <p:nvPr/>
-        </p:nvSpPr>
-        <p:spPr>
-          <a:xfrm>
-            <a:off x="500000" y="6540000"/>
-            <a:ext cx="7000000" cy="300000"/>
-          </a:xfrm>
-          <a:prstGeom prst="rect">
-            <a:avLst/>
-          </a:prstGeom>
-          <a:noFill/>
-        </p:spPr>
-        <p:txBody>
-          <a:bodyPr wrap="square" anchor="t">
-            <a:spAutoFit/>
-          </a:bodyPr>
-          <a:lstStyle/>
-          <a:p>
-            <a:pPr algn="l">
-              <a:lnSpc>
-                <a:spcPct val="110000"/>
-              </a:lnSpc>
+              <a:rPr sz="1800"/>
+              <a:t>3. 身体任何部位不进入设备运动/散热区域，长发束起，不佩戴悬垂饰物。</a:t>
+            </a:r>
+          </a:p>
+          <a:p>
+            <a:pPr>
               <a:spcAft>
-                <a:spcPts val="600"/>
+                <a:spcPts val="1000"/>
               </a:spcAft>
             </a:pPr>
             <a:r>
-              <a:rPr sz="1000" b="0">
-                <a:solidFill>
-                  <a:srgbClr val="8A97B5"/>
-                </a:solidFill>
-                <a:latin typeface="微软雅黑"/>
-              </a:rPr>
-              <a:t>两江智造集团 · Python编程基础</a:t>
-            </a:r>
-          </a:p>
-        </p:txBody>
-      </p:sp>
-      <p:sp>
-        <p:nvSpPr>
-          <p:cNvPr id="12" name="TextBox 11"/>
-          <p:cNvSpPr txBox="1"/>
-          <p:nvPr/>
-        </p:nvSpPr>
-        <p:spPr>
-          <a:xfrm>
-            <a:off x="10600000" y="6540000"/>
-            <a:ext cx="1000000" cy="300000"/>
-          </a:xfrm>
-          <a:prstGeom prst="rect">
-            <a:avLst/>
-          </a:prstGeom>
-          <a:noFill/>
-        </p:spPr>
-        <p:txBody>
-          <a:bodyPr wrap="square" anchor="t">
-            <a:spAutoFit/>
-          </a:bodyPr>
-          <a:lstStyle/>
-          <a:p>
-            <a:pPr algn="r">
-              <a:lnSpc>
-                <a:spcPct val="110000"/>
-              </a:lnSpc>
+              <a:rPr sz="1800"/>
+              <a:t>4. 调试程序前先静态检查、再低速小样本试运行，确认无异常后放大规模。</a:t>
+            </a:r>
+          </a:p>
+          <a:p>
+            <a:pPr>
               <a:spcAft>
-                <a:spcPts val="600"/>
+                <a:spcPts val="1000"/>
               </a:spcAft>
             </a:pPr>
             <a:r>
-              <a:rPr sz="1000" b="0">
-                <a:solidFill>
-                  <a:srgbClr val="8A97B5"/>
-                </a:solidFill>
-                <a:latin typeface="微软雅黑"/>
-              </a:rPr>
-              <a:t>2 / 8</a:t>
+              <a:rPr sz="1800"/>
+              <a:t>5. 任何不确定或异常情况，立即停止操作并报告指导教师，不擅自处置。</a:t>
+            </a:r>
+          </a:p>
+          <a:p>
+            <a:r>
+              <a:rPr sz="1400" b="1"/>
+              <a:t>以上任一条违反，本次任务按课程标准「安全规范一票否决」条款记 0 分并中止实训。</a:t>
             </a:r>
           </a:p>
         </p:txBody>
@@ -5185,100 +8098,14 @@
       </p:sp>
       <p:sp>
         <p:nvSpPr>
-          <p:cNvPr id="4" name="Rectangle 3"/>
-          <p:cNvSpPr/>
-          <p:nvPr/>
-        </p:nvSpPr>
-        <p:spPr>
-          <a:xfrm>
-            <a:off x="600000" y="230000"/>
-            <a:ext cx="700000" cy="700000"/>
-          </a:xfrm>
-          <a:prstGeom prst="rect">
-            <a:avLst/>
-          </a:prstGeom>
-          <a:solidFill>
-            <a:srgbClr val="F5670F"/>
-          </a:solidFill>
-          <a:ln>
-            <a:noFill/>
-          </a:ln>
-          <a:effectLst/>
-        </p:spPr>
-        <p:style>
-          <a:lnRef idx="1">
-            <a:schemeClr val="accent1"/>
-          </a:lnRef>
-          <a:fillRef idx="3">
-            <a:schemeClr val="accent1"/>
-          </a:fillRef>
-          <a:effectRef idx="2">
-            <a:schemeClr val="accent1"/>
-          </a:effectRef>
-          <a:fontRef idx="minor">
-            <a:schemeClr val="lt1"/>
-          </a:fontRef>
-        </p:style>
-        <p:txBody>
-          <a:bodyPr rtlCol="0" anchor="ctr"/>
-          <a:lstStyle/>
-          <a:p>
-            <a:pPr algn="ctr"/>
-          </a:p>
-        </p:txBody>
-      </p:sp>
-      <p:sp>
-        <p:nvSpPr>
-          <p:cNvPr id="5" name="TextBox 4"/>
+          <p:cNvPr id="4" name="TextBox 3"/>
           <p:cNvSpPr txBox="1"/>
           <p:nvPr/>
         </p:nvSpPr>
         <p:spPr>
           <a:xfrm>
-            <a:off x="600000" y="255000"/>
-            <a:ext cx="700000" cy="660000"/>
-          </a:xfrm>
-          <a:prstGeom prst="rect">
-            <a:avLst/>
-          </a:prstGeom>
-          <a:noFill/>
-        </p:spPr>
-        <p:txBody>
-          <a:bodyPr wrap="square" anchor="t">
-            <a:spAutoFit/>
-          </a:bodyPr>
-          <a:lstStyle/>
-          <a:p>
-            <a:pPr algn="ctr">
-              <a:lnSpc>
-                <a:spcPct val="110000"/>
-              </a:lnSpc>
-              <a:spcAft>
-                <a:spcPts val="600"/>
-              </a:spcAft>
-            </a:pPr>
-            <a:r>
-              <a:rPr sz="2400" b="1">
-                <a:solidFill>
-                  <a:srgbClr val="FFFFFF"/>
-                </a:solidFill>
-                <a:latin typeface="微软雅黑"/>
-              </a:rPr>
-              <a:t>1</a:t>
-            </a:r>
-          </a:p>
-        </p:txBody>
-      </p:sp>
-      <p:sp>
-        <p:nvSpPr>
-          <p:cNvPr id="6" name="TextBox 5"/>
-          <p:cNvSpPr txBox="1"/>
-          <p:nvPr/>
-        </p:nvSpPr>
-        <p:spPr>
-          <a:xfrm>
-            <a:off x="1500000" y="300000"/>
-            <a:ext cx="9992000" cy="700000"/>
+            <a:off x="700000" y="300000"/>
+            <a:ext cx="10792000" cy="700000"/>
           </a:xfrm>
           <a:prstGeom prst="rect">
             <a:avLst/>
@@ -5306,27 +8133,27 @@
                 </a:solidFill>
                 <a:latin typeface="微软雅黑"/>
               </a:rPr>
-              <a:t>从虚拟设备采数到云端上报（1）</a:t>
-            </a:r>
-          </a:p>
-        </p:txBody>
-      </p:sp>
-      <p:sp>
-        <p:nvSpPr>
-          <p:cNvPr id="7" name="Rectangle 6"/>
+              <a:t>任务情境（集团项目案例）</a:t>
+            </a:r>
+          </a:p>
+        </p:txBody>
+      </p:sp>
+      <p:sp>
+        <p:nvSpPr>
+          <p:cNvPr id="5" name="Rectangle 4"/>
           <p:cNvSpPr/>
           <p:nvPr/>
         </p:nvSpPr>
         <p:spPr>
           <a:xfrm>
-            <a:off x="820000" y="2160000"/>
-            <a:ext cx="120000" cy="120000"/>
+            <a:off x="800000" y="1780000"/>
+            <a:ext cx="10600000" cy="700000"/>
           </a:xfrm>
           <a:prstGeom prst="rect">
             <a:avLst/>
           </a:prstGeom>
           <a:solidFill>
-            <a:srgbClr val="F5670F"/>
+            <a:srgbClr val="010328"/>
           </a:solidFill>
           <a:ln>
             <a:noFill/>
@@ -5357,358 +8184,14 @@
       </p:sp>
       <p:sp>
         <p:nvSpPr>
-          <p:cNvPr id="8" name="TextBox 7"/>
+          <p:cNvPr id="6" name="TextBox 5"/>
           <p:cNvSpPr txBox="1"/>
           <p:nvPr/>
         </p:nvSpPr>
         <p:spPr>
           <a:xfrm>
-            <a:off x="1100000" y="2050000"/>
-            <a:ext cx="10200000" cy="680000"/>
-          </a:xfrm>
-          <a:prstGeom prst="rect">
-            <a:avLst/>
-          </a:prstGeom>
-          <a:noFill/>
-        </p:spPr>
-        <p:txBody>
-          <a:bodyPr wrap="square" anchor="t">
-            <a:spAutoFit/>
-          </a:bodyPr>
-          <a:lstStyle/>
-          <a:p>
-            <a:pPr algn="l">
-              <a:lnSpc>
-                <a:spcPct val="125000"/>
-              </a:lnSpc>
-              <a:spcAft>
-                <a:spcPts val="600"/>
-              </a:spcAft>
-            </a:pPr>
-            <a:r>
-              <a:rPr sz="1500" b="0">
-                <a:solidFill>
-                  <a:srgbClr val="010328"/>
-                </a:solidFill>
-                <a:latin typeface="微软雅黑"/>
-              </a:rPr>
-              <a:t>pymodbus读取虚拟PLC寄存器数据；</a:t>
-            </a:r>
-          </a:p>
-        </p:txBody>
-      </p:sp>
-      <p:sp>
-        <p:nvSpPr>
-          <p:cNvPr id="9" name="Rectangle 8"/>
-          <p:cNvSpPr/>
-          <p:nvPr/>
-        </p:nvSpPr>
-        <p:spPr>
-          <a:xfrm>
-            <a:off x="820000" y="2840000"/>
-            <a:ext cx="120000" cy="120000"/>
-          </a:xfrm>
-          <a:prstGeom prst="rect">
-            <a:avLst/>
-          </a:prstGeom>
-          <a:solidFill>
-            <a:srgbClr val="F5670F"/>
-          </a:solidFill>
-          <a:ln>
-            <a:noFill/>
-          </a:ln>
-          <a:effectLst/>
-        </p:spPr>
-        <p:style>
-          <a:lnRef idx="1">
-            <a:schemeClr val="accent1"/>
-          </a:lnRef>
-          <a:fillRef idx="3">
-            <a:schemeClr val="accent1"/>
-          </a:fillRef>
-          <a:effectRef idx="2">
-            <a:schemeClr val="accent1"/>
-          </a:effectRef>
-          <a:fontRef idx="minor">
-            <a:schemeClr val="lt1"/>
-          </a:fontRef>
-        </p:style>
-        <p:txBody>
-          <a:bodyPr rtlCol="0" anchor="ctr"/>
-          <a:lstStyle/>
-          <a:p>
-            <a:pPr algn="ctr"/>
-          </a:p>
-        </p:txBody>
-      </p:sp>
-      <p:sp>
-        <p:nvSpPr>
-          <p:cNvPr id="10" name="TextBox 9"/>
-          <p:cNvSpPr txBox="1"/>
-          <p:nvPr/>
-        </p:nvSpPr>
-        <p:spPr>
-          <a:xfrm>
-            <a:off x="1100000" y="2730000"/>
-            <a:ext cx="10200000" cy="680000"/>
-          </a:xfrm>
-          <a:prstGeom prst="rect">
-            <a:avLst/>
-          </a:prstGeom>
-          <a:noFill/>
-        </p:spPr>
-        <p:txBody>
-          <a:bodyPr wrap="square" anchor="t">
-            <a:spAutoFit/>
-          </a:bodyPr>
-          <a:lstStyle/>
-          <a:p>
-            <a:pPr algn="l">
-              <a:lnSpc>
-                <a:spcPct val="125000"/>
-              </a:lnSpc>
-              <a:spcAft>
-                <a:spcPts val="600"/>
-              </a:spcAft>
-            </a:pPr>
-            <a:r>
-              <a:rPr sz="1500" b="0">
-                <a:solidFill>
-                  <a:srgbClr val="010328"/>
-                </a:solidFill>
-                <a:latin typeface="微软雅黑"/>
-              </a:rPr>
-              <a:t>paho-mqtt连接Broker、发布/订阅主题；</a:t>
-            </a:r>
-          </a:p>
-        </p:txBody>
-      </p:sp>
-      <p:sp>
-        <p:nvSpPr>
-          <p:cNvPr id="11" name="Rectangle 10"/>
-          <p:cNvSpPr/>
-          <p:nvPr/>
-        </p:nvSpPr>
-        <p:spPr>
-          <a:xfrm>
-            <a:off x="820000" y="3520000"/>
-            <a:ext cx="120000" cy="120000"/>
-          </a:xfrm>
-          <a:prstGeom prst="rect">
-            <a:avLst/>
-          </a:prstGeom>
-          <a:solidFill>
-            <a:srgbClr val="F5670F"/>
-          </a:solidFill>
-          <a:ln>
-            <a:noFill/>
-          </a:ln>
-          <a:effectLst/>
-        </p:spPr>
-        <p:style>
-          <a:lnRef idx="1">
-            <a:schemeClr val="accent1"/>
-          </a:lnRef>
-          <a:fillRef idx="3">
-            <a:schemeClr val="accent1"/>
-          </a:fillRef>
-          <a:effectRef idx="2">
-            <a:schemeClr val="accent1"/>
-          </a:effectRef>
-          <a:fontRef idx="minor">
-            <a:schemeClr val="lt1"/>
-          </a:fontRef>
-        </p:style>
-        <p:txBody>
-          <a:bodyPr rtlCol="0" anchor="ctr"/>
-          <a:lstStyle/>
-          <a:p>
-            <a:pPr algn="ctr"/>
-          </a:p>
-        </p:txBody>
-      </p:sp>
-      <p:sp>
-        <p:nvSpPr>
-          <p:cNvPr id="12" name="TextBox 11"/>
-          <p:cNvSpPr txBox="1"/>
-          <p:nvPr/>
-        </p:nvSpPr>
-        <p:spPr>
-          <a:xfrm>
-            <a:off x="1100000" y="3410000"/>
-            <a:ext cx="10200000" cy="680000"/>
-          </a:xfrm>
-          <a:prstGeom prst="rect">
-            <a:avLst/>
-          </a:prstGeom>
-          <a:noFill/>
-        </p:spPr>
-        <p:txBody>
-          <a:bodyPr wrap="square" anchor="t">
-            <a:spAutoFit/>
-          </a:bodyPr>
-          <a:lstStyle/>
-          <a:p>
-            <a:pPr algn="l">
-              <a:lnSpc>
-                <a:spcPct val="125000"/>
-              </a:lnSpc>
-              <a:spcAft>
-                <a:spcPts val="600"/>
-              </a:spcAft>
-            </a:pPr>
-            <a:r>
-              <a:rPr sz="1500" b="0">
-                <a:solidFill>
-                  <a:srgbClr val="010328"/>
-                </a:solidFill>
-                <a:latin typeface="微软雅黑"/>
-              </a:rPr>
-              <a:t>工单项目1.5实操：Modbus定时采集+MQTT上报的完整数据采集系统；</a:t>
-            </a:r>
-          </a:p>
-        </p:txBody>
-      </p:sp>
-      <p:sp>
-        <p:nvSpPr>
-          <p:cNvPr id="13" name="Rectangle 12"/>
-          <p:cNvSpPr/>
-          <p:nvPr/>
-        </p:nvSpPr>
-        <p:spPr>
-          <a:xfrm>
-            <a:off x="820000" y="4200000"/>
-            <a:ext cx="120000" cy="120000"/>
-          </a:xfrm>
-          <a:prstGeom prst="rect">
-            <a:avLst/>
-          </a:prstGeom>
-          <a:solidFill>
-            <a:srgbClr val="F5670F"/>
-          </a:solidFill>
-          <a:ln>
-            <a:noFill/>
-          </a:ln>
-          <a:effectLst/>
-        </p:spPr>
-        <p:style>
-          <a:lnRef idx="1">
-            <a:schemeClr val="accent1"/>
-          </a:lnRef>
-          <a:fillRef idx="3">
-            <a:schemeClr val="accent1"/>
-          </a:fillRef>
-          <a:effectRef idx="2">
-            <a:schemeClr val="accent1"/>
-          </a:effectRef>
-          <a:fontRef idx="minor">
-            <a:schemeClr val="lt1"/>
-          </a:fontRef>
-        </p:style>
-        <p:txBody>
-          <a:bodyPr rtlCol="0" anchor="ctr"/>
-          <a:lstStyle/>
-          <a:p>
-            <a:pPr algn="ctr"/>
-          </a:p>
-        </p:txBody>
-      </p:sp>
-      <p:sp>
-        <p:nvSpPr>
-          <p:cNvPr id="14" name="TextBox 13"/>
-          <p:cNvSpPr txBox="1"/>
-          <p:nvPr/>
-        </p:nvSpPr>
-        <p:spPr>
-          <a:xfrm>
-            <a:off x="1100000" y="4090000"/>
-            <a:ext cx="10200000" cy="680000"/>
-          </a:xfrm>
-          <a:prstGeom prst="rect">
-            <a:avLst/>
-          </a:prstGeom>
-          <a:noFill/>
-        </p:spPr>
-        <p:txBody>
-          <a:bodyPr wrap="square" anchor="t">
-            <a:spAutoFit/>
-          </a:bodyPr>
-          <a:lstStyle/>
-          <a:p>
-            <a:pPr algn="l">
-              <a:lnSpc>
-                <a:spcPct val="125000"/>
-              </a:lnSpc>
-              <a:spcAft>
-                <a:spcPts val="600"/>
-              </a:spcAft>
-            </a:pPr>
-            <a:r>
-              <a:rPr sz="1500" b="0">
-                <a:solidFill>
-                  <a:srgbClr val="010328"/>
-                </a:solidFill>
-                <a:latin typeface="微软雅黑"/>
-              </a:rPr>
-              <a:t>末期复习：核心知识点串讲与综合项目答疑。</a:t>
-            </a:r>
-          </a:p>
-        </p:txBody>
-      </p:sp>
-      <p:sp>
-        <p:nvSpPr>
-          <p:cNvPr id="15" name="Rectangle 14"/>
-          <p:cNvSpPr/>
-          <p:nvPr/>
-        </p:nvSpPr>
-        <p:spPr>
-          <a:xfrm>
-            <a:off x="500000" y="6500000"/>
-            <a:ext cx="11100000" cy="20000"/>
-          </a:xfrm>
-          <a:prstGeom prst="rect">
-            <a:avLst/>
-          </a:prstGeom>
-          <a:solidFill>
-            <a:srgbClr val="C9D4EE"/>
-          </a:solidFill>
-          <a:ln>
-            <a:noFill/>
-          </a:ln>
-          <a:effectLst/>
-        </p:spPr>
-        <p:style>
-          <a:lnRef idx="1">
-            <a:schemeClr val="accent1"/>
-          </a:lnRef>
-          <a:fillRef idx="3">
-            <a:schemeClr val="accent1"/>
-          </a:fillRef>
-          <a:effectRef idx="2">
-            <a:schemeClr val="accent1"/>
-          </a:effectRef>
-          <a:fontRef idx="minor">
-            <a:schemeClr val="lt1"/>
-          </a:fontRef>
-        </p:style>
-        <p:txBody>
-          <a:bodyPr rtlCol="0" anchor="ctr"/>
-          <a:lstStyle/>
-          <a:p>
-            <a:pPr algn="ctr"/>
-          </a:p>
-        </p:txBody>
-      </p:sp>
-      <p:sp>
-        <p:nvSpPr>
-          <p:cNvPr id="16" name="TextBox 15"/>
-          <p:cNvSpPr txBox="1"/>
-          <p:nvPr/>
-        </p:nvSpPr>
-        <p:spPr>
-          <a:xfrm>
-            <a:off x="500000" y="6540000"/>
-            <a:ext cx="7000000" cy="300000"/>
+            <a:off x="1000000" y="1880000"/>
+            <a:ext cx="10200000" cy="520000"/>
           </a:xfrm>
           <a:prstGeom prst="rect">
             <a:avLst/>
@@ -5730,6 +8213,204 @@
               </a:spcAft>
             </a:pPr>
             <a:r>
+              <a:rPr sz="1400" b="1">
+                <a:solidFill>
+                  <a:srgbClr val="FFFFFF"/>
+                </a:solidFill>
+                <a:latin typeface="微软雅黑"/>
+              </a:rPr>
+              <a:t>◆ 重庆两江智造集团 · 精密制造事业部</a:t>
+            </a:r>
+          </a:p>
+        </p:txBody>
+      </p:sp>
+      <p:sp>
+        <p:nvSpPr>
+          <p:cNvPr id="7" name="Rectangle 6"/>
+          <p:cNvSpPr/>
+          <p:nvPr/>
+        </p:nvSpPr>
+        <p:spPr>
+          <a:xfrm>
+            <a:off x="800000" y="2580000"/>
+            <a:ext cx="6300000" cy="3600000"/>
+          </a:xfrm>
+          <a:prstGeom prst="rect">
+            <a:avLst/>
+          </a:prstGeom>
+          <a:solidFill>
+            <a:srgbClr val="F7F9FD"/>
+          </a:solidFill>
+          <a:ln>
+            <a:solidFill>
+              <a:srgbClr val="0545E8"/>
+            </a:solidFill>
+          </a:ln>
+          <a:effectLst/>
+        </p:spPr>
+        <p:style>
+          <a:lnRef idx="1">
+            <a:schemeClr val="accent1"/>
+          </a:lnRef>
+          <a:fillRef idx="3">
+            <a:schemeClr val="accent1"/>
+          </a:fillRef>
+          <a:effectRef idx="2">
+            <a:schemeClr val="accent1"/>
+          </a:effectRef>
+          <a:fontRef idx="minor">
+            <a:schemeClr val="lt1"/>
+          </a:fontRef>
+        </p:style>
+        <p:txBody>
+          <a:bodyPr rtlCol="0" anchor="ctr"/>
+          <a:lstStyle/>
+          <a:p>
+            <a:pPr algn="ctr"/>
+          </a:p>
+        </p:txBody>
+      </p:sp>
+      <p:sp>
+        <p:nvSpPr>
+          <p:cNvPr id="8" name="TextBox 7"/>
+          <p:cNvSpPr txBox="1"/>
+          <p:nvPr/>
+        </p:nvSpPr>
+        <p:spPr>
+          <a:xfrm>
+            <a:off x="1000000" y="2740000"/>
+            <a:ext cx="5900000" cy="3300000"/>
+          </a:xfrm>
+          <a:prstGeom prst="rect">
+            <a:avLst/>
+          </a:prstGeom>
+          <a:noFill/>
+        </p:spPr>
+        <p:txBody>
+          <a:bodyPr wrap="square" anchor="t">
+            <a:spAutoFit/>
+          </a:bodyPr>
+          <a:lstStyle/>
+          <a:p>
+            <a:pPr algn="l">
+              <a:lnSpc>
+                <a:spcPct val="130000"/>
+              </a:lnSpc>
+              <a:spcAft>
+                <a:spcPts val="600"/>
+              </a:spcAft>
+            </a:pPr>
+            <a:r>
+              <a:rPr sz="1450" b="0">
+                <a:solidFill>
+                  <a:srgbClr val="010328"/>
+                </a:solidFill>
+                <a:latin typeface="微软雅黑"/>
+              </a:rPr>
+              <a:t>数字化转型办终于把边缘网关接到了车间，Modbus口和MQTT通道都通了（本地模拟环境）。'最后一公里交给你。'——工单1.5：把设备数据从现场采上来、报上去；综合项目同步启动。</a:t>
+            </a:r>
+          </a:p>
+        </p:txBody>
+      </p:sp>
+      <p:pic>
+        <p:nvPicPr>
+          <p:cNvPr id="9" name="Picture 8" descr="W11_场景.png"/>
+          <p:cNvPicPr>
+            <a:picLocks noChangeAspect="1"/>
+          </p:cNvPicPr>
+          <p:nvPr/>
+        </p:nvPicPr>
+        <p:blipFill>
+          <a:blip r:embed="rId2"/>
+          <a:stretch>
+            <a:fillRect/>
+          </a:stretch>
+        </p:blipFill>
+        <p:spPr>
+          <a:xfrm>
+            <a:off x="7250000" y="2580000"/>
+            <a:ext cx="4150000" cy="3600000"/>
+          </a:xfrm>
+          <a:prstGeom prst="rect">
+            <a:avLst/>
+          </a:prstGeom>
+        </p:spPr>
+      </p:pic>
+      <p:sp>
+        <p:nvSpPr>
+          <p:cNvPr id="10" name="Rectangle 9"/>
+          <p:cNvSpPr/>
+          <p:nvPr/>
+        </p:nvSpPr>
+        <p:spPr>
+          <a:xfrm>
+            <a:off x="500000" y="6500000"/>
+            <a:ext cx="11100000" cy="20000"/>
+          </a:xfrm>
+          <a:prstGeom prst="rect">
+            <a:avLst/>
+          </a:prstGeom>
+          <a:solidFill>
+            <a:srgbClr val="C9D4EE"/>
+          </a:solidFill>
+          <a:ln>
+            <a:noFill/>
+          </a:ln>
+          <a:effectLst/>
+        </p:spPr>
+        <p:style>
+          <a:lnRef idx="1">
+            <a:schemeClr val="accent1"/>
+          </a:lnRef>
+          <a:fillRef idx="3">
+            <a:schemeClr val="accent1"/>
+          </a:fillRef>
+          <a:effectRef idx="2">
+            <a:schemeClr val="accent1"/>
+          </a:effectRef>
+          <a:fontRef idx="minor">
+            <a:schemeClr val="lt1"/>
+          </a:fontRef>
+        </p:style>
+        <p:txBody>
+          <a:bodyPr rtlCol="0" anchor="ctr"/>
+          <a:lstStyle/>
+          <a:p>
+            <a:pPr algn="ctr"/>
+          </a:p>
+        </p:txBody>
+      </p:sp>
+      <p:sp>
+        <p:nvSpPr>
+          <p:cNvPr id="11" name="TextBox 10"/>
+          <p:cNvSpPr txBox="1"/>
+          <p:nvPr/>
+        </p:nvSpPr>
+        <p:spPr>
+          <a:xfrm>
+            <a:off x="500000" y="6540000"/>
+            <a:ext cx="7000000" cy="300000"/>
+          </a:xfrm>
+          <a:prstGeom prst="rect">
+            <a:avLst/>
+          </a:prstGeom>
+          <a:noFill/>
+        </p:spPr>
+        <p:txBody>
+          <a:bodyPr wrap="square" anchor="t">
+            <a:spAutoFit/>
+          </a:bodyPr>
+          <a:lstStyle/>
+          <a:p>
+            <a:pPr algn="l">
+              <a:lnSpc>
+                <a:spcPct val="110000"/>
+              </a:lnSpc>
+              <a:spcAft>
+                <a:spcPts val="600"/>
+              </a:spcAft>
+            </a:pPr>
+            <a:r>
               <a:rPr sz="1000" b="0">
                 <a:solidFill>
                   <a:srgbClr val="8A97B5"/>
@@ -5743,7 +8424,7 @@
       </p:sp>
       <p:sp>
         <p:nvSpPr>
-          <p:cNvPr id="17" name="TextBox 16"/>
+          <p:cNvPr id="12" name="TextBox 11"/>
           <p:cNvSpPr txBox="1"/>
           <p:nvPr/>
         </p:nvSpPr>
@@ -5778,7 +8459,7 @@
                 </a:solidFill>
                 <a:latin typeface="微软雅黑"/>
               </a:rPr>
-              <a:t>3 / 8</a:t>
+              <a:t>3 / 14</a:t>
             </a:r>
           </a:p>
         </p:txBody>
@@ -5891,14 +8572,58 @@
       </p:sp>
       <p:sp>
         <p:nvSpPr>
-          <p:cNvPr id="4" name="TextBox 3"/>
+          <p:cNvPr id="4" name="Rectangle 3"/>
+          <p:cNvSpPr/>
+          <p:nvPr/>
+        </p:nvSpPr>
+        <p:spPr>
+          <a:xfrm>
+            <a:off x="600000" y="230000"/>
+            <a:ext cx="700000" cy="700000"/>
+          </a:xfrm>
+          <a:prstGeom prst="rect">
+            <a:avLst/>
+          </a:prstGeom>
+          <a:solidFill>
+            <a:srgbClr val="F5670F"/>
+          </a:solidFill>
+          <a:ln>
+            <a:noFill/>
+          </a:ln>
+          <a:effectLst/>
+        </p:spPr>
+        <p:style>
+          <a:lnRef idx="1">
+            <a:schemeClr val="accent1"/>
+          </a:lnRef>
+          <a:fillRef idx="3">
+            <a:schemeClr val="accent1"/>
+          </a:fillRef>
+          <a:effectRef idx="2">
+            <a:schemeClr val="accent1"/>
+          </a:effectRef>
+          <a:fontRef idx="minor">
+            <a:schemeClr val="lt1"/>
+          </a:fontRef>
+        </p:style>
+        <p:txBody>
+          <a:bodyPr rtlCol="0" anchor="ctr"/>
+          <a:lstStyle/>
+          <a:p>
+            <a:pPr algn="ctr"/>
+          </a:p>
+        </p:txBody>
+      </p:sp>
+      <p:sp>
+        <p:nvSpPr>
+          <p:cNvPr id="5" name="TextBox 4"/>
           <p:cNvSpPr txBox="1"/>
           <p:nvPr/>
         </p:nvSpPr>
         <p:spPr>
           <a:xfrm>
-            <a:off x="700000" y="300000"/>
-            <a:ext cx="10792000" cy="700000"/>
+            <a:off x="600000" y="255000"/>
+            <a:ext cx="700000" cy="660000"/>
           </a:xfrm>
           <a:prstGeom prst="rect">
             <a:avLst/>
@@ -5906,7 +8631,49 @@
           <a:noFill/>
         </p:spPr>
         <p:txBody>
-          <a:bodyPr wrap="square" anchor="ctr">
+          <a:bodyPr wrap="square" anchor="t">
+            <a:spAutoFit/>
+          </a:bodyPr>
+          <a:lstStyle/>
+          <a:p>
+            <a:pPr algn="ctr">
+              <a:lnSpc>
+                <a:spcPct val="110000"/>
+              </a:lnSpc>
+              <a:spcAft>
+                <a:spcPts val="600"/>
+              </a:spcAft>
+            </a:pPr>
+            <a:r>
+              <a:rPr sz="2400" b="1">
+                <a:solidFill>
+                  <a:srgbClr val="FFFFFF"/>
+                </a:solidFill>
+                <a:latin typeface="微软雅黑"/>
+              </a:rPr>
+              <a:t>1</a:t>
+            </a:r>
+          </a:p>
+        </p:txBody>
+      </p:sp>
+      <p:sp>
+        <p:nvSpPr>
+          <p:cNvPr id="6" name="TextBox 5"/>
+          <p:cNvSpPr txBox="1"/>
+          <p:nvPr/>
+        </p:nvSpPr>
+        <p:spPr>
+          <a:xfrm>
+            <a:off x="1500000" y="300000"/>
+            <a:ext cx="9992000" cy="700000"/>
+          </a:xfrm>
+          <a:prstGeom prst="rect">
+            <a:avLst/>
+          </a:prstGeom>
+          <a:noFill/>
+        </p:spPr>
+        <p:txBody>
+          <a:bodyPr wrap="square" anchor="t">
             <a:spAutoFit/>
           </a:bodyPr>
           <a:lstStyle/>
@@ -5926,27 +8693,27 @@
                 </a:solidFill>
                 <a:latin typeface="微软雅黑"/>
               </a:rPr>
-              <a:t>决策：异常策略</a:t>
-            </a:r>
-          </a:p>
-        </p:txBody>
-      </p:sp>
-      <p:sp>
-        <p:nvSpPr>
-          <p:cNvPr id="5" name="Rectangle 4"/>
+              <a:t>从虚拟设备采数到云端上报（1）</a:t>
+            </a:r>
+          </a:p>
+        </p:txBody>
+      </p:sp>
+      <p:sp>
+        <p:nvSpPr>
+          <p:cNvPr id="7" name="Rectangle 6"/>
           <p:cNvSpPr/>
           <p:nvPr/>
         </p:nvSpPr>
         <p:spPr>
           <a:xfrm>
-            <a:off x="800000" y="2000000"/>
-            <a:ext cx="3400000" cy="700000"/>
+            <a:off x="820000" y="2160000"/>
+            <a:ext cx="120000" cy="120000"/>
           </a:xfrm>
           <a:prstGeom prst="rect">
             <a:avLst/>
           </a:prstGeom>
           <a:solidFill>
-            <a:srgbClr val="010328"/>
+            <a:srgbClr val="F5670F"/>
           </a:solidFill>
           <a:ln>
             <a:noFill/>
@@ -5977,14 +8744,14 @@
       </p:sp>
       <p:sp>
         <p:nvSpPr>
-          <p:cNvPr id="6" name="TextBox 5"/>
+          <p:cNvPr id="8" name="TextBox 7"/>
           <p:cNvSpPr txBox="1"/>
           <p:nvPr/>
         </p:nvSpPr>
         <p:spPr>
           <a:xfrm>
-            <a:off x="800000" y="2120000"/>
-            <a:ext cx="3400000" cy="500000"/>
+            <a:off x="1100000" y="2050000"/>
+            <a:ext cx="10200000" cy="680000"/>
           </a:xfrm>
           <a:prstGeom prst="rect">
             <a:avLst/>
@@ -5997,42 +8764,42 @@
           </a:bodyPr>
           <a:lstStyle/>
           <a:p>
-            <a:pPr algn="ctr">
+            <a:pPr algn="l">
               <a:lnSpc>
-                <a:spcPct val="110000"/>
+                <a:spcPct val="125000"/>
               </a:lnSpc>
               <a:spcAft>
                 <a:spcPts val="600"/>
               </a:spcAft>
             </a:pPr>
             <a:r>
-              <a:rPr sz="1400" b="1">
-                <a:solidFill>
-                  <a:srgbClr val="FFFFFF"/>
-                </a:solidFill>
-                <a:latin typeface="微软雅黑"/>
-              </a:rPr>
-              <a:t>场景</a:t>
-            </a:r>
-          </a:p>
-        </p:txBody>
-      </p:sp>
-      <p:sp>
-        <p:nvSpPr>
-          <p:cNvPr id="7" name="Rectangle 6"/>
+              <a:rPr sz="1500" b="0">
+                <a:solidFill>
+                  <a:srgbClr val="010328"/>
+                </a:solidFill>
+                <a:latin typeface="微软雅黑"/>
+              </a:rPr>
+              <a:t>pymodbus读取虚拟PLC寄存器数据；</a:t>
+            </a:r>
+          </a:p>
+        </p:txBody>
+      </p:sp>
+      <p:sp>
+        <p:nvSpPr>
+          <p:cNvPr id="9" name="Rectangle 8"/>
           <p:cNvSpPr/>
           <p:nvPr/>
         </p:nvSpPr>
         <p:spPr>
           <a:xfrm>
-            <a:off x="4200000" y="2000000"/>
-            <a:ext cx="2400000" cy="700000"/>
+            <a:off x="820000" y="2840000"/>
+            <a:ext cx="120000" cy="120000"/>
           </a:xfrm>
           <a:prstGeom prst="rect">
             <a:avLst/>
           </a:prstGeom>
           <a:solidFill>
-            <a:srgbClr val="010328"/>
+            <a:srgbClr val="F5670F"/>
           </a:solidFill>
           <a:ln>
             <a:noFill/>
@@ -6063,14 +8830,14 @@
       </p:sp>
       <p:sp>
         <p:nvSpPr>
-          <p:cNvPr id="8" name="TextBox 7"/>
+          <p:cNvPr id="10" name="TextBox 9"/>
           <p:cNvSpPr txBox="1"/>
           <p:nvPr/>
         </p:nvSpPr>
         <p:spPr>
           <a:xfrm>
-            <a:off x="4200000" y="2120000"/>
-            <a:ext cx="2400000" cy="500000"/>
+            <a:off x="1100000" y="2730000"/>
+            <a:ext cx="10200000" cy="680000"/>
           </a:xfrm>
           <a:prstGeom prst="rect">
             <a:avLst/>
@@ -6083,47 +8850,45 @@
           </a:bodyPr>
           <a:lstStyle/>
           <a:p>
-            <a:pPr algn="ctr">
+            <a:pPr algn="l">
               <a:lnSpc>
-                <a:spcPct val="110000"/>
+                <a:spcPct val="125000"/>
               </a:lnSpc>
               <a:spcAft>
                 <a:spcPts val="600"/>
               </a:spcAft>
             </a:pPr>
             <a:r>
-              <a:rPr sz="1400" b="1">
-                <a:solidFill>
-                  <a:srgbClr val="FFFFFF"/>
-                </a:solidFill>
-                <a:latin typeface="微软雅黑"/>
-              </a:rPr>
-              <a:t>策略</a:t>
-            </a:r>
-          </a:p>
-        </p:txBody>
-      </p:sp>
-      <p:sp>
-        <p:nvSpPr>
-          <p:cNvPr id="9" name="Rectangle 8"/>
+              <a:rPr sz="1500" b="0">
+                <a:solidFill>
+                  <a:srgbClr val="010328"/>
+                </a:solidFill>
+                <a:latin typeface="微软雅黑"/>
+              </a:rPr>
+              <a:t>paho-mqtt连接Broker、发布/订阅主题；</a:t>
+            </a:r>
+          </a:p>
+        </p:txBody>
+      </p:sp>
+      <p:sp>
+        <p:nvSpPr>
+          <p:cNvPr id="11" name="Rectangle 10"/>
           <p:cNvSpPr/>
           <p:nvPr/>
         </p:nvSpPr>
         <p:spPr>
           <a:xfrm>
-            <a:off x="800000" y="2700000"/>
-            <a:ext cx="3400000" cy="620000"/>
+            <a:off x="820000" y="3520000"/>
+            <a:ext cx="120000" cy="120000"/>
           </a:xfrm>
           <a:prstGeom prst="rect">
             <a:avLst/>
           </a:prstGeom>
           <a:solidFill>
-            <a:srgbClr val="F3F6FD"/>
+            <a:srgbClr val="F5670F"/>
           </a:solidFill>
           <a:ln>
-            <a:solidFill>
-              <a:srgbClr val="C9D4EE"/>
-            </a:solidFill>
+            <a:noFill/>
           </a:ln>
           <a:effectLst/>
         </p:spPr>
@@ -6151,14 +8916,14 @@
       </p:sp>
       <p:sp>
         <p:nvSpPr>
-          <p:cNvPr id="10" name="TextBox 9"/>
+          <p:cNvPr id="12" name="TextBox 11"/>
           <p:cNvSpPr txBox="1"/>
           <p:nvPr/>
         </p:nvSpPr>
         <p:spPr>
           <a:xfrm>
-            <a:off x="800000" y="2800000"/>
-            <a:ext cx="3400000" cy="480000"/>
+            <a:off x="1100000" y="3410000"/>
+            <a:ext cx="10200000" cy="680000"/>
           </a:xfrm>
           <a:prstGeom prst="rect">
             <a:avLst/>
@@ -6171,47 +8936,45 @@
           </a:bodyPr>
           <a:lstStyle/>
           <a:p>
-            <a:pPr algn="ctr">
+            <a:pPr algn="l">
               <a:lnSpc>
-                <a:spcPct val="110000"/>
+                <a:spcPct val="125000"/>
               </a:lnSpc>
               <a:spcAft>
                 <a:spcPts val="600"/>
               </a:spcAft>
             </a:pPr>
             <a:r>
-              <a:rPr sz="1300" b="1">
+              <a:rPr sz="1500" b="0">
                 <a:solidFill>
                   <a:srgbClr val="010328"/>
                 </a:solidFill>
                 <a:latin typeface="微软雅黑"/>
               </a:rPr>
-              <a:t>连接失败</a:t>
-            </a:r>
-          </a:p>
-        </p:txBody>
-      </p:sp>
-      <p:sp>
-        <p:nvSpPr>
-          <p:cNvPr id="11" name="Rectangle 10"/>
+              <a:t>工单项目1.5实操：Modbus定时采集+MQTT上报的完整数据采集系统；</a:t>
+            </a:r>
+          </a:p>
+        </p:txBody>
+      </p:sp>
+      <p:sp>
+        <p:nvSpPr>
+          <p:cNvPr id="13" name="Rectangle 12"/>
           <p:cNvSpPr/>
           <p:nvPr/>
         </p:nvSpPr>
         <p:spPr>
           <a:xfrm>
-            <a:off x="4200000" y="2700000"/>
-            <a:ext cx="2400000" cy="620000"/>
+            <a:off x="820000" y="4200000"/>
+            <a:ext cx="120000" cy="120000"/>
           </a:xfrm>
           <a:prstGeom prst="rect">
             <a:avLst/>
           </a:prstGeom>
           <a:solidFill>
-            <a:srgbClr val="F3F6FD"/>
+            <a:srgbClr val="F5670F"/>
           </a:solidFill>
           <a:ln>
-            <a:solidFill>
-              <a:srgbClr val="C9D4EE"/>
-            </a:solidFill>
+            <a:noFill/>
           </a:ln>
           <a:effectLst/>
         </p:spPr>
@@ -6239,14 +9002,14 @@
       </p:sp>
       <p:sp>
         <p:nvSpPr>
-          <p:cNvPr id="12" name="TextBox 11"/>
+          <p:cNvPr id="14" name="TextBox 13"/>
           <p:cNvSpPr txBox="1"/>
           <p:nvPr/>
         </p:nvSpPr>
         <p:spPr>
           <a:xfrm>
-            <a:off x="4200000" y="2800000"/>
-            <a:ext cx="2400000" cy="480000"/>
+            <a:off x="1100000" y="4090000"/>
+            <a:ext cx="10200000" cy="680000"/>
           </a:xfrm>
           <a:prstGeom prst="rect">
             <a:avLst/>
@@ -6259,47 +9022,45 @@
           </a:bodyPr>
           <a:lstStyle/>
           <a:p>
-            <a:pPr algn="ctr">
+            <a:pPr algn="l">
               <a:lnSpc>
-                <a:spcPct val="110000"/>
+                <a:spcPct val="125000"/>
               </a:lnSpc>
               <a:spcAft>
                 <a:spcPts val="600"/>
               </a:spcAft>
             </a:pPr>
             <a:r>
-              <a:rPr sz="1300" b="0">
+              <a:rPr sz="1500" b="0">
                 <a:solidFill>
                   <a:srgbClr val="010328"/>
                 </a:solidFill>
                 <a:latin typeface="微软雅黑"/>
               </a:rPr>
-              <a:t>重试1次+日志</a:t>
-            </a:r>
-          </a:p>
-        </p:txBody>
-      </p:sp>
-      <p:sp>
-        <p:nvSpPr>
-          <p:cNvPr id="13" name="Rectangle 12"/>
+              <a:t>末期复习：核心知识点串讲与综合项目答疑。</a:t>
+            </a:r>
+          </a:p>
+        </p:txBody>
+      </p:sp>
+      <p:sp>
+        <p:nvSpPr>
+          <p:cNvPr id="15" name="Rectangle 14"/>
           <p:cNvSpPr/>
           <p:nvPr/>
         </p:nvSpPr>
         <p:spPr>
           <a:xfrm>
-            <a:off x="800000" y="3320000"/>
-            <a:ext cx="3400000" cy="620000"/>
+            <a:off x="500000" y="6500000"/>
+            <a:ext cx="11100000" cy="20000"/>
           </a:xfrm>
           <a:prstGeom prst="rect">
             <a:avLst/>
           </a:prstGeom>
           <a:solidFill>
-            <a:srgbClr val="FFFFFF"/>
+            <a:srgbClr val="C9D4EE"/>
           </a:solidFill>
           <a:ln>
-            <a:solidFill>
-              <a:srgbClr val="C9D4EE"/>
-            </a:solidFill>
+            <a:noFill/>
           </a:ln>
           <a:effectLst/>
         </p:spPr>
@@ -6327,144 +9088,14 @@
       </p:sp>
       <p:sp>
         <p:nvSpPr>
-          <p:cNvPr id="14" name="TextBox 13"/>
-          <p:cNvSpPr txBox="1"/>
-          <p:nvPr/>
-        </p:nvSpPr>
-        <p:spPr>
-          <a:xfrm>
-            <a:off x="800000" y="3420000"/>
-            <a:ext cx="3400000" cy="480000"/>
-          </a:xfrm>
-          <a:prstGeom prst="rect">
-            <a:avLst/>
-          </a:prstGeom>
-          <a:noFill/>
-        </p:spPr>
-        <p:txBody>
-          <a:bodyPr wrap="square" anchor="t">
-            <a:spAutoFit/>
-          </a:bodyPr>
-          <a:lstStyle/>
-          <a:p>
-            <a:pPr algn="ctr">
-              <a:lnSpc>
-                <a:spcPct val="110000"/>
-              </a:lnSpc>
-              <a:spcAft>
-                <a:spcPts val="600"/>
-              </a:spcAft>
-            </a:pPr>
-            <a:r>
-              <a:rPr sz="1300" b="1">
-                <a:solidFill>
-                  <a:srgbClr val="010328"/>
-                </a:solidFill>
-                <a:latin typeface="微软雅黑"/>
-              </a:rPr>
-              <a:t>数据越界</a:t>
-            </a:r>
-          </a:p>
-        </p:txBody>
-      </p:sp>
-      <p:sp>
-        <p:nvSpPr>
-          <p:cNvPr id="15" name="Rectangle 14"/>
-          <p:cNvSpPr/>
-          <p:nvPr/>
-        </p:nvSpPr>
-        <p:spPr>
-          <a:xfrm>
-            <a:off x="4200000" y="3320000"/>
-            <a:ext cx="2400000" cy="620000"/>
-          </a:xfrm>
-          <a:prstGeom prst="rect">
-            <a:avLst/>
-          </a:prstGeom>
-          <a:solidFill>
-            <a:srgbClr val="FFFFFF"/>
-          </a:solidFill>
-          <a:ln>
-            <a:solidFill>
-              <a:srgbClr val="C9D4EE"/>
-            </a:solidFill>
-          </a:ln>
-          <a:effectLst/>
-        </p:spPr>
-        <p:style>
-          <a:lnRef idx="1">
-            <a:schemeClr val="accent1"/>
-          </a:lnRef>
-          <a:fillRef idx="3">
-            <a:schemeClr val="accent1"/>
-          </a:fillRef>
-          <a:effectRef idx="2">
-            <a:schemeClr val="accent1"/>
-          </a:effectRef>
-          <a:fontRef idx="minor">
-            <a:schemeClr val="lt1"/>
-          </a:fontRef>
-        </p:style>
-        <p:txBody>
-          <a:bodyPr rtlCol="0" anchor="ctr"/>
-          <a:lstStyle/>
-          <a:p>
-            <a:pPr algn="ctr"/>
-          </a:p>
-        </p:txBody>
-      </p:sp>
-      <p:sp>
-        <p:nvSpPr>
           <p:cNvPr id="16" name="TextBox 15"/>
           <p:cNvSpPr txBox="1"/>
           <p:nvPr/>
         </p:nvSpPr>
         <p:spPr>
           <a:xfrm>
-            <a:off x="4200000" y="3420000"/>
-            <a:ext cx="2400000" cy="480000"/>
-          </a:xfrm>
-          <a:prstGeom prst="rect">
-            <a:avLst/>
-          </a:prstGeom>
-          <a:noFill/>
-        </p:spPr>
-        <p:txBody>
-          <a:bodyPr wrap="square" anchor="t">
-            <a:spAutoFit/>
-          </a:bodyPr>
-          <a:lstStyle/>
-          <a:p>
-            <a:pPr algn="ctr">
-              <a:lnSpc>
-                <a:spcPct val="110000"/>
-              </a:lnSpc>
-              <a:spcAft>
-                <a:spcPts val="600"/>
-              </a:spcAft>
-            </a:pPr>
-            <a:r>
-              <a:rPr sz="1300" b="0">
-                <a:solidFill>
-                  <a:srgbClr val="010328"/>
-                </a:solidFill>
-                <a:latin typeface="微软雅黑"/>
-              </a:rPr>
-              <a:t>标记上报</a:t>
-            </a:r>
-          </a:p>
-        </p:txBody>
-      </p:sp>
-      <p:sp>
-        <p:nvSpPr>
-          <p:cNvPr id="17" name="TextBox 16"/>
-          <p:cNvSpPr txBox="1"/>
-          <p:nvPr/>
-        </p:nvSpPr>
-        <p:spPr>
-          <a:xfrm>
-            <a:off x="800000" y="4060000"/>
-            <a:ext cx="10600000" cy="380000"/>
+            <a:off x="500000" y="6540000"/>
+            <a:ext cx="7000000" cy="300000"/>
           </a:xfrm>
           <a:prstGeom prst="rect">
             <a:avLst/>
@@ -6486,92 +9117,6 @@
               </a:spcAft>
             </a:pPr>
             <a:r>
-              <a:rPr sz="1300" b="1">
-                <a:solidFill>
-                  <a:srgbClr val="F5670F"/>
-                </a:solidFill>
-                <a:latin typeface="微软雅黑"/>
-              </a:rPr>
-              <a:t>决策结论写入工单，答辩必答；实施失误回溯决策复盘</a:t>
-            </a:r>
-          </a:p>
-        </p:txBody>
-      </p:sp>
-      <p:sp>
-        <p:nvSpPr>
-          <p:cNvPr id="18" name="Rectangle 17"/>
-          <p:cNvSpPr/>
-          <p:nvPr/>
-        </p:nvSpPr>
-        <p:spPr>
-          <a:xfrm>
-            <a:off x="500000" y="6500000"/>
-            <a:ext cx="11100000" cy="20000"/>
-          </a:xfrm>
-          <a:prstGeom prst="rect">
-            <a:avLst/>
-          </a:prstGeom>
-          <a:solidFill>
-            <a:srgbClr val="C9D4EE"/>
-          </a:solidFill>
-          <a:ln>
-            <a:noFill/>
-          </a:ln>
-          <a:effectLst/>
-        </p:spPr>
-        <p:style>
-          <a:lnRef idx="1">
-            <a:schemeClr val="accent1"/>
-          </a:lnRef>
-          <a:fillRef idx="3">
-            <a:schemeClr val="accent1"/>
-          </a:fillRef>
-          <a:effectRef idx="2">
-            <a:schemeClr val="accent1"/>
-          </a:effectRef>
-          <a:fontRef idx="minor">
-            <a:schemeClr val="lt1"/>
-          </a:fontRef>
-        </p:style>
-        <p:txBody>
-          <a:bodyPr rtlCol="0" anchor="ctr"/>
-          <a:lstStyle/>
-          <a:p>
-            <a:pPr algn="ctr"/>
-          </a:p>
-        </p:txBody>
-      </p:sp>
-      <p:sp>
-        <p:nvSpPr>
-          <p:cNvPr id="19" name="TextBox 18"/>
-          <p:cNvSpPr txBox="1"/>
-          <p:nvPr/>
-        </p:nvSpPr>
-        <p:spPr>
-          <a:xfrm>
-            <a:off x="500000" y="6540000"/>
-            <a:ext cx="7000000" cy="300000"/>
-          </a:xfrm>
-          <a:prstGeom prst="rect">
-            <a:avLst/>
-          </a:prstGeom>
-          <a:noFill/>
-        </p:spPr>
-        <p:txBody>
-          <a:bodyPr wrap="square" anchor="t">
-            <a:spAutoFit/>
-          </a:bodyPr>
-          <a:lstStyle/>
-          <a:p>
-            <a:pPr algn="l">
-              <a:lnSpc>
-                <a:spcPct val="110000"/>
-              </a:lnSpc>
-              <a:spcAft>
-                <a:spcPts val="600"/>
-              </a:spcAft>
-            </a:pPr>
-            <a:r>
               <a:rPr sz="1000" b="0">
                 <a:solidFill>
                   <a:srgbClr val="8A97B5"/>
@@ -6585,7 +9130,7 @@
       </p:sp>
       <p:sp>
         <p:nvSpPr>
-          <p:cNvPr id="20" name="TextBox 19"/>
+          <p:cNvPr id="17" name="TextBox 16"/>
           <p:cNvSpPr txBox="1"/>
           <p:nvPr/>
         </p:nvSpPr>
@@ -6620,7 +9165,7 @@
                 </a:solidFill>
                 <a:latin typeface="微软雅黑"/>
               </a:rPr>
-              <a:t>4 / 8</a:t>
+              <a:t>4 / 14</a:t>
             </a:r>
           </a:p>
         </p:txBody>
@@ -6748,7 +9293,7 @@
           <a:noFill/>
         </p:spPr>
         <p:txBody>
-          <a:bodyPr wrap="square" anchor="t">
+          <a:bodyPr wrap="square" anchor="ctr">
             <a:spAutoFit/>
           </a:bodyPr>
           <a:lstStyle/>
@@ -6768,7 +9313,7 @@
                 </a:solidFill>
                 <a:latin typeface="微软雅黑"/>
               </a:rPr>
-              <a:t>实施任务：工单1.5《工业互联网数据采集系统》</a:t>
+              <a:t>决策：异常策略</a:t>
             </a:r>
           </a:p>
         </p:txBody>
@@ -6781,14 +9326,14 @@
         </p:nvSpPr>
         <p:spPr>
           <a:xfrm>
-            <a:off x="800000" y="1950000"/>
-            <a:ext cx="6300000" cy="3900000"/>
+            <a:off x="800000" y="2000000"/>
+            <a:ext cx="3400000" cy="700000"/>
           </a:xfrm>
           <a:prstGeom prst="rect">
             <a:avLst/>
           </a:prstGeom>
           <a:solidFill>
-            <a:srgbClr val="F3F6FD"/>
+            <a:srgbClr val="010328"/>
           </a:solidFill>
           <a:ln>
             <a:noFill/>
@@ -6825,8 +9370,8 @@
         </p:nvSpPr>
         <p:spPr>
           <a:xfrm>
-            <a:off x="1000000" y="2100000"/>
-            <a:ext cx="5900000" cy="3600000"/>
+            <a:off x="800000" y="2120000"/>
+            <a:ext cx="3400000" cy="500000"/>
           </a:xfrm>
           <a:prstGeom prst="rect">
             <a:avLst/>
@@ -6839,103 +9384,308 @@
           </a:bodyPr>
           <a:lstStyle/>
           <a:p>
-            <a:pPr algn="l">
+            <a:pPr algn="ctr">
               <a:lnSpc>
-                <a:spcPct val="130000"/>
+                <a:spcPct val="110000"/>
               </a:lnSpc>
               <a:spcAft>
                 <a:spcPts val="600"/>
               </a:spcAft>
             </a:pPr>
             <a:r>
-              <a:rPr sz="1500" b="1">
-                <a:solidFill>
-                  <a:srgbClr val="0545E8"/>
-                </a:solidFill>
-                <a:latin typeface="微软雅黑"/>
-              </a:rPr>
-              <a:t>实施步骤</a:t>
-            </a:r>
-          </a:p>
-          <a:p>
-            <a:pPr algn="l">
+              <a:rPr sz="1400" b="1">
+                <a:solidFill>
+                  <a:srgbClr val="FFFFFF"/>
+                </a:solidFill>
+                <a:latin typeface="微软雅黑"/>
+              </a:rPr>
+              <a:t>场景</a:t>
+            </a:r>
+          </a:p>
+        </p:txBody>
+      </p:sp>
+      <p:sp>
+        <p:nvSpPr>
+          <p:cNvPr id="7" name="Rectangle 6"/>
+          <p:cNvSpPr/>
+          <p:nvPr/>
+        </p:nvSpPr>
+        <p:spPr>
+          <a:xfrm>
+            <a:off x="4200000" y="2000000"/>
+            <a:ext cx="2400000" cy="700000"/>
+          </a:xfrm>
+          <a:prstGeom prst="rect">
+            <a:avLst/>
+          </a:prstGeom>
+          <a:solidFill>
+            <a:srgbClr val="010328"/>
+          </a:solidFill>
+          <a:ln>
+            <a:noFill/>
+          </a:ln>
+          <a:effectLst/>
+        </p:spPr>
+        <p:style>
+          <a:lnRef idx="1">
+            <a:schemeClr val="accent1"/>
+          </a:lnRef>
+          <a:fillRef idx="3">
+            <a:schemeClr val="accent1"/>
+          </a:fillRef>
+          <a:effectRef idx="2">
+            <a:schemeClr val="accent1"/>
+          </a:effectRef>
+          <a:fontRef idx="minor">
+            <a:schemeClr val="lt1"/>
+          </a:fontRef>
+        </p:style>
+        <p:txBody>
+          <a:bodyPr rtlCol="0" anchor="ctr"/>
+          <a:lstStyle/>
+          <a:p>
+            <a:pPr algn="ctr"/>
+          </a:p>
+        </p:txBody>
+      </p:sp>
+      <p:sp>
+        <p:nvSpPr>
+          <p:cNvPr id="8" name="TextBox 7"/>
+          <p:cNvSpPr txBox="1"/>
+          <p:nvPr/>
+        </p:nvSpPr>
+        <p:spPr>
+          <a:xfrm>
+            <a:off x="4200000" y="2120000"/>
+            <a:ext cx="2400000" cy="500000"/>
+          </a:xfrm>
+          <a:prstGeom prst="rect">
+            <a:avLst/>
+          </a:prstGeom>
+          <a:noFill/>
+        </p:spPr>
+        <p:txBody>
+          <a:bodyPr wrap="square" anchor="t">
+            <a:spAutoFit/>
+          </a:bodyPr>
+          <a:lstStyle/>
+          <a:p>
+            <a:pPr algn="ctr">
               <a:lnSpc>
-                <a:spcPct val="130000"/>
+                <a:spcPct val="110000"/>
               </a:lnSpc>
               <a:spcAft>
                 <a:spcPts val="600"/>
               </a:spcAft>
             </a:pPr>
             <a:r>
-              <a:rPr sz="1400" b="0">
-                <a:solidFill>
-                  <a:srgbClr val="010328"/>
-                </a:solidFill>
-                <a:latin typeface="微软雅黑"/>
-              </a:rPr>
-              <a:t>1. paho-mqtt连接本地代理发布</a:t>
-            </a:r>
-          </a:p>
-          <a:p>
-            <a:pPr algn="l">
+              <a:rPr sz="1400" b="1">
+                <a:solidFill>
+                  <a:srgbClr val="FFFFFF"/>
+                </a:solidFill>
+                <a:latin typeface="微软雅黑"/>
+              </a:rPr>
+              <a:t>策略</a:t>
+            </a:r>
+          </a:p>
+        </p:txBody>
+      </p:sp>
+      <p:sp>
+        <p:nvSpPr>
+          <p:cNvPr id="9" name="Rectangle 8"/>
+          <p:cNvSpPr/>
+          <p:nvPr/>
+        </p:nvSpPr>
+        <p:spPr>
+          <a:xfrm>
+            <a:off x="800000" y="2700000"/>
+            <a:ext cx="3400000" cy="620000"/>
+          </a:xfrm>
+          <a:prstGeom prst="rect">
+            <a:avLst/>
+          </a:prstGeom>
+          <a:solidFill>
+            <a:srgbClr val="F3F6FD"/>
+          </a:solidFill>
+          <a:ln>
+            <a:solidFill>
+              <a:srgbClr val="C9D4EE"/>
+            </a:solidFill>
+          </a:ln>
+          <a:effectLst/>
+        </p:spPr>
+        <p:style>
+          <a:lnRef idx="1">
+            <a:schemeClr val="accent1"/>
+          </a:lnRef>
+          <a:fillRef idx="3">
+            <a:schemeClr val="accent1"/>
+          </a:fillRef>
+          <a:effectRef idx="2">
+            <a:schemeClr val="accent1"/>
+          </a:effectRef>
+          <a:fontRef idx="minor">
+            <a:schemeClr val="lt1"/>
+          </a:fontRef>
+        </p:style>
+        <p:txBody>
+          <a:bodyPr rtlCol="0" anchor="ctr"/>
+          <a:lstStyle/>
+          <a:p>
+            <a:pPr algn="ctr"/>
+          </a:p>
+        </p:txBody>
+      </p:sp>
+      <p:sp>
+        <p:nvSpPr>
+          <p:cNvPr id="10" name="TextBox 9"/>
+          <p:cNvSpPr txBox="1"/>
+          <p:nvPr/>
+        </p:nvSpPr>
+        <p:spPr>
+          <a:xfrm>
+            <a:off x="800000" y="2800000"/>
+            <a:ext cx="3400000" cy="480000"/>
+          </a:xfrm>
+          <a:prstGeom prst="rect">
+            <a:avLst/>
+          </a:prstGeom>
+          <a:noFill/>
+        </p:spPr>
+        <p:txBody>
+          <a:bodyPr wrap="square" anchor="t">
+            <a:spAutoFit/>
+          </a:bodyPr>
+          <a:lstStyle/>
+          <a:p>
+            <a:pPr algn="ctr">
               <a:lnSpc>
-                <a:spcPct val="130000"/>
+                <a:spcPct val="110000"/>
               </a:lnSpc>
               <a:spcAft>
                 <a:spcPts val="600"/>
               </a:spcAft>
             </a:pPr>
             <a:r>
-              <a:rPr sz="1400" b="0">
+              <a:rPr sz="1300" b="1">
                 <a:solidFill>
                   <a:srgbClr val="010328"/>
                 </a:solidFill>
                 <a:latin typeface="微软雅黑"/>
               </a:rPr>
-              <a:t>2. 断线重试+异常日志</a:t>
-            </a:r>
-          </a:p>
-          <a:p>
-            <a:pPr algn="l">
+              <a:t>连接失败</a:t>
+            </a:r>
+          </a:p>
+        </p:txBody>
+      </p:sp>
+      <p:sp>
+        <p:nvSpPr>
+          <p:cNvPr id="11" name="Rectangle 10"/>
+          <p:cNvSpPr/>
+          <p:nvPr/>
+        </p:nvSpPr>
+        <p:spPr>
+          <a:xfrm>
+            <a:off x="4200000" y="2700000"/>
+            <a:ext cx="2400000" cy="620000"/>
+          </a:xfrm>
+          <a:prstGeom prst="rect">
+            <a:avLst/>
+          </a:prstGeom>
+          <a:solidFill>
+            <a:srgbClr val="F3F6FD"/>
+          </a:solidFill>
+          <a:ln>
+            <a:solidFill>
+              <a:srgbClr val="C9D4EE"/>
+            </a:solidFill>
+          </a:ln>
+          <a:effectLst/>
+        </p:spPr>
+        <p:style>
+          <a:lnRef idx="1">
+            <a:schemeClr val="accent1"/>
+          </a:lnRef>
+          <a:fillRef idx="3">
+            <a:schemeClr val="accent1"/>
+          </a:fillRef>
+          <a:effectRef idx="2">
+            <a:schemeClr val="accent1"/>
+          </a:effectRef>
+          <a:fontRef idx="minor">
+            <a:schemeClr val="lt1"/>
+          </a:fontRef>
+        </p:style>
+        <p:txBody>
+          <a:bodyPr rtlCol="0" anchor="ctr"/>
+          <a:lstStyle/>
+          <a:p>
+            <a:pPr algn="ctr"/>
+          </a:p>
+        </p:txBody>
+      </p:sp>
+      <p:sp>
+        <p:nvSpPr>
+          <p:cNvPr id="12" name="TextBox 11"/>
+          <p:cNvSpPr txBox="1"/>
+          <p:nvPr/>
+        </p:nvSpPr>
+        <p:spPr>
+          <a:xfrm>
+            <a:off x="4200000" y="2800000"/>
+            <a:ext cx="2400000" cy="480000"/>
+          </a:xfrm>
+          <a:prstGeom prst="rect">
+            <a:avLst/>
+          </a:prstGeom>
+          <a:noFill/>
+        </p:spPr>
+        <p:txBody>
+          <a:bodyPr wrap="square" anchor="t">
+            <a:spAutoFit/>
+          </a:bodyPr>
+          <a:lstStyle/>
+          <a:p>
+            <a:pPr algn="ctr">
               <a:lnSpc>
-                <a:spcPct val="130000"/>
+                <a:spcPct val="110000"/>
               </a:lnSpc>
               <a:spcAft>
                 <a:spcPts val="600"/>
               </a:spcAft>
             </a:pPr>
             <a:r>
-              <a:rPr sz="1400" b="0">
+              <a:rPr sz="1300" b="0">
                 <a:solidFill>
                   <a:srgbClr val="010328"/>
                 </a:solidFill>
                 <a:latin typeface="微软雅黑"/>
               </a:rPr>
-              <a:t>3. 末期复习自测20题+综合项目选题</a:t>
-            </a:r>
-          </a:p>
-        </p:txBody>
-      </p:sp>
-      <p:sp>
-        <p:nvSpPr>
-          <p:cNvPr id="7" name="Rectangle 6"/>
+              <a:t>重试1次+日志</a:t>
+            </a:r>
+          </a:p>
+        </p:txBody>
+      </p:sp>
+      <p:sp>
+        <p:nvSpPr>
+          <p:cNvPr id="13" name="Rectangle 12"/>
           <p:cNvSpPr/>
           <p:nvPr/>
         </p:nvSpPr>
         <p:spPr>
           <a:xfrm>
-            <a:off x="7400000" y="1950000"/>
-            <a:ext cx="4000000" cy="1850000"/>
+            <a:off x="800000" y="3320000"/>
+            <a:ext cx="3400000" cy="620000"/>
           </a:xfrm>
           <a:prstGeom prst="rect">
             <a:avLst/>
           </a:prstGeom>
           <a:solidFill>
-            <a:srgbClr val="E8F1E8"/>
+            <a:srgbClr val="FFFFFF"/>
           </a:solidFill>
           <a:ln>
             <a:solidFill>
-              <a:srgbClr val="0475B6"/>
+              <a:srgbClr val="C9D4EE"/>
             </a:solidFill>
           </a:ln>
           <a:effectLst/>
@@ -6964,14 +9714,144 @@
       </p:sp>
       <p:sp>
         <p:nvSpPr>
-          <p:cNvPr id="8" name="TextBox 7"/>
+          <p:cNvPr id="14" name="TextBox 13"/>
           <p:cNvSpPr txBox="1"/>
           <p:nvPr/>
         </p:nvSpPr>
         <p:spPr>
           <a:xfrm>
-            <a:off x="7550000" y="2080000"/>
-            <a:ext cx="3750000" cy="1650000"/>
+            <a:off x="800000" y="3420000"/>
+            <a:ext cx="3400000" cy="480000"/>
+          </a:xfrm>
+          <a:prstGeom prst="rect">
+            <a:avLst/>
+          </a:prstGeom>
+          <a:noFill/>
+        </p:spPr>
+        <p:txBody>
+          <a:bodyPr wrap="square" anchor="t">
+            <a:spAutoFit/>
+          </a:bodyPr>
+          <a:lstStyle/>
+          <a:p>
+            <a:pPr algn="ctr">
+              <a:lnSpc>
+                <a:spcPct val="110000"/>
+              </a:lnSpc>
+              <a:spcAft>
+                <a:spcPts val="600"/>
+              </a:spcAft>
+            </a:pPr>
+            <a:r>
+              <a:rPr sz="1300" b="1">
+                <a:solidFill>
+                  <a:srgbClr val="010328"/>
+                </a:solidFill>
+                <a:latin typeface="微软雅黑"/>
+              </a:rPr>
+              <a:t>数据越界</a:t>
+            </a:r>
+          </a:p>
+        </p:txBody>
+      </p:sp>
+      <p:sp>
+        <p:nvSpPr>
+          <p:cNvPr id="15" name="Rectangle 14"/>
+          <p:cNvSpPr/>
+          <p:nvPr/>
+        </p:nvSpPr>
+        <p:spPr>
+          <a:xfrm>
+            <a:off x="4200000" y="3320000"/>
+            <a:ext cx="2400000" cy="620000"/>
+          </a:xfrm>
+          <a:prstGeom prst="rect">
+            <a:avLst/>
+          </a:prstGeom>
+          <a:solidFill>
+            <a:srgbClr val="FFFFFF"/>
+          </a:solidFill>
+          <a:ln>
+            <a:solidFill>
+              <a:srgbClr val="C9D4EE"/>
+            </a:solidFill>
+          </a:ln>
+          <a:effectLst/>
+        </p:spPr>
+        <p:style>
+          <a:lnRef idx="1">
+            <a:schemeClr val="accent1"/>
+          </a:lnRef>
+          <a:fillRef idx="3">
+            <a:schemeClr val="accent1"/>
+          </a:fillRef>
+          <a:effectRef idx="2">
+            <a:schemeClr val="accent1"/>
+          </a:effectRef>
+          <a:fontRef idx="minor">
+            <a:schemeClr val="lt1"/>
+          </a:fontRef>
+        </p:style>
+        <p:txBody>
+          <a:bodyPr rtlCol="0" anchor="ctr"/>
+          <a:lstStyle/>
+          <a:p>
+            <a:pPr algn="ctr"/>
+          </a:p>
+        </p:txBody>
+      </p:sp>
+      <p:sp>
+        <p:nvSpPr>
+          <p:cNvPr id="16" name="TextBox 15"/>
+          <p:cNvSpPr txBox="1"/>
+          <p:nvPr/>
+        </p:nvSpPr>
+        <p:spPr>
+          <a:xfrm>
+            <a:off x="4200000" y="3420000"/>
+            <a:ext cx="2400000" cy="480000"/>
+          </a:xfrm>
+          <a:prstGeom prst="rect">
+            <a:avLst/>
+          </a:prstGeom>
+          <a:noFill/>
+        </p:spPr>
+        <p:txBody>
+          <a:bodyPr wrap="square" anchor="t">
+            <a:spAutoFit/>
+          </a:bodyPr>
+          <a:lstStyle/>
+          <a:p>
+            <a:pPr algn="ctr">
+              <a:lnSpc>
+                <a:spcPct val="110000"/>
+              </a:lnSpc>
+              <a:spcAft>
+                <a:spcPts val="600"/>
+              </a:spcAft>
+            </a:pPr>
+            <a:r>
+              <a:rPr sz="1300" b="0">
+                <a:solidFill>
+                  <a:srgbClr val="010328"/>
+                </a:solidFill>
+                <a:latin typeface="微软雅黑"/>
+              </a:rPr>
+              <a:t>标记上报</a:t>
+            </a:r>
+          </a:p>
+        </p:txBody>
+      </p:sp>
+      <p:sp>
+        <p:nvSpPr>
+          <p:cNvPr id="17" name="TextBox 16"/>
+          <p:cNvSpPr txBox="1"/>
+          <p:nvPr/>
+        </p:nvSpPr>
+        <p:spPr>
+          <a:xfrm>
+            <a:off x="800000" y="4060000"/>
+            <a:ext cx="10600000" cy="380000"/>
           </a:xfrm>
           <a:prstGeom prst="rect">
             <a:avLst/>
@@ -6993,15 +9873,82 @@
               </a:spcAft>
             </a:pPr>
             <a:r>
-              <a:rPr sz="1400" b="1">
-                <a:solidFill>
-                  <a:srgbClr val="0475B6"/>
-                </a:solidFill>
-                <a:latin typeface="微软雅黑"/>
-              </a:rPr>
-              <a:t>及格标准（D）</a:t>
-            </a:r>
-          </a:p>
+              <a:rPr sz="1300" b="1">
+                <a:solidFill>
+                  <a:srgbClr val="F5670F"/>
+                </a:solidFill>
+                <a:latin typeface="微软雅黑"/>
+              </a:rPr>
+              <a:t>决策结论写入工单，答辩必答；实施失误回溯决策复盘</a:t>
+            </a:r>
+          </a:p>
+        </p:txBody>
+      </p:sp>
+      <p:sp>
+        <p:nvSpPr>
+          <p:cNvPr id="18" name="Rectangle 17"/>
+          <p:cNvSpPr/>
+          <p:nvPr/>
+        </p:nvSpPr>
+        <p:spPr>
+          <a:xfrm>
+            <a:off x="500000" y="6500000"/>
+            <a:ext cx="11100000" cy="20000"/>
+          </a:xfrm>
+          <a:prstGeom prst="rect">
+            <a:avLst/>
+          </a:prstGeom>
+          <a:solidFill>
+            <a:srgbClr val="C9D4EE"/>
+          </a:solidFill>
+          <a:ln>
+            <a:noFill/>
+          </a:ln>
+          <a:effectLst/>
+        </p:spPr>
+        <p:style>
+          <a:lnRef idx="1">
+            <a:schemeClr val="accent1"/>
+          </a:lnRef>
+          <a:fillRef idx="3">
+            <a:schemeClr val="accent1"/>
+          </a:fillRef>
+          <a:effectRef idx="2">
+            <a:schemeClr val="accent1"/>
+          </a:effectRef>
+          <a:fontRef idx="minor">
+            <a:schemeClr val="lt1"/>
+          </a:fontRef>
+        </p:style>
+        <p:txBody>
+          <a:bodyPr rtlCol="0" anchor="ctr"/>
+          <a:lstStyle/>
+          <a:p>
+            <a:pPr algn="ctr"/>
+          </a:p>
+        </p:txBody>
+      </p:sp>
+      <p:sp>
+        <p:nvSpPr>
+          <p:cNvPr id="19" name="TextBox 18"/>
+          <p:cNvSpPr txBox="1"/>
+          <p:nvPr/>
+        </p:nvSpPr>
+        <p:spPr>
+          <a:xfrm>
+            <a:off x="500000" y="6540000"/>
+            <a:ext cx="7000000" cy="300000"/>
+          </a:xfrm>
+          <a:prstGeom prst="rect">
+            <a:avLst/>
+          </a:prstGeom>
+          <a:noFill/>
+        </p:spPr>
+        <p:txBody>
+          <a:bodyPr wrap="square" anchor="t">
+            <a:spAutoFit/>
+          </a:bodyPr>
+          <a:lstStyle/>
           <a:p>
             <a:pPr algn="l">
               <a:lnSpc>
@@ -7012,199 +9959,6 @@
               </a:spcAft>
             </a:pPr>
             <a:r>
-              <a:rPr sz="1300" b="0">
-                <a:solidFill>
-                  <a:srgbClr val="010328"/>
-                </a:solidFill>
-                <a:latin typeface="微软雅黑"/>
-              </a:rPr>
-              <a:t>Modbus读+MQTT发布成功</a:t>
-            </a:r>
-          </a:p>
-        </p:txBody>
-      </p:sp>
-      <p:sp>
-        <p:nvSpPr>
-          <p:cNvPr id="9" name="Rectangle 8"/>
-          <p:cNvSpPr/>
-          <p:nvPr/>
-        </p:nvSpPr>
-        <p:spPr>
-          <a:xfrm>
-            <a:off x="7400000" y="3950000"/>
-            <a:ext cx="4000000" cy="1850000"/>
-          </a:xfrm>
-          <a:prstGeom prst="rect">
-            <a:avLst/>
-          </a:prstGeom>
-          <a:solidFill>
-            <a:srgbClr val="FDF0E6"/>
-          </a:solidFill>
-          <a:ln>
-            <a:solidFill>
-              <a:srgbClr val="F5670F"/>
-            </a:solidFill>
-          </a:ln>
-          <a:effectLst/>
-        </p:spPr>
-        <p:style>
-          <a:lnRef idx="1">
-            <a:schemeClr val="accent1"/>
-          </a:lnRef>
-          <a:fillRef idx="3">
-            <a:schemeClr val="accent1"/>
-          </a:fillRef>
-          <a:effectRef idx="2">
-            <a:schemeClr val="accent1"/>
-          </a:effectRef>
-          <a:fontRef idx="minor">
-            <a:schemeClr val="lt1"/>
-          </a:fontRef>
-        </p:style>
-        <p:txBody>
-          <a:bodyPr rtlCol="0" anchor="ctr"/>
-          <a:lstStyle/>
-          <a:p>
-            <a:pPr algn="ctr"/>
-          </a:p>
-        </p:txBody>
-      </p:sp>
-      <p:sp>
-        <p:nvSpPr>
-          <p:cNvPr id="10" name="TextBox 9"/>
-          <p:cNvSpPr txBox="1"/>
-          <p:nvPr/>
-        </p:nvSpPr>
-        <p:spPr>
-          <a:xfrm>
-            <a:off x="7550000" y="4080000"/>
-            <a:ext cx="3750000" cy="1650000"/>
-          </a:xfrm>
-          <a:prstGeom prst="rect">
-            <a:avLst/>
-          </a:prstGeom>
-          <a:noFill/>
-        </p:spPr>
-        <p:txBody>
-          <a:bodyPr wrap="square" anchor="t">
-            <a:spAutoFit/>
-          </a:bodyPr>
-          <a:lstStyle/>
-          <a:p>
-            <a:pPr algn="l">
-              <a:lnSpc>
-                <a:spcPct val="110000"/>
-              </a:lnSpc>
-              <a:spcAft>
-                <a:spcPts val="600"/>
-              </a:spcAft>
-            </a:pPr>
-            <a:r>
-              <a:rPr sz="1400" b="1">
-                <a:solidFill>
-                  <a:srgbClr val="F5670F"/>
-                </a:solidFill>
-                <a:latin typeface="微软雅黑"/>
-              </a:rPr>
-              <a:t>优秀标准（B+）</a:t>
-            </a:r>
-          </a:p>
-          <a:p>
-            <a:pPr algn="l">
-              <a:lnSpc>
-                <a:spcPct val="110000"/>
-              </a:lnSpc>
-              <a:spcAft>
-                <a:spcPts val="600"/>
-              </a:spcAft>
-            </a:pPr>
-            <a:r>
-              <a:rPr sz="1300" b="0">
-                <a:solidFill>
-                  <a:srgbClr val="010328"/>
-                </a:solidFill>
-                <a:latin typeface="微软雅黑"/>
-              </a:rPr>
-              <a:t>断线重连+回环验证+规范率≥90%</a:t>
-            </a:r>
-          </a:p>
-        </p:txBody>
-      </p:sp>
-      <p:sp>
-        <p:nvSpPr>
-          <p:cNvPr id="11" name="Rectangle 10"/>
-          <p:cNvSpPr/>
-          <p:nvPr/>
-        </p:nvSpPr>
-        <p:spPr>
-          <a:xfrm>
-            <a:off x="500000" y="6500000"/>
-            <a:ext cx="11100000" cy="20000"/>
-          </a:xfrm>
-          <a:prstGeom prst="rect">
-            <a:avLst/>
-          </a:prstGeom>
-          <a:solidFill>
-            <a:srgbClr val="C9D4EE"/>
-          </a:solidFill>
-          <a:ln>
-            <a:noFill/>
-          </a:ln>
-          <a:effectLst/>
-        </p:spPr>
-        <p:style>
-          <a:lnRef idx="1">
-            <a:schemeClr val="accent1"/>
-          </a:lnRef>
-          <a:fillRef idx="3">
-            <a:schemeClr val="accent1"/>
-          </a:fillRef>
-          <a:effectRef idx="2">
-            <a:schemeClr val="accent1"/>
-          </a:effectRef>
-          <a:fontRef idx="minor">
-            <a:schemeClr val="lt1"/>
-          </a:fontRef>
-        </p:style>
-        <p:txBody>
-          <a:bodyPr rtlCol="0" anchor="ctr"/>
-          <a:lstStyle/>
-          <a:p>
-            <a:pPr algn="ctr"/>
-          </a:p>
-        </p:txBody>
-      </p:sp>
-      <p:sp>
-        <p:nvSpPr>
-          <p:cNvPr id="12" name="TextBox 11"/>
-          <p:cNvSpPr txBox="1"/>
-          <p:nvPr/>
-        </p:nvSpPr>
-        <p:spPr>
-          <a:xfrm>
-            <a:off x="500000" y="6540000"/>
-            <a:ext cx="7000000" cy="300000"/>
-          </a:xfrm>
-          <a:prstGeom prst="rect">
-            <a:avLst/>
-          </a:prstGeom>
-          <a:noFill/>
-        </p:spPr>
-        <p:txBody>
-          <a:bodyPr wrap="square" anchor="t">
-            <a:spAutoFit/>
-          </a:bodyPr>
-          <a:lstStyle/>
-          <a:p>
-            <a:pPr algn="l">
-              <a:lnSpc>
-                <a:spcPct val="110000"/>
-              </a:lnSpc>
-              <a:spcAft>
-                <a:spcPts val="600"/>
-              </a:spcAft>
-            </a:pPr>
-            <a:r>
               <a:rPr sz="1000" b="0">
                 <a:solidFill>
                   <a:srgbClr val="8A97B5"/>
@@ -7218,7 +9972,7 @@
       </p:sp>
       <p:sp>
         <p:nvSpPr>
-          <p:cNvPr id="13" name="TextBox 12"/>
+          <p:cNvPr id="20" name="TextBox 19"/>
           <p:cNvSpPr txBox="1"/>
           <p:nvPr/>
         </p:nvSpPr>
@@ -7253,7 +10007,7 @@
                 </a:solidFill>
                 <a:latin typeface="微软雅黑"/>
               </a:rPr>
-              <a:t>5 / 8</a:t>
+              <a:t>5 / 14</a:t>
             </a:r>
           </a:p>
         </p:txBody>
@@ -7401,7 +10155,7 @@
                 </a:solidFill>
                 <a:latin typeface="微软雅黑"/>
               </a:rPr>
-              <a:t>总结评价与课后任务</a:t>
+              <a:t>实施任务：工单1.5《工业互联网数据采集系统》</a:t>
             </a:r>
           </a:p>
         </p:txBody>
@@ -7415,7 +10169,7 @@
         <p:spPr>
           <a:xfrm>
             <a:off x="800000" y="1950000"/>
-            <a:ext cx="10600000" cy="1500000"/>
+            <a:ext cx="6300000" cy="3900000"/>
           </a:xfrm>
           <a:prstGeom prst="rect">
             <a:avLst/>
@@ -7458,8 +10212,153 @@
         </p:nvSpPr>
         <p:spPr>
           <a:xfrm>
-            <a:off x="1000000" y="2050000"/>
-            <a:ext cx="10300000" cy="1400000"/>
+            <a:off x="1000000" y="2100000"/>
+            <a:ext cx="5900000" cy="3600000"/>
+          </a:xfrm>
+          <a:prstGeom prst="rect">
+            <a:avLst/>
+          </a:prstGeom>
+          <a:noFill/>
+        </p:spPr>
+        <p:txBody>
+          <a:bodyPr wrap="square" anchor="t">
+            <a:spAutoFit/>
+          </a:bodyPr>
+          <a:lstStyle/>
+          <a:p>
+            <a:pPr algn="l">
+              <a:lnSpc>
+                <a:spcPct val="130000"/>
+              </a:lnSpc>
+              <a:spcAft>
+                <a:spcPts val="600"/>
+              </a:spcAft>
+            </a:pPr>
+            <a:r>
+              <a:rPr sz="1500" b="1">
+                <a:solidFill>
+                  <a:srgbClr val="0545E8"/>
+                </a:solidFill>
+                <a:latin typeface="微软雅黑"/>
+              </a:rPr>
+              <a:t>实施步骤</a:t>
+            </a:r>
+          </a:p>
+          <a:p>
+            <a:pPr algn="l">
+              <a:lnSpc>
+                <a:spcPct val="130000"/>
+              </a:lnSpc>
+              <a:spcAft>
+                <a:spcPts val="600"/>
+              </a:spcAft>
+            </a:pPr>
+            <a:r>
+              <a:rPr sz="1400" b="0">
+                <a:solidFill>
+                  <a:srgbClr val="010328"/>
+                </a:solidFill>
+                <a:latin typeface="微软雅黑"/>
+              </a:rPr>
+              <a:t>1. paho-mqtt连接本地代理发布</a:t>
+            </a:r>
+          </a:p>
+          <a:p>
+            <a:pPr algn="l">
+              <a:lnSpc>
+                <a:spcPct val="130000"/>
+              </a:lnSpc>
+              <a:spcAft>
+                <a:spcPts val="600"/>
+              </a:spcAft>
+            </a:pPr>
+            <a:r>
+              <a:rPr sz="1400" b="0">
+                <a:solidFill>
+                  <a:srgbClr val="010328"/>
+                </a:solidFill>
+                <a:latin typeface="微软雅黑"/>
+              </a:rPr>
+              <a:t>2. 断线重试+异常日志</a:t>
+            </a:r>
+          </a:p>
+          <a:p>
+            <a:pPr algn="l">
+              <a:lnSpc>
+                <a:spcPct val="130000"/>
+              </a:lnSpc>
+              <a:spcAft>
+                <a:spcPts val="600"/>
+              </a:spcAft>
+            </a:pPr>
+            <a:r>
+              <a:rPr sz="1400" b="0">
+                <a:solidFill>
+                  <a:srgbClr val="010328"/>
+                </a:solidFill>
+                <a:latin typeface="微软雅黑"/>
+              </a:rPr>
+              <a:t>3. 末期复习自测20题+综合项目选题</a:t>
+            </a:r>
+          </a:p>
+        </p:txBody>
+      </p:sp>
+      <p:sp>
+        <p:nvSpPr>
+          <p:cNvPr id="7" name="Rectangle 6"/>
+          <p:cNvSpPr/>
+          <p:nvPr/>
+        </p:nvSpPr>
+        <p:spPr>
+          <a:xfrm>
+            <a:off x="7400000" y="1950000"/>
+            <a:ext cx="4000000" cy="1850000"/>
+          </a:xfrm>
+          <a:prstGeom prst="rect">
+            <a:avLst/>
+          </a:prstGeom>
+          <a:solidFill>
+            <a:srgbClr val="E8F1E8"/>
+          </a:solidFill>
+          <a:ln>
+            <a:solidFill>
+              <a:srgbClr val="0475B6"/>
+            </a:solidFill>
+          </a:ln>
+          <a:effectLst/>
+        </p:spPr>
+        <p:style>
+          <a:lnRef idx="1">
+            <a:schemeClr val="accent1"/>
+          </a:lnRef>
+          <a:fillRef idx="3">
+            <a:schemeClr val="accent1"/>
+          </a:fillRef>
+          <a:effectRef idx="2">
+            <a:schemeClr val="accent1"/>
+          </a:effectRef>
+          <a:fontRef idx="minor">
+            <a:schemeClr val="lt1"/>
+          </a:fontRef>
+        </p:style>
+        <p:txBody>
+          <a:bodyPr rtlCol="0" anchor="ctr"/>
+          <a:lstStyle/>
+          <a:p>
+            <a:pPr algn="ctr"/>
+          </a:p>
+        </p:txBody>
+      </p:sp>
+      <p:sp>
+        <p:nvSpPr>
+          <p:cNvPr id="8" name="TextBox 7"/>
+          <p:cNvSpPr txBox="1"/>
+          <p:nvPr/>
+        </p:nvSpPr>
+        <p:spPr>
+          <a:xfrm>
+            <a:off x="7550000" y="2080000"/>
+            <a:ext cx="3750000" cy="1650000"/>
           </a:xfrm>
           <a:prstGeom prst="rect">
             <a:avLst/>
@@ -7481,13 +10380,13 @@
               </a:spcAft>
             </a:pPr>
             <a:r>
-              <a:rPr sz="1500" b="1">
-                <a:solidFill>
-                  <a:srgbClr val="0545E8"/>
-                </a:solidFill>
-                <a:latin typeface="微软雅黑"/>
-              </a:rPr>
-              <a:t>评价（10分钟）：</a:t>
+              <a:rPr sz="1400" b="1">
+                <a:solidFill>
+                  <a:srgbClr val="0475B6"/>
+                </a:solidFill>
+                <a:latin typeface="微软雅黑"/>
+              </a:rPr>
+              <a:t>及格标准（D）</a:t>
             </a:r>
           </a:p>
           <a:p>
@@ -7500,167 +10399,60 @@
               </a:spcAft>
             </a:pPr>
             <a:r>
-              <a:rPr sz="1400" b="0">
+              <a:rPr sz="1300" b="0">
                 <a:solidFill>
                   <a:srgbClr val="010328"/>
                 </a:solidFill>
                 <a:latin typeface="微软雅黑"/>
               </a:rPr>
-              <a:t>按D/C/B/A量表当堂评分；工单24小时内反馈评语与改进建议。</a:t>
-            </a:r>
-          </a:p>
-        </p:txBody>
-      </p:sp>
-      <p:sp>
-        <p:nvSpPr>
-          <p:cNvPr id="7" name="TextBox 6"/>
-          <p:cNvSpPr txBox="1"/>
-          <p:nvPr/>
-        </p:nvSpPr>
-        <p:spPr>
-          <a:xfrm>
-            <a:off x="850000" y="3700000"/>
-            <a:ext cx="10600000" cy="700000"/>
-          </a:xfrm>
-          <a:prstGeom prst="rect">
-            <a:avLst/>
-          </a:prstGeom>
-          <a:noFill/>
-        </p:spPr>
-        <p:txBody>
-          <a:bodyPr wrap="square" anchor="t">
-            <a:spAutoFit/>
-          </a:bodyPr>
-          <a:lstStyle/>
-          <a:p>
-            <a:pPr algn="l">
-              <a:lnSpc>
-                <a:spcPct val="120000"/>
-              </a:lnSpc>
-              <a:spcAft>
-                <a:spcPts val="600"/>
-              </a:spcAft>
-            </a:pPr>
-            <a:r>
-              <a:rPr sz="1400" b="1">
-                <a:solidFill>
-                  <a:srgbClr val="F5670F"/>
-                </a:solidFill>
-                <a:latin typeface="微软雅黑"/>
-              </a:rPr>
-              <a:t>1. </a:t>
-            </a:r>
-            <a:r>
-              <a:rPr sz="1400" b="0">
-                <a:solidFill>
-                  <a:srgbClr val="010328"/>
-                </a:solidFill>
-                <a:latin typeface="微软雅黑"/>
-              </a:rPr>
-              <a:t>1. 完成工单项目1.5《工业互联网数据采集系统》：及格标准Modbus读取+MQTT发布基本工作；优秀标准采集完整+消息规范+异常处理完善+规范率≥90%；</a:t>
-            </a:r>
-          </a:p>
-        </p:txBody>
-      </p:sp>
-      <p:sp>
-        <p:nvSpPr>
-          <p:cNvPr id="8" name="TextBox 7"/>
-          <p:cNvSpPr txBox="1"/>
-          <p:nvPr/>
-        </p:nvSpPr>
-        <p:spPr>
-          <a:xfrm>
-            <a:off x="850000" y="4420000"/>
-            <a:ext cx="10600000" cy="700000"/>
-          </a:xfrm>
-          <a:prstGeom prst="rect">
-            <a:avLst/>
-          </a:prstGeom>
-          <a:noFill/>
-        </p:spPr>
-        <p:txBody>
-          <a:bodyPr wrap="square" anchor="t">
-            <a:spAutoFit/>
-          </a:bodyPr>
-          <a:lstStyle/>
-          <a:p>
-            <a:pPr algn="l">
-              <a:lnSpc>
-                <a:spcPct val="120000"/>
-              </a:lnSpc>
-              <a:spcAft>
-                <a:spcPts val="600"/>
-              </a:spcAft>
-            </a:pPr>
-            <a:r>
-              <a:rPr sz="1400" b="1">
-                <a:solidFill>
-                  <a:srgbClr val="F5670F"/>
-                </a:solidFill>
-                <a:latin typeface="微软雅黑"/>
-              </a:rPr>
-              <a:t>2. </a:t>
-            </a:r>
-            <a:r>
-              <a:rPr sz="1400" b="0">
-                <a:solidFill>
-                  <a:srgbClr val="010328"/>
-                </a:solidFill>
-                <a:latin typeface="微软雅黑"/>
-              </a:rPr>
-              <a:t>2. 完成综合项目需求分析与分工计划；</a:t>
-            </a:r>
-          </a:p>
-        </p:txBody>
-      </p:sp>
-      <p:sp>
-        <p:nvSpPr>
-          <p:cNvPr id="9" name="TextBox 8"/>
-          <p:cNvSpPr txBox="1"/>
-          <p:nvPr/>
-        </p:nvSpPr>
-        <p:spPr>
-          <a:xfrm>
-            <a:off x="850000" y="5140000"/>
-            <a:ext cx="10600000" cy="700000"/>
-          </a:xfrm>
-          <a:prstGeom prst="rect">
-            <a:avLst/>
-          </a:prstGeom>
-          <a:noFill/>
-        </p:spPr>
-        <p:txBody>
-          <a:bodyPr wrap="square" anchor="t">
-            <a:spAutoFit/>
-          </a:bodyPr>
-          <a:lstStyle/>
-          <a:p>
-            <a:pPr algn="l">
-              <a:lnSpc>
-                <a:spcPct val="120000"/>
-              </a:lnSpc>
-              <a:spcAft>
-                <a:spcPts val="600"/>
-              </a:spcAft>
-            </a:pPr>
-            <a:r>
-              <a:rPr sz="1400" b="1">
-                <a:solidFill>
-                  <a:srgbClr val="F5670F"/>
-                </a:solidFill>
-                <a:latin typeface="微软雅黑"/>
-              </a:rPr>
-              <a:t>3. </a:t>
-            </a:r>
-            <a:r>
-              <a:rPr sz="1400" b="0">
-                <a:solidFill>
-                  <a:srgbClr val="010328"/>
-                </a:solidFill>
-                <a:latin typeface="微软雅黑"/>
-              </a:rPr>
-              <a:t>3. 复习全课程知识清单，准备综合项目答辩。</a:t>
-            </a:r>
+              <a:t>Modbus读+MQTT发布成功</a:t>
+            </a:r>
+          </a:p>
+        </p:txBody>
+      </p:sp>
+      <p:sp>
+        <p:nvSpPr>
+          <p:cNvPr id="9" name="Rectangle 8"/>
+          <p:cNvSpPr/>
+          <p:nvPr/>
+        </p:nvSpPr>
+        <p:spPr>
+          <a:xfrm>
+            <a:off x="7400000" y="3950000"/>
+            <a:ext cx="4000000" cy="1850000"/>
+          </a:xfrm>
+          <a:prstGeom prst="rect">
+            <a:avLst/>
+          </a:prstGeom>
+          <a:solidFill>
+            <a:srgbClr val="FDF0E6"/>
+          </a:solidFill>
+          <a:ln>
+            <a:solidFill>
+              <a:srgbClr val="F5670F"/>
+            </a:solidFill>
+          </a:ln>
+          <a:effectLst/>
+        </p:spPr>
+        <p:style>
+          <a:lnRef idx="1">
+            <a:schemeClr val="accent1"/>
+          </a:lnRef>
+          <a:fillRef idx="3">
+            <a:schemeClr val="accent1"/>
+          </a:fillRef>
+          <a:effectRef idx="2">
+            <a:schemeClr val="accent1"/>
+          </a:effectRef>
+          <a:fontRef idx="minor">
+            <a:schemeClr val="lt1"/>
+          </a:fontRef>
+        </p:style>
+        <p:txBody>
+          <a:bodyPr rtlCol="0" anchor="ctr"/>
+          <a:lstStyle/>
+          <a:p>
+            <a:pPr algn="ctr"/>
           </a:p>
         </p:txBody>
       </p:sp>
@@ -7672,8 +10464,8 @@
         </p:nvSpPr>
         <p:spPr>
           <a:xfrm>
-            <a:off x="850000" y="5960000"/>
-            <a:ext cx="10600000" cy="500000"/>
+            <a:off x="7550000" y="4080000"/>
+            <a:ext cx="3750000" cy="1650000"/>
           </a:xfrm>
           <a:prstGeom prst="rect">
             <a:avLst/>
@@ -7695,91 +10487,15 @@
               </a:spcAft>
             </a:pPr>
             <a:r>
-              <a:rPr sz="1300" b="1">
-                <a:solidFill>
-                  <a:srgbClr val="0475B6"/>
-                </a:solidFill>
-                <a:latin typeface="微软雅黑"/>
-              </a:rPr>
-              <a:t>下次课预告：</a:t>
-            </a:r>
-            <a:r>
-              <a:rPr sz="1300" b="0">
-                <a:solidFill>
-                  <a:srgbClr val="44546A"/>
-                </a:solidFill>
-                <a:latin typeface="微软雅黑"/>
-              </a:rPr>
-              <a:t>见下次课工单任务书</a:t>
-            </a:r>
-          </a:p>
-        </p:txBody>
-      </p:sp>
-      <p:sp>
-        <p:nvSpPr>
-          <p:cNvPr id="11" name="Rectangle 10"/>
-          <p:cNvSpPr/>
-          <p:nvPr/>
-        </p:nvSpPr>
-        <p:spPr>
-          <a:xfrm>
-            <a:off x="500000" y="6500000"/>
-            <a:ext cx="11100000" cy="20000"/>
-          </a:xfrm>
-          <a:prstGeom prst="rect">
-            <a:avLst/>
-          </a:prstGeom>
-          <a:solidFill>
-            <a:srgbClr val="C9D4EE"/>
-          </a:solidFill>
-          <a:ln>
-            <a:noFill/>
-          </a:ln>
-          <a:effectLst/>
-        </p:spPr>
-        <p:style>
-          <a:lnRef idx="1">
-            <a:schemeClr val="accent1"/>
-          </a:lnRef>
-          <a:fillRef idx="3">
-            <a:schemeClr val="accent1"/>
-          </a:fillRef>
-          <a:effectRef idx="2">
-            <a:schemeClr val="accent1"/>
-          </a:effectRef>
-          <a:fontRef idx="minor">
-            <a:schemeClr val="lt1"/>
-          </a:fontRef>
-        </p:style>
-        <p:txBody>
-          <a:bodyPr rtlCol="0" anchor="ctr"/>
-          <a:lstStyle/>
-          <a:p>
-            <a:pPr algn="ctr"/>
-          </a:p>
-        </p:txBody>
-      </p:sp>
-      <p:sp>
-        <p:nvSpPr>
-          <p:cNvPr id="12" name="TextBox 11"/>
-          <p:cNvSpPr txBox="1"/>
-          <p:nvPr/>
-        </p:nvSpPr>
-        <p:spPr>
-          <a:xfrm>
-            <a:off x="500000" y="6540000"/>
-            <a:ext cx="7000000" cy="300000"/>
-          </a:xfrm>
-          <a:prstGeom prst="rect">
-            <a:avLst/>
-          </a:prstGeom>
-          <a:noFill/>
-        </p:spPr>
-        <p:txBody>
-          <a:bodyPr wrap="square" anchor="t">
-            <a:spAutoFit/>
-          </a:bodyPr>
-          <a:lstStyle/>
+              <a:rPr sz="1400" b="1">
+                <a:solidFill>
+                  <a:srgbClr val="F5670F"/>
+                </a:solidFill>
+                <a:latin typeface="微软雅黑"/>
+              </a:rPr>
+              <a:t>优秀标准（B+）</a:t>
+            </a:r>
+          </a:p>
           <a:p>
             <a:pPr algn="l">
               <a:lnSpc>
@@ -7790,6 +10506,92 @@
               </a:spcAft>
             </a:pPr>
             <a:r>
+              <a:rPr sz="1300" b="0">
+                <a:solidFill>
+                  <a:srgbClr val="010328"/>
+                </a:solidFill>
+                <a:latin typeface="微软雅黑"/>
+              </a:rPr>
+              <a:t>断线重连+回环验证+规范率≥90%</a:t>
+            </a:r>
+          </a:p>
+        </p:txBody>
+      </p:sp>
+      <p:sp>
+        <p:nvSpPr>
+          <p:cNvPr id="11" name="Rectangle 10"/>
+          <p:cNvSpPr/>
+          <p:nvPr/>
+        </p:nvSpPr>
+        <p:spPr>
+          <a:xfrm>
+            <a:off x="500000" y="6500000"/>
+            <a:ext cx="11100000" cy="20000"/>
+          </a:xfrm>
+          <a:prstGeom prst="rect">
+            <a:avLst/>
+          </a:prstGeom>
+          <a:solidFill>
+            <a:srgbClr val="C9D4EE"/>
+          </a:solidFill>
+          <a:ln>
+            <a:noFill/>
+          </a:ln>
+          <a:effectLst/>
+        </p:spPr>
+        <p:style>
+          <a:lnRef idx="1">
+            <a:schemeClr val="accent1"/>
+          </a:lnRef>
+          <a:fillRef idx="3">
+            <a:schemeClr val="accent1"/>
+          </a:fillRef>
+          <a:effectRef idx="2">
+            <a:schemeClr val="accent1"/>
+          </a:effectRef>
+          <a:fontRef idx="minor">
+            <a:schemeClr val="lt1"/>
+          </a:fontRef>
+        </p:style>
+        <p:txBody>
+          <a:bodyPr rtlCol="0" anchor="ctr"/>
+          <a:lstStyle/>
+          <a:p>
+            <a:pPr algn="ctr"/>
+          </a:p>
+        </p:txBody>
+      </p:sp>
+      <p:sp>
+        <p:nvSpPr>
+          <p:cNvPr id="12" name="TextBox 11"/>
+          <p:cNvSpPr txBox="1"/>
+          <p:nvPr/>
+        </p:nvSpPr>
+        <p:spPr>
+          <a:xfrm>
+            <a:off x="500000" y="6540000"/>
+            <a:ext cx="7000000" cy="300000"/>
+          </a:xfrm>
+          <a:prstGeom prst="rect">
+            <a:avLst/>
+          </a:prstGeom>
+          <a:noFill/>
+        </p:spPr>
+        <p:txBody>
+          <a:bodyPr wrap="square" anchor="t">
+            <a:spAutoFit/>
+          </a:bodyPr>
+          <a:lstStyle/>
+          <a:p>
+            <a:pPr algn="l">
+              <a:lnSpc>
+                <a:spcPct val="110000"/>
+              </a:lnSpc>
+              <a:spcAft>
+                <a:spcPts val="600"/>
+              </a:spcAft>
+            </a:pPr>
+            <a:r>
               <a:rPr sz="1000" b="0">
                 <a:solidFill>
                   <a:srgbClr val="8A97B5"/>
@@ -7838,7 +10640,7 @@
                 </a:solidFill>
                 <a:latin typeface="微软雅黑"/>
               </a:rPr>
-              <a:t>6 / 8</a:t>
+              <a:t>9 / 14</a:t>
             </a:r>
           </a:p>
         </p:txBody>
@@ -7870,7 +10672,7 @@
         <p:spPr>
           <a:xfrm>
             <a:off x="0" y="0"/>
-            <a:ext cx="12192000" cy="6858000"/>
+            <a:ext cx="12192000" cy="1150000"/>
           </a:xfrm>
           <a:prstGeom prst="rect">
             <a:avLst/>
@@ -7913,8 +10715,8 @@
         </p:nvSpPr>
         <p:spPr>
           <a:xfrm>
-            <a:off x="0" y="2880360"/>
-            <a:ext cx="12192000" cy="50000"/>
+            <a:off x="0" y="1150000"/>
+            <a:ext cx="2600000" cy="70000"/>
           </a:xfrm>
           <a:prstGeom prst="rect">
             <a:avLst/>
@@ -7957,178 +10759,8 @@
         </p:nvSpPr>
         <p:spPr>
           <a:xfrm>
-            <a:off x="0" y="1645920"/>
-            <a:ext cx="12192000" cy="1500000"/>
-          </a:xfrm>
-          <a:prstGeom prst="rect">
-            <a:avLst/>
-          </a:prstGeom>
-          <a:noFill/>
-        </p:spPr>
-        <p:txBody>
-          <a:bodyPr wrap="square" anchor="t">
-            <a:spAutoFit/>
-          </a:bodyPr>
-          <a:lstStyle/>
-          <a:p>
-            <a:pPr algn="ctr">
-              <a:lnSpc>
-                <a:spcPct val="110000"/>
-              </a:lnSpc>
-              <a:spcAft>
-                <a:spcPts val="600"/>
-              </a:spcAft>
-            </a:pPr>
-            <a:r>
-              <a:rPr sz="5400" b="1">
-                <a:solidFill>
-                  <a:srgbClr val="FFFFFF"/>
-                </a:solidFill>
-                <a:latin typeface="微软雅黑"/>
-              </a:rPr>
-              <a:t>THANKS</a:t>
-            </a:r>
-          </a:p>
-        </p:txBody>
-      </p:sp>
-      <p:sp>
-        <p:nvSpPr>
-          <p:cNvPr id="5" name="TextBox 4"/>
-          <p:cNvSpPr txBox="1"/>
-          <p:nvPr/>
-        </p:nvSpPr>
-        <p:spPr>
-          <a:xfrm>
-            <a:off x="0" y="3429000"/>
-            <a:ext cx="12192000" cy="800000"/>
-          </a:xfrm>
-          <a:prstGeom prst="rect">
-            <a:avLst/>
-          </a:prstGeom>
-          <a:noFill/>
-        </p:spPr>
-        <p:txBody>
-          <a:bodyPr wrap="square" anchor="t">
-            <a:spAutoFit/>
-          </a:bodyPr>
-          <a:lstStyle/>
-          <a:p>
-            <a:pPr algn="ctr">
-              <a:lnSpc>
-                <a:spcPct val="110000"/>
-              </a:lnSpc>
-              <a:spcAft>
-                <a:spcPts val="600"/>
-              </a:spcAft>
-            </a:pPr>
-            <a:r>
-              <a:rPr sz="2200" b="1">
-                <a:solidFill>
-                  <a:srgbClr val="F5670F"/>
-                </a:solidFill>
-                <a:latin typeface="微软雅黑"/>
-              </a:rPr>
-              <a:t>感谢聆听 · 动手实践出真知</a:t>
-            </a:r>
-          </a:p>
-        </p:txBody>
-      </p:sp>
-      <p:sp>
-        <p:nvSpPr>
-          <p:cNvPr id="6" name="TextBox 5"/>
-          <p:cNvSpPr txBox="1"/>
-          <p:nvPr/>
-        </p:nvSpPr>
-        <p:spPr>
-          <a:xfrm>
-            <a:off x="0" y="4526280"/>
-            <a:ext cx="12192000" cy="600000"/>
-          </a:xfrm>
-          <a:prstGeom prst="rect">
-            <a:avLst/>
-          </a:prstGeom>
-          <a:noFill/>
-        </p:spPr>
-        <p:txBody>
-          <a:bodyPr wrap="square" anchor="t">
-            <a:spAutoFit/>
-          </a:bodyPr>
-          <a:lstStyle/>
-          <a:p>
-            <a:pPr algn="ctr">
-              <a:lnSpc>
-                <a:spcPct val="110000"/>
-              </a:lnSpc>
-              <a:spcAft>
-                <a:spcPts val="600"/>
-              </a:spcAft>
-            </a:pPr>
-            <a:r>
-              <a:rPr sz="1400" b="0">
-                <a:solidFill>
-                  <a:srgbClr val="BBC6E6"/>
-                </a:solidFill>
-                <a:latin typeface="微软雅黑"/>
-              </a:rPr>
-              <a:t>以生为本   |   做中学 · 学中做</a:t>
-            </a:r>
-          </a:p>
-        </p:txBody>
-      </p:sp>
-      <p:sp>
-        <p:nvSpPr>
-          <p:cNvPr id="7" name="Rectangle 6"/>
-          <p:cNvSpPr/>
-          <p:nvPr/>
-        </p:nvSpPr>
-        <p:spPr>
-          <a:xfrm>
-            <a:off x="500000" y="6500000"/>
-            <a:ext cx="11100000" cy="20000"/>
-          </a:xfrm>
-          <a:prstGeom prst="rect">
-            <a:avLst/>
-          </a:prstGeom>
-          <a:solidFill>
-            <a:srgbClr val="C9D4EE"/>
-          </a:solidFill>
-          <a:ln>
-            <a:noFill/>
-          </a:ln>
-          <a:effectLst/>
-        </p:spPr>
-        <p:style>
-          <a:lnRef idx="1">
-            <a:schemeClr val="accent1"/>
-          </a:lnRef>
-          <a:fillRef idx="3">
-            <a:schemeClr val="accent1"/>
-          </a:fillRef>
-          <a:effectRef idx="2">
-            <a:schemeClr val="accent1"/>
-          </a:effectRef>
-          <a:fontRef idx="minor">
-            <a:schemeClr val="lt1"/>
-          </a:fontRef>
-        </p:style>
-        <p:txBody>
-          <a:bodyPr rtlCol="0" anchor="ctr"/>
-          <a:lstStyle/>
-          <a:p>
-            <a:pPr algn="ctr"/>
-          </a:p>
-        </p:txBody>
-      </p:sp>
-      <p:sp>
-        <p:nvSpPr>
-          <p:cNvPr id="8" name="TextBox 7"/>
-          <p:cNvSpPr txBox="1"/>
-          <p:nvPr/>
-        </p:nvSpPr>
-        <p:spPr>
-          <a:xfrm>
-            <a:off x="500000" y="6540000"/>
-            <a:ext cx="7000000" cy="300000"/>
+            <a:off x="700000" y="300000"/>
+            <a:ext cx="10792000" cy="700000"/>
           </a:xfrm>
           <a:prstGeom prst="rect">
             <a:avLst/>
@@ -8150,13 +10782,220 @@
               </a:spcAft>
             </a:pPr>
             <a:r>
-              <a:rPr sz="1000" b="0">
-                <a:solidFill>
-                  <a:srgbClr val="8A97B5"/>
-                </a:solidFill>
-                <a:latin typeface="微软雅黑"/>
-              </a:rPr>
-              <a:t>两江智造集团 · Python编程基础</a:t>
+              <a:rPr sz="2400" b="1">
+                <a:solidFill>
+                  <a:srgbClr val="FFFFFF"/>
+                </a:solidFill>
+                <a:latin typeface="微软雅黑"/>
+              </a:rPr>
+              <a:t>总结评价与课后任务</a:t>
+            </a:r>
+          </a:p>
+        </p:txBody>
+      </p:sp>
+      <p:sp>
+        <p:nvSpPr>
+          <p:cNvPr id="5" name="Rectangle 4"/>
+          <p:cNvSpPr/>
+          <p:nvPr/>
+        </p:nvSpPr>
+        <p:spPr>
+          <a:xfrm>
+            <a:off x="800000" y="1950000"/>
+            <a:ext cx="10600000" cy="1500000"/>
+          </a:xfrm>
+          <a:prstGeom prst="rect">
+            <a:avLst/>
+          </a:prstGeom>
+          <a:solidFill>
+            <a:srgbClr val="F3F6FD"/>
+          </a:solidFill>
+          <a:ln>
+            <a:noFill/>
+          </a:ln>
+          <a:effectLst/>
+        </p:spPr>
+        <p:style>
+          <a:lnRef idx="1">
+            <a:schemeClr val="accent1"/>
+          </a:lnRef>
+          <a:fillRef idx="3">
+            <a:schemeClr val="accent1"/>
+          </a:fillRef>
+          <a:effectRef idx="2">
+            <a:schemeClr val="accent1"/>
+          </a:effectRef>
+          <a:fontRef idx="minor">
+            <a:schemeClr val="lt1"/>
+          </a:fontRef>
+        </p:style>
+        <p:txBody>
+          <a:bodyPr rtlCol="0" anchor="ctr"/>
+          <a:lstStyle/>
+          <a:p>
+            <a:pPr algn="ctr"/>
+          </a:p>
+        </p:txBody>
+      </p:sp>
+      <p:sp>
+        <p:nvSpPr>
+          <p:cNvPr id="6" name="TextBox 5"/>
+          <p:cNvSpPr txBox="1"/>
+          <p:nvPr/>
+        </p:nvSpPr>
+        <p:spPr>
+          <a:xfrm>
+            <a:off x="1000000" y="2050000"/>
+            <a:ext cx="10300000" cy="1400000"/>
+          </a:xfrm>
+          <a:prstGeom prst="rect">
+            <a:avLst/>
+          </a:prstGeom>
+          <a:noFill/>
+        </p:spPr>
+        <p:txBody>
+          <a:bodyPr wrap="square" anchor="t">
+            <a:spAutoFit/>
+          </a:bodyPr>
+          <a:lstStyle/>
+          <a:p>
+            <a:pPr algn="l">
+              <a:lnSpc>
+                <a:spcPct val="110000"/>
+              </a:lnSpc>
+              <a:spcAft>
+                <a:spcPts val="600"/>
+              </a:spcAft>
+            </a:pPr>
+            <a:r>
+              <a:rPr sz="1500" b="1">
+                <a:solidFill>
+                  <a:srgbClr val="0545E8"/>
+                </a:solidFill>
+                <a:latin typeface="微软雅黑"/>
+              </a:rPr>
+              <a:t>评价（10分钟）：</a:t>
+            </a:r>
+          </a:p>
+          <a:p>
+            <a:pPr algn="l">
+              <a:lnSpc>
+                <a:spcPct val="110000"/>
+              </a:lnSpc>
+              <a:spcAft>
+                <a:spcPts val="600"/>
+              </a:spcAft>
+            </a:pPr>
+            <a:r>
+              <a:rPr sz="1400" b="0">
+                <a:solidFill>
+                  <a:srgbClr val="010328"/>
+                </a:solidFill>
+                <a:latin typeface="微软雅黑"/>
+              </a:rPr>
+              <a:t>按D/C/B/A量表当堂评分；工单24小时内反馈评语与改进建议。</a:t>
+            </a:r>
+          </a:p>
+        </p:txBody>
+      </p:sp>
+      <p:sp>
+        <p:nvSpPr>
+          <p:cNvPr id="7" name="TextBox 6"/>
+          <p:cNvSpPr txBox="1"/>
+          <p:nvPr/>
+        </p:nvSpPr>
+        <p:spPr>
+          <a:xfrm>
+            <a:off x="850000" y="3700000"/>
+            <a:ext cx="10600000" cy="700000"/>
+          </a:xfrm>
+          <a:prstGeom prst="rect">
+            <a:avLst/>
+          </a:prstGeom>
+          <a:noFill/>
+        </p:spPr>
+        <p:txBody>
+          <a:bodyPr wrap="square" anchor="t">
+            <a:spAutoFit/>
+          </a:bodyPr>
+          <a:lstStyle/>
+          <a:p>
+            <a:pPr algn="l">
+              <a:lnSpc>
+                <a:spcPct val="120000"/>
+              </a:lnSpc>
+              <a:spcAft>
+                <a:spcPts val="600"/>
+              </a:spcAft>
+            </a:pPr>
+            <a:r>
+              <a:rPr sz="1400" b="1">
+                <a:solidFill>
+                  <a:srgbClr val="F5670F"/>
+                </a:solidFill>
+                <a:latin typeface="微软雅黑"/>
+              </a:rPr>
+              <a:t>1. </a:t>
+            </a:r>
+            <a:r>
+              <a:rPr sz="1400" b="0">
+                <a:solidFill>
+                  <a:srgbClr val="010328"/>
+                </a:solidFill>
+                <a:latin typeface="微软雅黑"/>
+              </a:rPr>
+              <a:t>1. 完成工单项目1.5《工业互联网数据采集系统》：及格标准Modbus读取+MQTT发布基本工作；优秀标准采集完整+消息规范+异常处理完善+规范率≥90%；</a:t>
+            </a:r>
+          </a:p>
+        </p:txBody>
+      </p:sp>
+      <p:sp>
+        <p:nvSpPr>
+          <p:cNvPr id="8" name="TextBox 7"/>
+          <p:cNvSpPr txBox="1"/>
+          <p:nvPr/>
+        </p:nvSpPr>
+        <p:spPr>
+          <a:xfrm>
+            <a:off x="850000" y="4420000"/>
+            <a:ext cx="10600000" cy="700000"/>
+          </a:xfrm>
+          <a:prstGeom prst="rect">
+            <a:avLst/>
+          </a:prstGeom>
+          <a:noFill/>
+        </p:spPr>
+        <p:txBody>
+          <a:bodyPr wrap="square" anchor="t">
+            <a:spAutoFit/>
+          </a:bodyPr>
+          <a:lstStyle/>
+          <a:p>
+            <a:pPr algn="l">
+              <a:lnSpc>
+                <a:spcPct val="120000"/>
+              </a:lnSpc>
+              <a:spcAft>
+                <a:spcPts val="600"/>
+              </a:spcAft>
+            </a:pPr>
+            <a:r>
+              <a:rPr sz="1400" b="1">
+                <a:solidFill>
+                  <a:srgbClr val="F5670F"/>
+                </a:solidFill>
+                <a:latin typeface="微软雅黑"/>
+              </a:rPr>
+              <a:t>2. </a:t>
+            </a:r>
+            <a:r>
+              <a:rPr sz="1400" b="0">
+                <a:solidFill>
+                  <a:srgbClr val="010328"/>
+                </a:solidFill>
+                <a:latin typeface="微软雅黑"/>
+              </a:rPr>
+              <a:t>2. 完成综合项目需求分析与分工计划；</a:t>
             </a:r>
           </a:p>
         </p:txBody>
@@ -8169,6 +11008,194 @@
         </p:nvSpPr>
         <p:spPr>
           <a:xfrm>
+            <a:off x="850000" y="5140000"/>
+            <a:ext cx="10600000" cy="700000"/>
+          </a:xfrm>
+          <a:prstGeom prst="rect">
+            <a:avLst/>
+          </a:prstGeom>
+          <a:noFill/>
+        </p:spPr>
+        <p:txBody>
+          <a:bodyPr wrap="square" anchor="t">
+            <a:spAutoFit/>
+          </a:bodyPr>
+          <a:lstStyle/>
+          <a:p>
+            <a:pPr algn="l">
+              <a:lnSpc>
+                <a:spcPct val="120000"/>
+              </a:lnSpc>
+              <a:spcAft>
+                <a:spcPts val="600"/>
+              </a:spcAft>
+            </a:pPr>
+            <a:r>
+              <a:rPr sz="1400" b="1">
+                <a:solidFill>
+                  <a:srgbClr val="F5670F"/>
+                </a:solidFill>
+                <a:latin typeface="微软雅黑"/>
+              </a:rPr>
+              <a:t>3. </a:t>
+            </a:r>
+            <a:r>
+              <a:rPr sz="1400" b="0">
+                <a:solidFill>
+                  <a:srgbClr val="010328"/>
+                </a:solidFill>
+                <a:latin typeface="微软雅黑"/>
+              </a:rPr>
+              <a:t>3. 复习全课程知识清单，准备综合项目答辩。</a:t>
+            </a:r>
+          </a:p>
+        </p:txBody>
+      </p:sp>
+      <p:sp>
+        <p:nvSpPr>
+          <p:cNvPr id="10" name="TextBox 9"/>
+          <p:cNvSpPr txBox="1"/>
+          <p:nvPr/>
+        </p:nvSpPr>
+        <p:spPr>
+          <a:xfrm>
+            <a:off x="850000" y="5960000"/>
+            <a:ext cx="10600000" cy="500000"/>
+          </a:xfrm>
+          <a:prstGeom prst="rect">
+            <a:avLst/>
+          </a:prstGeom>
+          <a:noFill/>
+        </p:spPr>
+        <p:txBody>
+          <a:bodyPr wrap="square" anchor="t">
+            <a:spAutoFit/>
+          </a:bodyPr>
+          <a:lstStyle/>
+          <a:p>
+            <a:pPr algn="l">
+              <a:lnSpc>
+                <a:spcPct val="110000"/>
+              </a:lnSpc>
+              <a:spcAft>
+                <a:spcPts val="600"/>
+              </a:spcAft>
+            </a:pPr>
+            <a:r>
+              <a:rPr sz="1300" b="1">
+                <a:solidFill>
+                  <a:srgbClr val="0475B6"/>
+                </a:solidFill>
+                <a:latin typeface="微软雅黑"/>
+              </a:rPr>
+              <a:t>下次课预告：</a:t>
+            </a:r>
+            <a:r>
+              <a:rPr sz="1300" b="0">
+                <a:solidFill>
+                  <a:srgbClr val="44546A"/>
+                </a:solidFill>
+                <a:latin typeface="微软雅黑"/>
+              </a:rPr>
+              <a:t>见下次课工单任务书</a:t>
+            </a:r>
+          </a:p>
+        </p:txBody>
+      </p:sp>
+      <p:sp>
+        <p:nvSpPr>
+          <p:cNvPr id="11" name="Rectangle 10"/>
+          <p:cNvSpPr/>
+          <p:nvPr/>
+        </p:nvSpPr>
+        <p:spPr>
+          <a:xfrm>
+            <a:off x="500000" y="6500000"/>
+            <a:ext cx="11100000" cy="20000"/>
+          </a:xfrm>
+          <a:prstGeom prst="rect">
+            <a:avLst/>
+          </a:prstGeom>
+          <a:solidFill>
+            <a:srgbClr val="C9D4EE"/>
+          </a:solidFill>
+          <a:ln>
+            <a:noFill/>
+          </a:ln>
+          <a:effectLst/>
+        </p:spPr>
+        <p:style>
+          <a:lnRef idx="1">
+            <a:schemeClr val="accent1"/>
+          </a:lnRef>
+          <a:fillRef idx="3">
+            <a:schemeClr val="accent1"/>
+          </a:fillRef>
+          <a:effectRef idx="2">
+            <a:schemeClr val="accent1"/>
+          </a:effectRef>
+          <a:fontRef idx="minor">
+            <a:schemeClr val="lt1"/>
+          </a:fontRef>
+        </p:style>
+        <p:txBody>
+          <a:bodyPr rtlCol="0" anchor="ctr"/>
+          <a:lstStyle/>
+          <a:p>
+            <a:pPr algn="ctr"/>
+          </a:p>
+        </p:txBody>
+      </p:sp>
+      <p:sp>
+        <p:nvSpPr>
+          <p:cNvPr id="12" name="TextBox 11"/>
+          <p:cNvSpPr txBox="1"/>
+          <p:nvPr/>
+        </p:nvSpPr>
+        <p:spPr>
+          <a:xfrm>
+            <a:off x="500000" y="6540000"/>
+            <a:ext cx="7000000" cy="300000"/>
+          </a:xfrm>
+          <a:prstGeom prst="rect">
+            <a:avLst/>
+          </a:prstGeom>
+          <a:noFill/>
+        </p:spPr>
+        <p:txBody>
+          <a:bodyPr wrap="square" anchor="t">
+            <a:spAutoFit/>
+          </a:bodyPr>
+          <a:lstStyle/>
+          <a:p>
+            <a:pPr algn="l">
+              <a:lnSpc>
+                <a:spcPct val="110000"/>
+              </a:lnSpc>
+              <a:spcAft>
+                <a:spcPts val="600"/>
+              </a:spcAft>
+            </a:pPr>
+            <a:r>
+              <a:rPr sz="1000" b="0">
+                <a:solidFill>
+                  <a:srgbClr val="8A97B5"/>
+                </a:solidFill>
+                <a:latin typeface="微软雅黑"/>
+              </a:rPr>
+              <a:t>两江智造集团 · Python编程基础</a:t>
+            </a:r>
+          </a:p>
+        </p:txBody>
+      </p:sp>
+      <p:sp>
+        <p:nvSpPr>
+          <p:cNvPr id="13" name="TextBox 12"/>
+          <p:cNvSpPr txBox="1"/>
+          <p:nvPr/>
+        </p:nvSpPr>
+        <p:spPr>
+          <a:xfrm>
             <a:off x="10600000" y="6540000"/>
             <a:ext cx="1000000" cy="300000"/>
           </a:xfrm>
@@ -8178,7 +11205,7 @@
           <a:noFill/>
         </p:spPr>
         <p:txBody>
-          <a:bodyPr wrap="square" anchor="ctr">
+          <a:bodyPr wrap="square" anchor="t">
             <a:spAutoFit/>
           </a:bodyPr>
           <a:lstStyle/>
@@ -8198,7 +11225,7 @@
                 </a:solidFill>
                 <a:latin typeface="微软雅黑"/>
               </a:rPr>
-              <a:t>7 / 8</a:t>
+              <a:t>10 / 14</a:t>
             </a:r>
           </a:p>
         </p:txBody>
@@ -8230,7 +11257,7 @@
         <p:spPr>
           <a:xfrm>
             <a:off x="0" y="0"/>
-            <a:ext cx="12192000" cy="1150000"/>
+            <a:ext cx="12192000" cy="6858000"/>
           </a:xfrm>
           <a:prstGeom prst="rect">
             <a:avLst/>
@@ -8273,8 +11300,8 @@
         </p:nvSpPr>
         <p:spPr>
           <a:xfrm>
-            <a:off x="0" y="1150000"/>
-            <a:ext cx="2600000" cy="70000"/>
+            <a:off x="0" y="2880360"/>
+            <a:ext cx="12192000" cy="50000"/>
           </a:xfrm>
           <a:prstGeom prst="rect">
             <a:avLst/>
@@ -8317,8 +11344,178 @@
         </p:nvSpPr>
         <p:spPr>
           <a:xfrm>
-            <a:off x="700000" y="300000"/>
-            <a:ext cx="10792000" cy="700000"/>
+            <a:off x="0" y="1645920"/>
+            <a:ext cx="12192000" cy="1500000"/>
+          </a:xfrm>
+          <a:prstGeom prst="rect">
+            <a:avLst/>
+          </a:prstGeom>
+          <a:noFill/>
+        </p:spPr>
+        <p:txBody>
+          <a:bodyPr wrap="square" anchor="t">
+            <a:spAutoFit/>
+          </a:bodyPr>
+          <a:lstStyle/>
+          <a:p>
+            <a:pPr algn="ctr">
+              <a:lnSpc>
+                <a:spcPct val="110000"/>
+              </a:lnSpc>
+              <a:spcAft>
+                <a:spcPts val="600"/>
+              </a:spcAft>
+            </a:pPr>
+            <a:r>
+              <a:rPr sz="5400" b="1">
+                <a:solidFill>
+                  <a:srgbClr val="FFFFFF"/>
+                </a:solidFill>
+                <a:latin typeface="微软雅黑"/>
+              </a:rPr>
+              <a:t>THANKS</a:t>
+            </a:r>
+          </a:p>
+        </p:txBody>
+      </p:sp>
+      <p:sp>
+        <p:nvSpPr>
+          <p:cNvPr id="5" name="TextBox 4"/>
+          <p:cNvSpPr txBox="1"/>
+          <p:nvPr/>
+        </p:nvSpPr>
+        <p:spPr>
+          <a:xfrm>
+            <a:off x="0" y="3429000"/>
+            <a:ext cx="12192000" cy="800000"/>
+          </a:xfrm>
+          <a:prstGeom prst="rect">
+            <a:avLst/>
+          </a:prstGeom>
+          <a:noFill/>
+        </p:spPr>
+        <p:txBody>
+          <a:bodyPr wrap="square" anchor="t">
+            <a:spAutoFit/>
+          </a:bodyPr>
+          <a:lstStyle/>
+          <a:p>
+            <a:pPr algn="ctr">
+              <a:lnSpc>
+                <a:spcPct val="110000"/>
+              </a:lnSpc>
+              <a:spcAft>
+                <a:spcPts val="600"/>
+              </a:spcAft>
+            </a:pPr>
+            <a:r>
+              <a:rPr sz="2200" b="1">
+                <a:solidFill>
+                  <a:srgbClr val="F5670F"/>
+                </a:solidFill>
+                <a:latin typeface="微软雅黑"/>
+              </a:rPr>
+              <a:t>感谢聆听 · 动手实践出真知</a:t>
+            </a:r>
+          </a:p>
+        </p:txBody>
+      </p:sp>
+      <p:sp>
+        <p:nvSpPr>
+          <p:cNvPr id="6" name="TextBox 5"/>
+          <p:cNvSpPr txBox="1"/>
+          <p:nvPr/>
+        </p:nvSpPr>
+        <p:spPr>
+          <a:xfrm>
+            <a:off x="0" y="4526280"/>
+            <a:ext cx="12192000" cy="600000"/>
+          </a:xfrm>
+          <a:prstGeom prst="rect">
+            <a:avLst/>
+          </a:prstGeom>
+          <a:noFill/>
+        </p:spPr>
+        <p:txBody>
+          <a:bodyPr wrap="square" anchor="t">
+            <a:spAutoFit/>
+          </a:bodyPr>
+          <a:lstStyle/>
+          <a:p>
+            <a:pPr algn="ctr">
+              <a:lnSpc>
+                <a:spcPct val="110000"/>
+              </a:lnSpc>
+              <a:spcAft>
+                <a:spcPts val="600"/>
+              </a:spcAft>
+            </a:pPr>
+            <a:r>
+              <a:rPr sz="1400" b="0">
+                <a:solidFill>
+                  <a:srgbClr val="BBC6E6"/>
+                </a:solidFill>
+                <a:latin typeface="微软雅黑"/>
+              </a:rPr>
+              <a:t>以生为本   |   做中学 · 学中做</a:t>
+            </a:r>
+          </a:p>
+        </p:txBody>
+      </p:sp>
+      <p:sp>
+        <p:nvSpPr>
+          <p:cNvPr id="7" name="Rectangle 6"/>
+          <p:cNvSpPr/>
+          <p:nvPr/>
+        </p:nvSpPr>
+        <p:spPr>
+          <a:xfrm>
+            <a:off x="500000" y="6500000"/>
+            <a:ext cx="11100000" cy="20000"/>
+          </a:xfrm>
+          <a:prstGeom prst="rect">
+            <a:avLst/>
+          </a:prstGeom>
+          <a:solidFill>
+            <a:srgbClr val="C9D4EE"/>
+          </a:solidFill>
+          <a:ln>
+            <a:noFill/>
+          </a:ln>
+          <a:effectLst/>
+        </p:spPr>
+        <p:style>
+          <a:lnRef idx="1">
+            <a:schemeClr val="accent1"/>
+          </a:lnRef>
+          <a:fillRef idx="3">
+            <a:schemeClr val="accent1"/>
+          </a:fillRef>
+          <a:effectRef idx="2">
+            <a:schemeClr val="accent1"/>
+          </a:effectRef>
+          <a:fontRef idx="minor">
+            <a:schemeClr val="lt1"/>
+          </a:fontRef>
+        </p:style>
+        <p:txBody>
+          <a:bodyPr rtlCol="0" anchor="ctr"/>
+          <a:lstStyle/>
+          <a:p>
+            <a:pPr algn="ctr"/>
+          </a:p>
+        </p:txBody>
+      </p:sp>
+      <p:sp>
+        <p:nvSpPr>
+          <p:cNvPr id="8" name="TextBox 7"/>
+          <p:cNvSpPr txBox="1"/>
+          <p:nvPr/>
+        </p:nvSpPr>
+        <p:spPr>
+          <a:xfrm>
+            <a:off x="500000" y="6540000"/>
+            <a:ext cx="7000000" cy="300000"/>
           </a:xfrm>
           <a:prstGeom prst="rect">
             <a:avLst/>
@@ -8340,115 +11537,27 @@
               </a:spcAft>
             </a:pPr>
             <a:r>
-              <a:rPr sz="2400" b="1">
-                <a:solidFill>
-                  <a:srgbClr val="FFFFFF"/>
-                </a:solidFill>
-                <a:latin typeface="微软雅黑"/>
-              </a:rPr>
-              <a:t>下次课预告（第12周）</a:t>
-            </a:r>
-          </a:p>
-        </p:txBody>
-      </p:sp>
-      <p:sp>
-        <p:nvSpPr>
-          <p:cNvPr id="5" name="Rectangle 4"/>
-          <p:cNvSpPr/>
-          <p:nvPr/>
-        </p:nvSpPr>
-        <p:spPr>
-          <a:xfrm>
-            <a:off x="760000" y="1900000"/>
-            <a:ext cx="10900000" cy="1600000"/>
-          </a:xfrm>
-          <a:prstGeom prst="rect">
-            <a:avLst/>
-          </a:prstGeom>
-          <a:solidFill>
-            <a:srgbClr val="F3F6FD"/>
-          </a:solidFill>
-          <a:ln>
-            <a:noFill/>
-          </a:ln>
-          <a:effectLst/>
-        </p:spPr>
-        <p:style>
-          <a:lnRef idx="1">
-            <a:schemeClr val="accent1"/>
-          </a:lnRef>
-          <a:fillRef idx="3">
-            <a:schemeClr val="accent1"/>
-          </a:fillRef>
-          <a:effectRef idx="2">
-            <a:schemeClr val="accent1"/>
-          </a:effectRef>
-          <a:fontRef idx="minor">
-            <a:schemeClr val="lt1"/>
-          </a:fontRef>
-        </p:style>
-        <p:txBody>
-          <a:bodyPr rtlCol="0" anchor="ctr"/>
-          <a:lstStyle/>
-          <a:p>
-            <a:pPr algn="ctr"/>
-          </a:p>
-        </p:txBody>
-      </p:sp>
-      <p:sp>
-        <p:nvSpPr>
-          <p:cNvPr id="6" name="Rectangle 5"/>
-          <p:cNvSpPr/>
-          <p:nvPr/>
-        </p:nvSpPr>
-        <p:spPr>
-          <a:xfrm>
-            <a:off x="760000" y="1900000"/>
-            <a:ext cx="150000" cy="1600000"/>
-          </a:xfrm>
-          <a:prstGeom prst="rect">
-            <a:avLst/>
-          </a:prstGeom>
-          <a:solidFill>
-            <a:srgbClr val="F5670F"/>
-          </a:solidFill>
-          <a:ln>
-            <a:noFill/>
-          </a:ln>
-          <a:effectLst/>
-        </p:spPr>
-        <p:style>
-          <a:lnRef idx="1">
-            <a:schemeClr val="accent1"/>
-          </a:lnRef>
-          <a:fillRef idx="3">
-            <a:schemeClr val="accent1"/>
-          </a:fillRef>
-          <a:effectRef idx="2">
-            <a:schemeClr val="accent1"/>
-          </a:effectRef>
-          <a:fontRef idx="minor">
-            <a:schemeClr val="lt1"/>
-          </a:fontRef>
-        </p:style>
-        <p:txBody>
-          <a:bodyPr rtlCol="0" anchor="ctr"/>
-          <a:lstStyle/>
-          <a:p>
-            <a:pPr algn="ctr"/>
-          </a:p>
-        </p:txBody>
-      </p:sp>
-      <p:sp>
-        <p:nvSpPr>
-          <p:cNvPr id="7" name="TextBox 6"/>
+              <a:rPr sz="1000" b="0">
+                <a:solidFill>
+                  <a:srgbClr val="8A97B5"/>
+                </a:solidFill>
+                <a:latin typeface="微软雅黑"/>
+              </a:rPr>
+              <a:t>两江智造集团 · Python编程基础</a:t>
+            </a:r>
+          </a:p>
+        </p:txBody>
+      </p:sp>
+      <p:sp>
+        <p:nvSpPr>
+          <p:cNvPr id="9" name="TextBox 8"/>
           <p:cNvSpPr txBox="1"/>
           <p:nvPr/>
         </p:nvSpPr>
         <p:spPr>
           <a:xfrm>
-            <a:off x="1020000" y="2050000"/>
-            <a:ext cx="10500000" cy="1400000"/>
+            <a:off x="10600000" y="6540000"/>
+            <a:ext cx="1000000" cy="300000"/>
           </a:xfrm>
           <a:prstGeom prst="rect">
             <a:avLst/>
@@ -8456,12 +11565,12 @@
           <a:noFill/>
         </p:spPr>
         <p:txBody>
-          <a:bodyPr wrap="square" anchor="t">
+          <a:bodyPr wrap="square" anchor="ctr">
             <a:spAutoFit/>
           </a:bodyPr>
           <a:lstStyle/>
           <a:p>
-            <a:pPr algn="l">
+            <a:pPr algn="r">
               <a:lnSpc>
                 <a:spcPct val="110000"/>
               </a:lnSpc>
@@ -8470,93 +11579,13 @@
               </a:spcAft>
             </a:pPr>
             <a:r>
-              <a:rPr sz="1700" b="1">
-                <a:solidFill>
-                  <a:srgbClr val="010328"/>
-                </a:solidFill>
-                <a:latin typeface="微软雅黑"/>
-              </a:rPr>
-              <a:t>主题: 按checklist完成终验自查——应用：见工单</a:t>
-            </a:r>
-          </a:p>
-          <a:p>
-            <a:pPr algn="l">
-              <a:lnSpc>
-                <a:spcPct val="110000"/>
-              </a:lnSpc>
-              <a:spcAft>
-                <a:spcPts val="600"/>
-              </a:spcAft>
-            </a:pPr>
-            <a:r>
-              <a:rPr sz="1300" b="0">
-                <a:solidFill>
-                  <a:srgbClr val="44546A"/>
-                </a:solidFill>
-                <a:latin typeface="微软雅黑"/>
-              </a:rPr>
-              <a:t>预习快问: checklist三清单(功能/规范/演示)你组还差哪几项？</a:t>
-            </a:r>
-          </a:p>
-        </p:txBody>
-      </p:sp>
-      <p:sp>
-        <p:nvSpPr>
-          <p:cNvPr id="8" name="TextBox 7"/>
-          <p:cNvSpPr txBox="1"/>
-          <p:nvPr/>
-        </p:nvSpPr>
-        <p:spPr>
-          <a:xfrm>
-            <a:off x="760000" y="3900000"/>
-            <a:ext cx="10900000" cy="900000"/>
-          </a:xfrm>
-          <a:prstGeom prst="rect">
-            <a:avLst/>
-          </a:prstGeom>
-          <a:noFill/>
-        </p:spPr>
-        <p:txBody>
-          <a:bodyPr wrap="square" anchor="t">
-            <a:spAutoFit/>
-          </a:bodyPr>
-          <a:lstStyle/>
-          <a:p>
-            <a:pPr algn="l">
-              <a:lnSpc>
-                <a:spcPct val="110000"/>
-              </a:lnSpc>
-              <a:spcAft>
-                <a:spcPts val="600"/>
-              </a:spcAft>
-            </a:pPr>
-            <a:r>
-              <a:rPr sz="1400" b="1">
-                <a:solidFill>
-                  <a:srgbClr val="0545E8"/>
-                </a:solidFill>
-                <a:latin typeface="微软雅黑"/>
-              </a:rPr>
-              <a:t>课前完成：导学单 + 预习自测 + starter环境自检</a:t>
-            </a:r>
-          </a:p>
-          <a:p>
-            <a:pPr algn="l">
-              <a:lnSpc>
-                <a:spcPct val="110000"/>
-              </a:lnSpc>
-              <a:spcAft>
-                <a:spcPts val="600"/>
-              </a:spcAft>
-            </a:pPr>
-            <a:r>
-              <a:rPr sz="1250" b="0">
-                <a:solidFill>
-                  <a:srgbClr val="44546A"/>
-                </a:solidFill>
-                <a:latin typeface="微软雅黑"/>
-              </a:rPr>
-              <a:t>带着问题来上课——Predict先于Run</a:t>
+              <a:rPr sz="1000" b="0">
+                <a:solidFill>
+                  <a:srgbClr val="8A97B5"/>
+                </a:solidFill>
+                <a:latin typeface="微软雅黑"/>
+              </a:rPr>
+              <a:t>11 / 14</a:t>
             </a:r>
           </a:p>
         </p:txBody>
@@ -8581,14 +11610,102 @@
       <p:grpSpPr/>
       <p:sp>
         <p:nvSpPr>
-          <p:cNvPr id="2" name="TextBox 1"/>
+          <p:cNvPr id="2" name="Rectangle 1"/>
+          <p:cNvSpPr/>
+          <p:nvPr/>
+        </p:nvSpPr>
+        <p:spPr>
+          <a:xfrm>
+            <a:off x="0" y="0"/>
+            <a:ext cx="12192000" cy="1150000"/>
+          </a:xfrm>
+          <a:prstGeom prst="rect">
+            <a:avLst/>
+          </a:prstGeom>
+          <a:solidFill>
+            <a:srgbClr val="010328"/>
+          </a:solidFill>
+          <a:ln>
+            <a:noFill/>
+          </a:ln>
+          <a:effectLst/>
+        </p:spPr>
+        <p:style>
+          <a:lnRef idx="1">
+            <a:schemeClr val="accent1"/>
+          </a:lnRef>
+          <a:fillRef idx="3">
+            <a:schemeClr val="accent1"/>
+          </a:fillRef>
+          <a:effectRef idx="2">
+            <a:schemeClr val="accent1"/>
+          </a:effectRef>
+          <a:fontRef idx="minor">
+            <a:schemeClr val="lt1"/>
+          </a:fontRef>
+        </p:style>
+        <p:txBody>
+          <a:bodyPr rtlCol="0" anchor="ctr"/>
+          <a:lstStyle/>
+          <a:p>
+            <a:pPr algn="ctr"/>
+          </a:p>
+        </p:txBody>
+      </p:sp>
+      <p:sp>
+        <p:nvSpPr>
+          <p:cNvPr id="3" name="Rectangle 2"/>
+          <p:cNvSpPr/>
+          <p:nvPr/>
+        </p:nvSpPr>
+        <p:spPr>
+          <a:xfrm>
+            <a:off x="0" y="1150000"/>
+            <a:ext cx="2600000" cy="70000"/>
+          </a:xfrm>
+          <a:prstGeom prst="rect">
+            <a:avLst/>
+          </a:prstGeom>
+          <a:solidFill>
+            <a:srgbClr val="F5670F"/>
+          </a:solidFill>
+          <a:ln>
+            <a:noFill/>
+          </a:ln>
+          <a:effectLst/>
+        </p:spPr>
+        <p:style>
+          <a:lnRef idx="1">
+            <a:schemeClr val="accent1"/>
+          </a:lnRef>
+          <a:fillRef idx="3">
+            <a:schemeClr val="accent1"/>
+          </a:fillRef>
+          <a:effectRef idx="2">
+            <a:schemeClr val="accent1"/>
+          </a:effectRef>
+          <a:fontRef idx="minor">
+            <a:schemeClr val="lt1"/>
+          </a:fontRef>
+        </p:style>
+        <p:txBody>
+          <a:bodyPr rtlCol="0" anchor="ctr"/>
+          <a:lstStyle/>
+          <a:p>
+            <a:pPr algn="ctr"/>
+          </a:p>
+        </p:txBody>
+      </p:sp>
+      <p:sp>
+        <p:nvSpPr>
+          <p:cNvPr id="4" name="TextBox 3"/>
           <p:cNvSpPr txBox="1"/>
           <p:nvPr/>
         </p:nvSpPr>
         <p:spPr>
           <a:xfrm>
-            <a:off x="548640" y="320040"/>
-            <a:ext cx="11094720" cy="914400"/>
+            <a:off x="700000" y="300000"/>
+            <a:ext cx="10792000" cy="700000"/>
           </a:xfrm>
           <a:prstGeom prst="rect">
             <a:avLst/>
@@ -8596,28 +11713,129 @@
           <a:noFill/>
         </p:spPr>
         <p:txBody>
-          <a:bodyPr wrap="none">
+          <a:bodyPr wrap="square" anchor="t">
             <a:spAutoFit/>
           </a:bodyPr>
           <a:lstStyle/>
           <a:p>
-            <a:r>
-              <a:rPr sz="3000" b="1"/>
-              <a:t>安全与合规警示（操作前必读）</a:t>
-            </a:r>
-          </a:p>
-        </p:txBody>
-      </p:sp>
-      <p:sp>
-        <p:nvSpPr>
-          <p:cNvPr id="3" name="TextBox 2"/>
+            <a:pPr algn="l">
+              <a:lnSpc>
+                <a:spcPct val="110000"/>
+              </a:lnSpc>
+              <a:spcAft>
+                <a:spcPts val="600"/>
+              </a:spcAft>
+            </a:pPr>
+            <a:r>
+              <a:rPr sz="2400" b="1">
+                <a:solidFill>
+                  <a:srgbClr val="FFFFFF"/>
+                </a:solidFill>
+                <a:latin typeface="微软雅黑"/>
+              </a:rPr>
+              <a:t>下次课预告（第12周）</a:t>
+            </a:r>
+          </a:p>
+        </p:txBody>
+      </p:sp>
+      <p:sp>
+        <p:nvSpPr>
+          <p:cNvPr id="5" name="Rectangle 4"/>
+          <p:cNvSpPr/>
+          <p:nvPr/>
+        </p:nvSpPr>
+        <p:spPr>
+          <a:xfrm>
+            <a:off x="760000" y="1900000"/>
+            <a:ext cx="10900000" cy="1600000"/>
+          </a:xfrm>
+          <a:prstGeom prst="rect">
+            <a:avLst/>
+          </a:prstGeom>
+          <a:solidFill>
+            <a:srgbClr val="F3F6FD"/>
+          </a:solidFill>
+          <a:ln>
+            <a:noFill/>
+          </a:ln>
+          <a:effectLst/>
+        </p:spPr>
+        <p:style>
+          <a:lnRef idx="1">
+            <a:schemeClr val="accent1"/>
+          </a:lnRef>
+          <a:fillRef idx="3">
+            <a:schemeClr val="accent1"/>
+          </a:fillRef>
+          <a:effectRef idx="2">
+            <a:schemeClr val="accent1"/>
+          </a:effectRef>
+          <a:fontRef idx="minor">
+            <a:schemeClr val="lt1"/>
+          </a:fontRef>
+        </p:style>
+        <p:txBody>
+          <a:bodyPr rtlCol="0" anchor="ctr"/>
+          <a:lstStyle/>
+          <a:p>
+            <a:pPr algn="ctr"/>
+          </a:p>
+        </p:txBody>
+      </p:sp>
+      <p:sp>
+        <p:nvSpPr>
+          <p:cNvPr id="6" name="Rectangle 5"/>
+          <p:cNvSpPr/>
+          <p:nvPr/>
+        </p:nvSpPr>
+        <p:spPr>
+          <a:xfrm>
+            <a:off x="760000" y="1900000"/>
+            <a:ext cx="150000" cy="1600000"/>
+          </a:xfrm>
+          <a:prstGeom prst="rect">
+            <a:avLst/>
+          </a:prstGeom>
+          <a:solidFill>
+            <a:srgbClr val="F5670F"/>
+          </a:solidFill>
+          <a:ln>
+            <a:noFill/>
+          </a:ln>
+          <a:effectLst/>
+        </p:spPr>
+        <p:style>
+          <a:lnRef idx="1">
+            <a:schemeClr val="accent1"/>
+          </a:lnRef>
+          <a:fillRef idx="3">
+            <a:schemeClr val="accent1"/>
+          </a:fillRef>
+          <a:effectRef idx="2">
+            <a:schemeClr val="accent1"/>
+          </a:effectRef>
+          <a:fontRef idx="minor">
+            <a:schemeClr val="lt1"/>
+          </a:fontRef>
+        </p:style>
+        <p:txBody>
+          <a:bodyPr rtlCol="0" anchor="ctr"/>
+          <a:lstStyle/>
+          <a:p>
+            <a:pPr algn="ctr"/>
+          </a:p>
+        </p:txBody>
+      </p:sp>
+      <p:sp>
+        <p:nvSpPr>
+          <p:cNvPr id="7" name="TextBox 6"/>
           <p:cNvSpPr txBox="1"/>
           <p:nvPr/>
         </p:nvSpPr>
         <p:spPr>
           <a:xfrm>
-            <a:off x="731520" y="1371600"/>
-            <a:ext cx="10728960" cy="4663440"/>
+            <a:off x="1020000" y="2050000"/>
+            <a:ext cx="10500000" cy="1400000"/>
           </a:xfrm>
           <a:prstGeom prst="rect">
             <a:avLst/>
@@ -8625,69 +11843,107 @@
           <a:noFill/>
         </p:spPr>
         <p:txBody>
-          <a:bodyPr wrap="square">
+          <a:bodyPr wrap="square" anchor="t">
             <a:spAutoFit/>
           </a:bodyPr>
           <a:lstStyle/>
           <a:p>
-            <a:pPr>
+            <a:pPr algn="l">
+              <a:lnSpc>
+                <a:spcPct val="110000"/>
+              </a:lnSpc>
               <a:spcAft>
-                <a:spcPts val="1000"/>
+                <a:spcPts val="600"/>
               </a:spcAft>
             </a:pPr>
             <a:r>
-              <a:rPr sz="1800"/>
-              <a:t>1. 上机前确认本工位电源开关与急停位置，确认设备处于安全状态。</a:t>
-            </a:r>
-          </a:p>
-          <a:p>
-            <a:pPr>
+              <a:rPr sz="1700" b="1">
+                <a:solidFill>
+                  <a:srgbClr val="010328"/>
+                </a:solidFill>
+                <a:latin typeface="微软雅黑"/>
+              </a:rPr>
+              <a:t>主题: 按checklist完成终验自查——应用：见工单</a:t>
+            </a:r>
+          </a:p>
+          <a:p>
+            <a:pPr algn="l">
+              <a:lnSpc>
+                <a:spcPct val="110000"/>
+              </a:lnSpc>
               <a:spcAft>
-                <a:spcPts val="1000"/>
+                <a:spcPts val="600"/>
               </a:spcAft>
             </a:pPr>
             <a:r>
-              <a:rPr sz="1800"/>
-              <a:t>2. 涉及接线的操作一律先断电、后验电、再作业，禁止带电插拔。</a:t>
-            </a:r>
-          </a:p>
-          <a:p>
-            <a:pPr>
+              <a:rPr sz="1300" b="0">
+                <a:solidFill>
+                  <a:srgbClr val="44546A"/>
+                </a:solidFill>
+                <a:latin typeface="微软雅黑"/>
+              </a:rPr>
+              <a:t>预习快问: checklist三清单(功能/规范/演示)你组还差哪几项？</a:t>
+            </a:r>
+          </a:p>
+        </p:txBody>
+      </p:sp>
+      <p:sp>
+        <p:nvSpPr>
+          <p:cNvPr id="8" name="TextBox 7"/>
+          <p:cNvSpPr txBox="1"/>
+          <p:nvPr/>
+        </p:nvSpPr>
+        <p:spPr>
+          <a:xfrm>
+            <a:off x="760000" y="3900000"/>
+            <a:ext cx="10900000" cy="900000"/>
+          </a:xfrm>
+          <a:prstGeom prst="rect">
+            <a:avLst/>
+          </a:prstGeom>
+          <a:noFill/>
+        </p:spPr>
+        <p:txBody>
+          <a:bodyPr wrap="square" anchor="t">
+            <a:spAutoFit/>
+          </a:bodyPr>
+          <a:lstStyle/>
+          <a:p>
+            <a:pPr algn="l">
+              <a:lnSpc>
+                <a:spcPct val="110000"/>
+              </a:lnSpc>
               <a:spcAft>
-                <a:spcPts val="1000"/>
+                <a:spcPts val="600"/>
               </a:spcAft>
             </a:pPr>
             <a:r>
-              <a:rPr sz="1800"/>
-              <a:t>3. 身体任何部位不进入设备运动/散热区域，长发束起，不佩戴悬垂饰物。</a:t>
-            </a:r>
-          </a:p>
-          <a:p>
-            <a:pPr>
+              <a:rPr sz="1400" b="1">
+                <a:solidFill>
+                  <a:srgbClr val="0545E8"/>
+                </a:solidFill>
+                <a:latin typeface="微软雅黑"/>
+              </a:rPr>
+              <a:t>课前完成：导学单 + 预习自测 + starter环境自检</a:t>
+            </a:r>
+          </a:p>
+          <a:p>
+            <a:pPr algn="l">
+              <a:lnSpc>
+                <a:spcPct val="110000"/>
+              </a:lnSpc>
               <a:spcAft>
-                <a:spcPts val="1000"/>
+                <a:spcPts val="600"/>
               </a:spcAft>
             </a:pPr>
             <a:r>
-              <a:rPr sz="1800"/>
-              <a:t>4. 调试程序前先静态检查、再低速小样本试运行，确认无异常后放大规模。</a:t>
-            </a:r>
-          </a:p>
-          <a:p>
-            <a:pPr>
-              <a:spcAft>
-                <a:spcPts val="1000"/>
-              </a:spcAft>
-            </a:pPr>
-            <a:r>
-              <a:rPr sz="1800"/>
-              <a:t>5. 任何不确定或异常情况，立即停止操作并报告指导教师，不擅自处置。</a:t>
-            </a:r>
-          </a:p>
-          <a:p>
-            <a:r>
-              <a:rPr sz="1400" b="1"/>
-              <a:t>以上任一条违反，本次任务按课程标准「安全规范一票否决」条款记 0 分并中止实训。</a:t>
+              <a:rPr sz="1250" b="0">
+                <a:solidFill>
+                  <a:srgbClr val="44546A"/>
+                </a:solidFill>
+                <a:latin typeface="微软雅黑"/>
+              </a:rPr>
+              <a:t>带着问题来上课——Predict先于Run</a:t>
             </a:r>
           </a:p>
         </p:txBody>

--- a/V2授课PPT/W11-第22次课-从虚拟设备采数到云端上报.pptx
+++ b/V2授课PPT/W11-第22次课-从虚拟设备采数到云端上报.pptx
@@ -13,6 +13,8 @@
     <p:sldId id="369" r:id="rId19"/>
     <p:sldId id="370" r:id="rId20"/>
     <p:sldId id="371" r:id="rId21"/>
+    <p:sldId id="372" r:id="rId22"/>
+    <p:sldId id="373" r:id="rId23"/>
     <p:sldId id="318" r:id="rId70"/>
     <p:sldId id="337" r:id="rId89"/>
     <p:sldId id="364" r:id="rId116"/>
@@ -4398,14 +4400,102 @@
       <p:grpSpPr/>
       <p:sp>
         <p:nvSpPr>
-          <p:cNvPr id="2" name="TextBox 1"/>
+          <p:cNvPr id="2" name="Rectangle 1"/>
+          <p:cNvSpPr/>
+          <p:nvPr/>
+        </p:nvSpPr>
+        <p:spPr>
+          <a:xfrm>
+            <a:off x="0" y="0"/>
+            <a:ext cx="12192000" cy="1150000"/>
+          </a:xfrm>
+          <a:prstGeom prst="rect">
+            <a:avLst/>
+          </a:prstGeom>
+          <a:solidFill>
+            <a:srgbClr val="010328"/>
+          </a:solidFill>
+          <a:ln>
+            <a:noFill/>
+          </a:ln>
+          <a:effectLst/>
+        </p:spPr>
+        <p:style>
+          <a:lnRef idx="1">
+            <a:schemeClr val="accent1"/>
+          </a:lnRef>
+          <a:fillRef idx="3">
+            <a:schemeClr val="accent1"/>
+          </a:fillRef>
+          <a:effectRef idx="2">
+            <a:schemeClr val="accent1"/>
+          </a:effectRef>
+          <a:fontRef idx="minor">
+            <a:schemeClr val="lt1"/>
+          </a:fontRef>
+        </p:style>
+        <p:txBody>
+          <a:bodyPr rtlCol="0" anchor="ctr"/>
+          <a:lstStyle/>
+          <a:p>
+            <a:pPr algn="ctr"/>
+          </a:p>
+        </p:txBody>
+      </p:sp>
+      <p:sp>
+        <p:nvSpPr>
+          <p:cNvPr id="3" name="Rectangle 2"/>
+          <p:cNvSpPr/>
+          <p:nvPr/>
+        </p:nvSpPr>
+        <p:spPr>
+          <a:xfrm>
+            <a:off x="0" y="1150000"/>
+            <a:ext cx="2600000" cy="70000"/>
+          </a:xfrm>
+          <a:prstGeom prst="rect">
+            <a:avLst/>
+          </a:prstGeom>
+          <a:solidFill>
+            <a:srgbClr val="F5670F"/>
+          </a:solidFill>
+          <a:ln>
+            <a:noFill/>
+          </a:ln>
+          <a:effectLst/>
+        </p:spPr>
+        <p:style>
+          <a:lnRef idx="1">
+            <a:schemeClr val="accent1"/>
+          </a:lnRef>
+          <a:fillRef idx="3">
+            <a:schemeClr val="accent1"/>
+          </a:fillRef>
+          <a:effectRef idx="2">
+            <a:schemeClr val="accent1"/>
+          </a:effectRef>
+          <a:fontRef idx="minor">
+            <a:schemeClr val="lt1"/>
+          </a:fontRef>
+        </p:style>
+        <p:txBody>
+          <a:bodyPr rtlCol="0" anchor="ctr"/>
+          <a:lstStyle/>
+          <a:p>
+            <a:pPr algn="ctr"/>
+          </a:p>
+        </p:txBody>
+      </p:sp>
+      <p:sp>
+        <p:nvSpPr>
+          <p:cNvPr id="4" name="TextBox 3"/>
           <p:cNvSpPr txBox="1"/>
           <p:nvPr/>
         </p:nvSpPr>
         <p:spPr>
           <a:xfrm>
-            <a:off x="548640" y="320040"/>
-            <a:ext cx="11094720" cy="914400"/>
+            <a:off x="700000" y="300000"/>
+            <a:ext cx="10792000" cy="700000"/>
           </a:xfrm>
           <a:prstGeom prst="rect">
             <a:avLst/>
@@ -4413,28 +4503,169 @@
           <a:noFill/>
         </p:spPr>
         <p:txBody>
-          <a:bodyPr wrap="none">
+          <a:bodyPr wrap="square" anchor="ctr">
             <a:spAutoFit/>
           </a:bodyPr>
           <a:lstStyle/>
           <a:p>
-            <a:r>
-              <a:rPr sz="3000" b="1"/>
-              <a:t>本任务六步法导航</a:t>
-            </a:r>
-          </a:p>
-        </p:txBody>
-      </p:sp>
-      <p:sp>
-        <p:nvSpPr>
-          <p:cNvPr id="3" name="TextBox 2"/>
+            <a:pPr algn="l">
+              <a:lnSpc>
+                <a:spcPct val="110000"/>
+              </a:lnSpc>
+              <a:spcAft>
+                <a:spcPts val="600"/>
+              </a:spcAft>
+            </a:pPr>
+            <a:r>
+              <a:rPr sz="2400" b="1">
+                <a:solidFill>
+                  <a:srgbClr val="FFFFFF"/>
+                </a:solidFill>
+                <a:latin typeface="微软雅黑"/>
+              </a:rPr>
+              <a:t>下次课预告 · 带着问题去下一讲</a:t>
+            </a:r>
+          </a:p>
+        </p:txBody>
+      </p:sp>
+      <p:sp>
+        <p:nvSpPr>
+          <p:cNvPr id="18" name="Rectangle 17"/>
+          <p:cNvSpPr/>
+          <p:nvPr/>
+        </p:nvSpPr>
+        <p:spPr>
+          <a:xfrm>
+            <a:off x="500000" y="6500000"/>
+            <a:ext cx="11100000" cy="20000"/>
+          </a:xfrm>
+          <a:prstGeom prst="rect">
+            <a:avLst/>
+          </a:prstGeom>
+          <a:solidFill>
+            <a:srgbClr val="C9D4EE"/>
+          </a:solidFill>
+          <a:ln>
+            <a:noFill/>
+          </a:ln>
+          <a:effectLst/>
+        </p:spPr>
+        <p:style>
+          <a:lnRef idx="1">
+            <a:schemeClr val="accent1"/>
+          </a:lnRef>
+          <a:fillRef idx="3">
+            <a:schemeClr val="accent1"/>
+          </a:fillRef>
+          <a:effectRef idx="2">
+            <a:schemeClr val="accent1"/>
+          </a:effectRef>
+          <a:fontRef idx="minor">
+            <a:schemeClr val="lt1"/>
+          </a:fontRef>
+        </p:style>
+        <p:txBody>
+          <a:bodyPr rtlCol="0" anchor="ctr"/>
+          <a:lstStyle/>
+          <a:p>
+            <a:pPr algn="ctr"/>
+          </a:p>
+        </p:txBody>
+      </p:sp>
+      <p:sp>
+        <p:nvSpPr>
+          <p:cNvPr id="19" name="TextBox 18"/>
           <p:cNvSpPr txBox="1"/>
           <p:nvPr/>
         </p:nvSpPr>
         <p:spPr>
           <a:xfrm>
-            <a:off x="731520" y="1371600"/>
-            <a:ext cx="10728960" cy="4663440"/>
+            <a:off x="500000" y="6540000"/>
+            <a:ext cx="7000000" cy="300000"/>
+          </a:xfrm>
+          <a:prstGeom prst="rect">
+            <a:avLst/>
+          </a:prstGeom>
+          <a:noFill/>
+        </p:spPr>
+        <p:txBody>
+          <a:bodyPr wrap="square" anchor="t">
+            <a:spAutoFit/>
+          </a:bodyPr>
+          <a:lstStyle/>
+          <a:p>
+            <a:pPr algn="l">
+              <a:lnSpc>
+                <a:spcPct val="110000"/>
+              </a:lnSpc>
+              <a:spcAft>
+                <a:spcPts val="600"/>
+              </a:spcAft>
+            </a:pPr>
+            <a:r>
+              <a:rPr sz="1000" b="0">
+                <a:solidFill>
+                  <a:srgbClr val="8A97B5"/>
+                </a:solidFill>
+                <a:latin typeface="微软雅黑"/>
+              </a:rPr>
+              <a:t>两江智造集团 · Python编程基础</a:t>
+            </a:r>
+          </a:p>
+        </p:txBody>
+      </p:sp>
+      <p:sp>
+        <p:nvSpPr>
+          <p:cNvPr id="20" name="TextBox 19"/>
+          <p:cNvSpPr txBox="1"/>
+          <p:nvPr/>
+        </p:nvSpPr>
+        <p:spPr>
+          <a:xfrm>
+            <a:off x="10600000" y="6540000"/>
+            <a:ext cx="1000000" cy="300000"/>
+          </a:xfrm>
+          <a:prstGeom prst="rect">
+            <a:avLst/>
+          </a:prstGeom>
+          <a:noFill/>
+        </p:spPr>
+        <p:txBody>
+          <a:bodyPr wrap="square" anchor="t">
+            <a:spAutoFit/>
+          </a:bodyPr>
+          <a:lstStyle/>
+          <a:p>
+            <a:pPr algn="r">
+              <a:lnSpc>
+                <a:spcPct val="110000"/>
+              </a:lnSpc>
+              <a:spcAft>
+                <a:spcPts val="600"/>
+              </a:spcAft>
+            </a:pPr>
+            <a:r>
+              <a:rPr sz="1000" b="0">
+                <a:solidFill>
+                  <a:srgbClr val="8A97B5"/>
+                </a:solidFill>
+                <a:latin typeface="微软雅黑"/>
+              </a:rPr>
+              <a:t>10 / 16</a:t>
+            </a:r>
+          </a:p>
+        </p:txBody>
+      </p:sp>
+      <p:sp>
+        <p:nvSpPr>
+          <p:cNvPr id="21" name="TextBox 20"/>
+          <p:cNvSpPr txBox="1"/>
+          <p:nvPr/>
+        </p:nvSpPr>
+        <p:spPr>
+          <a:xfrm>
+            <a:off x="457200" y="1389888"/>
+            <a:ext cx="11274552" cy="274320"/>
           </a:xfrm>
           <a:prstGeom prst="rect">
             <a:avLst/>
@@ -4447,47 +4678,510 @@
           </a:bodyPr>
           <a:lstStyle/>
           <a:p>
-            <a:pPr>
-              <a:spcAft>
-                <a:spcPts val="1000"/>
-              </a:spcAft>
-            </a:pPr>
-            <a:r>
-              <a:rPr sz="1800"/>
-              <a:t>六步法：资讯 → 计划 → 决策 → 实施 → 检查 → 评估</a:t>
-            </a:r>
-          </a:p>
-          <a:p>
-            <a:pPr>
-              <a:spcAft>
-                <a:spcPts val="1000"/>
-              </a:spcAft>
-            </a:pPr>
-            <a:r>
-              <a:rPr sz="1800"/>
-              <a:t>本讲对应工单：《程序设计基础》分层任务工单</a:t>
-            </a:r>
-          </a:p>
-          <a:p>
-            <a:pPr>
-              <a:spcAft>
-                <a:spcPts val="1000"/>
-              </a:spcAft>
-            </a:pPr>
-            <a:r>
-              <a:rPr sz="1800"/>
-              <a:t>课堂产出：工单第六节实施记录须当堂填写，含操作前安全打勾与学生本人签字。</a:t>
-            </a:r>
-          </a:p>
-          <a:p>
-            <a:pPr>
-              <a:spcAft>
-                <a:spcPts val="1000"/>
-              </a:spcAft>
-            </a:pPr>
-            <a:r>
-              <a:rPr sz="1800"/>
-              <a:t>课后交付：班组长／操作员／教师三方联签后交回，缺签视为未交付。</a:t>
+            <a:r>
+              <a:rPr sz="1050" b="0">
+                <a:solidFill>
+                  <a:srgbClr val="6B7280"/>
+                </a:solidFill>
+                <a:latin typeface="微软雅黑"/>
+              </a:rPr>
+              <a:t>带着问题去下一讲——预习任务与自测问题逐字取自课程安排，课前完成。</a:t>
+            </a:r>
+          </a:p>
+        </p:txBody>
+      </p:sp>
+      <p:sp>
+        <p:nvSpPr>
+          <p:cNvPr id="22" name="Rectangle 21"/>
+          <p:cNvSpPr/>
+          <p:nvPr/>
+        </p:nvSpPr>
+        <p:spPr>
+          <a:xfrm>
+            <a:off x="457200" y="1920240"/>
+            <a:ext cx="11274552" cy="960120"/>
+          </a:xfrm>
+          <a:prstGeom prst="rect">
+            <a:avLst/>
+          </a:prstGeom>
+          <a:solidFill>
+            <a:srgbClr val="F7F9FC"/>
+          </a:solidFill>
+          <a:ln>
+            <a:solidFill>
+              <a:srgbClr val="D6DCE4"/>
+            </a:solidFill>
+          </a:ln>
+          <a:effectLst/>
+        </p:spPr>
+        <p:style>
+          <a:lnRef idx="1">
+            <a:schemeClr val="accent1"/>
+          </a:lnRef>
+          <a:fillRef idx="3">
+            <a:schemeClr val="accent1"/>
+          </a:fillRef>
+          <a:effectRef idx="2">
+            <a:schemeClr val="accent1"/>
+          </a:effectRef>
+          <a:fontRef idx="minor">
+            <a:schemeClr val="lt1"/>
+          </a:fontRef>
+        </p:style>
+        <p:txBody>
+          <a:bodyPr rtlCol="0" anchor="ctr" wrap="square"/>
+          <a:lstStyle/>
+          <a:p>
+            <a:pPr algn="ctr"/>
+          </a:p>
+        </p:txBody>
+      </p:sp>
+      <p:sp>
+        <p:nvSpPr>
+          <p:cNvPr id="23" name="Rectangle 22"/>
+          <p:cNvSpPr/>
+          <p:nvPr/>
+        </p:nvSpPr>
+        <p:spPr>
+          <a:xfrm>
+            <a:off x="457200" y="1920240"/>
+            <a:ext cx="82296" cy="960120"/>
+          </a:xfrm>
+          <a:prstGeom prst="rect">
+            <a:avLst/>
+          </a:prstGeom>
+          <a:solidFill>
+            <a:srgbClr val="2F5D8C"/>
+          </a:solidFill>
+          <a:ln>
+            <a:noFill/>
+          </a:ln>
+          <a:effectLst/>
+        </p:spPr>
+        <p:style>
+          <a:lnRef idx="1">
+            <a:schemeClr val="accent1"/>
+          </a:lnRef>
+          <a:fillRef idx="3">
+            <a:schemeClr val="accent1"/>
+          </a:fillRef>
+          <a:effectRef idx="2">
+            <a:schemeClr val="accent1"/>
+          </a:effectRef>
+          <a:fontRef idx="minor">
+            <a:schemeClr val="lt1"/>
+          </a:fontRef>
+        </p:style>
+        <p:txBody>
+          <a:bodyPr rtlCol="0" anchor="ctr" wrap="square"/>
+          <a:lstStyle/>
+          <a:p>
+            <a:pPr algn="ctr"/>
+          </a:p>
+        </p:txBody>
+      </p:sp>
+      <p:sp>
+        <p:nvSpPr>
+          <p:cNvPr id="24" name="TextBox 23"/>
+          <p:cNvSpPr txBox="1"/>
+          <p:nvPr/>
+        </p:nvSpPr>
+        <p:spPr>
+          <a:xfrm>
+            <a:off x="685800" y="2084832"/>
+            <a:ext cx="10881360" cy="685800"/>
+          </a:xfrm>
+          <a:prstGeom prst="rect">
+            <a:avLst/>
+          </a:prstGeom>
+          <a:noFill/>
+        </p:spPr>
+        <p:txBody>
+          <a:bodyPr wrap="square">
+            <a:spAutoFit/>
+          </a:bodyPr>
+          <a:lstStyle/>
+          <a:p>
+            <a:r>
+              <a:rPr sz="1050" b="0">
+                <a:solidFill>
+                  <a:srgbClr val="2B2F36"/>
+                </a:solidFill>
+                <a:latin typeface="微软雅黑"/>
+              </a:rPr>
+              <a:t>主题：按checklist完成终验自查——应用：见工单</a:t>
+            </a:r>
+          </a:p>
+        </p:txBody>
+      </p:sp>
+      <p:sp>
+        <p:nvSpPr>
+          <p:cNvPr id="25" name="Rectangle 24"/>
+          <p:cNvSpPr/>
+          <p:nvPr/>
+        </p:nvSpPr>
+        <p:spPr>
+          <a:xfrm>
+            <a:off x="457200" y="3026664"/>
+            <a:ext cx="11274552" cy="960120"/>
+          </a:xfrm>
+          <a:prstGeom prst="rect">
+            <a:avLst/>
+          </a:prstGeom>
+          <a:solidFill>
+            <a:srgbClr val="F7F9FC"/>
+          </a:solidFill>
+          <a:ln>
+            <a:solidFill>
+              <a:srgbClr val="D6DCE4"/>
+            </a:solidFill>
+          </a:ln>
+          <a:effectLst/>
+        </p:spPr>
+        <p:style>
+          <a:lnRef idx="1">
+            <a:schemeClr val="accent1"/>
+          </a:lnRef>
+          <a:fillRef idx="3">
+            <a:schemeClr val="accent1"/>
+          </a:fillRef>
+          <a:effectRef idx="2">
+            <a:schemeClr val="accent1"/>
+          </a:effectRef>
+          <a:fontRef idx="minor">
+            <a:schemeClr val="lt1"/>
+          </a:fontRef>
+        </p:style>
+        <p:txBody>
+          <a:bodyPr rtlCol="0" anchor="ctr" wrap="square"/>
+          <a:lstStyle/>
+          <a:p>
+            <a:pPr algn="ctr"/>
+          </a:p>
+        </p:txBody>
+      </p:sp>
+      <p:sp>
+        <p:nvSpPr>
+          <p:cNvPr id="26" name="Rectangle 25"/>
+          <p:cNvSpPr/>
+          <p:nvPr/>
+        </p:nvSpPr>
+        <p:spPr>
+          <a:xfrm>
+            <a:off x="457200" y="3026664"/>
+            <a:ext cx="82296" cy="960120"/>
+          </a:xfrm>
+          <a:prstGeom prst="rect">
+            <a:avLst/>
+          </a:prstGeom>
+          <a:solidFill>
+            <a:srgbClr val="2F5D8C"/>
+          </a:solidFill>
+          <a:ln>
+            <a:noFill/>
+          </a:ln>
+          <a:effectLst/>
+        </p:spPr>
+        <p:style>
+          <a:lnRef idx="1">
+            <a:schemeClr val="accent1"/>
+          </a:lnRef>
+          <a:fillRef idx="3">
+            <a:schemeClr val="accent1"/>
+          </a:fillRef>
+          <a:effectRef idx="2">
+            <a:schemeClr val="accent1"/>
+          </a:effectRef>
+          <a:fontRef idx="minor">
+            <a:schemeClr val="lt1"/>
+          </a:fontRef>
+        </p:style>
+        <p:txBody>
+          <a:bodyPr rtlCol="0" anchor="ctr" wrap="square"/>
+          <a:lstStyle/>
+          <a:p>
+            <a:pPr algn="ctr"/>
+          </a:p>
+        </p:txBody>
+      </p:sp>
+      <p:sp>
+        <p:nvSpPr>
+          <p:cNvPr id="27" name="TextBox 26"/>
+          <p:cNvSpPr txBox="1"/>
+          <p:nvPr/>
+        </p:nvSpPr>
+        <p:spPr>
+          <a:xfrm>
+            <a:off x="685800" y="3191256"/>
+            <a:ext cx="10881360" cy="685800"/>
+          </a:xfrm>
+          <a:prstGeom prst="rect">
+            <a:avLst/>
+          </a:prstGeom>
+          <a:noFill/>
+        </p:spPr>
+        <p:txBody>
+          <a:bodyPr wrap="square">
+            <a:spAutoFit/>
+          </a:bodyPr>
+          <a:lstStyle/>
+          <a:p>
+            <a:r>
+              <a:rPr sz="1050" b="0">
+                <a:solidFill>
+                  <a:srgbClr val="2B2F36"/>
+                </a:solidFill>
+                <a:latin typeface="微软雅黑"/>
+              </a:rPr>
+              <a:t>预习快问：checklist三清单(功能/规范/演示)你组还差哪几项？</a:t>
+            </a:r>
+          </a:p>
+        </p:txBody>
+      </p:sp>
+      <p:sp>
+        <p:nvSpPr>
+          <p:cNvPr id="28" name="Rectangle 27"/>
+          <p:cNvSpPr/>
+          <p:nvPr/>
+        </p:nvSpPr>
+        <p:spPr>
+          <a:xfrm>
+            <a:off x="457200" y="4133087"/>
+            <a:ext cx="11274552" cy="960120"/>
+          </a:xfrm>
+          <a:prstGeom prst="rect">
+            <a:avLst/>
+          </a:prstGeom>
+          <a:solidFill>
+            <a:srgbClr val="F7F9FC"/>
+          </a:solidFill>
+          <a:ln>
+            <a:solidFill>
+              <a:srgbClr val="D6DCE4"/>
+            </a:solidFill>
+          </a:ln>
+          <a:effectLst/>
+        </p:spPr>
+        <p:style>
+          <a:lnRef idx="1">
+            <a:schemeClr val="accent1"/>
+          </a:lnRef>
+          <a:fillRef idx="3">
+            <a:schemeClr val="accent1"/>
+          </a:fillRef>
+          <a:effectRef idx="2">
+            <a:schemeClr val="accent1"/>
+          </a:effectRef>
+          <a:fontRef idx="minor">
+            <a:schemeClr val="lt1"/>
+          </a:fontRef>
+        </p:style>
+        <p:txBody>
+          <a:bodyPr rtlCol="0" anchor="ctr" wrap="square"/>
+          <a:lstStyle/>
+          <a:p>
+            <a:pPr algn="ctr"/>
+          </a:p>
+        </p:txBody>
+      </p:sp>
+      <p:sp>
+        <p:nvSpPr>
+          <p:cNvPr id="29" name="Rectangle 28"/>
+          <p:cNvSpPr/>
+          <p:nvPr/>
+        </p:nvSpPr>
+        <p:spPr>
+          <a:xfrm>
+            <a:off x="457200" y="4133087"/>
+            <a:ext cx="82296" cy="960120"/>
+          </a:xfrm>
+          <a:prstGeom prst="rect">
+            <a:avLst/>
+          </a:prstGeom>
+          <a:solidFill>
+            <a:srgbClr val="2F5D8C"/>
+          </a:solidFill>
+          <a:ln>
+            <a:noFill/>
+          </a:ln>
+          <a:effectLst/>
+        </p:spPr>
+        <p:style>
+          <a:lnRef idx="1">
+            <a:schemeClr val="accent1"/>
+          </a:lnRef>
+          <a:fillRef idx="3">
+            <a:schemeClr val="accent1"/>
+          </a:fillRef>
+          <a:effectRef idx="2">
+            <a:schemeClr val="accent1"/>
+          </a:effectRef>
+          <a:fontRef idx="minor">
+            <a:schemeClr val="lt1"/>
+          </a:fontRef>
+        </p:style>
+        <p:txBody>
+          <a:bodyPr rtlCol="0" anchor="ctr" wrap="square"/>
+          <a:lstStyle/>
+          <a:p>
+            <a:pPr algn="ctr"/>
+          </a:p>
+        </p:txBody>
+      </p:sp>
+      <p:sp>
+        <p:nvSpPr>
+          <p:cNvPr id="30" name="TextBox 29"/>
+          <p:cNvSpPr txBox="1"/>
+          <p:nvPr/>
+        </p:nvSpPr>
+        <p:spPr>
+          <a:xfrm>
+            <a:off x="685800" y="4297679"/>
+            <a:ext cx="10881360" cy="685800"/>
+          </a:xfrm>
+          <a:prstGeom prst="rect">
+            <a:avLst/>
+          </a:prstGeom>
+          <a:noFill/>
+        </p:spPr>
+        <p:txBody>
+          <a:bodyPr wrap="square">
+            <a:spAutoFit/>
+          </a:bodyPr>
+          <a:lstStyle/>
+          <a:p>
+            <a:r>
+              <a:rPr sz="1050" b="0">
+                <a:solidFill>
+                  <a:srgbClr val="2B2F36"/>
+                </a:solidFill>
+                <a:latin typeface="微软雅黑"/>
+              </a:rPr>
+              <a:t>课前完成：导学单 + 预习自测 + starter环境自检</a:t>
+            </a:r>
+          </a:p>
+        </p:txBody>
+      </p:sp>
+      <p:sp>
+        <p:nvSpPr>
+          <p:cNvPr id="31" name="Rectangle 30"/>
+          <p:cNvSpPr/>
+          <p:nvPr/>
+        </p:nvSpPr>
+        <p:spPr>
+          <a:xfrm>
+            <a:off x="457200" y="5239512"/>
+            <a:ext cx="11274552" cy="960120"/>
+          </a:xfrm>
+          <a:prstGeom prst="rect">
+            <a:avLst/>
+          </a:prstGeom>
+          <a:solidFill>
+            <a:srgbClr val="F7F9FC"/>
+          </a:solidFill>
+          <a:ln>
+            <a:solidFill>
+              <a:srgbClr val="D6DCE4"/>
+            </a:solidFill>
+          </a:ln>
+          <a:effectLst/>
+        </p:spPr>
+        <p:style>
+          <a:lnRef idx="1">
+            <a:schemeClr val="accent1"/>
+          </a:lnRef>
+          <a:fillRef idx="3">
+            <a:schemeClr val="accent1"/>
+          </a:fillRef>
+          <a:effectRef idx="2">
+            <a:schemeClr val="accent1"/>
+          </a:effectRef>
+          <a:fontRef idx="minor">
+            <a:schemeClr val="lt1"/>
+          </a:fontRef>
+        </p:style>
+        <p:txBody>
+          <a:bodyPr rtlCol="0" anchor="ctr" wrap="square"/>
+          <a:lstStyle/>
+          <a:p>
+            <a:pPr algn="ctr"/>
+          </a:p>
+        </p:txBody>
+      </p:sp>
+      <p:sp>
+        <p:nvSpPr>
+          <p:cNvPr id="32" name="Rectangle 31"/>
+          <p:cNvSpPr/>
+          <p:nvPr/>
+        </p:nvSpPr>
+        <p:spPr>
+          <a:xfrm>
+            <a:off x="457200" y="5239512"/>
+            <a:ext cx="82296" cy="960120"/>
+          </a:xfrm>
+          <a:prstGeom prst="rect">
+            <a:avLst/>
+          </a:prstGeom>
+          <a:solidFill>
+            <a:srgbClr val="2F5D8C"/>
+          </a:solidFill>
+          <a:ln>
+            <a:noFill/>
+          </a:ln>
+          <a:effectLst/>
+        </p:spPr>
+        <p:style>
+          <a:lnRef idx="1">
+            <a:schemeClr val="accent1"/>
+          </a:lnRef>
+          <a:fillRef idx="3">
+            <a:schemeClr val="accent1"/>
+          </a:fillRef>
+          <a:effectRef idx="2">
+            <a:schemeClr val="accent1"/>
+          </a:effectRef>
+          <a:fontRef idx="minor">
+            <a:schemeClr val="lt1"/>
+          </a:fontRef>
+        </p:style>
+        <p:txBody>
+          <a:bodyPr rtlCol="0" anchor="ctr" wrap="square"/>
+          <a:lstStyle/>
+          <a:p>
+            <a:pPr algn="ctr"/>
+          </a:p>
+        </p:txBody>
+      </p:sp>
+      <p:sp>
+        <p:nvSpPr>
+          <p:cNvPr id="33" name="TextBox 32"/>
+          <p:cNvSpPr txBox="1"/>
+          <p:nvPr/>
+        </p:nvSpPr>
+        <p:spPr>
+          <a:xfrm>
+            <a:off x="685800" y="5404103"/>
+            <a:ext cx="10881360" cy="685800"/>
+          </a:xfrm>
+          <a:prstGeom prst="rect">
+            <a:avLst/>
+          </a:prstGeom>
+          <a:noFill/>
+        </p:spPr>
+        <p:txBody>
+          <a:bodyPr wrap="square">
+            <a:spAutoFit/>
+          </a:bodyPr>
+          <a:lstStyle/>
+          <a:p>
+            <a:r>
+              <a:rPr sz="1050" b="0">
+                <a:solidFill>
+                  <a:srgbClr val="2B2F36"/>
+                </a:solidFill>
+                <a:latin typeface="微软雅黑"/>
+              </a:rPr>
+              <a:t>带着问题：来上课——Predict先于Run</a:t>
             </a:r>
           </a:p>
         </p:txBody>
@@ -4512,14 +5206,102 @@
       <p:grpSpPr/>
       <p:sp>
         <p:nvSpPr>
-          <p:cNvPr id="2" name="TextBox 1"/>
+          <p:cNvPr id="2" name="Rectangle 1"/>
+          <p:cNvSpPr/>
+          <p:nvPr/>
+        </p:nvSpPr>
+        <p:spPr>
+          <a:xfrm>
+            <a:off x="0" y="0"/>
+            <a:ext cx="12192000" cy="1150000"/>
+          </a:xfrm>
+          <a:prstGeom prst="rect">
+            <a:avLst/>
+          </a:prstGeom>
+          <a:solidFill>
+            <a:srgbClr val="010328"/>
+          </a:solidFill>
+          <a:ln>
+            <a:noFill/>
+          </a:ln>
+          <a:effectLst/>
+        </p:spPr>
+        <p:style>
+          <a:lnRef idx="1">
+            <a:schemeClr val="accent1"/>
+          </a:lnRef>
+          <a:fillRef idx="3">
+            <a:schemeClr val="accent1"/>
+          </a:fillRef>
+          <a:effectRef idx="2">
+            <a:schemeClr val="accent1"/>
+          </a:effectRef>
+          <a:fontRef idx="minor">
+            <a:schemeClr val="lt1"/>
+          </a:fontRef>
+        </p:style>
+        <p:txBody>
+          <a:bodyPr rtlCol="0" anchor="ctr"/>
+          <a:lstStyle/>
+          <a:p>
+            <a:pPr algn="ctr"/>
+          </a:p>
+        </p:txBody>
+      </p:sp>
+      <p:sp>
+        <p:nvSpPr>
+          <p:cNvPr id="3" name="Rectangle 2"/>
+          <p:cNvSpPr/>
+          <p:nvPr/>
+        </p:nvSpPr>
+        <p:spPr>
+          <a:xfrm>
+            <a:off x="0" y="1150000"/>
+            <a:ext cx="2600000" cy="70000"/>
+          </a:xfrm>
+          <a:prstGeom prst="rect">
+            <a:avLst/>
+          </a:prstGeom>
+          <a:solidFill>
+            <a:srgbClr val="F5670F"/>
+          </a:solidFill>
+          <a:ln>
+            <a:noFill/>
+          </a:ln>
+          <a:effectLst/>
+        </p:spPr>
+        <p:style>
+          <a:lnRef idx="1">
+            <a:schemeClr val="accent1"/>
+          </a:lnRef>
+          <a:fillRef idx="3">
+            <a:schemeClr val="accent1"/>
+          </a:fillRef>
+          <a:effectRef idx="2">
+            <a:schemeClr val="accent1"/>
+          </a:effectRef>
+          <a:fontRef idx="minor">
+            <a:schemeClr val="lt1"/>
+          </a:fontRef>
+        </p:style>
+        <p:txBody>
+          <a:bodyPr rtlCol="0" anchor="ctr"/>
+          <a:lstStyle/>
+          <a:p>
+            <a:pPr algn="ctr"/>
+          </a:p>
+        </p:txBody>
+      </p:sp>
+      <p:sp>
+        <p:nvSpPr>
+          <p:cNvPr id="4" name="TextBox 3"/>
           <p:cNvSpPr txBox="1"/>
           <p:nvPr/>
         </p:nvSpPr>
         <p:spPr>
           <a:xfrm>
-            <a:off x="548640" y="320040"/>
-            <a:ext cx="11094720" cy="914400"/>
+            <a:off x="700000" y="300000"/>
+            <a:ext cx="10792000" cy="700000"/>
           </a:xfrm>
           <a:prstGeom prst="rect">
             <a:avLst/>
@@ -4527,28 +5309,85 @@
           <a:noFill/>
         </p:spPr>
         <p:txBody>
-          <a:bodyPr wrap="none">
+          <a:bodyPr wrap="square" anchor="t">
             <a:spAutoFit/>
           </a:bodyPr>
           <a:lstStyle/>
           <a:p>
-            <a:r>
-              <a:rPr sz="3000" b="1"/>
-              <a:t>本讲与岗位任务单的衔接</a:t>
-            </a:r>
-          </a:p>
-        </p:txBody>
-      </p:sp>
-      <p:sp>
-        <p:nvSpPr>
-          <p:cNvPr id="3" name="TextBox 2"/>
+            <a:pPr algn="l">
+              <a:lnSpc>
+                <a:spcPct val="110000"/>
+              </a:lnSpc>
+              <a:spcAft>
+                <a:spcPts val="600"/>
+              </a:spcAft>
+            </a:pPr>
+            <a:r>
+              <a:rPr sz="2400" b="1">
+                <a:solidFill>
+                  <a:srgbClr val="FFFFFF"/>
+                </a:solidFill>
+                <a:latin typeface="微软雅黑"/>
+              </a:rPr>
+              <a:t>实施任务：工单1.5《工业互联网数据采集系统》</a:t>
+            </a:r>
+          </a:p>
+        </p:txBody>
+      </p:sp>
+      <p:sp>
+        <p:nvSpPr>
+          <p:cNvPr id="5" name="Rectangle 4"/>
+          <p:cNvSpPr/>
+          <p:nvPr/>
+        </p:nvSpPr>
+        <p:spPr>
+          <a:xfrm>
+            <a:off x="800000" y="1950000"/>
+            <a:ext cx="6300000" cy="3900000"/>
+          </a:xfrm>
+          <a:prstGeom prst="rect">
+            <a:avLst/>
+          </a:prstGeom>
+          <a:solidFill>
+            <a:srgbClr val="F3F6FD"/>
+          </a:solidFill>
+          <a:ln>
+            <a:noFill/>
+          </a:ln>
+          <a:effectLst/>
+        </p:spPr>
+        <p:style>
+          <a:lnRef idx="1">
+            <a:schemeClr val="accent1"/>
+          </a:lnRef>
+          <a:fillRef idx="3">
+            <a:schemeClr val="accent1"/>
+          </a:fillRef>
+          <a:effectRef idx="2">
+            <a:schemeClr val="accent1"/>
+          </a:effectRef>
+          <a:fontRef idx="minor">
+            <a:schemeClr val="lt1"/>
+          </a:fontRef>
+        </p:style>
+        <p:txBody>
+          <a:bodyPr rtlCol="0" anchor="ctr"/>
+          <a:lstStyle/>
+          <a:p>
+            <a:pPr algn="ctr"/>
+          </a:p>
+        </p:txBody>
+      </p:sp>
+      <p:sp>
+        <p:nvSpPr>
+          <p:cNvPr id="6" name="TextBox 5"/>
           <p:cNvSpPr txBox="1"/>
           <p:nvPr/>
         </p:nvSpPr>
         <p:spPr>
           <a:xfrm>
-            <a:off x="731520" y="1371600"/>
-            <a:ext cx="10728960" cy="4663440"/>
+            <a:off x="1000000" y="2100000"/>
+            <a:ext cx="5900000" cy="3600000"/>
           </a:xfrm>
           <a:prstGeom prst="rect">
             <a:avLst/>
@@ -4556,52 +5395,426 @@
           <a:noFill/>
         </p:spPr>
         <p:txBody>
-          <a:bodyPr wrap="square">
+          <a:bodyPr wrap="square" anchor="t">
             <a:spAutoFit/>
           </a:bodyPr>
           <a:lstStyle/>
           <a:p>
-            <a:pPr>
+            <a:pPr algn="l">
+              <a:lnSpc>
+                <a:spcPct val="130000"/>
+              </a:lnSpc>
               <a:spcAft>
-                <a:spcPts val="1000"/>
+                <a:spcPts val="600"/>
               </a:spcAft>
             </a:pPr>
             <a:r>
-              <a:rPr sz="1800"/>
-              <a:t>本讲在工作过程系统化课程中承担的任务环节：任务实施</a:t>
-            </a:r>
-          </a:p>
-          <a:p>
-            <a:pPr>
+              <a:rPr sz="1500" b="1">
+                <a:solidFill>
+                  <a:srgbClr val="0545E8"/>
+                </a:solidFill>
+                <a:latin typeface="微软雅黑"/>
+              </a:rPr>
+              <a:t>实施步骤</a:t>
+            </a:r>
+          </a:p>
+          <a:p>
+            <a:pPr algn="l">
+              <a:lnSpc>
+                <a:spcPct val="130000"/>
+              </a:lnSpc>
               <a:spcAft>
-                <a:spcPts val="1000"/>
+                <a:spcPts val="600"/>
               </a:spcAft>
             </a:pPr>
             <a:r>
-              <a:rPr sz="1800"/>
-              <a:t>考核对齐：过程性成绩取自本讲工单第六节各模块得分合计（满分 100）。</a:t>
-            </a:r>
-          </a:p>
-          <a:p>
-            <a:pPr>
+              <a:rPr sz="1400" b="0">
+                <a:solidFill>
+                  <a:srgbClr val="010328"/>
+                </a:solidFill>
+                <a:latin typeface="微软雅黑"/>
+              </a:rPr>
+              <a:t>1. paho-mqtt连接本地代理发布</a:t>
+            </a:r>
+          </a:p>
+          <a:p>
+            <a:pPr algn="l">
+              <a:lnSpc>
+                <a:spcPct val="130000"/>
+              </a:lnSpc>
               <a:spcAft>
-                <a:spcPts val="1000"/>
+                <a:spcPts val="600"/>
               </a:spcAft>
             </a:pPr>
             <a:r>
-              <a:rPr sz="1800"/>
-              <a:t>达标线：综合成绩≥60 分，且无安全红线一票否决记录</a:t>
-            </a:r>
-          </a:p>
-          <a:p>
-            <a:pPr>
+              <a:rPr sz="1400" b="0">
+                <a:solidFill>
+                  <a:srgbClr val="010328"/>
+                </a:solidFill>
+                <a:latin typeface="微软雅黑"/>
+              </a:rPr>
+              <a:t>2. 断线重试+异常日志</a:t>
+            </a:r>
+          </a:p>
+          <a:p>
+            <a:pPr algn="l">
+              <a:lnSpc>
+                <a:spcPct val="130000"/>
+              </a:lnSpc>
               <a:spcAft>
-                <a:spcPts val="1000"/>
+                <a:spcPts val="600"/>
               </a:spcAft>
             </a:pPr>
             <a:r>
-              <a:rPr sz="1800"/>
-              <a:t>无效工单判定：未打安全勾、无本人签字、无三方联签。</a:t>
+              <a:rPr sz="1400" b="0">
+                <a:solidFill>
+                  <a:srgbClr val="010328"/>
+                </a:solidFill>
+                <a:latin typeface="微软雅黑"/>
+              </a:rPr>
+              <a:t>3. 末期复习自测20题+综合项目选题</a:t>
+            </a:r>
+          </a:p>
+        </p:txBody>
+      </p:sp>
+      <p:sp>
+        <p:nvSpPr>
+          <p:cNvPr id="7" name="Rectangle 6"/>
+          <p:cNvSpPr/>
+          <p:nvPr/>
+        </p:nvSpPr>
+        <p:spPr>
+          <a:xfrm>
+            <a:off x="7400000" y="1950000"/>
+            <a:ext cx="4000000" cy="1850000"/>
+          </a:xfrm>
+          <a:prstGeom prst="rect">
+            <a:avLst/>
+          </a:prstGeom>
+          <a:solidFill>
+            <a:srgbClr val="E8F1E8"/>
+          </a:solidFill>
+          <a:ln>
+            <a:solidFill>
+              <a:srgbClr val="0475B6"/>
+            </a:solidFill>
+          </a:ln>
+          <a:effectLst/>
+        </p:spPr>
+        <p:style>
+          <a:lnRef idx="1">
+            <a:schemeClr val="accent1"/>
+          </a:lnRef>
+          <a:fillRef idx="3">
+            <a:schemeClr val="accent1"/>
+          </a:fillRef>
+          <a:effectRef idx="2">
+            <a:schemeClr val="accent1"/>
+          </a:effectRef>
+          <a:fontRef idx="minor">
+            <a:schemeClr val="lt1"/>
+          </a:fontRef>
+        </p:style>
+        <p:txBody>
+          <a:bodyPr rtlCol="0" anchor="ctr"/>
+          <a:lstStyle/>
+          <a:p>
+            <a:pPr algn="ctr"/>
+          </a:p>
+        </p:txBody>
+      </p:sp>
+      <p:sp>
+        <p:nvSpPr>
+          <p:cNvPr id="8" name="TextBox 7"/>
+          <p:cNvSpPr txBox="1"/>
+          <p:nvPr/>
+        </p:nvSpPr>
+        <p:spPr>
+          <a:xfrm>
+            <a:off x="7550000" y="2080000"/>
+            <a:ext cx="3750000" cy="1650000"/>
+          </a:xfrm>
+          <a:prstGeom prst="rect">
+            <a:avLst/>
+          </a:prstGeom>
+          <a:noFill/>
+        </p:spPr>
+        <p:txBody>
+          <a:bodyPr wrap="square" anchor="t">
+            <a:spAutoFit/>
+          </a:bodyPr>
+          <a:lstStyle/>
+          <a:p>
+            <a:pPr algn="l">
+              <a:lnSpc>
+                <a:spcPct val="110000"/>
+              </a:lnSpc>
+              <a:spcAft>
+                <a:spcPts val="600"/>
+              </a:spcAft>
+            </a:pPr>
+            <a:r>
+              <a:rPr sz="1400" b="1">
+                <a:solidFill>
+                  <a:srgbClr val="0475B6"/>
+                </a:solidFill>
+                <a:latin typeface="微软雅黑"/>
+              </a:rPr>
+              <a:t>及格标准（D）</a:t>
+            </a:r>
+          </a:p>
+          <a:p>
+            <a:pPr algn="l">
+              <a:lnSpc>
+                <a:spcPct val="110000"/>
+              </a:lnSpc>
+              <a:spcAft>
+                <a:spcPts val="600"/>
+              </a:spcAft>
+            </a:pPr>
+            <a:r>
+              <a:rPr sz="1300" b="0">
+                <a:solidFill>
+                  <a:srgbClr val="010328"/>
+                </a:solidFill>
+                <a:latin typeface="微软雅黑"/>
+              </a:rPr>
+              <a:t>Modbus读+MQTT发布成功</a:t>
+            </a:r>
+          </a:p>
+        </p:txBody>
+      </p:sp>
+      <p:sp>
+        <p:nvSpPr>
+          <p:cNvPr id="9" name="Rectangle 8"/>
+          <p:cNvSpPr/>
+          <p:nvPr/>
+        </p:nvSpPr>
+        <p:spPr>
+          <a:xfrm>
+            <a:off x="7400000" y="3950000"/>
+            <a:ext cx="4000000" cy="1850000"/>
+          </a:xfrm>
+          <a:prstGeom prst="rect">
+            <a:avLst/>
+          </a:prstGeom>
+          <a:solidFill>
+            <a:srgbClr val="FDF0E6"/>
+          </a:solidFill>
+          <a:ln>
+            <a:solidFill>
+              <a:srgbClr val="F5670F"/>
+            </a:solidFill>
+          </a:ln>
+          <a:effectLst/>
+        </p:spPr>
+        <p:style>
+          <a:lnRef idx="1">
+            <a:schemeClr val="accent1"/>
+          </a:lnRef>
+          <a:fillRef idx="3">
+            <a:schemeClr val="accent1"/>
+          </a:fillRef>
+          <a:effectRef idx="2">
+            <a:schemeClr val="accent1"/>
+          </a:effectRef>
+          <a:fontRef idx="minor">
+            <a:schemeClr val="lt1"/>
+          </a:fontRef>
+        </p:style>
+        <p:txBody>
+          <a:bodyPr rtlCol="0" anchor="ctr"/>
+          <a:lstStyle/>
+          <a:p>
+            <a:pPr algn="ctr"/>
+          </a:p>
+        </p:txBody>
+      </p:sp>
+      <p:sp>
+        <p:nvSpPr>
+          <p:cNvPr id="10" name="TextBox 9"/>
+          <p:cNvSpPr txBox="1"/>
+          <p:nvPr/>
+        </p:nvSpPr>
+        <p:spPr>
+          <a:xfrm>
+            <a:off x="7550000" y="4080000"/>
+            <a:ext cx="3750000" cy="1650000"/>
+          </a:xfrm>
+          <a:prstGeom prst="rect">
+            <a:avLst/>
+          </a:prstGeom>
+          <a:noFill/>
+        </p:spPr>
+        <p:txBody>
+          <a:bodyPr wrap="square" anchor="t">
+            <a:spAutoFit/>
+          </a:bodyPr>
+          <a:lstStyle/>
+          <a:p>
+            <a:pPr algn="l">
+              <a:lnSpc>
+                <a:spcPct val="110000"/>
+              </a:lnSpc>
+              <a:spcAft>
+                <a:spcPts val="600"/>
+              </a:spcAft>
+            </a:pPr>
+            <a:r>
+              <a:rPr sz="1400" b="1">
+                <a:solidFill>
+                  <a:srgbClr val="F5670F"/>
+                </a:solidFill>
+                <a:latin typeface="微软雅黑"/>
+              </a:rPr>
+              <a:t>优秀标准（B+）</a:t>
+            </a:r>
+          </a:p>
+          <a:p>
+            <a:pPr algn="l">
+              <a:lnSpc>
+                <a:spcPct val="110000"/>
+              </a:lnSpc>
+              <a:spcAft>
+                <a:spcPts val="600"/>
+              </a:spcAft>
+            </a:pPr>
+            <a:r>
+              <a:rPr sz="1300" b="0">
+                <a:solidFill>
+                  <a:srgbClr val="010328"/>
+                </a:solidFill>
+                <a:latin typeface="微软雅黑"/>
+              </a:rPr>
+              <a:t>断线重连+回环验证+规范率≥90%</a:t>
+            </a:r>
+          </a:p>
+        </p:txBody>
+      </p:sp>
+      <p:sp>
+        <p:nvSpPr>
+          <p:cNvPr id="11" name="Rectangle 10"/>
+          <p:cNvSpPr/>
+          <p:nvPr/>
+        </p:nvSpPr>
+        <p:spPr>
+          <a:xfrm>
+            <a:off x="500000" y="6500000"/>
+            <a:ext cx="11100000" cy="20000"/>
+          </a:xfrm>
+          <a:prstGeom prst="rect">
+            <a:avLst/>
+          </a:prstGeom>
+          <a:solidFill>
+            <a:srgbClr val="C9D4EE"/>
+          </a:solidFill>
+          <a:ln>
+            <a:noFill/>
+          </a:ln>
+          <a:effectLst/>
+        </p:spPr>
+        <p:style>
+          <a:lnRef idx="1">
+            <a:schemeClr val="accent1"/>
+          </a:lnRef>
+          <a:fillRef idx="3">
+            <a:schemeClr val="accent1"/>
+          </a:fillRef>
+          <a:effectRef idx="2">
+            <a:schemeClr val="accent1"/>
+          </a:effectRef>
+          <a:fontRef idx="minor">
+            <a:schemeClr val="lt1"/>
+          </a:fontRef>
+        </p:style>
+        <p:txBody>
+          <a:bodyPr rtlCol="0" anchor="ctr"/>
+          <a:lstStyle/>
+          <a:p>
+            <a:pPr algn="ctr"/>
+          </a:p>
+        </p:txBody>
+      </p:sp>
+      <p:sp>
+        <p:nvSpPr>
+          <p:cNvPr id="12" name="TextBox 11"/>
+          <p:cNvSpPr txBox="1"/>
+          <p:nvPr/>
+        </p:nvSpPr>
+        <p:spPr>
+          <a:xfrm>
+            <a:off x="500000" y="6540000"/>
+            <a:ext cx="7000000" cy="300000"/>
+          </a:xfrm>
+          <a:prstGeom prst="rect">
+            <a:avLst/>
+          </a:prstGeom>
+          <a:noFill/>
+        </p:spPr>
+        <p:txBody>
+          <a:bodyPr wrap="square" anchor="t">
+            <a:spAutoFit/>
+          </a:bodyPr>
+          <a:lstStyle/>
+          <a:p>
+            <a:pPr algn="l">
+              <a:lnSpc>
+                <a:spcPct val="110000"/>
+              </a:lnSpc>
+              <a:spcAft>
+                <a:spcPts val="600"/>
+              </a:spcAft>
+            </a:pPr>
+            <a:r>
+              <a:rPr sz="1000" b="0">
+                <a:solidFill>
+                  <a:srgbClr val="8A97B5"/>
+                </a:solidFill>
+                <a:latin typeface="微软雅黑"/>
+              </a:rPr>
+              <a:t>两江智造集团 · Python编程基础</a:t>
+            </a:r>
+          </a:p>
+        </p:txBody>
+      </p:sp>
+      <p:sp>
+        <p:nvSpPr>
+          <p:cNvPr id="13" name="TextBox 12"/>
+          <p:cNvSpPr txBox="1"/>
+          <p:nvPr/>
+        </p:nvSpPr>
+        <p:spPr>
+          <a:xfrm>
+            <a:off x="10600000" y="6540000"/>
+            <a:ext cx="1000000" cy="300000"/>
+          </a:xfrm>
+          <a:prstGeom prst="rect">
+            <a:avLst/>
+          </a:prstGeom>
+          <a:noFill/>
+        </p:spPr>
+        <p:txBody>
+          <a:bodyPr wrap="square" anchor="t">
+            <a:spAutoFit/>
+          </a:bodyPr>
+          <a:lstStyle/>
+          <a:p>
+            <a:pPr algn="r">
+              <a:lnSpc>
+                <a:spcPct val="110000"/>
+              </a:lnSpc>
+              <a:spcAft>
+                <a:spcPts val="600"/>
+              </a:spcAft>
+            </a:pPr>
+            <a:r>
+              <a:rPr sz="1000" b="0">
+                <a:solidFill>
+                  <a:srgbClr val="8A97B5"/>
+                </a:solidFill>
+                <a:latin typeface="微软雅黑"/>
+              </a:rPr>
+              <a:t>11 / 16</a:t>
             </a:r>
           </a:p>
         </p:txBody>
@@ -4729,7 +5942,7 @@
           <a:noFill/>
         </p:spPr>
         <p:txBody>
-          <a:bodyPr wrap="square" anchor="ctr">
+          <a:bodyPr wrap="square" anchor="t">
             <a:spAutoFit/>
           </a:bodyPr>
           <a:lstStyle/>
@@ -4749,27 +5962,27 @@
                 </a:solidFill>
                 <a:latin typeface="微软雅黑"/>
               </a:rPr>
-              <a:t>本课重难点地图 · 老师划重点（动手前必看）</a:t>
-            </a:r>
-          </a:p>
-        </p:txBody>
-      </p:sp>
-      <p:sp>
-        <p:nvSpPr>
-          <p:cNvPr id="18" name="Rectangle 17"/>
+              <a:t>总结评价与课后任务</a:t>
+            </a:r>
+          </a:p>
+        </p:txBody>
+      </p:sp>
+      <p:sp>
+        <p:nvSpPr>
+          <p:cNvPr id="5" name="Rectangle 4"/>
           <p:cNvSpPr/>
           <p:nvPr/>
         </p:nvSpPr>
         <p:spPr>
           <a:xfrm>
-            <a:off x="500000" y="6500000"/>
-            <a:ext cx="11100000" cy="20000"/>
+            <a:off x="800000" y="1950000"/>
+            <a:ext cx="10600000" cy="1500000"/>
           </a:xfrm>
           <a:prstGeom prst="rect">
             <a:avLst/>
           </a:prstGeom>
           <a:solidFill>
-            <a:srgbClr val="C9D4EE"/>
+            <a:srgbClr val="F3F6FD"/>
           </a:solidFill>
           <a:ln>
             <a:noFill/>
@@ -4800,14 +6013,14 @@
       </p:sp>
       <p:sp>
         <p:nvSpPr>
-          <p:cNvPr id="19" name="TextBox 18"/>
+          <p:cNvPr id="6" name="TextBox 5"/>
           <p:cNvSpPr txBox="1"/>
           <p:nvPr/>
         </p:nvSpPr>
         <p:spPr>
           <a:xfrm>
-            <a:off x="500000" y="6540000"/>
-            <a:ext cx="7000000" cy="300000"/>
+            <a:off x="1000000" y="2050000"/>
+            <a:ext cx="10300000" cy="1400000"/>
           </a:xfrm>
           <a:prstGeom prst="rect">
             <a:avLst/>
@@ -4829,6 +6042,315 @@
               </a:spcAft>
             </a:pPr>
             <a:r>
+              <a:rPr sz="1500" b="1">
+                <a:solidFill>
+                  <a:srgbClr val="0545E8"/>
+                </a:solidFill>
+                <a:latin typeface="微软雅黑"/>
+              </a:rPr>
+              <a:t>评价（10分钟）：</a:t>
+            </a:r>
+          </a:p>
+          <a:p>
+            <a:pPr algn="l">
+              <a:lnSpc>
+                <a:spcPct val="110000"/>
+              </a:lnSpc>
+              <a:spcAft>
+                <a:spcPts val="600"/>
+              </a:spcAft>
+            </a:pPr>
+            <a:r>
+              <a:rPr sz="1400" b="0">
+                <a:solidFill>
+                  <a:srgbClr val="010328"/>
+                </a:solidFill>
+                <a:latin typeface="微软雅黑"/>
+              </a:rPr>
+              <a:t>按D/C/B/A量表当堂评分；工单24小时内反馈评语与改进建议。</a:t>
+            </a:r>
+          </a:p>
+        </p:txBody>
+      </p:sp>
+      <p:sp>
+        <p:nvSpPr>
+          <p:cNvPr id="7" name="TextBox 6"/>
+          <p:cNvSpPr txBox="1"/>
+          <p:nvPr/>
+        </p:nvSpPr>
+        <p:spPr>
+          <a:xfrm>
+            <a:off x="850000" y="3700000"/>
+            <a:ext cx="10600000" cy="700000"/>
+          </a:xfrm>
+          <a:prstGeom prst="rect">
+            <a:avLst/>
+          </a:prstGeom>
+          <a:noFill/>
+        </p:spPr>
+        <p:txBody>
+          <a:bodyPr wrap="square" anchor="t">
+            <a:spAutoFit/>
+          </a:bodyPr>
+          <a:lstStyle/>
+          <a:p>
+            <a:pPr algn="l">
+              <a:lnSpc>
+                <a:spcPct val="120000"/>
+              </a:lnSpc>
+              <a:spcAft>
+                <a:spcPts val="600"/>
+              </a:spcAft>
+            </a:pPr>
+            <a:r>
+              <a:rPr sz="1400" b="1">
+                <a:solidFill>
+                  <a:srgbClr val="F5670F"/>
+                </a:solidFill>
+                <a:latin typeface="微软雅黑"/>
+              </a:rPr>
+              <a:t>1. </a:t>
+            </a:r>
+            <a:r>
+              <a:rPr sz="1400" b="0">
+                <a:solidFill>
+                  <a:srgbClr val="010328"/>
+                </a:solidFill>
+                <a:latin typeface="微软雅黑"/>
+              </a:rPr>
+              <a:t>1. 完成工单项目1.5《工业互联网数据采集系统》：及格标准Modbus读取+MQTT发布基本工作；优秀标准采集完整+消息规范+异常处理完善+规范率≥90%；</a:t>
+            </a:r>
+          </a:p>
+        </p:txBody>
+      </p:sp>
+      <p:sp>
+        <p:nvSpPr>
+          <p:cNvPr id="8" name="TextBox 7"/>
+          <p:cNvSpPr txBox="1"/>
+          <p:nvPr/>
+        </p:nvSpPr>
+        <p:spPr>
+          <a:xfrm>
+            <a:off x="850000" y="4420000"/>
+            <a:ext cx="10600000" cy="700000"/>
+          </a:xfrm>
+          <a:prstGeom prst="rect">
+            <a:avLst/>
+          </a:prstGeom>
+          <a:noFill/>
+        </p:spPr>
+        <p:txBody>
+          <a:bodyPr wrap="square" anchor="t">
+            <a:spAutoFit/>
+          </a:bodyPr>
+          <a:lstStyle/>
+          <a:p>
+            <a:pPr algn="l">
+              <a:lnSpc>
+                <a:spcPct val="120000"/>
+              </a:lnSpc>
+              <a:spcAft>
+                <a:spcPts val="600"/>
+              </a:spcAft>
+            </a:pPr>
+            <a:r>
+              <a:rPr sz="1400" b="1">
+                <a:solidFill>
+                  <a:srgbClr val="F5670F"/>
+                </a:solidFill>
+                <a:latin typeface="微软雅黑"/>
+              </a:rPr>
+              <a:t>2. </a:t>
+            </a:r>
+            <a:r>
+              <a:rPr sz="1400" b="0">
+                <a:solidFill>
+                  <a:srgbClr val="010328"/>
+                </a:solidFill>
+                <a:latin typeface="微软雅黑"/>
+              </a:rPr>
+              <a:t>2. 完成综合项目需求分析与分工计划；</a:t>
+            </a:r>
+          </a:p>
+        </p:txBody>
+      </p:sp>
+      <p:sp>
+        <p:nvSpPr>
+          <p:cNvPr id="9" name="TextBox 8"/>
+          <p:cNvSpPr txBox="1"/>
+          <p:nvPr/>
+        </p:nvSpPr>
+        <p:spPr>
+          <a:xfrm>
+            <a:off x="850000" y="5140000"/>
+            <a:ext cx="10600000" cy="700000"/>
+          </a:xfrm>
+          <a:prstGeom prst="rect">
+            <a:avLst/>
+          </a:prstGeom>
+          <a:noFill/>
+        </p:spPr>
+        <p:txBody>
+          <a:bodyPr wrap="square" anchor="t">
+            <a:spAutoFit/>
+          </a:bodyPr>
+          <a:lstStyle/>
+          <a:p>
+            <a:pPr algn="l">
+              <a:lnSpc>
+                <a:spcPct val="120000"/>
+              </a:lnSpc>
+              <a:spcAft>
+                <a:spcPts val="600"/>
+              </a:spcAft>
+            </a:pPr>
+            <a:r>
+              <a:rPr sz="1400" b="1">
+                <a:solidFill>
+                  <a:srgbClr val="F5670F"/>
+                </a:solidFill>
+                <a:latin typeface="微软雅黑"/>
+              </a:rPr>
+              <a:t>3. </a:t>
+            </a:r>
+            <a:r>
+              <a:rPr sz="1400" b="0">
+                <a:solidFill>
+                  <a:srgbClr val="010328"/>
+                </a:solidFill>
+                <a:latin typeface="微软雅黑"/>
+              </a:rPr>
+              <a:t>3. 复习全课程知识清单，准备综合项目答辩。</a:t>
+            </a:r>
+          </a:p>
+        </p:txBody>
+      </p:sp>
+      <p:sp>
+        <p:nvSpPr>
+          <p:cNvPr id="10" name="TextBox 9"/>
+          <p:cNvSpPr txBox="1"/>
+          <p:nvPr/>
+        </p:nvSpPr>
+        <p:spPr>
+          <a:xfrm>
+            <a:off x="850000" y="5960000"/>
+            <a:ext cx="10600000" cy="500000"/>
+          </a:xfrm>
+          <a:prstGeom prst="rect">
+            <a:avLst/>
+          </a:prstGeom>
+          <a:noFill/>
+        </p:spPr>
+        <p:txBody>
+          <a:bodyPr wrap="square" anchor="t">
+            <a:spAutoFit/>
+          </a:bodyPr>
+          <a:lstStyle/>
+          <a:p>
+            <a:pPr algn="l">
+              <a:lnSpc>
+                <a:spcPct val="110000"/>
+              </a:lnSpc>
+              <a:spcAft>
+                <a:spcPts val="600"/>
+              </a:spcAft>
+            </a:pPr>
+            <a:r>
+              <a:rPr sz="1300" b="1">
+                <a:solidFill>
+                  <a:srgbClr val="0475B6"/>
+                </a:solidFill>
+                <a:latin typeface="微软雅黑"/>
+              </a:rPr>
+              <a:t>下次课预告：</a:t>
+            </a:r>
+            <a:r>
+              <a:rPr sz="1300" b="0">
+                <a:solidFill>
+                  <a:srgbClr val="44546A"/>
+                </a:solidFill>
+                <a:latin typeface="微软雅黑"/>
+              </a:rPr>
+              <a:t>见下次课工单任务书</a:t>
+            </a:r>
+          </a:p>
+        </p:txBody>
+      </p:sp>
+      <p:sp>
+        <p:nvSpPr>
+          <p:cNvPr id="11" name="Rectangle 10"/>
+          <p:cNvSpPr/>
+          <p:nvPr/>
+        </p:nvSpPr>
+        <p:spPr>
+          <a:xfrm>
+            <a:off x="500000" y="6500000"/>
+            <a:ext cx="11100000" cy="20000"/>
+          </a:xfrm>
+          <a:prstGeom prst="rect">
+            <a:avLst/>
+          </a:prstGeom>
+          <a:solidFill>
+            <a:srgbClr val="C9D4EE"/>
+          </a:solidFill>
+          <a:ln>
+            <a:noFill/>
+          </a:ln>
+          <a:effectLst/>
+        </p:spPr>
+        <p:style>
+          <a:lnRef idx="1">
+            <a:schemeClr val="accent1"/>
+          </a:lnRef>
+          <a:fillRef idx="3">
+            <a:schemeClr val="accent1"/>
+          </a:fillRef>
+          <a:effectRef idx="2">
+            <a:schemeClr val="accent1"/>
+          </a:effectRef>
+          <a:fontRef idx="minor">
+            <a:schemeClr val="lt1"/>
+          </a:fontRef>
+        </p:style>
+        <p:txBody>
+          <a:bodyPr rtlCol="0" anchor="ctr"/>
+          <a:lstStyle/>
+          <a:p>
+            <a:pPr algn="ctr"/>
+          </a:p>
+        </p:txBody>
+      </p:sp>
+      <p:sp>
+        <p:nvSpPr>
+          <p:cNvPr id="12" name="TextBox 11"/>
+          <p:cNvSpPr txBox="1"/>
+          <p:nvPr/>
+        </p:nvSpPr>
+        <p:spPr>
+          <a:xfrm>
+            <a:off x="500000" y="6540000"/>
+            <a:ext cx="7000000" cy="300000"/>
+          </a:xfrm>
+          <a:prstGeom prst="rect">
+            <a:avLst/>
+          </a:prstGeom>
+          <a:noFill/>
+        </p:spPr>
+        <p:txBody>
+          <a:bodyPr wrap="square" anchor="t">
+            <a:spAutoFit/>
+          </a:bodyPr>
+          <a:lstStyle/>
+          <a:p>
+            <a:pPr algn="l">
+              <a:lnSpc>
+                <a:spcPct val="110000"/>
+              </a:lnSpc>
+              <a:spcAft>
+                <a:spcPts val="600"/>
+              </a:spcAft>
+            </a:pPr>
+            <a:r>
               <a:rPr sz="1000" b="0">
                 <a:solidFill>
                   <a:srgbClr val="8A97B5"/>
@@ -4842,7 +6364,7 @@
       </p:sp>
       <p:sp>
         <p:nvSpPr>
-          <p:cNvPr id="20" name="TextBox 19"/>
+          <p:cNvPr id="13" name="TextBox 12"/>
           <p:cNvSpPr txBox="1"/>
           <p:nvPr/>
         </p:nvSpPr>
@@ -4877,839 +6399,7 @@
                 </a:solidFill>
                 <a:latin typeface="微软雅黑"/>
               </a:rPr>
-              <a:t>6 / 14</a:t>
-            </a:r>
-          </a:p>
-        </p:txBody>
-      </p:sp>
-      <p:sp>
-        <p:nvSpPr>
-          <p:cNvPr id="21" name="TextBox 20"/>
-          <p:cNvSpPr txBox="1"/>
-          <p:nvPr/>
-        </p:nvSpPr>
-        <p:spPr>
-          <a:xfrm>
-            <a:off x="457200" y="1389888"/>
-            <a:ext cx="11274552" cy="274320"/>
-          </a:xfrm>
-          <a:prstGeom prst="rect">
-            <a:avLst/>
-          </a:prstGeom>
-          <a:noFill/>
-        </p:spPr>
-        <p:txBody>
-          <a:bodyPr wrap="square">
-            <a:spAutoFit/>
-          </a:bodyPr>
-          <a:lstStyle/>
-          <a:p>
-            <a:r>
-              <a:rPr sz="1050" b="0">
-                <a:solidFill>
-                  <a:srgbClr val="6B7280"/>
-                </a:solidFill>
-                <a:latin typeface="微软雅黑"/>
-              </a:rPr>
-              <a:t>动手前先看这页：重点要会什么、难点会卡在哪、哪里最容易错、学没学会怎么自测。</a:t>
-            </a:r>
-          </a:p>
-        </p:txBody>
-      </p:sp>
-      <p:sp>
-        <p:nvSpPr>
-          <p:cNvPr id="22" name="Rectangle 21"/>
-          <p:cNvSpPr/>
-          <p:nvPr/>
-        </p:nvSpPr>
-        <p:spPr>
-          <a:xfrm>
-            <a:off x="457200" y="1783080"/>
-            <a:ext cx="5532120" cy="3127248"/>
-          </a:xfrm>
-          <a:prstGeom prst="rect">
-            <a:avLst/>
-          </a:prstGeom>
-          <a:solidFill>
-            <a:srgbClr val="FFFFFF"/>
-          </a:solidFill>
-          <a:ln>
-            <a:solidFill>
-              <a:srgbClr val="D6DCE4"/>
-            </a:solidFill>
-          </a:ln>
-          <a:effectLst/>
-        </p:spPr>
-        <p:style>
-          <a:lnRef idx="1">
-            <a:schemeClr val="accent1"/>
-          </a:lnRef>
-          <a:fillRef idx="3">
-            <a:schemeClr val="accent1"/>
-          </a:fillRef>
-          <a:effectRef idx="2">
-            <a:schemeClr val="accent1"/>
-          </a:effectRef>
-          <a:fontRef idx="minor">
-            <a:schemeClr val="lt1"/>
-          </a:fontRef>
-        </p:style>
-        <p:txBody>
-          <a:bodyPr rtlCol="0" anchor="ctr" wrap="square"/>
-          <a:lstStyle/>
-          <a:p>
-            <a:pPr algn="ctr"/>
-          </a:p>
-        </p:txBody>
-      </p:sp>
-      <p:sp>
-        <p:nvSpPr>
-          <p:cNvPr id="23" name="Rectangle 22"/>
-          <p:cNvSpPr/>
-          <p:nvPr/>
-        </p:nvSpPr>
-        <p:spPr>
-          <a:xfrm>
-            <a:off x="457200" y="1783080"/>
-            <a:ext cx="5532120" cy="365760"/>
-          </a:xfrm>
-          <a:prstGeom prst="rect">
-            <a:avLst/>
-          </a:prstGeom>
-          <a:solidFill>
-            <a:srgbClr val="2F5D8C"/>
-          </a:solidFill>
-          <a:ln>
-            <a:noFill/>
-          </a:ln>
-          <a:effectLst/>
-        </p:spPr>
-        <p:style>
-          <a:lnRef idx="1">
-            <a:schemeClr val="accent1"/>
-          </a:lnRef>
-          <a:fillRef idx="3">
-            <a:schemeClr val="accent1"/>
-          </a:fillRef>
-          <a:effectRef idx="2">
-            <a:schemeClr val="accent1"/>
-          </a:effectRef>
-          <a:fontRef idx="minor">
-            <a:schemeClr val="lt1"/>
-          </a:fontRef>
-        </p:style>
-        <p:txBody>
-          <a:bodyPr rtlCol="0" anchor="ctr" wrap="square"/>
-          <a:lstStyle/>
-          <a:p>
-            <a:pPr algn="ctr"/>
-          </a:p>
-        </p:txBody>
-      </p:sp>
-      <p:sp>
-        <p:nvSpPr>
-          <p:cNvPr id="24" name="TextBox 23"/>
-          <p:cNvSpPr txBox="1"/>
-          <p:nvPr/>
-        </p:nvSpPr>
-        <p:spPr>
-          <a:xfrm>
-            <a:off x="566928" y="1819656"/>
-            <a:ext cx="5312664" cy="292608"/>
-          </a:xfrm>
-          <a:prstGeom prst="rect">
-            <a:avLst/>
-          </a:prstGeom>
-          <a:noFill/>
-        </p:spPr>
-        <p:txBody>
-          <a:bodyPr wrap="square">
-            <a:spAutoFit/>
-          </a:bodyPr>
-          <a:lstStyle/>
-          <a:p>
-            <a:r>
-              <a:rPr sz="1150" b="1">
-                <a:solidFill>
-                  <a:srgbClr val="FFFFFF"/>
-                </a:solidFill>
-                <a:latin typeface="微软雅黑"/>
-              </a:rPr>
-              <a:t>重点 · 必会必考（本课知识点全景）</a:t>
-            </a:r>
-          </a:p>
-        </p:txBody>
-      </p:sp>
-      <p:sp>
-        <p:nvSpPr>
-          <p:cNvPr id="25" name="TextBox 24"/>
-          <p:cNvSpPr txBox="1"/>
-          <p:nvPr/>
-        </p:nvSpPr>
-        <p:spPr>
-          <a:xfrm>
-            <a:off x="621792" y="2267712"/>
-            <a:ext cx="5257800" cy="2560320"/>
-          </a:xfrm>
-          <a:prstGeom prst="rect">
-            <a:avLst/>
-          </a:prstGeom>
-          <a:noFill/>
-        </p:spPr>
-        <p:txBody>
-          <a:bodyPr wrap="square">
-            <a:spAutoFit/>
-          </a:bodyPr>
-          <a:lstStyle/>
-          <a:p>
-            <a:r>
-              <a:rPr sz="950" b="0">
-                <a:solidFill>
-                  <a:srgbClr val="2B2F36"/>
-                </a:solidFill>
-                <a:latin typeface="微软雅黑"/>
-              </a:rPr>
-              <a:t>◆ B01 Modbus寄存器｜寄存器=PLC的储物柜编号：40001起按地址读数</a:t>
-            </a:r>
-          </a:p>
-          <a:p>
-            <a:r>
-              <a:rPr sz="950" b="0">
-                <a:solidFill>
-                  <a:srgbClr val="2B2F36"/>
-                </a:solidFill>
-                <a:latin typeface="微软雅黑"/>
-              </a:rPr>
-              <a:t>◆ B02 定点存储约定｜定点=小数×10存整数：678其实是67.8℃——PLC不存小数</a:t>
-            </a:r>
-          </a:p>
-          <a:p>
-            <a:r>
-              <a:rPr sz="950" b="0">
-                <a:solidFill>
-                  <a:srgbClr val="2B2F36"/>
-                </a:solidFill>
-                <a:latin typeface="微软雅黑"/>
-              </a:rPr>
-              <a:t>◆ B03 pymodbus读寄存器｜pymodbus=Python的Modbus翻译官——一行读PLC…</a:t>
-            </a:r>
-          </a:p>
-          <a:p>
-            <a:r>
-              <a:rPr sz="950" b="0">
-                <a:solidFill>
-                  <a:srgbClr val="2B2F36"/>
-                </a:solidFill>
-                <a:latin typeface="微软雅黑"/>
-              </a:rPr>
-              <a:t>◆ B04 MQTT主题路由｜MQTT=广播电台：主题=频道，发布订阅各取所需</a:t>
-            </a:r>
-          </a:p>
-          <a:p>
-            <a:r>
-              <a:rPr sz="950" b="0">
-                <a:solidFill>
-                  <a:srgbClr val="2B2F36"/>
-                </a:solidFill>
-                <a:latin typeface="微软雅黑"/>
-              </a:rPr>
-              <a:t>◆ B05 JSON消息含时间戳｜ts时间戳=消息的出生证明——排序追溯全靠它</a:t>
-            </a:r>
-          </a:p>
-          <a:p>
-            <a:r>
-              <a:rPr sz="950" b="0">
-                <a:solidFill>
-                  <a:srgbClr val="2B2F36"/>
-                </a:solidFill>
-                <a:latin typeface="微软雅黑"/>
-              </a:rPr>
-              <a:t>◆ B06 排错三步法｜排错三步=从外到内剥洋葱：ping通→端口通→代码通</a:t>
-            </a:r>
-          </a:p>
-        </p:txBody>
-      </p:sp>
-      <p:sp>
-        <p:nvSpPr>
-          <p:cNvPr id="26" name="Rectangle 25"/>
-          <p:cNvSpPr/>
-          <p:nvPr/>
-        </p:nvSpPr>
-        <p:spPr>
-          <a:xfrm>
-            <a:off x="6144768" y="1783080"/>
-            <a:ext cx="5586984" cy="1481328"/>
-          </a:xfrm>
-          <a:prstGeom prst="rect">
-            <a:avLst/>
-          </a:prstGeom>
-          <a:solidFill>
-            <a:srgbClr val="FFFFFF"/>
-          </a:solidFill>
-          <a:ln>
-            <a:solidFill>
-              <a:srgbClr val="D6DCE4"/>
-            </a:solidFill>
-          </a:ln>
-          <a:effectLst/>
-        </p:spPr>
-        <p:style>
-          <a:lnRef idx="1">
-            <a:schemeClr val="accent1"/>
-          </a:lnRef>
-          <a:fillRef idx="3">
-            <a:schemeClr val="accent1"/>
-          </a:fillRef>
-          <a:effectRef idx="2">
-            <a:schemeClr val="accent1"/>
-          </a:effectRef>
-          <a:fontRef idx="minor">
-            <a:schemeClr val="lt1"/>
-          </a:fontRef>
-        </p:style>
-        <p:txBody>
-          <a:bodyPr rtlCol="0" anchor="ctr" wrap="square"/>
-          <a:lstStyle/>
-          <a:p>
-            <a:pPr algn="ctr"/>
-          </a:p>
-        </p:txBody>
-      </p:sp>
-      <p:sp>
-        <p:nvSpPr>
-          <p:cNvPr id="27" name="Rectangle 26"/>
-          <p:cNvSpPr/>
-          <p:nvPr/>
-        </p:nvSpPr>
-        <p:spPr>
-          <a:xfrm>
-            <a:off x="6144768" y="1783080"/>
-            <a:ext cx="5586984" cy="365760"/>
-          </a:xfrm>
-          <a:prstGeom prst="rect">
-            <a:avLst/>
-          </a:prstGeom>
-          <a:solidFill>
-            <a:srgbClr val="8A4B2D"/>
-          </a:solidFill>
-          <a:ln>
-            <a:noFill/>
-          </a:ln>
-          <a:effectLst/>
-        </p:spPr>
-        <p:style>
-          <a:lnRef idx="1">
-            <a:schemeClr val="accent1"/>
-          </a:lnRef>
-          <a:fillRef idx="3">
-            <a:schemeClr val="accent1"/>
-          </a:fillRef>
-          <a:effectRef idx="2">
-            <a:schemeClr val="accent1"/>
-          </a:effectRef>
-          <a:fontRef idx="minor">
-            <a:schemeClr val="lt1"/>
-          </a:fontRef>
-        </p:style>
-        <p:txBody>
-          <a:bodyPr rtlCol="0" anchor="ctr" wrap="square"/>
-          <a:lstStyle/>
-          <a:p>
-            <a:pPr algn="ctr"/>
-          </a:p>
-        </p:txBody>
-      </p:sp>
-      <p:sp>
-        <p:nvSpPr>
-          <p:cNvPr id="28" name="TextBox 27"/>
-          <p:cNvSpPr txBox="1"/>
-          <p:nvPr/>
-        </p:nvSpPr>
-        <p:spPr>
-          <a:xfrm>
-            <a:off x="6254496" y="1819656"/>
-            <a:ext cx="5367528" cy="292608"/>
-          </a:xfrm>
-          <a:prstGeom prst="rect">
-            <a:avLst/>
-          </a:prstGeom>
-          <a:noFill/>
-        </p:spPr>
-        <p:txBody>
-          <a:bodyPr wrap="square">
-            <a:spAutoFit/>
-          </a:bodyPr>
-          <a:lstStyle/>
-          <a:p>
-            <a:r>
-              <a:rPr sz="1150" b="1">
-                <a:solidFill>
-                  <a:srgbClr val="FFFFFF"/>
-                </a:solidFill>
-                <a:latin typeface="微软雅黑"/>
-              </a:rPr>
-              <a:t>难点 · 易卡壳（下一页逐个击破）</a:t>
-            </a:r>
-          </a:p>
-        </p:txBody>
-      </p:sp>
-      <p:sp>
-        <p:nvSpPr>
-          <p:cNvPr id="29" name="TextBox 28"/>
-          <p:cNvSpPr txBox="1"/>
-          <p:nvPr/>
-        </p:nvSpPr>
-        <p:spPr>
-          <a:xfrm>
-            <a:off x="6309360" y="2231136"/>
-            <a:ext cx="5303520" cy="960120"/>
-          </a:xfrm>
-          <a:prstGeom prst="rect">
-            <a:avLst/>
-          </a:prstGeom>
-          <a:noFill/>
-        </p:spPr>
-        <p:txBody>
-          <a:bodyPr wrap="square">
-            <a:spAutoFit/>
-          </a:bodyPr>
-          <a:lstStyle/>
-          <a:p>
-            <a:r>
-              <a:rPr sz="900" b="0">
-                <a:solidFill>
-                  <a:srgbClr val="2B2F36"/>
-                </a:solidFill>
-                <a:latin typeface="微软雅黑"/>
-              </a:rPr>
-              <a:t>▲ 误区：地址从0还是40001起两派之争——以server文档为准</a:t>
-            </a:r>
-          </a:p>
-          <a:p>
-            <a:r>
-              <a:rPr sz="900" b="0">
-                <a:solidFill>
-                  <a:srgbClr val="2B2F36"/>
-                </a:solidFill>
-                <a:latin typeface="微软雅黑"/>
-              </a:rPr>
-              <a:t>▲ 误区：忘除倍率→温度高10倍——对不上先查约定倍率</a:t>
-            </a:r>
-          </a:p>
-          <a:p>
-            <a:r>
-              <a:rPr sz="900" b="0">
-                <a:solidFill>
-                  <a:srgbClr val="2B2F36"/>
-                </a:solidFill>
-                <a:latin typeface="微软雅黑"/>
-              </a:rPr>
-              <a:t>▲ 误区：3.x必须关键字传参(address=/count=)——照2.x旧码抄报错</a:t>
-            </a:r>
-          </a:p>
-        </p:txBody>
-      </p:sp>
-      <p:sp>
-        <p:nvSpPr>
-          <p:cNvPr id="30" name="Rectangle 29"/>
-          <p:cNvSpPr/>
-          <p:nvPr/>
-        </p:nvSpPr>
-        <p:spPr>
-          <a:xfrm>
-            <a:off x="6144768" y="3401568"/>
-            <a:ext cx="5586984" cy="1508760"/>
-          </a:xfrm>
-          <a:prstGeom prst="rect">
-            <a:avLst/>
-          </a:prstGeom>
-          <a:solidFill>
-            <a:srgbClr val="FFFFFF"/>
-          </a:solidFill>
-          <a:ln>
-            <a:solidFill>
-              <a:srgbClr val="D6DCE4"/>
-            </a:solidFill>
-          </a:ln>
-          <a:effectLst/>
-        </p:spPr>
-        <p:style>
-          <a:lnRef idx="1">
-            <a:schemeClr val="accent1"/>
-          </a:lnRef>
-          <a:fillRef idx="3">
-            <a:schemeClr val="accent1"/>
-          </a:fillRef>
-          <a:effectRef idx="2">
-            <a:schemeClr val="accent1"/>
-          </a:effectRef>
-          <a:fontRef idx="minor">
-            <a:schemeClr val="lt1"/>
-          </a:fontRef>
-        </p:style>
-        <p:txBody>
-          <a:bodyPr rtlCol="0" anchor="ctr" wrap="square"/>
-          <a:lstStyle/>
-          <a:p>
-            <a:pPr algn="ctr"/>
-          </a:p>
-        </p:txBody>
-      </p:sp>
-      <p:sp>
-        <p:nvSpPr>
-          <p:cNvPr id="31" name="Rectangle 30"/>
-          <p:cNvSpPr/>
-          <p:nvPr/>
-        </p:nvSpPr>
-        <p:spPr>
-          <a:xfrm>
-            <a:off x="6144768" y="3401568"/>
-            <a:ext cx="5586984" cy="365760"/>
-          </a:xfrm>
-          <a:prstGeom prst="rect">
-            <a:avLst/>
-          </a:prstGeom>
-          <a:solidFill>
-            <a:srgbClr val="9A3B3B"/>
-          </a:solidFill>
-          <a:ln>
-            <a:noFill/>
-          </a:ln>
-          <a:effectLst/>
-        </p:spPr>
-        <p:style>
-          <a:lnRef idx="1">
-            <a:schemeClr val="accent1"/>
-          </a:lnRef>
-          <a:fillRef idx="3">
-            <a:schemeClr val="accent1"/>
-          </a:fillRef>
-          <a:effectRef idx="2">
-            <a:schemeClr val="accent1"/>
-          </a:effectRef>
-          <a:fontRef idx="minor">
-            <a:schemeClr val="lt1"/>
-          </a:fontRef>
-        </p:style>
-        <p:txBody>
-          <a:bodyPr rtlCol="0" anchor="ctr" wrap="square"/>
-          <a:lstStyle/>
-          <a:p>
-            <a:pPr algn="ctr"/>
-          </a:p>
-        </p:txBody>
-      </p:sp>
-      <p:sp>
-        <p:nvSpPr>
-          <p:cNvPr id="32" name="TextBox 31"/>
-          <p:cNvSpPr txBox="1"/>
-          <p:nvPr/>
-        </p:nvSpPr>
-        <p:spPr>
-          <a:xfrm>
-            <a:off x="6254496" y="3438144"/>
-            <a:ext cx="5367528" cy="292608"/>
-          </a:xfrm>
-          <a:prstGeom prst="rect">
-            <a:avLst/>
-          </a:prstGeom>
-          <a:noFill/>
-        </p:spPr>
-        <p:txBody>
-          <a:bodyPr wrap="square">
-            <a:spAutoFit/>
-          </a:bodyPr>
-          <a:lstStyle/>
-          <a:p>
-            <a:r>
-              <a:rPr sz="1150" b="1">
-                <a:solidFill>
-                  <a:srgbClr val="FFFFFF"/>
-                </a:solidFill>
-                <a:latin typeface="微软雅黑"/>
-              </a:rPr>
-              <a:t>高频易错 · 动手前先记住</a:t>
-            </a:r>
-          </a:p>
-        </p:txBody>
-      </p:sp>
-      <p:sp>
-        <p:nvSpPr>
-          <p:cNvPr id="33" name="TextBox 32"/>
-          <p:cNvSpPr txBox="1"/>
-          <p:nvPr/>
-        </p:nvSpPr>
-        <p:spPr>
-          <a:xfrm>
-            <a:off x="6309360" y="3849624"/>
-            <a:ext cx="5303520" cy="960120"/>
-          </a:xfrm>
-          <a:prstGeom prst="rect">
-            <a:avLst/>
-          </a:prstGeom>
-          <a:noFill/>
-        </p:spPr>
-        <p:txBody>
-          <a:bodyPr wrap="square">
-            <a:spAutoFit/>
-          </a:bodyPr>
-          <a:lstStyle/>
-          <a:p>
-            <a:r>
-              <a:rPr sz="900" b="0">
-                <a:solidFill>
-                  <a:srgbClr val="2B2F36"/>
-                </a:solidFill>
-                <a:latin typeface="微软雅黑"/>
-              </a:rPr>
-              <a:t>✗ 连不上PLC → 先跑虚拟产线--check</a:t>
-            </a:r>
-          </a:p>
-          <a:p>
-            <a:r>
-              <a:rPr sz="900" b="0">
-                <a:solidFill>
-                  <a:srgbClr val="2B2F36"/>
-                </a:solidFill>
-                <a:latin typeface="微软雅黑"/>
-              </a:rPr>
-              <a:t>✗ 数值大10倍 → 寄存器定点换算</a:t>
-            </a:r>
-          </a:p>
-          <a:p>
-            <a:r>
-              <a:rPr sz="900" b="0">
-                <a:solidFill>
-                  <a:srgbClr val="2B2F36"/>
-                </a:solidFill>
-                <a:latin typeface="微软雅黑"/>
-              </a:rPr>
-              <a:t>✗ publish后无消息 → sleep 0.3再退</a:t>
-            </a:r>
-          </a:p>
-        </p:txBody>
-      </p:sp>
-      <p:sp>
-        <p:nvSpPr>
-          <p:cNvPr id="34" name="Rectangle 33"/>
-          <p:cNvSpPr/>
-          <p:nvPr/>
-        </p:nvSpPr>
-        <p:spPr>
-          <a:xfrm>
-            <a:off x="457200" y="5047488"/>
-            <a:ext cx="11274552" cy="1207008"/>
-          </a:xfrm>
-          <a:prstGeom prst="rect">
-            <a:avLst/>
-          </a:prstGeom>
-          <a:solidFill>
-            <a:srgbClr val="FFFFFF"/>
-          </a:solidFill>
-          <a:ln>
-            <a:solidFill>
-              <a:srgbClr val="D6DCE4"/>
-            </a:solidFill>
-          </a:ln>
-          <a:effectLst/>
-        </p:spPr>
-        <p:style>
-          <a:lnRef idx="1">
-            <a:schemeClr val="accent1"/>
-          </a:lnRef>
-          <a:fillRef idx="3">
-            <a:schemeClr val="accent1"/>
-          </a:fillRef>
-          <a:effectRef idx="2">
-            <a:schemeClr val="accent1"/>
-          </a:effectRef>
-          <a:fontRef idx="minor">
-            <a:schemeClr val="lt1"/>
-          </a:fontRef>
-        </p:style>
-        <p:txBody>
-          <a:bodyPr rtlCol="0" anchor="ctr" wrap="square"/>
-          <a:lstStyle/>
-          <a:p>
-            <a:pPr algn="ctr"/>
-          </a:p>
-        </p:txBody>
-      </p:sp>
-      <p:sp>
-        <p:nvSpPr>
-          <p:cNvPr id="35" name="Rectangle 34"/>
-          <p:cNvSpPr/>
-          <p:nvPr/>
-        </p:nvSpPr>
-        <p:spPr>
-          <a:xfrm>
-            <a:off x="457200" y="5047488"/>
-            <a:ext cx="11274552" cy="365760"/>
-          </a:xfrm>
-          <a:prstGeom prst="rect">
-            <a:avLst/>
-          </a:prstGeom>
-          <a:solidFill>
-            <a:srgbClr val="2E7D46"/>
-          </a:solidFill>
-          <a:ln>
-            <a:noFill/>
-          </a:ln>
-          <a:effectLst/>
-        </p:spPr>
-        <p:style>
-          <a:lnRef idx="1">
-            <a:schemeClr val="accent1"/>
-          </a:lnRef>
-          <a:fillRef idx="3">
-            <a:schemeClr val="accent1"/>
-          </a:fillRef>
-          <a:effectRef idx="2">
-            <a:schemeClr val="accent1"/>
-          </a:effectRef>
-          <a:fontRef idx="minor">
-            <a:schemeClr val="lt1"/>
-          </a:fontRef>
-        </p:style>
-        <p:txBody>
-          <a:bodyPr rtlCol="0" anchor="ctr" wrap="square"/>
-          <a:lstStyle/>
-          <a:p>
-            <a:pPr algn="ctr"/>
-          </a:p>
-        </p:txBody>
-      </p:sp>
-      <p:sp>
-        <p:nvSpPr>
-          <p:cNvPr id="36" name="TextBox 35"/>
-          <p:cNvSpPr txBox="1"/>
-          <p:nvPr/>
-        </p:nvSpPr>
-        <p:spPr>
-          <a:xfrm>
-            <a:off x="566928" y="5084064"/>
-            <a:ext cx="11055096" cy="292608"/>
-          </a:xfrm>
-          <a:prstGeom prst="rect">
-            <a:avLst/>
-          </a:prstGeom>
-          <a:noFill/>
-        </p:spPr>
-        <p:txBody>
-          <a:bodyPr wrap="square">
-            <a:spAutoFit/>
-          </a:bodyPr>
-          <a:lstStyle/>
-          <a:p>
-            <a:r>
-              <a:rPr sz="1150" b="1">
-                <a:solidFill>
-                  <a:srgbClr val="FFFFFF"/>
-                </a:solidFill>
-                <a:latin typeface="微软雅黑"/>
-              </a:rPr>
-              <a:t>达标自问 · 学没学会，问自己这四句（当堂评分同口径）</a:t>
-            </a:r>
-          </a:p>
-        </p:txBody>
-      </p:sp>
-      <p:sp>
-        <p:nvSpPr>
-          <p:cNvPr id="37" name="TextBox 36"/>
-          <p:cNvSpPr txBox="1"/>
-          <p:nvPr/>
-        </p:nvSpPr>
-        <p:spPr>
-          <a:xfrm>
-            <a:off x="621792" y="5458968"/>
-            <a:ext cx="10972800" cy="768096"/>
-          </a:xfrm>
-          <a:prstGeom prst="rect">
-            <a:avLst/>
-          </a:prstGeom>
-          <a:noFill/>
-        </p:spPr>
-        <p:txBody>
-          <a:bodyPr wrap="square">
-            <a:spAutoFit/>
-          </a:bodyPr>
-          <a:lstStyle/>
-          <a:p>
-            <a:r>
-              <a:rPr sz="900" b="0">
-                <a:solidFill>
-                  <a:srgbClr val="2B2F36"/>
-                </a:solidFill>
-                <a:latin typeface="微软雅黑"/>
-              </a:rPr>
-              <a:t>① 及格线我能过吗——Modbus读+MQTT发布成功</a:t>
-            </a:r>
-          </a:p>
-          <a:p>
-            <a:r>
-              <a:rPr sz="900" b="0">
-                <a:solidFill>
-                  <a:srgbClr val="2B2F36"/>
-                </a:solidFill>
-                <a:latin typeface="微软雅黑"/>
-              </a:rPr>
-              <a:t>② 优秀线我够吗——断线重连+回环验证+规范率≥90%</a:t>
-            </a:r>
-          </a:p>
-          <a:p>
-            <a:r>
-              <a:rPr sz="900" b="0">
-                <a:solidFill>
-                  <a:srgbClr val="2B2F36"/>
-                </a:solidFill>
-                <a:latin typeface="微软雅黑"/>
-              </a:rPr>
-              <a:t>③ 技能点我能独立做出来吗——连接虚拟PLC读取寄存器；paho-mqtt发布JSON消息</a:t>
-            </a:r>
-          </a:p>
-          <a:p>
-            <a:r>
-              <a:rPr sz="900" b="0">
-                <a:solidFill>
-                  <a:srgbClr val="2B2F36"/>
-                </a:solidFill>
-                <a:latin typeface="微软雅黑"/>
-              </a:rPr>
-              <a:t>④ 报错了先查「常见错误速查」页再举手——错误信息逐字读一遍，八成自己能修</a:t>
-            </a:r>
-          </a:p>
-        </p:txBody>
-      </p:sp>
-      <p:sp>
-        <p:nvSpPr>
-          <p:cNvPr id="38" name="TextBox 37"/>
-          <p:cNvSpPr txBox="1"/>
-          <p:nvPr/>
-        </p:nvSpPr>
-        <p:spPr>
-          <a:xfrm>
-            <a:off x="457200" y="6281928"/>
-            <a:ext cx="9601200" cy="182880"/>
-          </a:xfrm>
-          <a:prstGeom prst="rect">
-            <a:avLst/>
-          </a:prstGeom>
-          <a:noFill/>
-        </p:spPr>
-        <p:txBody>
-          <a:bodyPr wrap="square">
-            <a:spAutoFit/>
-          </a:bodyPr>
-          <a:lstStyle/>
-          <a:p>
-            <a:r>
-              <a:rPr sz="750" b="0">
-                <a:solidFill>
-                  <a:srgbClr val="6B7280"/>
-                </a:solidFill>
-                <a:latin typeface="微软雅黑"/>
-              </a:rPr>
-              <a:t>素材来源：同周《第21次课-设备如何在网络上说话》知识卡与避坑清单（逐字摘录）</a:t>
+              <a:t>12 / 16</a:t>
             </a:r>
           </a:p>
         </p:txBody>
@@ -5741,7 +6431,7 @@
         <p:spPr>
           <a:xfrm>
             <a:off x="0" y="0"/>
-            <a:ext cx="12192000" cy="1150000"/>
+            <a:ext cx="12192000" cy="6858000"/>
           </a:xfrm>
           <a:prstGeom prst="rect">
             <a:avLst/>
@@ -5784,8 +6474,8 @@
         </p:nvSpPr>
         <p:spPr>
           <a:xfrm>
-            <a:off x="0" y="1150000"/>
-            <a:ext cx="2600000" cy="70000"/>
+            <a:off x="0" y="2880360"/>
+            <a:ext cx="12192000" cy="50000"/>
           </a:xfrm>
           <a:prstGeom prst="rect">
             <a:avLst/>
@@ -5828,8 +6518,8 @@
         </p:nvSpPr>
         <p:spPr>
           <a:xfrm>
-            <a:off x="700000" y="300000"/>
-            <a:ext cx="10792000" cy="700000"/>
+            <a:off x="0" y="1645920"/>
+            <a:ext cx="12192000" cy="1500000"/>
           </a:xfrm>
           <a:prstGeom prst="rect">
             <a:avLst/>
@@ -5837,7 +6527,177 @@
           <a:noFill/>
         </p:spPr>
         <p:txBody>
-          <a:bodyPr wrap="square" anchor="ctr">
+          <a:bodyPr wrap="square" anchor="t">
+            <a:spAutoFit/>
+          </a:bodyPr>
+          <a:lstStyle/>
+          <a:p>
+            <a:pPr algn="ctr">
+              <a:lnSpc>
+                <a:spcPct val="110000"/>
+              </a:lnSpc>
+              <a:spcAft>
+                <a:spcPts val="600"/>
+              </a:spcAft>
+            </a:pPr>
+            <a:r>
+              <a:rPr sz="5400" b="1">
+                <a:solidFill>
+                  <a:srgbClr val="FFFFFF"/>
+                </a:solidFill>
+                <a:latin typeface="微软雅黑"/>
+              </a:rPr>
+              <a:t>THANKS</a:t>
+            </a:r>
+          </a:p>
+        </p:txBody>
+      </p:sp>
+      <p:sp>
+        <p:nvSpPr>
+          <p:cNvPr id="5" name="TextBox 4"/>
+          <p:cNvSpPr txBox="1"/>
+          <p:nvPr/>
+        </p:nvSpPr>
+        <p:spPr>
+          <a:xfrm>
+            <a:off x="0" y="3429000"/>
+            <a:ext cx="12192000" cy="800000"/>
+          </a:xfrm>
+          <a:prstGeom prst="rect">
+            <a:avLst/>
+          </a:prstGeom>
+          <a:noFill/>
+        </p:spPr>
+        <p:txBody>
+          <a:bodyPr wrap="square" anchor="t">
+            <a:spAutoFit/>
+          </a:bodyPr>
+          <a:lstStyle/>
+          <a:p>
+            <a:pPr algn="ctr">
+              <a:lnSpc>
+                <a:spcPct val="110000"/>
+              </a:lnSpc>
+              <a:spcAft>
+                <a:spcPts val="600"/>
+              </a:spcAft>
+            </a:pPr>
+            <a:r>
+              <a:rPr sz="2200" b="1">
+                <a:solidFill>
+                  <a:srgbClr val="F5670F"/>
+                </a:solidFill>
+                <a:latin typeface="微软雅黑"/>
+              </a:rPr>
+              <a:t>感谢聆听 · 动手实践出真知</a:t>
+            </a:r>
+          </a:p>
+        </p:txBody>
+      </p:sp>
+      <p:sp>
+        <p:nvSpPr>
+          <p:cNvPr id="6" name="TextBox 5"/>
+          <p:cNvSpPr txBox="1"/>
+          <p:nvPr/>
+        </p:nvSpPr>
+        <p:spPr>
+          <a:xfrm>
+            <a:off x="0" y="4526280"/>
+            <a:ext cx="12192000" cy="600000"/>
+          </a:xfrm>
+          <a:prstGeom prst="rect">
+            <a:avLst/>
+          </a:prstGeom>
+          <a:noFill/>
+        </p:spPr>
+        <p:txBody>
+          <a:bodyPr wrap="square" anchor="t">
+            <a:spAutoFit/>
+          </a:bodyPr>
+          <a:lstStyle/>
+          <a:p>
+            <a:pPr algn="ctr">
+              <a:lnSpc>
+                <a:spcPct val="110000"/>
+              </a:lnSpc>
+              <a:spcAft>
+                <a:spcPts val="600"/>
+              </a:spcAft>
+            </a:pPr>
+            <a:r>
+              <a:rPr sz="1400" b="0">
+                <a:solidFill>
+                  <a:srgbClr val="BBC6E6"/>
+                </a:solidFill>
+                <a:latin typeface="微软雅黑"/>
+              </a:rPr>
+              <a:t>以生为本   |   做中学 · 学中做</a:t>
+            </a:r>
+          </a:p>
+        </p:txBody>
+      </p:sp>
+      <p:sp>
+        <p:nvSpPr>
+          <p:cNvPr id="7" name="Rectangle 6"/>
+          <p:cNvSpPr/>
+          <p:nvPr/>
+        </p:nvSpPr>
+        <p:spPr>
+          <a:xfrm>
+            <a:off x="500000" y="6500000"/>
+            <a:ext cx="11100000" cy="20000"/>
+          </a:xfrm>
+          <a:prstGeom prst="rect">
+            <a:avLst/>
+          </a:prstGeom>
+          <a:solidFill>
+            <a:srgbClr val="C9D4EE"/>
+          </a:solidFill>
+          <a:ln>
+            <a:noFill/>
+          </a:ln>
+          <a:effectLst/>
+        </p:spPr>
+        <p:style>
+          <a:lnRef idx="1">
+            <a:schemeClr val="accent1"/>
+          </a:lnRef>
+          <a:fillRef idx="3">
+            <a:schemeClr val="accent1"/>
+          </a:fillRef>
+          <a:effectRef idx="2">
+            <a:schemeClr val="accent1"/>
+          </a:effectRef>
+          <a:fontRef idx="minor">
+            <a:schemeClr val="lt1"/>
+          </a:fontRef>
+        </p:style>
+        <p:txBody>
+          <a:bodyPr rtlCol="0" anchor="ctr"/>
+          <a:lstStyle/>
+          <a:p>
+            <a:pPr algn="ctr"/>
+          </a:p>
+        </p:txBody>
+      </p:sp>
+      <p:sp>
+        <p:nvSpPr>
+          <p:cNvPr id="8" name="TextBox 7"/>
+          <p:cNvSpPr txBox="1"/>
+          <p:nvPr/>
+        </p:nvSpPr>
+        <p:spPr>
+          <a:xfrm>
+            <a:off x="500000" y="6540000"/>
+            <a:ext cx="7000000" cy="300000"/>
+          </a:xfrm>
+          <a:prstGeom prst="rect">
+            <a:avLst/>
+          </a:prstGeom>
+          <a:noFill/>
+        </p:spPr>
+        <p:txBody>
+          <a:bodyPr wrap="square" anchor="t">
             <a:spAutoFit/>
           </a:bodyPr>
           <a:lstStyle/>
@@ -5851,92 +6711,6 @@
               </a:spcAft>
             </a:pPr>
             <a:r>
-              <a:rPr sz="2400" b="1">
-                <a:solidFill>
-                  <a:srgbClr val="FFFFFF"/>
-                </a:solidFill>
-                <a:latin typeface="微软雅黑"/>
-              </a:rPr>
-              <a:t>难点逐个击破 · 零基础照做就能会</a:t>
-            </a:r>
-          </a:p>
-        </p:txBody>
-      </p:sp>
-      <p:sp>
-        <p:nvSpPr>
-          <p:cNvPr id="18" name="Rectangle 17"/>
-          <p:cNvSpPr/>
-          <p:nvPr/>
-        </p:nvSpPr>
-        <p:spPr>
-          <a:xfrm>
-            <a:off x="500000" y="6500000"/>
-            <a:ext cx="11100000" cy="20000"/>
-          </a:xfrm>
-          <a:prstGeom prst="rect">
-            <a:avLst/>
-          </a:prstGeom>
-          <a:solidFill>
-            <a:srgbClr val="C9D4EE"/>
-          </a:solidFill>
-          <a:ln>
-            <a:noFill/>
-          </a:ln>
-          <a:effectLst/>
-        </p:spPr>
-        <p:style>
-          <a:lnRef idx="1">
-            <a:schemeClr val="accent1"/>
-          </a:lnRef>
-          <a:fillRef idx="3">
-            <a:schemeClr val="accent1"/>
-          </a:fillRef>
-          <a:effectRef idx="2">
-            <a:schemeClr val="accent1"/>
-          </a:effectRef>
-          <a:fontRef idx="minor">
-            <a:schemeClr val="lt1"/>
-          </a:fontRef>
-        </p:style>
-        <p:txBody>
-          <a:bodyPr rtlCol="0" anchor="ctr"/>
-          <a:lstStyle/>
-          <a:p>
-            <a:pPr algn="ctr"/>
-          </a:p>
-        </p:txBody>
-      </p:sp>
-      <p:sp>
-        <p:nvSpPr>
-          <p:cNvPr id="19" name="TextBox 18"/>
-          <p:cNvSpPr txBox="1"/>
-          <p:nvPr/>
-        </p:nvSpPr>
-        <p:spPr>
-          <a:xfrm>
-            <a:off x="500000" y="6540000"/>
-            <a:ext cx="7000000" cy="300000"/>
-          </a:xfrm>
-          <a:prstGeom prst="rect">
-            <a:avLst/>
-          </a:prstGeom>
-          <a:noFill/>
-        </p:spPr>
-        <p:txBody>
-          <a:bodyPr wrap="square" anchor="t">
-            <a:spAutoFit/>
-          </a:bodyPr>
-          <a:lstStyle/>
-          <a:p>
-            <a:pPr algn="l">
-              <a:lnSpc>
-                <a:spcPct val="110000"/>
-              </a:lnSpc>
-              <a:spcAft>
-                <a:spcPts val="600"/>
-              </a:spcAft>
-            </a:pPr>
-            <a:r>
               <a:rPr sz="1000" b="0">
                 <a:solidFill>
                   <a:srgbClr val="8A97B5"/>
@@ -5950,7 +6724,7 @@
       </p:sp>
       <p:sp>
         <p:nvSpPr>
-          <p:cNvPr id="20" name="TextBox 19"/>
+          <p:cNvPr id="9" name="TextBox 8"/>
           <p:cNvSpPr txBox="1"/>
           <p:nvPr/>
         </p:nvSpPr>
@@ -5965,7 +6739,7 @@
           <a:noFill/>
         </p:spPr>
         <p:txBody>
-          <a:bodyPr wrap="square" anchor="t">
+          <a:bodyPr wrap="square" anchor="ctr">
             <a:spAutoFit/>
           </a:bodyPr>
           <a:lstStyle/>
@@ -5985,1025 +6759,7 @@
                 </a:solidFill>
                 <a:latin typeface="微软雅黑"/>
               </a:rPr>
-              <a:t>7 / 14</a:t>
-            </a:r>
-          </a:p>
-        </p:txBody>
-      </p:sp>
-      <p:sp>
-        <p:nvSpPr>
-          <p:cNvPr id="21" name="TextBox 20"/>
-          <p:cNvSpPr txBox="1"/>
-          <p:nvPr/>
-        </p:nvSpPr>
-        <p:spPr>
-          <a:xfrm>
-            <a:off x="457200" y="1389888"/>
-            <a:ext cx="11274552" cy="274320"/>
-          </a:xfrm>
-          <a:prstGeom prst="rect">
-            <a:avLst/>
-          </a:prstGeom>
-          <a:noFill/>
-        </p:spPr>
-        <p:txBody>
-          <a:bodyPr wrap="square">
-            <a:spAutoFit/>
-          </a:bodyPr>
-          <a:lstStyle/>
-          <a:p>
-            <a:r>
-              <a:rPr sz="1050" b="0">
-                <a:solidFill>
-                  <a:srgbClr val="6B7280"/>
-                </a:solidFill>
-                <a:latin typeface="微软雅黑"/>
-              </a:rPr>
-              <a:t>每个难点四步走：先看「为什么容易栽」对号入座 → 记住「一招破解」→ 照「动手验证」做一遍 → 做不出回知识详解页。</a:t>
-            </a:r>
-          </a:p>
-        </p:txBody>
-      </p:sp>
-      <p:sp>
-        <p:nvSpPr>
-          <p:cNvPr id="22" name="Rectangle 21"/>
-          <p:cNvSpPr/>
-          <p:nvPr/>
-        </p:nvSpPr>
-        <p:spPr>
-          <a:xfrm>
-            <a:off x="457200" y="1783080"/>
-            <a:ext cx="11274552" cy="1481328"/>
-          </a:xfrm>
-          <a:prstGeom prst="rect">
-            <a:avLst/>
-          </a:prstGeom>
-          <a:solidFill>
-            <a:srgbClr val="F7F9FC"/>
-          </a:solidFill>
-          <a:ln>
-            <a:solidFill>
-              <a:srgbClr val="D6DCE4"/>
-            </a:solidFill>
-          </a:ln>
-          <a:effectLst/>
-        </p:spPr>
-        <p:style>
-          <a:lnRef idx="1">
-            <a:schemeClr val="accent1"/>
-          </a:lnRef>
-          <a:fillRef idx="3">
-            <a:schemeClr val="accent1"/>
-          </a:fillRef>
-          <a:effectRef idx="2">
-            <a:schemeClr val="accent1"/>
-          </a:effectRef>
-          <a:fontRef idx="minor">
-            <a:schemeClr val="lt1"/>
-          </a:fontRef>
-        </p:style>
-        <p:txBody>
-          <a:bodyPr rtlCol="0" anchor="ctr" wrap="square"/>
-          <a:lstStyle/>
-          <a:p>
-            <a:pPr algn="ctr"/>
-          </a:p>
-        </p:txBody>
-      </p:sp>
-      <p:sp>
-        <p:nvSpPr>
-          <p:cNvPr id="23" name="Rectangle 22"/>
-          <p:cNvSpPr/>
-          <p:nvPr/>
-        </p:nvSpPr>
-        <p:spPr>
-          <a:xfrm>
-            <a:off x="457200" y="1783080"/>
-            <a:ext cx="82296" cy="1481328"/>
-          </a:xfrm>
-          <a:prstGeom prst="rect">
-            <a:avLst/>
-          </a:prstGeom>
-          <a:solidFill>
-            <a:srgbClr val="8A4B2D"/>
-          </a:solidFill>
-          <a:ln>
-            <a:noFill/>
-          </a:ln>
-          <a:effectLst/>
-        </p:spPr>
-        <p:style>
-          <a:lnRef idx="1">
-            <a:schemeClr val="accent1"/>
-          </a:lnRef>
-          <a:fillRef idx="3">
-            <a:schemeClr val="accent1"/>
-          </a:fillRef>
-          <a:effectRef idx="2">
-            <a:schemeClr val="accent1"/>
-          </a:effectRef>
-          <a:fontRef idx="minor">
-            <a:schemeClr val="lt1"/>
-          </a:fontRef>
-        </p:style>
-        <p:txBody>
-          <a:bodyPr rtlCol="0" anchor="ctr" wrap="square"/>
-          <a:lstStyle/>
-          <a:p>
-            <a:pPr algn="ctr"/>
-          </a:p>
-        </p:txBody>
-      </p:sp>
-      <p:sp>
-        <p:nvSpPr>
-          <p:cNvPr id="24" name="TextBox 23"/>
-          <p:cNvSpPr txBox="1"/>
-          <p:nvPr/>
-        </p:nvSpPr>
-        <p:spPr>
-          <a:xfrm>
-            <a:off x="658368" y="1828800"/>
-            <a:ext cx="10972800" cy="274320"/>
-          </a:xfrm>
-          <a:prstGeom prst="rect">
-            <a:avLst/>
-          </a:prstGeom>
-          <a:noFill/>
-        </p:spPr>
-        <p:txBody>
-          <a:bodyPr wrap="square">
-            <a:spAutoFit/>
-          </a:bodyPr>
-          <a:lstStyle/>
-          <a:p>
-            <a:r>
-              <a:rPr sz="1100" b="1">
-                <a:solidFill>
-                  <a:srgbClr val="8A4B2D"/>
-                </a:solidFill>
-                <a:latin typeface="微软雅黑"/>
-              </a:rPr>
-              <a:t>难点1：B01 Modbus寄存器</a:t>
-            </a:r>
-          </a:p>
-        </p:txBody>
-      </p:sp>
-      <p:sp>
-        <p:nvSpPr>
-          <p:cNvPr id="25" name="TextBox 24"/>
-          <p:cNvSpPr txBox="1"/>
-          <p:nvPr/>
-        </p:nvSpPr>
-        <p:spPr>
-          <a:xfrm>
-            <a:off x="658368" y="2148840"/>
-            <a:ext cx="3566160" cy="219456"/>
-          </a:xfrm>
-          <a:prstGeom prst="rect">
-            <a:avLst/>
-          </a:prstGeom>
-          <a:noFill/>
-        </p:spPr>
-        <p:txBody>
-          <a:bodyPr wrap="square">
-            <a:spAutoFit/>
-          </a:bodyPr>
-          <a:lstStyle/>
-          <a:p>
-            <a:r>
-              <a:rPr sz="900" b="1">
-                <a:solidFill>
-                  <a:srgbClr val="B5533A"/>
-                </a:solidFill>
-                <a:latin typeface="微软雅黑"/>
-              </a:rPr>
-              <a:t>为什么容易栽</a:t>
-            </a:r>
-          </a:p>
-        </p:txBody>
-      </p:sp>
-      <p:sp>
-        <p:nvSpPr>
-          <p:cNvPr id="26" name="TextBox 25"/>
-          <p:cNvSpPr txBox="1"/>
-          <p:nvPr/>
-        </p:nvSpPr>
-        <p:spPr>
-          <a:xfrm>
-            <a:off x="658368" y="2386584"/>
-            <a:ext cx="3584448" cy="822960"/>
-          </a:xfrm>
-          <a:prstGeom prst="rect">
-            <a:avLst/>
-          </a:prstGeom>
-          <a:noFill/>
-        </p:spPr>
-        <p:txBody>
-          <a:bodyPr wrap="square">
-            <a:spAutoFit/>
-          </a:bodyPr>
-          <a:lstStyle/>
-          <a:p>
-            <a:r>
-              <a:rPr sz="850" b="0">
-                <a:solidFill>
-                  <a:srgbClr val="2B2F36"/>
-                </a:solidFill>
-                <a:latin typeface="微软雅黑"/>
-              </a:rPr>
-              <a:t>误区：地址从0还是40001起两派之争——以server文档为准</a:t>
-            </a:r>
-          </a:p>
-        </p:txBody>
-      </p:sp>
-      <p:sp>
-        <p:nvSpPr>
-          <p:cNvPr id="27" name="TextBox 26"/>
-          <p:cNvSpPr txBox="1"/>
-          <p:nvPr/>
-        </p:nvSpPr>
-        <p:spPr>
-          <a:xfrm>
-            <a:off x="4334255" y="2148840"/>
-            <a:ext cx="3566160" cy="219456"/>
-          </a:xfrm>
-          <a:prstGeom prst="rect">
-            <a:avLst/>
-          </a:prstGeom>
-          <a:noFill/>
-        </p:spPr>
-        <p:txBody>
-          <a:bodyPr wrap="square">
-            <a:spAutoFit/>
-          </a:bodyPr>
-          <a:lstStyle/>
-          <a:p>
-            <a:r>
-              <a:rPr sz="900" b="1">
-                <a:solidFill>
-                  <a:srgbClr val="2E7D46"/>
-                </a:solidFill>
-                <a:latin typeface="微软雅黑"/>
-              </a:rPr>
-              <a:t>一招破解（记住这句）</a:t>
-            </a:r>
-          </a:p>
-        </p:txBody>
-      </p:sp>
-      <p:sp>
-        <p:nvSpPr>
-          <p:cNvPr id="28" name="TextBox 27"/>
-          <p:cNvSpPr txBox="1"/>
-          <p:nvPr/>
-        </p:nvSpPr>
-        <p:spPr>
-          <a:xfrm>
-            <a:off x="4334255" y="2386584"/>
-            <a:ext cx="3584448" cy="822960"/>
-          </a:xfrm>
-          <a:prstGeom prst="rect">
-            <a:avLst/>
-          </a:prstGeom>
-          <a:noFill/>
-        </p:spPr>
-        <p:txBody>
-          <a:bodyPr wrap="square">
-            <a:spAutoFit/>
-          </a:bodyPr>
-          <a:lstStyle/>
-          <a:p>
-            <a:r>
-              <a:rPr sz="850" b="0">
-                <a:solidFill>
-                  <a:srgbClr val="2B2F36"/>
-                </a:solidFill>
-                <a:latin typeface="微软雅黑"/>
-              </a:rPr>
-              <a:t>寄存器=PLC的储物柜编号：40001起按地址读数</a:t>
-            </a:r>
-          </a:p>
-        </p:txBody>
-      </p:sp>
-      <p:sp>
-        <p:nvSpPr>
-          <p:cNvPr id="29" name="TextBox 28"/>
-          <p:cNvSpPr txBox="1"/>
-          <p:nvPr/>
-        </p:nvSpPr>
-        <p:spPr>
-          <a:xfrm>
-            <a:off x="8010143" y="2148840"/>
-            <a:ext cx="3566160" cy="219456"/>
-          </a:xfrm>
-          <a:prstGeom prst="rect">
-            <a:avLst/>
-          </a:prstGeom>
-          <a:noFill/>
-        </p:spPr>
-        <p:txBody>
-          <a:bodyPr wrap="square">
-            <a:spAutoFit/>
-          </a:bodyPr>
-          <a:lstStyle/>
-          <a:p>
-            <a:r>
-              <a:rPr sz="900" b="1">
-                <a:solidFill>
-                  <a:srgbClr val="35506E"/>
-                </a:solidFill>
-                <a:latin typeface="微软雅黑"/>
-              </a:rPr>
-              <a:t>动手验证（照做一遍）</a:t>
-            </a:r>
-          </a:p>
-        </p:txBody>
-      </p:sp>
-      <p:sp>
-        <p:nvSpPr>
-          <p:cNvPr id="30" name="TextBox 29"/>
-          <p:cNvSpPr txBox="1"/>
-          <p:nvPr/>
-        </p:nvSpPr>
-        <p:spPr>
-          <a:xfrm>
-            <a:off x="8010143" y="2386584"/>
-            <a:ext cx="3584448" cy="822960"/>
-          </a:xfrm>
-          <a:prstGeom prst="rect">
-            <a:avLst/>
-          </a:prstGeom>
-          <a:noFill/>
-        </p:spPr>
-        <p:txBody>
-          <a:bodyPr wrap="square">
-            <a:spAutoFit/>
-          </a:bodyPr>
-          <a:lstStyle/>
-          <a:p>
-            <a:r>
-              <a:rPr sz="850" b="0">
-                <a:solidFill>
-                  <a:srgbClr val="2B2F36"/>
-                </a:solidFill>
-                <a:latin typeface="微软雅黑"/>
-              </a:rPr>
-              <a:t>五测点(温度/压力/振动/转速/状态)固定地址——通信的门牌号 client.read_holding_registers(address=0, count=5)</a:t>
-            </a:r>
-          </a:p>
-        </p:txBody>
-      </p:sp>
-      <p:sp>
-        <p:nvSpPr>
-          <p:cNvPr id="31" name="Rectangle 30"/>
-          <p:cNvSpPr/>
-          <p:nvPr/>
-        </p:nvSpPr>
-        <p:spPr>
-          <a:xfrm>
-            <a:off x="457200" y="3383280"/>
-            <a:ext cx="11274552" cy="1481328"/>
-          </a:xfrm>
-          <a:prstGeom prst="rect">
-            <a:avLst/>
-          </a:prstGeom>
-          <a:solidFill>
-            <a:srgbClr val="F7F9FC"/>
-          </a:solidFill>
-          <a:ln>
-            <a:solidFill>
-              <a:srgbClr val="D6DCE4"/>
-            </a:solidFill>
-          </a:ln>
-          <a:effectLst/>
-        </p:spPr>
-        <p:style>
-          <a:lnRef idx="1">
-            <a:schemeClr val="accent1"/>
-          </a:lnRef>
-          <a:fillRef idx="3">
-            <a:schemeClr val="accent1"/>
-          </a:fillRef>
-          <a:effectRef idx="2">
-            <a:schemeClr val="accent1"/>
-          </a:effectRef>
-          <a:fontRef idx="minor">
-            <a:schemeClr val="lt1"/>
-          </a:fontRef>
-        </p:style>
-        <p:txBody>
-          <a:bodyPr rtlCol="0" anchor="ctr" wrap="square"/>
-          <a:lstStyle/>
-          <a:p>
-            <a:pPr algn="ctr"/>
-          </a:p>
-        </p:txBody>
-      </p:sp>
-      <p:sp>
-        <p:nvSpPr>
-          <p:cNvPr id="32" name="Rectangle 31"/>
-          <p:cNvSpPr/>
-          <p:nvPr/>
-        </p:nvSpPr>
-        <p:spPr>
-          <a:xfrm>
-            <a:off x="457200" y="3383280"/>
-            <a:ext cx="82296" cy="1481328"/>
-          </a:xfrm>
-          <a:prstGeom prst="rect">
-            <a:avLst/>
-          </a:prstGeom>
-          <a:solidFill>
-            <a:srgbClr val="8A4B2D"/>
-          </a:solidFill>
-          <a:ln>
-            <a:noFill/>
-          </a:ln>
-          <a:effectLst/>
-        </p:spPr>
-        <p:style>
-          <a:lnRef idx="1">
-            <a:schemeClr val="accent1"/>
-          </a:lnRef>
-          <a:fillRef idx="3">
-            <a:schemeClr val="accent1"/>
-          </a:fillRef>
-          <a:effectRef idx="2">
-            <a:schemeClr val="accent1"/>
-          </a:effectRef>
-          <a:fontRef idx="minor">
-            <a:schemeClr val="lt1"/>
-          </a:fontRef>
-        </p:style>
-        <p:txBody>
-          <a:bodyPr rtlCol="0" anchor="ctr" wrap="square"/>
-          <a:lstStyle/>
-          <a:p>
-            <a:pPr algn="ctr"/>
-          </a:p>
-        </p:txBody>
-      </p:sp>
-      <p:sp>
-        <p:nvSpPr>
-          <p:cNvPr id="33" name="TextBox 32"/>
-          <p:cNvSpPr txBox="1"/>
-          <p:nvPr/>
-        </p:nvSpPr>
-        <p:spPr>
-          <a:xfrm>
-            <a:off x="658368" y="3429000"/>
-            <a:ext cx="10972800" cy="274320"/>
-          </a:xfrm>
-          <a:prstGeom prst="rect">
-            <a:avLst/>
-          </a:prstGeom>
-          <a:noFill/>
-        </p:spPr>
-        <p:txBody>
-          <a:bodyPr wrap="square">
-            <a:spAutoFit/>
-          </a:bodyPr>
-          <a:lstStyle/>
-          <a:p>
-            <a:r>
-              <a:rPr sz="1100" b="1">
-                <a:solidFill>
-                  <a:srgbClr val="8A4B2D"/>
-                </a:solidFill>
-                <a:latin typeface="微软雅黑"/>
-              </a:rPr>
-              <a:t>难点2：B02 定点存储约定</a:t>
-            </a:r>
-          </a:p>
-        </p:txBody>
-      </p:sp>
-      <p:sp>
-        <p:nvSpPr>
-          <p:cNvPr id="34" name="TextBox 33"/>
-          <p:cNvSpPr txBox="1"/>
-          <p:nvPr/>
-        </p:nvSpPr>
-        <p:spPr>
-          <a:xfrm>
-            <a:off x="658368" y="3749040"/>
-            <a:ext cx="3566160" cy="219456"/>
-          </a:xfrm>
-          <a:prstGeom prst="rect">
-            <a:avLst/>
-          </a:prstGeom>
-          <a:noFill/>
-        </p:spPr>
-        <p:txBody>
-          <a:bodyPr wrap="square">
-            <a:spAutoFit/>
-          </a:bodyPr>
-          <a:lstStyle/>
-          <a:p>
-            <a:r>
-              <a:rPr sz="900" b="1">
-                <a:solidFill>
-                  <a:srgbClr val="B5533A"/>
-                </a:solidFill>
-                <a:latin typeface="微软雅黑"/>
-              </a:rPr>
-              <a:t>为什么容易栽</a:t>
-            </a:r>
-          </a:p>
-        </p:txBody>
-      </p:sp>
-      <p:sp>
-        <p:nvSpPr>
-          <p:cNvPr id="35" name="TextBox 34"/>
-          <p:cNvSpPr txBox="1"/>
-          <p:nvPr/>
-        </p:nvSpPr>
-        <p:spPr>
-          <a:xfrm>
-            <a:off x="658368" y="3986784"/>
-            <a:ext cx="3584448" cy="822960"/>
-          </a:xfrm>
-          <a:prstGeom prst="rect">
-            <a:avLst/>
-          </a:prstGeom>
-          <a:noFill/>
-        </p:spPr>
-        <p:txBody>
-          <a:bodyPr wrap="square">
-            <a:spAutoFit/>
-          </a:bodyPr>
-          <a:lstStyle/>
-          <a:p>
-            <a:r>
-              <a:rPr sz="850" b="0">
-                <a:solidFill>
-                  <a:srgbClr val="2B2F36"/>
-                </a:solidFill>
-                <a:latin typeface="微软雅黑"/>
-              </a:rPr>
-              <a:t>误区：忘除倍率→温度高10倍——对不上先查约定倍率</a:t>
-            </a:r>
-          </a:p>
-        </p:txBody>
-      </p:sp>
-      <p:sp>
-        <p:nvSpPr>
-          <p:cNvPr id="36" name="TextBox 35"/>
-          <p:cNvSpPr txBox="1"/>
-          <p:nvPr/>
-        </p:nvSpPr>
-        <p:spPr>
-          <a:xfrm>
-            <a:off x="4334255" y="3749040"/>
-            <a:ext cx="3566160" cy="219456"/>
-          </a:xfrm>
-          <a:prstGeom prst="rect">
-            <a:avLst/>
-          </a:prstGeom>
-          <a:noFill/>
-        </p:spPr>
-        <p:txBody>
-          <a:bodyPr wrap="square">
-            <a:spAutoFit/>
-          </a:bodyPr>
-          <a:lstStyle/>
-          <a:p>
-            <a:r>
-              <a:rPr sz="900" b="1">
-                <a:solidFill>
-                  <a:srgbClr val="2E7D46"/>
-                </a:solidFill>
-                <a:latin typeface="微软雅黑"/>
-              </a:rPr>
-              <a:t>一招破解（记住这句）</a:t>
-            </a:r>
-          </a:p>
-        </p:txBody>
-      </p:sp>
-      <p:sp>
-        <p:nvSpPr>
-          <p:cNvPr id="37" name="TextBox 36"/>
-          <p:cNvSpPr txBox="1"/>
-          <p:nvPr/>
-        </p:nvSpPr>
-        <p:spPr>
-          <a:xfrm>
-            <a:off x="4334255" y="3986784"/>
-            <a:ext cx="3584448" cy="822960"/>
-          </a:xfrm>
-          <a:prstGeom prst="rect">
-            <a:avLst/>
-          </a:prstGeom>
-          <a:noFill/>
-        </p:spPr>
-        <p:txBody>
-          <a:bodyPr wrap="square">
-            <a:spAutoFit/>
-          </a:bodyPr>
-          <a:lstStyle/>
-          <a:p>
-            <a:r>
-              <a:rPr sz="850" b="0">
-                <a:solidFill>
-                  <a:srgbClr val="2B2F36"/>
-                </a:solidFill>
-                <a:latin typeface="微软雅黑"/>
-              </a:rPr>
-              <a:t>定点=小数×10存整数：678其实是67.8℃——PLC不存小数</a:t>
-            </a:r>
-          </a:p>
-        </p:txBody>
-      </p:sp>
-      <p:sp>
-        <p:nvSpPr>
-          <p:cNvPr id="38" name="TextBox 37"/>
-          <p:cNvSpPr txBox="1"/>
-          <p:nvPr/>
-        </p:nvSpPr>
-        <p:spPr>
-          <a:xfrm>
-            <a:off x="8010143" y="3749040"/>
-            <a:ext cx="3566160" cy="219456"/>
-          </a:xfrm>
-          <a:prstGeom prst="rect">
-            <a:avLst/>
-          </a:prstGeom>
-          <a:noFill/>
-        </p:spPr>
-        <p:txBody>
-          <a:bodyPr wrap="square">
-            <a:spAutoFit/>
-          </a:bodyPr>
-          <a:lstStyle/>
-          <a:p>
-            <a:r>
-              <a:rPr sz="900" b="1">
-                <a:solidFill>
-                  <a:srgbClr val="35506E"/>
-                </a:solidFill>
-                <a:latin typeface="微软雅黑"/>
-              </a:rPr>
-              <a:t>动手验证（照做一遍）</a:t>
-            </a:r>
-          </a:p>
-        </p:txBody>
-      </p:sp>
-      <p:sp>
-        <p:nvSpPr>
-          <p:cNvPr id="39" name="TextBox 38"/>
-          <p:cNvSpPr txBox="1"/>
-          <p:nvPr/>
-        </p:nvSpPr>
-        <p:spPr>
-          <a:xfrm>
-            <a:off x="8010143" y="3986784"/>
-            <a:ext cx="3584448" cy="822960"/>
-          </a:xfrm>
-          <a:prstGeom prst="rect">
-            <a:avLst/>
-          </a:prstGeom>
-          <a:noFill/>
-        </p:spPr>
-        <p:txBody>
-          <a:bodyPr wrap="square">
-            <a:spAutoFit/>
-          </a:bodyPr>
-          <a:lstStyle/>
-          <a:p>
-            <a:r>
-              <a:rPr sz="850" b="0">
-                <a:solidFill>
-                  <a:srgbClr val="2B2F36"/>
-                </a:solidFill>
-                <a:latin typeface="微软雅黑"/>
-              </a:rPr>
-              <a:t>行业惯例：约定小数位，通信只传整数 raw=678 → real=raw/10 → 67.8℃</a:t>
-            </a:r>
-          </a:p>
-        </p:txBody>
-      </p:sp>
-      <p:sp>
-        <p:nvSpPr>
-          <p:cNvPr id="40" name="Rectangle 39"/>
-          <p:cNvSpPr/>
-          <p:nvPr/>
-        </p:nvSpPr>
-        <p:spPr>
-          <a:xfrm>
-            <a:off x="457200" y="4983480"/>
-            <a:ext cx="11274552" cy="1481328"/>
-          </a:xfrm>
-          <a:prstGeom prst="rect">
-            <a:avLst/>
-          </a:prstGeom>
-          <a:solidFill>
-            <a:srgbClr val="F7F9FC"/>
-          </a:solidFill>
-          <a:ln>
-            <a:solidFill>
-              <a:srgbClr val="D6DCE4"/>
-            </a:solidFill>
-          </a:ln>
-          <a:effectLst/>
-        </p:spPr>
-        <p:style>
-          <a:lnRef idx="1">
-            <a:schemeClr val="accent1"/>
-          </a:lnRef>
-          <a:fillRef idx="3">
-            <a:schemeClr val="accent1"/>
-          </a:fillRef>
-          <a:effectRef idx="2">
-            <a:schemeClr val="accent1"/>
-          </a:effectRef>
-          <a:fontRef idx="minor">
-            <a:schemeClr val="lt1"/>
-          </a:fontRef>
-        </p:style>
-        <p:txBody>
-          <a:bodyPr rtlCol="0" anchor="ctr" wrap="square"/>
-          <a:lstStyle/>
-          <a:p>
-            <a:pPr algn="ctr"/>
-          </a:p>
-        </p:txBody>
-      </p:sp>
-      <p:sp>
-        <p:nvSpPr>
-          <p:cNvPr id="41" name="Rectangle 40"/>
-          <p:cNvSpPr/>
-          <p:nvPr/>
-        </p:nvSpPr>
-        <p:spPr>
-          <a:xfrm>
-            <a:off x="457200" y="4983480"/>
-            <a:ext cx="82296" cy="1481328"/>
-          </a:xfrm>
-          <a:prstGeom prst="rect">
-            <a:avLst/>
-          </a:prstGeom>
-          <a:solidFill>
-            <a:srgbClr val="8A4B2D"/>
-          </a:solidFill>
-          <a:ln>
-            <a:noFill/>
-          </a:ln>
-          <a:effectLst/>
-        </p:spPr>
-        <p:style>
-          <a:lnRef idx="1">
-            <a:schemeClr val="accent1"/>
-          </a:lnRef>
-          <a:fillRef idx="3">
-            <a:schemeClr val="accent1"/>
-          </a:fillRef>
-          <a:effectRef idx="2">
-            <a:schemeClr val="accent1"/>
-          </a:effectRef>
-          <a:fontRef idx="minor">
-            <a:schemeClr val="lt1"/>
-          </a:fontRef>
-        </p:style>
-        <p:txBody>
-          <a:bodyPr rtlCol="0" anchor="ctr" wrap="square"/>
-          <a:lstStyle/>
-          <a:p>
-            <a:pPr algn="ctr"/>
-          </a:p>
-        </p:txBody>
-      </p:sp>
-      <p:sp>
-        <p:nvSpPr>
-          <p:cNvPr id="42" name="TextBox 41"/>
-          <p:cNvSpPr txBox="1"/>
-          <p:nvPr/>
-        </p:nvSpPr>
-        <p:spPr>
-          <a:xfrm>
-            <a:off x="658368" y="5029200"/>
-            <a:ext cx="10972800" cy="274320"/>
-          </a:xfrm>
-          <a:prstGeom prst="rect">
-            <a:avLst/>
-          </a:prstGeom>
-          <a:noFill/>
-        </p:spPr>
-        <p:txBody>
-          <a:bodyPr wrap="square">
-            <a:spAutoFit/>
-          </a:bodyPr>
-          <a:lstStyle/>
-          <a:p>
-            <a:r>
-              <a:rPr sz="1100" b="1">
-                <a:solidFill>
-                  <a:srgbClr val="8A4B2D"/>
-                </a:solidFill>
-                <a:latin typeface="微软雅黑"/>
-              </a:rPr>
-              <a:t>难点3：B03 pymodbus读寄存器</a:t>
-            </a:r>
-          </a:p>
-        </p:txBody>
-      </p:sp>
-      <p:sp>
-        <p:nvSpPr>
-          <p:cNvPr id="43" name="TextBox 42"/>
-          <p:cNvSpPr txBox="1"/>
-          <p:nvPr/>
-        </p:nvSpPr>
-        <p:spPr>
-          <a:xfrm>
-            <a:off x="658368" y="5349240"/>
-            <a:ext cx="3566160" cy="219456"/>
-          </a:xfrm>
-          <a:prstGeom prst="rect">
-            <a:avLst/>
-          </a:prstGeom>
-          <a:noFill/>
-        </p:spPr>
-        <p:txBody>
-          <a:bodyPr wrap="square">
-            <a:spAutoFit/>
-          </a:bodyPr>
-          <a:lstStyle/>
-          <a:p>
-            <a:r>
-              <a:rPr sz="900" b="1">
-                <a:solidFill>
-                  <a:srgbClr val="B5533A"/>
-                </a:solidFill>
-                <a:latin typeface="微软雅黑"/>
-              </a:rPr>
-              <a:t>为什么容易栽</a:t>
-            </a:r>
-          </a:p>
-        </p:txBody>
-      </p:sp>
-      <p:sp>
-        <p:nvSpPr>
-          <p:cNvPr id="44" name="TextBox 43"/>
-          <p:cNvSpPr txBox="1"/>
-          <p:nvPr/>
-        </p:nvSpPr>
-        <p:spPr>
-          <a:xfrm>
-            <a:off x="658368" y="5586984"/>
-            <a:ext cx="3584448" cy="822960"/>
-          </a:xfrm>
-          <a:prstGeom prst="rect">
-            <a:avLst/>
-          </a:prstGeom>
-          <a:noFill/>
-        </p:spPr>
-        <p:txBody>
-          <a:bodyPr wrap="square">
-            <a:spAutoFit/>
-          </a:bodyPr>
-          <a:lstStyle/>
-          <a:p>
-            <a:r>
-              <a:rPr sz="850" b="0">
-                <a:solidFill>
-                  <a:srgbClr val="2B2F36"/>
-                </a:solidFill>
-                <a:latin typeface="微软雅黑"/>
-              </a:rPr>
-              <a:t>误区：3.x必须关键字传参(address=/count=)——照2.x旧码抄报错</a:t>
-            </a:r>
-          </a:p>
-        </p:txBody>
-      </p:sp>
-      <p:sp>
-        <p:nvSpPr>
-          <p:cNvPr id="45" name="TextBox 44"/>
-          <p:cNvSpPr txBox="1"/>
-          <p:nvPr/>
-        </p:nvSpPr>
-        <p:spPr>
-          <a:xfrm>
-            <a:off x="4334255" y="5349240"/>
-            <a:ext cx="3566160" cy="219456"/>
-          </a:xfrm>
-          <a:prstGeom prst="rect">
-            <a:avLst/>
-          </a:prstGeom>
-          <a:noFill/>
-        </p:spPr>
-        <p:txBody>
-          <a:bodyPr wrap="square">
-            <a:spAutoFit/>
-          </a:bodyPr>
-          <a:lstStyle/>
-          <a:p>
-            <a:r>
-              <a:rPr sz="900" b="1">
-                <a:solidFill>
-                  <a:srgbClr val="2E7D46"/>
-                </a:solidFill>
-                <a:latin typeface="微软雅黑"/>
-              </a:rPr>
-              <a:t>一招破解（记住这句）</a:t>
-            </a:r>
-          </a:p>
-        </p:txBody>
-      </p:sp>
-      <p:sp>
-        <p:nvSpPr>
-          <p:cNvPr id="46" name="TextBox 45"/>
-          <p:cNvSpPr txBox="1"/>
-          <p:nvPr/>
-        </p:nvSpPr>
-        <p:spPr>
-          <a:xfrm>
-            <a:off x="4334255" y="5586984"/>
-            <a:ext cx="3584448" cy="822960"/>
-          </a:xfrm>
-          <a:prstGeom prst="rect">
-            <a:avLst/>
-          </a:prstGeom>
-          <a:noFill/>
-        </p:spPr>
-        <p:txBody>
-          <a:bodyPr wrap="square">
-            <a:spAutoFit/>
-          </a:bodyPr>
-          <a:lstStyle/>
-          <a:p>
-            <a:r>
-              <a:rPr sz="850" b="0">
-                <a:solidFill>
-                  <a:srgbClr val="2B2F36"/>
-                </a:solidFill>
-                <a:latin typeface="微软雅黑"/>
-              </a:rPr>
-              <a:t>pymodbus=Python的Modbus翻译官——一行读PLC寄存器</a:t>
-            </a:r>
-          </a:p>
-        </p:txBody>
-      </p:sp>
-      <p:sp>
-        <p:nvSpPr>
-          <p:cNvPr id="47" name="TextBox 46"/>
-          <p:cNvSpPr txBox="1"/>
-          <p:nvPr/>
-        </p:nvSpPr>
-        <p:spPr>
-          <a:xfrm>
-            <a:off x="8010143" y="5349240"/>
-            <a:ext cx="3566160" cy="219456"/>
-          </a:xfrm>
-          <a:prstGeom prst="rect">
-            <a:avLst/>
-          </a:prstGeom>
-          <a:noFill/>
-        </p:spPr>
-        <p:txBody>
-          <a:bodyPr wrap="square">
-            <a:spAutoFit/>
-          </a:bodyPr>
-          <a:lstStyle/>
-          <a:p>
-            <a:r>
-              <a:rPr sz="900" b="1">
-                <a:solidFill>
-                  <a:srgbClr val="35506E"/>
-                </a:solidFill>
-                <a:latin typeface="微软雅黑"/>
-              </a:rPr>
-              <a:t>动手验证（照做一遍）</a:t>
-            </a:r>
-          </a:p>
-        </p:txBody>
-      </p:sp>
-      <p:sp>
-        <p:nvSpPr>
-          <p:cNvPr id="48" name="TextBox 47"/>
-          <p:cNvSpPr txBox="1"/>
-          <p:nvPr/>
-        </p:nvSpPr>
-        <p:spPr>
-          <a:xfrm>
-            <a:off x="8010143" y="5586984"/>
-            <a:ext cx="3584448" cy="822960"/>
-          </a:xfrm>
-          <a:prstGeom prst="rect">
-            <a:avLst/>
-          </a:prstGeom>
-          <a:noFill/>
-        </p:spPr>
-        <p:txBody>
-          <a:bodyPr wrap="square">
-            <a:spAutoFit/>
-          </a:bodyPr>
-          <a:lstStyle/>
-          <a:p>
-            <a:r>
-              <a:rPr sz="850" b="0">
-                <a:solidFill>
-                  <a:srgbClr val="2B2F36"/>
-                </a:solidFill>
-                <a:latin typeface="微软雅黑"/>
-              </a:rPr>
-              <a:t>Modbus TCP读PLC保持寄存器——采集主链路 rr = client.read_holding_registers(0,5)</a:t>
+              <a:t>13 / 16</a:t>
             </a:r>
           </a:p>
         </p:txBody>
@@ -7131,7 +6887,7 @@
           <a:noFill/>
         </p:spPr>
         <p:txBody>
-          <a:bodyPr wrap="square" anchor="ctr">
+          <a:bodyPr wrap="square" anchor="t">
             <a:spAutoFit/>
           </a:bodyPr>
           <a:lstStyle/>
@@ -7151,27 +6907,27 @@
                 </a:solidFill>
                 <a:latin typeface="微软雅黑"/>
               </a:rPr>
-              <a:t>承上启下 · 动手前避坑清单</a:t>
-            </a:r>
-          </a:p>
-        </p:txBody>
-      </p:sp>
-      <p:sp>
-        <p:nvSpPr>
-          <p:cNvPr id="18" name="Rectangle 17"/>
+              <a:t>下次课预告（第12周）</a:t>
+            </a:r>
+          </a:p>
+        </p:txBody>
+      </p:sp>
+      <p:sp>
+        <p:nvSpPr>
+          <p:cNvPr id="5" name="Rectangle 4"/>
           <p:cNvSpPr/>
           <p:nvPr/>
         </p:nvSpPr>
         <p:spPr>
           <a:xfrm>
-            <a:off x="500000" y="6500000"/>
-            <a:ext cx="11100000" cy="20000"/>
+            <a:off x="760000" y="1900000"/>
+            <a:ext cx="10900000" cy="1600000"/>
           </a:xfrm>
           <a:prstGeom prst="rect">
             <a:avLst/>
           </a:prstGeom>
           <a:solidFill>
-            <a:srgbClr val="C9D4EE"/>
+            <a:srgbClr val="F3F6FD"/>
           </a:solidFill>
           <a:ln>
             <a:noFill/>
@@ -7202,14 +6958,58 @@
       </p:sp>
       <p:sp>
         <p:nvSpPr>
-          <p:cNvPr id="19" name="TextBox 18"/>
+          <p:cNvPr id="6" name="Rectangle 5"/>
+          <p:cNvSpPr/>
+          <p:nvPr/>
+        </p:nvSpPr>
+        <p:spPr>
+          <a:xfrm>
+            <a:off x="760000" y="1900000"/>
+            <a:ext cx="150000" cy="1600000"/>
+          </a:xfrm>
+          <a:prstGeom prst="rect">
+            <a:avLst/>
+          </a:prstGeom>
+          <a:solidFill>
+            <a:srgbClr val="F5670F"/>
+          </a:solidFill>
+          <a:ln>
+            <a:noFill/>
+          </a:ln>
+          <a:effectLst/>
+        </p:spPr>
+        <p:style>
+          <a:lnRef idx="1">
+            <a:schemeClr val="accent1"/>
+          </a:lnRef>
+          <a:fillRef idx="3">
+            <a:schemeClr val="accent1"/>
+          </a:fillRef>
+          <a:effectRef idx="2">
+            <a:schemeClr val="accent1"/>
+          </a:effectRef>
+          <a:fontRef idx="minor">
+            <a:schemeClr val="lt1"/>
+          </a:fontRef>
+        </p:style>
+        <p:txBody>
+          <a:bodyPr rtlCol="0" anchor="ctr"/>
+          <a:lstStyle/>
+          <a:p>
+            <a:pPr algn="ctr"/>
+          </a:p>
+        </p:txBody>
+      </p:sp>
+      <p:sp>
+        <p:nvSpPr>
+          <p:cNvPr id="7" name="TextBox 6"/>
           <p:cNvSpPr txBox="1"/>
           <p:nvPr/>
         </p:nvSpPr>
         <p:spPr>
           <a:xfrm>
-            <a:off x="500000" y="6540000"/>
-            <a:ext cx="7000000" cy="300000"/>
+            <a:off x="1020000" y="2050000"/>
+            <a:ext cx="10500000" cy="1400000"/>
           </a:xfrm>
           <a:prstGeom prst="rect">
             <a:avLst/>
@@ -7231,40 +7031,17 @@
               </a:spcAft>
             </a:pPr>
             <a:r>
-              <a:rPr sz="1000" b="0">
-                <a:solidFill>
-                  <a:srgbClr val="8A97B5"/>
-                </a:solidFill>
-                <a:latin typeface="微软雅黑"/>
-              </a:rPr>
-              <a:t>两江智造集团 · Python编程基础</a:t>
-            </a:r>
-          </a:p>
-        </p:txBody>
-      </p:sp>
-      <p:sp>
-        <p:nvSpPr>
-          <p:cNvPr id="20" name="TextBox 19"/>
-          <p:cNvSpPr txBox="1"/>
-          <p:nvPr/>
-        </p:nvSpPr>
-        <p:spPr>
-          <a:xfrm>
-            <a:off x="10600000" y="6540000"/>
-            <a:ext cx="1000000" cy="300000"/>
-          </a:xfrm>
-          <a:prstGeom prst="rect">
-            <a:avLst/>
-          </a:prstGeom>
-          <a:noFill/>
-        </p:spPr>
-        <p:txBody>
-          <a:bodyPr wrap="square" anchor="t">
-            <a:spAutoFit/>
-          </a:bodyPr>
-          <a:lstStyle/>
-          <a:p>
-            <a:pPr algn="r">
+              <a:rPr sz="1700" b="1">
+                <a:solidFill>
+                  <a:srgbClr val="010328"/>
+                </a:solidFill>
+                <a:latin typeface="微软雅黑"/>
+              </a:rPr>
+              <a:t>主题: 按checklist完成终验自查——应用：见工单</a:t>
+            </a:r>
+          </a:p>
+          <a:p>
+            <a:pPr algn="l">
               <a:lnSpc>
                 <a:spcPct val="110000"/>
               </a:lnSpc>
@@ -7273,27 +7050,135 @@
               </a:spcAft>
             </a:pPr>
             <a:r>
-              <a:rPr sz="1000" b="0">
-                <a:solidFill>
-                  <a:srgbClr val="8A97B5"/>
-                </a:solidFill>
-                <a:latin typeface="微软雅黑"/>
-              </a:rPr>
-              <a:t>8 / 14</a:t>
-            </a:r>
-          </a:p>
-        </p:txBody>
-      </p:sp>
-      <p:sp>
-        <p:nvSpPr>
-          <p:cNvPr id="21" name="TextBox 20"/>
+              <a:rPr sz="1300" b="0">
+                <a:solidFill>
+                  <a:srgbClr val="44546A"/>
+                </a:solidFill>
+                <a:latin typeface="微软雅黑"/>
+              </a:rPr>
+              <a:t>预习快问: checklist三清单(功能/规范/演示)你组还差哪几项？</a:t>
+            </a:r>
+          </a:p>
+        </p:txBody>
+      </p:sp>
+      <p:sp>
+        <p:nvSpPr>
+          <p:cNvPr id="8" name="TextBox 7"/>
           <p:cNvSpPr txBox="1"/>
           <p:nvPr/>
         </p:nvSpPr>
         <p:spPr>
           <a:xfrm>
-            <a:off x="457200" y="1389888"/>
-            <a:ext cx="11274552" cy="274320"/>
+            <a:off x="760000" y="3900000"/>
+            <a:ext cx="10900000" cy="900000"/>
+          </a:xfrm>
+          <a:prstGeom prst="rect">
+            <a:avLst/>
+          </a:prstGeom>
+          <a:noFill/>
+        </p:spPr>
+        <p:txBody>
+          <a:bodyPr wrap="square" anchor="t">
+            <a:spAutoFit/>
+          </a:bodyPr>
+          <a:lstStyle/>
+          <a:p>
+            <a:pPr algn="l">
+              <a:lnSpc>
+                <a:spcPct val="110000"/>
+              </a:lnSpc>
+              <a:spcAft>
+                <a:spcPts val="600"/>
+              </a:spcAft>
+            </a:pPr>
+            <a:r>
+              <a:rPr sz="1400" b="1">
+                <a:solidFill>
+                  <a:srgbClr val="0545E8"/>
+                </a:solidFill>
+                <a:latin typeface="微软雅黑"/>
+              </a:rPr>
+              <a:t>课前完成：导学单 + 预习自测 + starter环境自检</a:t>
+            </a:r>
+          </a:p>
+          <a:p>
+            <a:pPr algn="l">
+              <a:lnSpc>
+                <a:spcPct val="110000"/>
+              </a:lnSpc>
+              <a:spcAft>
+                <a:spcPts val="600"/>
+              </a:spcAft>
+            </a:pPr>
+            <a:r>
+              <a:rPr sz="1250" b="0">
+                <a:solidFill>
+                  <a:srgbClr val="44546A"/>
+                </a:solidFill>
+                <a:latin typeface="微软雅黑"/>
+              </a:rPr>
+              <a:t>带着问题来上课——Predict先于Run</a:t>
+            </a:r>
+          </a:p>
+        </p:txBody>
+      </p:sp>
+    </p:spTree>
+  </p:cSld>
+  <p:clrMapOvr>
+    <a:masterClrMapping/>
+  </p:clrMapOvr>
+</p:sld>
+</file>
+
+<file path=ppt/slides/slide15.xml><?xml version="1.0" encoding="utf-8"?>
+<p:sld xmlns:a="http://schemas.openxmlformats.org/drawingml/2006/main" xmlns:p="http://schemas.openxmlformats.org/presentationml/2006/main" xmlns:r="http://schemas.openxmlformats.org/officeDocument/2006/relationships">
+  <p:cSld>
+    <p:spTree>
+      <p:nvGrpSpPr>
+        <p:cNvPr id="1" name=""/>
+        <p:cNvGrpSpPr/>
+        <p:nvPr/>
+      </p:nvGrpSpPr>
+      <p:grpSpPr/>
+      <p:sp>
+        <p:nvSpPr>
+          <p:cNvPr id="2" name="TextBox 1"/>
+          <p:cNvSpPr txBox="1"/>
+          <p:nvPr/>
+        </p:nvSpPr>
+        <p:spPr>
+          <a:xfrm>
+            <a:off x="548640" y="320040"/>
+            <a:ext cx="11094720" cy="914400"/>
+          </a:xfrm>
+          <a:prstGeom prst="rect">
+            <a:avLst/>
+          </a:prstGeom>
+          <a:noFill/>
+        </p:spPr>
+        <p:txBody>
+          <a:bodyPr wrap="none">
+            <a:spAutoFit/>
+          </a:bodyPr>
+          <a:lstStyle/>
+          <a:p>
+            <a:r>
+              <a:rPr sz="3000" b="1"/>
+              <a:t>本任务六步法导航</a:t>
+            </a:r>
+          </a:p>
+        </p:txBody>
+      </p:sp>
+      <p:sp>
+        <p:nvSpPr>
+          <p:cNvPr id="3" name="TextBox 2"/>
+          <p:cNvSpPr txBox="1"/>
+          <p:nvPr/>
+        </p:nvSpPr>
+        <p:spPr>
+          <a:xfrm>
+            <a:off x="731520" y="1371600"/>
+            <a:ext cx="10728960" cy="4663440"/>
           </a:xfrm>
           <a:prstGeom prst="rect">
             <a:avLst/>
@@ -7306,118 +7191,108 @@
           </a:bodyPr>
           <a:lstStyle/>
           <a:p>
-            <a:r>
-              <a:rPr sz="1050" b="0">
-                <a:solidFill>
-                  <a:srgbClr val="6B7280"/>
-                </a:solidFill>
-                <a:latin typeface="微软雅黑"/>
-              </a:rPr>
-              <a:t>本讲是动手冲刺课：先把上周完整讲解里的高频翻车点过一遍，再开工——每条都是历届学生真实踩过的坑。</a:t>
-            </a:r>
-          </a:p>
-        </p:txBody>
-      </p:sp>
-      <p:sp>
-        <p:nvSpPr>
-          <p:cNvPr id="22" name="Rectangle 21"/>
-          <p:cNvSpPr/>
-          <p:nvPr/>
-        </p:nvSpPr>
-        <p:spPr>
-          <a:xfrm>
-            <a:off x="457200" y="1783080"/>
-            <a:ext cx="5532120" cy="2061972"/>
-          </a:xfrm>
-          <a:prstGeom prst="rect">
-            <a:avLst/>
-          </a:prstGeom>
-          <a:solidFill>
-            <a:srgbClr val="FFFFFF"/>
-          </a:solidFill>
-          <a:ln>
-            <a:solidFill>
-              <a:srgbClr val="D6DCE4"/>
-            </a:solidFill>
-          </a:ln>
-          <a:effectLst/>
-        </p:spPr>
-        <p:style>
-          <a:lnRef idx="1">
-            <a:schemeClr val="accent1"/>
-          </a:lnRef>
-          <a:fillRef idx="3">
-            <a:schemeClr val="accent1"/>
-          </a:fillRef>
-          <a:effectRef idx="2">
-            <a:schemeClr val="accent1"/>
-          </a:effectRef>
-          <a:fontRef idx="minor">
-            <a:schemeClr val="lt1"/>
-          </a:fontRef>
-        </p:style>
-        <p:txBody>
-          <a:bodyPr rtlCol="0" anchor="ctr" wrap="square"/>
-          <a:lstStyle/>
-          <a:p>
-            <a:pPr algn="ctr"/>
-          </a:p>
-        </p:txBody>
-      </p:sp>
-      <p:sp>
-        <p:nvSpPr>
-          <p:cNvPr id="23" name="Rectangle 22"/>
-          <p:cNvSpPr/>
-          <p:nvPr/>
-        </p:nvSpPr>
-        <p:spPr>
-          <a:xfrm>
-            <a:off x="457200" y="1783080"/>
-            <a:ext cx="82296" cy="2061972"/>
-          </a:xfrm>
-          <a:prstGeom prst="rect">
-            <a:avLst/>
-          </a:prstGeom>
-          <a:solidFill>
-            <a:srgbClr val="9A3B3B"/>
-          </a:solidFill>
-          <a:ln>
-            <a:noFill/>
-          </a:ln>
-          <a:effectLst/>
-        </p:spPr>
-        <p:style>
-          <a:lnRef idx="1">
-            <a:schemeClr val="accent1"/>
-          </a:lnRef>
-          <a:fillRef idx="3">
-            <a:schemeClr val="accent1"/>
-          </a:fillRef>
-          <a:effectRef idx="2">
-            <a:schemeClr val="accent1"/>
-          </a:effectRef>
-          <a:fontRef idx="minor">
-            <a:schemeClr val="lt1"/>
-          </a:fontRef>
-        </p:style>
-        <p:txBody>
-          <a:bodyPr rtlCol="0" anchor="ctr" wrap="square"/>
-          <a:lstStyle/>
-          <a:p>
-            <a:pPr algn="ctr"/>
-          </a:p>
-        </p:txBody>
-      </p:sp>
-      <p:sp>
-        <p:nvSpPr>
-          <p:cNvPr id="24" name="TextBox 23"/>
+            <a:pPr>
+              <a:spcAft>
+                <a:spcPts val="1000"/>
+              </a:spcAft>
+            </a:pPr>
+            <a:r>
+              <a:rPr sz="1800"/>
+              <a:t>六步法：资讯 → 计划 → 决策 → 实施 → 检查 → 评估</a:t>
+            </a:r>
+          </a:p>
+          <a:p>
+            <a:pPr>
+              <a:spcAft>
+                <a:spcPts val="1000"/>
+              </a:spcAft>
+            </a:pPr>
+            <a:r>
+              <a:rPr sz="1800"/>
+              <a:t>本讲对应工单：《程序设计基础》分层任务工单</a:t>
+            </a:r>
+          </a:p>
+          <a:p>
+            <a:pPr>
+              <a:spcAft>
+                <a:spcPts val="1000"/>
+              </a:spcAft>
+            </a:pPr>
+            <a:r>
+              <a:rPr sz="1800"/>
+              <a:t>课堂产出：工单第六节实施记录须当堂填写，含操作前安全打勾与学生本人签字。</a:t>
+            </a:r>
+          </a:p>
+          <a:p>
+            <a:pPr>
+              <a:spcAft>
+                <a:spcPts val="1000"/>
+              </a:spcAft>
+            </a:pPr>
+            <a:r>
+              <a:rPr sz="1800"/>
+              <a:t>课后交付：班组长／操作员／教师三方联签后交回，缺签视为未交付。</a:t>
+            </a:r>
+          </a:p>
+        </p:txBody>
+      </p:sp>
+    </p:spTree>
+  </p:cSld>
+  <p:clrMapOvr>
+    <a:masterClrMapping/>
+  </p:clrMapOvr>
+</p:sld>
+</file>
+
+<file path=ppt/slides/slide16.xml><?xml version="1.0" encoding="utf-8"?>
+<p:sld xmlns:a="http://schemas.openxmlformats.org/drawingml/2006/main" xmlns:p="http://schemas.openxmlformats.org/presentationml/2006/main" xmlns:r="http://schemas.openxmlformats.org/officeDocument/2006/relationships">
+  <p:cSld>
+    <p:spTree>
+      <p:nvGrpSpPr>
+        <p:cNvPr id="1" name=""/>
+        <p:cNvGrpSpPr/>
+        <p:nvPr/>
+      </p:nvGrpSpPr>
+      <p:grpSpPr/>
+      <p:sp>
+        <p:nvSpPr>
+          <p:cNvPr id="2" name="TextBox 1"/>
           <p:cNvSpPr txBox="1"/>
           <p:nvPr/>
         </p:nvSpPr>
         <p:spPr>
           <a:xfrm>
-            <a:off x="658368" y="1847088"/>
-            <a:ext cx="5166359" cy="274320"/>
+            <a:off x="548640" y="320040"/>
+            <a:ext cx="11094720" cy="914400"/>
+          </a:xfrm>
+          <a:prstGeom prst="rect">
+            <a:avLst/>
+          </a:prstGeom>
+          <a:noFill/>
+        </p:spPr>
+        <p:txBody>
+          <a:bodyPr wrap="none">
+            <a:spAutoFit/>
+          </a:bodyPr>
+          <a:lstStyle/>
+          <a:p>
+            <a:r>
+              <a:rPr sz="3000" b="1"/>
+              <a:t>本讲与岗位任务单的衔接</a:t>
+            </a:r>
+          </a:p>
+        </p:txBody>
+      </p:sp>
+      <p:sp>
+        <p:nvSpPr>
+          <p:cNvPr id="3" name="TextBox 2"/>
+          <p:cNvSpPr txBox="1"/>
+          <p:nvPr/>
+        </p:nvSpPr>
+        <p:spPr>
+          <a:xfrm>
+            <a:off x="731520" y="1371600"/>
+            <a:ext cx="10728960" cy="4663440"/>
           </a:xfrm>
           <a:prstGeom prst="rect">
             <a:avLst/>
@@ -7430,431 +7305,47 @@
           </a:bodyPr>
           <a:lstStyle/>
           <a:p>
-            <a:r>
-              <a:rPr sz="1050" b="1">
-                <a:solidFill>
-                  <a:srgbClr val="B5533A"/>
-                </a:solidFill>
-                <a:latin typeface="微软雅黑"/>
-              </a:rPr>
-              <a:t>✗ 连不上PLC</a:t>
-            </a:r>
-          </a:p>
-        </p:txBody>
-      </p:sp>
-      <p:sp>
-        <p:nvSpPr>
-          <p:cNvPr id="25" name="TextBox 24"/>
-          <p:cNvSpPr txBox="1"/>
-          <p:nvPr/>
-        </p:nvSpPr>
-        <p:spPr>
-          <a:xfrm>
-            <a:off x="658368" y="2167128"/>
-            <a:ext cx="5166359" cy="868680"/>
-          </a:xfrm>
-          <a:prstGeom prst="rect">
-            <a:avLst/>
-          </a:prstGeom>
-          <a:noFill/>
-        </p:spPr>
-        <p:txBody>
-          <a:bodyPr wrap="square">
-            <a:spAutoFit/>
-          </a:bodyPr>
-          <a:lstStyle/>
-          <a:p>
-            <a:r>
-              <a:rPr sz="900" b="0">
-                <a:solidFill>
-                  <a:srgbClr val="2B2F36"/>
-                </a:solidFill>
-                <a:latin typeface="微软雅黑"/>
-              </a:rPr>
-              <a:t>原因：模拟器没启动</a:t>
-            </a:r>
-          </a:p>
-          <a:p>
-            <a:r>
-              <a:rPr sz="900" b="0">
-                <a:solidFill>
-                  <a:srgbClr val="2B2F36"/>
-                </a:solidFill>
-                <a:latin typeface="微软雅黑"/>
-              </a:rPr>
-              <a:t>✔ 解决：先跑虚拟产线--check</a:t>
-            </a:r>
-          </a:p>
-        </p:txBody>
-      </p:sp>
-      <p:sp>
-        <p:nvSpPr>
-          <p:cNvPr id="26" name="Rectangle 25"/>
-          <p:cNvSpPr/>
-          <p:nvPr/>
-        </p:nvSpPr>
-        <p:spPr>
-          <a:xfrm>
-            <a:off x="6199632" y="1783080"/>
-            <a:ext cx="5532120" cy="2061972"/>
-          </a:xfrm>
-          <a:prstGeom prst="rect">
-            <a:avLst/>
-          </a:prstGeom>
-          <a:solidFill>
-            <a:srgbClr val="FFFFFF"/>
-          </a:solidFill>
-          <a:ln>
-            <a:solidFill>
-              <a:srgbClr val="D6DCE4"/>
-            </a:solidFill>
-          </a:ln>
-          <a:effectLst/>
-        </p:spPr>
-        <p:style>
-          <a:lnRef idx="1">
-            <a:schemeClr val="accent1"/>
-          </a:lnRef>
-          <a:fillRef idx="3">
-            <a:schemeClr val="accent1"/>
-          </a:fillRef>
-          <a:effectRef idx="2">
-            <a:schemeClr val="accent1"/>
-          </a:effectRef>
-          <a:fontRef idx="minor">
-            <a:schemeClr val="lt1"/>
-          </a:fontRef>
-        </p:style>
-        <p:txBody>
-          <a:bodyPr rtlCol="0" anchor="ctr" wrap="square"/>
-          <a:lstStyle/>
-          <a:p>
-            <a:pPr algn="ctr"/>
-          </a:p>
-        </p:txBody>
-      </p:sp>
-      <p:sp>
-        <p:nvSpPr>
-          <p:cNvPr id="27" name="Rectangle 26"/>
-          <p:cNvSpPr/>
-          <p:nvPr/>
-        </p:nvSpPr>
-        <p:spPr>
-          <a:xfrm>
-            <a:off x="6199632" y="1783080"/>
-            <a:ext cx="82296" cy="2061972"/>
-          </a:xfrm>
-          <a:prstGeom prst="rect">
-            <a:avLst/>
-          </a:prstGeom>
-          <a:solidFill>
-            <a:srgbClr val="9A3B3B"/>
-          </a:solidFill>
-          <a:ln>
-            <a:noFill/>
-          </a:ln>
-          <a:effectLst/>
-        </p:spPr>
-        <p:style>
-          <a:lnRef idx="1">
-            <a:schemeClr val="accent1"/>
-          </a:lnRef>
-          <a:fillRef idx="3">
-            <a:schemeClr val="accent1"/>
-          </a:fillRef>
-          <a:effectRef idx="2">
-            <a:schemeClr val="accent1"/>
-          </a:effectRef>
-          <a:fontRef idx="minor">
-            <a:schemeClr val="lt1"/>
-          </a:fontRef>
-        </p:style>
-        <p:txBody>
-          <a:bodyPr rtlCol="0" anchor="ctr" wrap="square"/>
-          <a:lstStyle/>
-          <a:p>
-            <a:pPr algn="ctr"/>
-          </a:p>
-        </p:txBody>
-      </p:sp>
-      <p:sp>
-        <p:nvSpPr>
-          <p:cNvPr id="28" name="TextBox 27"/>
-          <p:cNvSpPr txBox="1"/>
-          <p:nvPr/>
-        </p:nvSpPr>
-        <p:spPr>
-          <a:xfrm>
-            <a:off x="6400800" y="1847088"/>
-            <a:ext cx="5166359" cy="274320"/>
-          </a:xfrm>
-          <a:prstGeom prst="rect">
-            <a:avLst/>
-          </a:prstGeom>
-          <a:noFill/>
-        </p:spPr>
-        <p:txBody>
-          <a:bodyPr wrap="square">
-            <a:spAutoFit/>
-          </a:bodyPr>
-          <a:lstStyle/>
-          <a:p>
-            <a:r>
-              <a:rPr sz="1050" b="1">
-                <a:solidFill>
-                  <a:srgbClr val="B5533A"/>
-                </a:solidFill>
-                <a:latin typeface="微软雅黑"/>
-              </a:rPr>
-              <a:t>✗ 数值大10倍</a:t>
-            </a:r>
-          </a:p>
-        </p:txBody>
-      </p:sp>
-      <p:sp>
-        <p:nvSpPr>
-          <p:cNvPr id="29" name="TextBox 28"/>
-          <p:cNvSpPr txBox="1"/>
-          <p:nvPr/>
-        </p:nvSpPr>
-        <p:spPr>
-          <a:xfrm>
-            <a:off x="6400800" y="2167128"/>
-            <a:ext cx="5166359" cy="868680"/>
-          </a:xfrm>
-          <a:prstGeom prst="rect">
-            <a:avLst/>
-          </a:prstGeom>
-          <a:noFill/>
-        </p:spPr>
-        <p:txBody>
-          <a:bodyPr wrap="square">
-            <a:spAutoFit/>
-          </a:bodyPr>
-          <a:lstStyle/>
-          <a:p>
-            <a:r>
-              <a:rPr sz="900" b="0">
-                <a:solidFill>
-                  <a:srgbClr val="2B2F36"/>
-                </a:solidFill>
-                <a:latin typeface="微软雅黑"/>
-              </a:rPr>
-              <a:t>原因：忘了÷10</a:t>
-            </a:r>
-          </a:p>
-          <a:p>
-            <a:r>
-              <a:rPr sz="900" b="0">
-                <a:solidFill>
-                  <a:srgbClr val="2B2F36"/>
-                </a:solidFill>
-                <a:latin typeface="微软雅黑"/>
-              </a:rPr>
-              <a:t>✔ 解决：寄存器定点换算</a:t>
-            </a:r>
-          </a:p>
-        </p:txBody>
-      </p:sp>
-      <p:sp>
-        <p:nvSpPr>
-          <p:cNvPr id="30" name="Rectangle 29"/>
-          <p:cNvSpPr/>
-          <p:nvPr/>
-        </p:nvSpPr>
-        <p:spPr>
-          <a:xfrm>
-            <a:off x="457200" y="3973068"/>
-            <a:ext cx="5532120" cy="2061972"/>
-          </a:xfrm>
-          <a:prstGeom prst="rect">
-            <a:avLst/>
-          </a:prstGeom>
-          <a:solidFill>
-            <a:srgbClr val="FFFFFF"/>
-          </a:solidFill>
-          <a:ln>
-            <a:solidFill>
-              <a:srgbClr val="D6DCE4"/>
-            </a:solidFill>
-          </a:ln>
-          <a:effectLst/>
-        </p:spPr>
-        <p:style>
-          <a:lnRef idx="1">
-            <a:schemeClr val="accent1"/>
-          </a:lnRef>
-          <a:fillRef idx="3">
-            <a:schemeClr val="accent1"/>
-          </a:fillRef>
-          <a:effectRef idx="2">
-            <a:schemeClr val="accent1"/>
-          </a:effectRef>
-          <a:fontRef idx="minor">
-            <a:schemeClr val="lt1"/>
-          </a:fontRef>
-        </p:style>
-        <p:txBody>
-          <a:bodyPr rtlCol="0" anchor="ctr" wrap="square"/>
-          <a:lstStyle/>
-          <a:p>
-            <a:pPr algn="ctr"/>
-          </a:p>
-        </p:txBody>
-      </p:sp>
-      <p:sp>
-        <p:nvSpPr>
-          <p:cNvPr id="31" name="Rectangle 30"/>
-          <p:cNvSpPr/>
-          <p:nvPr/>
-        </p:nvSpPr>
-        <p:spPr>
-          <a:xfrm>
-            <a:off x="457200" y="3973068"/>
-            <a:ext cx="82296" cy="2061972"/>
-          </a:xfrm>
-          <a:prstGeom prst="rect">
-            <a:avLst/>
-          </a:prstGeom>
-          <a:solidFill>
-            <a:srgbClr val="9A3B3B"/>
-          </a:solidFill>
-          <a:ln>
-            <a:noFill/>
-          </a:ln>
-          <a:effectLst/>
-        </p:spPr>
-        <p:style>
-          <a:lnRef idx="1">
-            <a:schemeClr val="accent1"/>
-          </a:lnRef>
-          <a:fillRef idx="3">
-            <a:schemeClr val="accent1"/>
-          </a:fillRef>
-          <a:effectRef idx="2">
-            <a:schemeClr val="accent1"/>
-          </a:effectRef>
-          <a:fontRef idx="minor">
-            <a:schemeClr val="lt1"/>
-          </a:fontRef>
-        </p:style>
-        <p:txBody>
-          <a:bodyPr rtlCol="0" anchor="ctr" wrap="square"/>
-          <a:lstStyle/>
-          <a:p>
-            <a:pPr algn="ctr"/>
-          </a:p>
-        </p:txBody>
-      </p:sp>
-      <p:sp>
-        <p:nvSpPr>
-          <p:cNvPr id="32" name="TextBox 31"/>
-          <p:cNvSpPr txBox="1"/>
-          <p:nvPr/>
-        </p:nvSpPr>
-        <p:spPr>
-          <a:xfrm>
-            <a:off x="658368" y="4037076"/>
-            <a:ext cx="5166359" cy="274320"/>
-          </a:xfrm>
-          <a:prstGeom prst="rect">
-            <a:avLst/>
-          </a:prstGeom>
-          <a:noFill/>
-        </p:spPr>
-        <p:txBody>
-          <a:bodyPr wrap="square">
-            <a:spAutoFit/>
-          </a:bodyPr>
-          <a:lstStyle/>
-          <a:p>
-            <a:r>
-              <a:rPr sz="1050" b="1">
-                <a:solidFill>
-                  <a:srgbClr val="B5533A"/>
-                </a:solidFill>
-                <a:latin typeface="微软雅黑"/>
-              </a:rPr>
-              <a:t>✗ publish后无消息</a:t>
-            </a:r>
-          </a:p>
-        </p:txBody>
-      </p:sp>
-      <p:sp>
-        <p:nvSpPr>
-          <p:cNvPr id="33" name="TextBox 32"/>
-          <p:cNvSpPr txBox="1"/>
-          <p:nvPr/>
-        </p:nvSpPr>
-        <p:spPr>
-          <a:xfrm>
-            <a:off x="658368" y="4357116"/>
-            <a:ext cx="5166359" cy="868680"/>
-          </a:xfrm>
-          <a:prstGeom prst="rect">
-            <a:avLst/>
-          </a:prstGeom>
-          <a:noFill/>
-        </p:spPr>
-        <p:txBody>
-          <a:bodyPr wrap="square">
-            <a:spAutoFit/>
-          </a:bodyPr>
-          <a:lstStyle/>
-          <a:p>
-            <a:r>
-              <a:rPr sz="900" b="0">
-                <a:solidFill>
-                  <a:srgbClr val="2B2F36"/>
-                </a:solidFill>
-                <a:latin typeface="微软雅黑"/>
-              </a:rPr>
-              <a:t>原因：立刻退出</a:t>
-            </a:r>
-          </a:p>
-          <a:p>
-            <a:r>
-              <a:rPr sz="900" b="0">
-                <a:solidFill>
-                  <a:srgbClr val="2B2F36"/>
-                </a:solidFill>
-                <a:latin typeface="微软雅黑"/>
-              </a:rPr>
-              <a:t>✔ 解决：sleep 0.3再退</a:t>
-            </a:r>
-          </a:p>
-        </p:txBody>
-      </p:sp>
-      <p:sp>
-        <p:nvSpPr>
-          <p:cNvPr id="34" name="TextBox 33"/>
-          <p:cNvSpPr txBox="1"/>
-          <p:nvPr/>
-        </p:nvSpPr>
-        <p:spPr>
-          <a:xfrm>
-            <a:off x="457200" y="6281928"/>
-            <a:ext cx="9601200" cy="182880"/>
-          </a:xfrm>
-          <a:prstGeom prst="rect">
-            <a:avLst/>
-          </a:prstGeom>
-          <a:noFill/>
-        </p:spPr>
-        <p:txBody>
-          <a:bodyPr wrap="square">
-            <a:spAutoFit/>
-          </a:bodyPr>
-          <a:lstStyle/>
-          <a:p>
-            <a:r>
-              <a:rPr sz="750" b="0">
-                <a:solidFill>
-                  <a:srgbClr val="6B7280"/>
-                </a:solidFill>
-                <a:latin typeface="微软雅黑"/>
-              </a:rPr>
-              <a:t>素材来源：同周《第21次课-设备如何在网络上说话》知识卡与避坑清单（逐字摘录）</a:t>
+            <a:pPr>
+              <a:spcAft>
+                <a:spcPts val="1000"/>
+              </a:spcAft>
+            </a:pPr>
+            <a:r>
+              <a:rPr sz="1800"/>
+              <a:t>本讲在工作过程系统化课程中承担的任务环节：任务实施</a:t>
+            </a:r>
+          </a:p>
+          <a:p>
+            <a:pPr>
+              <a:spcAft>
+                <a:spcPts val="1000"/>
+              </a:spcAft>
+            </a:pPr>
+            <a:r>
+              <a:rPr sz="1800"/>
+              <a:t>考核对齐：过程性成绩取自本讲工单第六节各模块得分合计（满分 100）。</a:t>
+            </a:r>
+          </a:p>
+          <a:p>
+            <a:pPr>
+              <a:spcAft>
+                <a:spcPts val="1000"/>
+              </a:spcAft>
+            </a:pPr>
+            <a:r>
+              <a:rPr sz="1800"/>
+              <a:t>达标线：综合成绩≥60 分，且无安全红线一票否决记录</a:t>
+            </a:r>
+          </a:p>
+          <a:p>
+            <a:pPr>
+              <a:spcAft>
+                <a:spcPts val="1000"/>
+              </a:spcAft>
+            </a:pPr>
+            <a:r>
+              <a:rPr sz="1800"/>
+              <a:t>无效工单判定：未打安全勾、无本人签字、无三方联签。</a:t>
             </a:r>
           </a:p>
         </p:txBody>
@@ -8459,7 +7950,7 @@
                 </a:solidFill>
                 <a:latin typeface="微软雅黑"/>
               </a:rPr>
-              <a:t>3 / 14</a:t>
+              <a:t>3 / 16</a:t>
             </a:r>
           </a:p>
         </p:txBody>
@@ -9165,7 +8656,7 @@
                 </a:solidFill>
                 <a:latin typeface="微软雅黑"/>
               </a:rPr>
-              <a:t>4 / 14</a:t>
+              <a:t>4 / 16</a:t>
             </a:r>
           </a:p>
         </p:txBody>
@@ -10007,7 +9498,7 @@
                 </a:solidFill>
                 <a:latin typeface="微软雅黑"/>
               </a:rPr>
-              <a:t>5 / 14</a:t>
+              <a:t>5 / 16</a:t>
             </a:r>
           </a:p>
         </p:txBody>
@@ -10135,7 +9626,7 @@
           <a:noFill/>
         </p:spPr>
         <p:txBody>
-          <a:bodyPr wrap="square" anchor="t">
+          <a:bodyPr wrap="square" anchor="ctr">
             <a:spAutoFit/>
           </a:bodyPr>
           <a:lstStyle/>
@@ -10155,27 +9646,27 @@
                 </a:solidFill>
                 <a:latin typeface="微软雅黑"/>
               </a:rPr>
-              <a:t>实施任务：工单1.5《工业互联网数据采集系统》</a:t>
-            </a:r>
-          </a:p>
-        </p:txBody>
-      </p:sp>
-      <p:sp>
-        <p:nvSpPr>
-          <p:cNvPr id="5" name="Rectangle 4"/>
+              <a:t>本课重难点地图 · 老师划重点（动手前必看）</a:t>
+            </a:r>
+          </a:p>
+        </p:txBody>
+      </p:sp>
+      <p:sp>
+        <p:nvSpPr>
+          <p:cNvPr id="18" name="Rectangle 17"/>
           <p:cNvSpPr/>
           <p:nvPr/>
         </p:nvSpPr>
         <p:spPr>
           <a:xfrm>
-            <a:off x="800000" y="1950000"/>
-            <a:ext cx="6300000" cy="3900000"/>
+            <a:off x="500000" y="6500000"/>
+            <a:ext cx="11100000" cy="20000"/>
           </a:xfrm>
           <a:prstGeom prst="rect">
             <a:avLst/>
           </a:prstGeom>
           <a:solidFill>
-            <a:srgbClr val="F3F6FD"/>
+            <a:srgbClr val="C9D4EE"/>
           </a:solidFill>
           <a:ln>
             <a:noFill/>
@@ -10206,159 +9697,14 @@
       </p:sp>
       <p:sp>
         <p:nvSpPr>
-          <p:cNvPr id="6" name="TextBox 5"/>
+          <p:cNvPr id="19" name="TextBox 18"/>
           <p:cNvSpPr txBox="1"/>
           <p:nvPr/>
         </p:nvSpPr>
         <p:spPr>
           <a:xfrm>
-            <a:off x="1000000" y="2100000"/>
-            <a:ext cx="5900000" cy="3600000"/>
-          </a:xfrm>
-          <a:prstGeom prst="rect">
-            <a:avLst/>
-          </a:prstGeom>
-          <a:noFill/>
-        </p:spPr>
-        <p:txBody>
-          <a:bodyPr wrap="square" anchor="t">
-            <a:spAutoFit/>
-          </a:bodyPr>
-          <a:lstStyle/>
-          <a:p>
-            <a:pPr algn="l">
-              <a:lnSpc>
-                <a:spcPct val="130000"/>
-              </a:lnSpc>
-              <a:spcAft>
-                <a:spcPts val="600"/>
-              </a:spcAft>
-            </a:pPr>
-            <a:r>
-              <a:rPr sz="1500" b="1">
-                <a:solidFill>
-                  <a:srgbClr val="0545E8"/>
-                </a:solidFill>
-                <a:latin typeface="微软雅黑"/>
-              </a:rPr>
-              <a:t>实施步骤</a:t>
-            </a:r>
-          </a:p>
-          <a:p>
-            <a:pPr algn="l">
-              <a:lnSpc>
-                <a:spcPct val="130000"/>
-              </a:lnSpc>
-              <a:spcAft>
-                <a:spcPts val="600"/>
-              </a:spcAft>
-            </a:pPr>
-            <a:r>
-              <a:rPr sz="1400" b="0">
-                <a:solidFill>
-                  <a:srgbClr val="010328"/>
-                </a:solidFill>
-                <a:latin typeface="微软雅黑"/>
-              </a:rPr>
-              <a:t>1. paho-mqtt连接本地代理发布</a:t>
-            </a:r>
-          </a:p>
-          <a:p>
-            <a:pPr algn="l">
-              <a:lnSpc>
-                <a:spcPct val="130000"/>
-              </a:lnSpc>
-              <a:spcAft>
-                <a:spcPts val="600"/>
-              </a:spcAft>
-            </a:pPr>
-            <a:r>
-              <a:rPr sz="1400" b="0">
-                <a:solidFill>
-                  <a:srgbClr val="010328"/>
-                </a:solidFill>
-                <a:latin typeface="微软雅黑"/>
-              </a:rPr>
-              <a:t>2. 断线重试+异常日志</a:t>
-            </a:r>
-          </a:p>
-          <a:p>
-            <a:pPr algn="l">
-              <a:lnSpc>
-                <a:spcPct val="130000"/>
-              </a:lnSpc>
-              <a:spcAft>
-                <a:spcPts val="600"/>
-              </a:spcAft>
-            </a:pPr>
-            <a:r>
-              <a:rPr sz="1400" b="0">
-                <a:solidFill>
-                  <a:srgbClr val="010328"/>
-                </a:solidFill>
-                <a:latin typeface="微软雅黑"/>
-              </a:rPr>
-              <a:t>3. 末期复习自测20题+综合项目选题</a:t>
-            </a:r>
-          </a:p>
-        </p:txBody>
-      </p:sp>
-      <p:sp>
-        <p:nvSpPr>
-          <p:cNvPr id="7" name="Rectangle 6"/>
-          <p:cNvSpPr/>
-          <p:nvPr/>
-        </p:nvSpPr>
-        <p:spPr>
-          <a:xfrm>
-            <a:off x="7400000" y="1950000"/>
-            <a:ext cx="4000000" cy="1850000"/>
-          </a:xfrm>
-          <a:prstGeom prst="rect">
-            <a:avLst/>
-          </a:prstGeom>
-          <a:solidFill>
-            <a:srgbClr val="E8F1E8"/>
-          </a:solidFill>
-          <a:ln>
-            <a:solidFill>
-              <a:srgbClr val="0475B6"/>
-            </a:solidFill>
-          </a:ln>
-          <a:effectLst/>
-        </p:spPr>
-        <p:style>
-          <a:lnRef idx="1">
-            <a:schemeClr val="accent1"/>
-          </a:lnRef>
-          <a:fillRef idx="3">
-            <a:schemeClr val="accent1"/>
-          </a:fillRef>
-          <a:effectRef idx="2">
-            <a:schemeClr val="accent1"/>
-          </a:effectRef>
-          <a:fontRef idx="minor">
-            <a:schemeClr val="lt1"/>
-          </a:fontRef>
-        </p:style>
-        <p:txBody>
-          <a:bodyPr rtlCol="0" anchor="ctr"/>
-          <a:lstStyle/>
-          <a:p>
-            <a:pPr algn="ctr"/>
-          </a:p>
-        </p:txBody>
-      </p:sp>
-      <p:sp>
-        <p:nvSpPr>
-          <p:cNvPr id="8" name="TextBox 7"/>
-          <p:cNvSpPr txBox="1"/>
-          <p:nvPr/>
-        </p:nvSpPr>
-        <p:spPr>
-          <a:xfrm>
-            <a:off x="7550000" y="2080000"/>
-            <a:ext cx="3750000" cy="1650000"/>
+            <a:off x="500000" y="6540000"/>
+            <a:ext cx="7000000" cy="300000"/>
           </a:xfrm>
           <a:prstGeom prst="rect">
             <a:avLst/>
@@ -10380,218 +9726,6 @@
               </a:spcAft>
             </a:pPr>
             <a:r>
-              <a:rPr sz="1400" b="1">
-                <a:solidFill>
-                  <a:srgbClr val="0475B6"/>
-                </a:solidFill>
-                <a:latin typeface="微软雅黑"/>
-              </a:rPr>
-              <a:t>及格标准（D）</a:t>
-            </a:r>
-          </a:p>
-          <a:p>
-            <a:pPr algn="l">
-              <a:lnSpc>
-                <a:spcPct val="110000"/>
-              </a:lnSpc>
-              <a:spcAft>
-                <a:spcPts val="600"/>
-              </a:spcAft>
-            </a:pPr>
-            <a:r>
-              <a:rPr sz="1300" b="0">
-                <a:solidFill>
-                  <a:srgbClr val="010328"/>
-                </a:solidFill>
-                <a:latin typeface="微软雅黑"/>
-              </a:rPr>
-              <a:t>Modbus读+MQTT发布成功</a:t>
-            </a:r>
-          </a:p>
-        </p:txBody>
-      </p:sp>
-      <p:sp>
-        <p:nvSpPr>
-          <p:cNvPr id="9" name="Rectangle 8"/>
-          <p:cNvSpPr/>
-          <p:nvPr/>
-        </p:nvSpPr>
-        <p:spPr>
-          <a:xfrm>
-            <a:off x="7400000" y="3950000"/>
-            <a:ext cx="4000000" cy="1850000"/>
-          </a:xfrm>
-          <a:prstGeom prst="rect">
-            <a:avLst/>
-          </a:prstGeom>
-          <a:solidFill>
-            <a:srgbClr val="FDF0E6"/>
-          </a:solidFill>
-          <a:ln>
-            <a:solidFill>
-              <a:srgbClr val="F5670F"/>
-            </a:solidFill>
-          </a:ln>
-          <a:effectLst/>
-        </p:spPr>
-        <p:style>
-          <a:lnRef idx="1">
-            <a:schemeClr val="accent1"/>
-          </a:lnRef>
-          <a:fillRef idx="3">
-            <a:schemeClr val="accent1"/>
-          </a:fillRef>
-          <a:effectRef idx="2">
-            <a:schemeClr val="accent1"/>
-          </a:effectRef>
-          <a:fontRef idx="minor">
-            <a:schemeClr val="lt1"/>
-          </a:fontRef>
-        </p:style>
-        <p:txBody>
-          <a:bodyPr rtlCol="0" anchor="ctr"/>
-          <a:lstStyle/>
-          <a:p>
-            <a:pPr algn="ctr"/>
-          </a:p>
-        </p:txBody>
-      </p:sp>
-      <p:sp>
-        <p:nvSpPr>
-          <p:cNvPr id="10" name="TextBox 9"/>
-          <p:cNvSpPr txBox="1"/>
-          <p:nvPr/>
-        </p:nvSpPr>
-        <p:spPr>
-          <a:xfrm>
-            <a:off x="7550000" y="4080000"/>
-            <a:ext cx="3750000" cy="1650000"/>
-          </a:xfrm>
-          <a:prstGeom prst="rect">
-            <a:avLst/>
-          </a:prstGeom>
-          <a:noFill/>
-        </p:spPr>
-        <p:txBody>
-          <a:bodyPr wrap="square" anchor="t">
-            <a:spAutoFit/>
-          </a:bodyPr>
-          <a:lstStyle/>
-          <a:p>
-            <a:pPr algn="l">
-              <a:lnSpc>
-                <a:spcPct val="110000"/>
-              </a:lnSpc>
-              <a:spcAft>
-                <a:spcPts val="600"/>
-              </a:spcAft>
-            </a:pPr>
-            <a:r>
-              <a:rPr sz="1400" b="1">
-                <a:solidFill>
-                  <a:srgbClr val="F5670F"/>
-                </a:solidFill>
-                <a:latin typeface="微软雅黑"/>
-              </a:rPr>
-              <a:t>优秀标准（B+）</a:t>
-            </a:r>
-          </a:p>
-          <a:p>
-            <a:pPr algn="l">
-              <a:lnSpc>
-                <a:spcPct val="110000"/>
-              </a:lnSpc>
-              <a:spcAft>
-                <a:spcPts val="600"/>
-              </a:spcAft>
-            </a:pPr>
-            <a:r>
-              <a:rPr sz="1300" b="0">
-                <a:solidFill>
-                  <a:srgbClr val="010328"/>
-                </a:solidFill>
-                <a:latin typeface="微软雅黑"/>
-              </a:rPr>
-              <a:t>断线重连+回环验证+规范率≥90%</a:t>
-            </a:r>
-          </a:p>
-        </p:txBody>
-      </p:sp>
-      <p:sp>
-        <p:nvSpPr>
-          <p:cNvPr id="11" name="Rectangle 10"/>
-          <p:cNvSpPr/>
-          <p:nvPr/>
-        </p:nvSpPr>
-        <p:spPr>
-          <a:xfrm>
-            <a:off x="500000" y="6500000"/>
-            <a:ext cx="11100000" cy="20000"/>
-          </a:xfrm>
-          <a:prstGeom prst="rect">
-            <a:avLst/>
-          </a:prstGeom>
-          <a:solidFill>
-            <a:srgbClr val="C9D4EE"/>
-          </a:solidFill>
-          <a:ln>
-            <a:noFill/>
-          </a:ln>
-          <a:effectLst/>
-        </p:spPr>
-        <p:style>
-          <a:lnRef idx="1">
-            <a:schemeClr val="accent1"/>
-          </a:lnRef>
-          <a:fillRef idx="3">
-            <a:schemeClr val="accent1"/>
-          </a:fillRef>
-          <a:effectRef idx="2">
-            <a:schemeClr val="accent1"/>
-          </a:effectRef>
-          <a:fontRef idx="minor">
-            <a:schemeClr val="lt1"/>
-          </a:fontRef>
-        </p:style>
-        <p:txBody>
-          <a:bodyPr rtlCol="0" anchor="ctr"/>
-          <a:lstStyle/>
-          <a:p>
-            <a:pPr algn="ctr"/>
-          </a:p>
-        </p:txBody>
-      </p:sp>
-      <p:sp>
-        <p:nvSpPr>
-          <p:cNvPr id="12" name="TextBox 11"/>
-          <p:cNvSpPr txBox="1"/>
-          <p:nvPr/>
-        </p:nvSpPr>
-        <p:spPr>
-          <a:xfrm>
-            <a:off x="500000" y="6540000"/>
-            <a:ext cx="7000000" cy="300000"/>
-          </a:xfrm>
-          <a:prstGeom prst="rect">
-            <a:avLst/>
-          </a:prstGeom>
-          <a:noFill/>
-        </p:spPr>
-        <p:txBody>
-          <a:bodyPr wrap="square" anchor="t">
-            <a:spAutoFit/>
-          </a:bodyPr>
-          <a:lstStyle/>
-          <a:p>
-            <a:pPr algn="l">
-              <a:lnSpc>
-                <a:spcPct val="110000"/>
-              </a:lnSpc>
-              <a:spcAft>
-                <a:spcPts val="600"/>
-              </a:spcAft>
-            </a:pPr>
-            <a:r>
               <a:rPr sz="1000" b="0">
                 <a:solidFill>
                   <a:srgbClr val="8A97B5"/>
@@ -10605,7 +9739,7 @@
       </p:sp>
       <p:sp>
         <p:nvSpPr>
-          <p:cNvPr id="13" name="TextBox 12"/>
+          <p:cNvPr id="20" name="TextBox 19"/>
           <p:cNvSpPr txBox="1"/>
           <p:nvPr/>
         </p:nvSpPr>
@@ -10640,7 +9774,839 @@
                 </a:solidFill>
                 <a:latin typeface="微软雅黑"/>
               </a:rPr>
-              <a:t>9 / 14</a:t>
+              <a:t>6 / 16</a:t>
+            </a:r>
+          </a:p>
+        </p:txBody>
+      </p:sp>
+      <p:sp>
+        <p:nvSpPr>
+          <p:cNvPr id="21" name="TextBox 20"/>
+          <p:cNvSpPr txBox="1"/>
+          <p:nvPr/>
+        </p:nvSpPr>
+        <p:spPr>
+          <a:xfrm>
+            <a:off x="457200" y="1389888"/>
+            <a:ext cx="11274552" cy="274320"/>
+          </a:xfrm>
+          <a:prstGeom prst="rect">
+            <a:avLst/>
+          </a:prstGeom>
+          <a:noFill/>
+        </p:spPr>
+        <p:txBody>
+          <a:bodyPr wrap="square">
+            <a:spAutoFit/>
+          </a:bodyPr>
+          <a:lstStyle/>
+          <a:p>
+            <a:r>
+              <a:rPr sz="1050" b="0">
+                <a:solidFill>
+                  <a:srgbClr val="6B7280"/>
+                </a:solidFill>
+                <a:latin typeface="微软雅黑"/>
+              </a:rPr>
+              <a:t>动手前先看这页：重点要会什么、难点会卡在哪、哪里最容易错、学没学会怎么自测。</a:t>
+            </a:r>
+          </a:p>
+        </p:txBody>
+      </p:sp>
+      <p:sp>
+        <p:nvSpPr>
+          <p:cNvPr id="22" name="Rectangle 21"/>
+          <p:cNvSpPr/>
+          <p:nvPr/>
+        </p:nvSpPr>
+        <p:spPr>
+          <a:xfrm>
+            <a:off x="457200" y="1783080"/>
+            <a:ext cx="5532120" cy="3127248"/>
+          </a:xfrm>
+          <a:prstGeom prst="rect">
+            <a:avLst/>
+          </a:prstGeom>
+          <a:solidFill>
+            <a:srgbClr val="FFFFFF"/>
+          </a:solidFill>
+          <a:ln>
+            <a:solidFill>
+              <a:srgbClr val="D6DCE4"/>
+            </a:solidFill>
+          </a:ln>
+          <a:effectLst/>
+        </p:spPr>
+        <p:style>
+          <a:lnRef idx="1">
+            <a:schemeClr val="accent1"/>
+          </a:lnRef>
+          <a:fillRef idx="3">
+            <a:schemeClr val="accent1"/>
+          </a:fillRef>
+          <a:effectRef idx="2">
+            <a:schemeClr val="accent1"/>
+          </a:effectRef>
+          <a:fontRef idx="minor">
+            <a:schemeClr val="lt1"/>
+          </a:fontRef>
+        </p:style>
+        <p:txBody>
+          <a:bodyPr rtlCol="0" anchor="ctr" wrap="square"/>
+          <a:lstStyle/>
+          <a:p>
+            <a:pPr algn="ctr"/>
+          </a:p>
+        </p:txBody>
+      </p:sp>
+      <p:sp>
+        <p:nvSpPr>
+          <p:cNvPr id="23" name="Rectangle 22"/>
+          <p:cNvSpPr/>
+          <p:nvPr/>
+        </p:nvSpPr>
+        <p:spPr>
+          <a:xfrm>
+            <a:off x="457200" y="1783080"/>
+            <a:ext cx="5532120" cy="365760"/>
+          </a:xfrm>
+          <a:prstGeom prst="rect">
+            <a:avLst/>
+          </a:prstGeom>
+          <a:solidFill>
+            <a:srgbClr val="2F5D8C"/>
+          </a:solidFill>
+          <a:ln>
+            <a:noFill/>
+          </a:ln>
+          <a:effectLst/>
+        </p:spPr>
+        <p:style>
+          <a:lnRef idx="1">
+            <a:schemeClr val="accent1"/>
+          </a:lnRef>
+          <a:fillRef idx="3">
+            <a:schemeClr val="accent1"/>
+          </a:fillRef>
+          <a:effectRef idx="2">
+            <a:schemeClr val="accent1"/>
+          </a:effectRef>
+          <a:fontRef idx="minor">
+            <a:schemeClr val="lt1"/>
+          </a:fontRef>
+        </p:style>
+        <p:txBody>
+          <a:bodyPr rtlCol="0" anchor="ctr" wrap="square"/>
+          <a:lstStyle/>
+          <a:p>
+            <a:pPr algn="ctr"/>
+          </a:p>
+        </p:txBody>
+      </p:sp>
+      <p:sp>
+        <p:nvSpPr>
+          <p:cNvPr id="24" name="TextBox 23"/>
+          <p:cNvSpPr txBox="1"/>
+          <p:nvPr/>
+        </p:nvSpPr>
+        <p:spPr>
+          <a:xfrm>
+            <a:off x="566928" y="1819656"/>
+            <a:ext cx="5312664" cy="292608"/>
+          </a:xfrm>
+          <a:prstGeom prst="rect">
+            <a:avLst/>
+          </a:prstGeom>
+          <a:noFill/>
+        </p:spPr>
+        <p:txBody>
+          <a:bodyPr wrap="square">
+            <a:spAutoFit/>
+          </a:bodyPr>
+          <a:lstStyle/>
+          <a:p>
+            <a:r>
+              <a:rPr sz="1150" b="1">
+                <a:solidFill>
+                  <a:srgbClr val="FFFFFF"/>
+                </a:solidFill>
+                <a:latin typeface="微软雅黑"/>
+              </a:rPr>
+              <a:t>重点 · 必会必考（本课知识点全景）</a:t>
+            </a:r>
+          </a:p>
+        </p:txBody>
+      </p:sp>
+      <p:sp>
+        <p:nvSpPr>
+          <p:cNvPr id="25" name="TextBox 24"/>
+          <p:cNvSpPr txBox="1"/>
+          <p:nvPr/>
+        </p:nvSpPr>
+        <p:spPr>
+          <a:xfrm>
+            <a:off x="621792" y="2267712"/>
+            <a:ext cx="5257800" cy="2560320"/>
+          </a:xfrm>
+          <a:prstGeom prst="rect">
+            <a:avLst/>
+          </a:prstGeom>
+          <a:noFill/>
+        </p:spPr>
+        <p:txBody>
+          <a:bodyPr wrap="square">
+            <a:spAutoFit/>
+          </a:bodyPr>
+          <a:lstStyle/>
+          <a:p>
+            <a:r>
+              <a:rPr sz="950" b="0">
+                <a:solidFill>
+                  <a:srgbClr val="2B2F36"/>
+                </a:solidFill>
+                <a:latin typeface="微软雅黑"/>
+              </a:rPr>
+              <a:t>◆ B01 Modbus寄存器｜寄存器=PLC的储物柜编号：40001起按地址读数</a:t>
+            </a:r>
+          </a:p>
+          <a:p>
+            <a:r>
+              <a:rPr sz="950" b="0">
+                <a:solidFill>
+                  <a:srgbClr val="2B2F36"/>
+                </a:solidFill>
+                <a:latin typeface="微软雅黑"/>
+              </a:rPr>
+              <a:t>◆ B02 定点存储约定｜定点=小数×10存整数：678其实是67.8℃——PLC不存小数</a:t>
+            </a:r>
+          </a:p>
+          <a:p>
+            <a:r>
+              <a:rPr sz="950" b="0">
+                <a:solidFill>
+                  <a:srgbClr val="2B2F36"/>
+                </a:solidFill>
+                <a:latin typeface="微软雅黑"/>
+              </a:rPr>
+              <a:t>◆ B03 pymodbus读寄存器｜pymodbus=Python的Modbus翻译官——一行读PLC…</a:t>
+            </a:r>
+          </a:p>
+          <a:p>
+            <a:r>
+              <a:rPr sz="950" b="0">
+                <a:solidFill>
+                  <a:srgbClr val="2B2F36"/>
+                </a:solidFill>
+                <a:latin typeface="微软雅黑"/>
+              </a:rPr>
+              <a:t>◆ B04 MQTT主题路由｜MQTT=广播电台：主题=频道，发布订阅各取所需</a:t>
+            </a:r>
+          </a:p>
+          <a:p>
+            <a:r>
+              <a:rPr sz="950" b="0">
+                <a:solidFill>
+                  <a:srgbClr val="2B2F36"/>
+                </a:solidFill>
+                <a:latin typeface="微软雅黑"/>
+              </a:rPr>
+              <a:t>◆ B05 JSON消息含时间戳｜ts时间戳=消息的出生证明——排序追溯全靠它</a:t>
+            </a:r>
+          </a:p>
+          <a:p>
+            <a:r>
+              <a:rPr sz="950" b="0">
+                <a:solidFill>
+                  <a:srgbClr val="2B2F36"/>
+                </a:solidFill>
+                <a:latin typeface="微软雅黑"/>
+              </a:rPr>
+              <a:t>◆ B06 排错三步法｜排错三步=从外到内剥洋葱：ping通→端口通→代码通</a:t>
+            </a:r>
+          </a:p>
+        </p:txBody>
+      </p:sp>
+      <p:sp>
+        <p:nvSpPr>
+          <p:cNvPr id="26" name="Rectangle 25"/>
+          <p:cNvSpPr/>
+          <p:nvPr/>
+        </p:nvSpPr>
+        <p:spPr>
+          <a:xfrm>
+            <a:off x="6144768" y="1783080"/>
+            <a:ext cx="5586984" cy="1481328"/>
+          </a:xfrm>
+          <a:prstGeom prst="rect">
+            <a:avLst/>
+          </a:prstGeom>
+          <a:solidFill>
+            <a:srgbClr val="FFFFFF"/>
+          </a:solidFill>
+          <a:ln>
+            <a:solidFill>
+              <a:srgbClr val="D6DCE4"/>
+            </a:solidFill>
+          </a:ln>
+          <a:effectLst/>
+        </p:spPr>
+        <p:style>
+          <a:lnRef idx="1">
+            <a:schemeClr val="accent1"/>
+          </a:lnRef>
+          <a:fillRef idx="3">
+            <a:schemeClr val="accent1"/>
+          </a:fillRef>
+          <a:effectRef idx="2">
+            <a:schemeClr val="accent1"/>
+          </a:effectRef>
+          <a:fontRef idx="minor">
+            <a:schemeClr val="lt1"/>
+          </a:fontRef>
+        </p:style>
+        <p:txBody>
+          <a:bodyPr rtlCol="0" anchor="ctr" wrap="square"/>
+          <a:lstStyle/>
+          <a:p>
+            <a:pPr algn="ctr"/>
+          </a:p>
+        </p:txBody>
+      </p:sp>
+      <p:sp>
+        <p:nvSpPr>
+          <p:cNvPr id="27" name="Rectangle 26"/>
+          <p:cNvSpPr/>
+          <p:nvPr/>
+        </p:nvSpPr>
+        <p:spPr>
+          <a:xfrm>
+            <a:off x="6144768" y="1783080"/>
+            <a:ext cx="5586984" cy="365760"/>
+          </a:xfrm>
+          <a:prstGeom prst="rect">
+            <a:avLst/>
+          </a:prstGeom>
+          <a:solidFill>
+            <a:srgbClr val="8A4B2D"/>
+          </a:solidFill>
+          <a:ln>
+            <a:noFill/>
+          </a:ln>
+          <a:effectLst/>
+        </p:spPr>
+        <p:style>
+          <a:lnRef idx="1">
+            <a:schemeClr val="accent1"/>
+          </a:lnRef>
+          <a:fillRef idx="3">
+            <a:schemeClr val="accent1"/>
+          </a:fillRef>
+          <a:effectRef idx="2">
+            <a:schemeClr val="accent1"/>
+          </a:effectRef>
+          <a:fontRef idx="minor">
+            <a:schemeClr val="lt1"/>
+          </a:fontRef>
+        </p:style>
+        <p:txBody>
+          <a:bodyPr rtlCol="0" anchor="ctr" wrap="square"/>
+          <a:lstStyle/>
+          <a:p>
+            <a:pPr algn="ctr"/>
+          </a:p>
+        </p:txBody>
+      </p:sp>
+      <p:sp>
+        <p:nvSpPr>
+          <p:cNvPr id="28" name="TextBox 27"/>
+          <p:cNvSpPr txBox="1"/>
+          <p:nvPr/>
+        </p:nvSpPr>
+        <p:spPr>
+          <a:xfrm>
+            <a:off x="6254496" y="1819656"/>
+            <a:ext cx="5367528" cy="292608"/>
+          </a:xfrm>
+          <a:prstGeom prst="rect">
+            <a:avLst/>
+          </a:prstGeom>
+          <a:noFill/>
+        </p:spPr>
+        <p:txBody>
+          <a:bodyPr wrap="square">
+            <a:spAutoFit/>
+          </a:bodyPr>
+          <a:lstStyle/>
+          <a:p>
+            <a:r>
+              <a:rPr sz="1150" b="1">
+                <a:solidFill>
+                  <a:srgbClr val="FFFFFF"/>
+                </a:solidFill>
+                <a:latin typeface="微软雅黑"/>
+              </a:rPr>
+              <a:t>难点 · 易卡壳（下一页逐个击破）</a:t>
+            </a:r>
+          </a:p>
+        </p:txBody>
+      </p:sp>
+      <p:sp>
+        <p:nvSpPr>
+          <p:cNvPr id="29" name="TextBox 28"/>
+          <p:cNvSpPr txBox="1"/>
+          <p:nvPr/>
+        </p:nvSpPr>
+        <p:spPr>
+          <a:xfrm>
+            <a:off x="6309360" y="2231136"/>
+            <a:ext cx="5303520" cy="960120"/>
+          </a:xfrm>
+          <a:prstGeom prst="rect">
+            <a:avLst/>
+          </a:prstGeom>
+          <a:noFill/>
+        </p:spPr>
+        <p:txBody>
+          <a:bodyPr wrap="square">
+            <a:spAutoFit/>
+          </a:bodyPr>
+          <a:lstStyle/>
+          <a:p>
+            <a:r>
+              <a:rPr sz="900" b="0">
+                <a:solidFill>
+                  <a:srgbClr val="2B2F36"/>
+                </a:solidFill>
+                <a:latin typeface="微软雅黑"/>
+              </a:rPr>
+              <a:t>▲ 误区：地址从0还是40001起两派之争——以server文档为准</a:t>
+            </a:r>
+          </a:p>
+          <a:p>
+            <a:r>
+              <a:rPr sz="900" b="0">
+                <a:solidFill>
+                  <a:srgbClr val="2B2F36"/>
+                </a:solidFill>
+                <a:latin typeface="微软雅黑"/>
+              </a:rPr>
+              <a:t>▲ 误区：忘除倍率→温度高10倍——对不上先查约定倍率</a:t>
+            </a:r>
+          </a:p>
+          <a:p>
+            <a:r>
+              <a:rPr sz="900" b="0">
+                <a:solidFill>
+                  <a:srgbClr val="2B2F36"/>
+                </a:solidFill>
+                <a:latin typeface="微软雅黑"/>
+              </a:rPr>
+              <a:t>▲ 误区：3.x必须关键字传参(address=/count=)——照2.x旧码抄报错</a:t>
+            </a:r>
+          </a:p>
+        </p:txBody>
+      </p:sp>
+      <p:sp>
+        <p:nvSpPr>
+          <p:cNvPr id="30" name="Rectangle 29"/>
+          <p:cNvSpPr/>
+          <p:nvPr/>
+        </p:nvSpPr>
+        <p:spPr>
+          <a:xfrm>
+            <a:off x="6144768" y="3401568"/>
+            <a:ext cx="5586984" cy="1508760"/>
+          </a:xfrm>
+          <a:prstGeom prst="rect">
+            <a:avLst/>
+          </a:prstGeom>
+          <a:solidFill>
+            <a:srgbClr val="FFFFFF"/>
+          </a:solidFill>
+          <a:ln>
+            <a:solidFill>
+              <a:srgbClr val="D6DCE4"/>
+            </a:solidFill>
+          </a:ln>
+          <a:effectLst/>
+        </p:spPr>
+        <p:style>
+          <a:lnRef idx="1">
+            <a:schemeClr val="accent1"/>
+          </a:lnRef>
+          <a:fillRef idx="3">
+            <a:schemeClr val="accent1"/>
+          </a:fillRef>
+          <a:effectRef idx="2">
+            <a:schemeClr val="accent1"/>
+          </a:effectRef>
+          <a:fontRef idx="minor">
+            <a:schemeClr val="lt1"/>
+          </a:fontRef>
+        </p:style>
+        <p:txBody>
+          <a:bodyPr rtlCol="0" anchor="ctr" wrap="square"/>
+          <a:lstStyle/>
+          <a:p>
+            <a:pPr algn="ctr"/>
+          </a:p>
+        </p:txBody>
+      </p:sp>
+      <p:sp>
+        <p:nvSpPr>
+          <p:cNvPr id="31" name="Rectangle 30"/>
+          <p:cNvSpPr/>
+          <p:nvPr/>
+        </p:nvSpPr>
+        <p:spPr>
+          <a:xfrm>
+            <a:off x="6144768" y="3401568"/>
+            <a:ext cx="5586984" cy="365760"/>
+          </a:xfrm>
+          <a:prstGeom prst="rect">
+            <a:avLst/>
+          </a:prstGeom>
+          <a:solidFill>
+            <a:srgbClr val="9A3B3B"/>
+          </a:solidFill>
+          <a:ln>
+            <a:noFill/>
+          </a:ln>
+          <a:effectLst/>
+        </p:spPr>
+        <p:style>
+          <a:lnRef idx="1">
+            <a:schemeClr val="accent1"/>
+          </a:lnRef>
+          <a:fillRef idx="3">
+            <a:schemeClr val="accent1"/>
+          </a:fillRef>
+          <a:effectRef idx="2">
+            <a:schemeClr val="accent1"/>
+          </a:effectRef>
+          <a:fontRef idx="minor">
+            <a:schemeClr val="lt1"/>
+          </a:fontRef>
+        </p:style>
+        <p:txBody>
+          <a:bodyPr rtlCol="0" anchor="ctr" wrap="square"/>
+          <a:lstStyle/>
+          <a:p>
+            <a:pPr algn="ctr"/>
+          </a:p>
+        </p:txBody>
+      </p:sp>
+      <p:sp>
+        <p:nvSpPr>
+          <p:cNvPr id="32" name="TextBox 31"/>
+          <p:cNvSpPr txBox="1"/>
+          <p:nvPr/>
+        </p:nvSpPr>
+        <p:spPr>
+          <a:xfrm>
+            <a:off x="6254496" y="3438144"/>
+            <a:ext cx="5367528" cy="292608"/>
+          </a:xfrm>
+          <a:prstGeom prst="rect">
+            <a:avLst/>
+          </a:prstGeom>
+          <a:noFill/>
+        </p:spPr>
+        <p:txBody>
+          <a:bodyPr wrap="square">
+            <a:spAutoFit/>
+          </a:bodyPr>
+          <a:lstStyle/>
+          <a:p>
+            <a:r>
+              <a:rPr sz="1150" b="1">
+                <a:solidFill>
+                  <a:srgbClr val="FFFFFF"/>
+                </a:solidFill>
+                <a:latin typeface="微软雅黑"/>
+              </a:rPr>
+              <a:t>高频易错 · 动手前先记住</a:t>
+            </a:r>
+          </a:p>
+        </p:txBody>
+      </p:sp>
+      <p:sp>
+        <p:nvSpPr>
+          <p:cNvPr id="33" name="TextBox 32"/>
+          <p:cNvSpPr txBox="1"/>
+          <p:nvPr/>
+        </p:nvSpPr>
+        <p:spPr>
+          <a:xfrm>
+            <a:off x="6309360" y="3849624"/>
+            <a:ext cx="5303520" cy="960120"/>
+          </a:xfrm>
+          <a:prstGeom prst="rect">
+            <a:avLst/>
+          </a:prstGeom>
+          <a:noFill/>
+        </p:spPr>
+        <p:txBody>
+          <a:bodyPr wrap="square">
+            <a:spAutoFit/>
+          </a:bodyPr>
+          <a:lstStyle/>
+          <a:p>
+            <a:r>
+              <a:rPr sz="900" b="0">
+                <a:solidFill>
+                  <a:srgbClr val="2B2F36"/>
+                </a:solidFill>
+                <a:latin typeface="微软雅黑"/>
+              </a:rPr>
+              <a:t>✗ 连不上PLC → 先跑虚拟产线--check</a:t>
+            </a:r>
+          </a:p>
+          <a:p>
+            <a:r>
+              <a:rPr sz="900" b="0">
+                <a:solidFill>
+                  <a:srgbClr val="2B2F36"/>
+                </a:solidFill>
+                <a:latin typeface="微软雅黑"/>
+              </a:rPr>
+              <a:t>✗ 数值大10倍 → 寄存器定点换算</a:t>
+            </a:r>
+          </a:p>
+          <a:p>
+            <a:r>
+              <a:rPr sz="900" b="0">
+                <a:solidFill>
+                  <a:srgbClr val="2B2F36"/>
+                </a:solidFill>
+                <a:latin typeface="微软雅黑"/>
+              </a:rPr>
+              <a:t>✗ publish后无消息 → sleep 0.3再退</a:t>
+            </a:r>
+          </a:p>
+        </p:txBody>
+      </p:sp>
+      <p:sp>
+        <p:nvSpPr>
+          <p:cNvPr id="34" name="Rectangle 33"/>
+          <p:cNvSpPr/>
+          <p:nvPr/>
+        </p:nvSpPr>
+        <p:spPr>
+          <a:xfrm>
+            <a:off x="457200" y="5047488"/>
+            <a:ext cx="11274552" cy="1207008"/>
+          </a:xfrm>
+          <a:prstGeom prst="rect">
+            <a:avLst/>
+          </a:prstGeom>
+          <a:solidFill>
+            <a:srgbClr val="FFFFFF"/>
+          </a:solidFill>
+          <a:ln>
+            <a:solidFill>
+              <a:srgbClr val="D6DCE4"/>
+            </a:solidFill>
+          </a:ln>
+          <a:effectLst/>
+        </p:spPr>
+        <p:style>
+          <a:lnRef idx="1">
+            <a:schemeClr val="accent1"/>
+          </a:lnRef>
+          <a:fillRef idx="3">
+            <a:schemeClr val="accent1"/>
+          </a:fillRef>
+          <a:effectRef idx="2">
+            <a:schemeClr val="accent1"/>
+          </a:effectRef>
+          <a:fontRef idx="minor">
+            <a:schemeClr val="lt1"/>
+          </a:fontRef>
+        </p:style>
+        <p:txBody>
+          <a:bodyPr rtlCol="0" anchor="ctr" wrap="square"/>
+          <a:lstStyle/>
+          <a:p>
+            <a:pPr algn="ctr"/>
+          </a:p>
+        </p:txBody>
+      </p:sp>
+      <p:sp>
+        <p:nvSpPr>
+          <p:cNvPr id="35" name="Rectangle 34"/>
+          <p:cNvSpPr/>
+          <p:nvPr/>
+        </p:nvSpPr>
+        <p:spPr>
+          <a:xfrm>
+            <a:off x="457200" y="5047488"/>
+            <a:ext cx="11274552" cy="365760"/>
+          </a:xfrm>
+          <a:prstGeom prst="rect">
+            <a:avLst/>
+          </a:prstGeom>
+          <a:solidFill>
+            <a:srgbClr val="2E7D46"/>
+          </a:solidFill>
+          <a:ln>
+            <a:noFill/>
+          </a:ln>
+          <a:effectLst/>
+        </p:spPr>
+        <p:style>
+          <a:lnRef idx="1">
+            <a:schemeClr val="accent1"/>
+          </a:lnRef>
+          <a:fillRef idx="3">
+            <a:schemeClr val="accent1"/>
+          </a:fillRef>
+          <a:effectRef idx="2">
+            <a:schemeClr val="accent1"/>
+          </a:effectRef>
+          <a:fontRef idx="minor">
+            <a:schemeClr val="lt1"/>
+          </a:fontRef>
+        </p:style>
+        <p:txBody>
+          <a:bodyPr rtlCol="0" anchor="ctr" wrap="square"/>
+          <a:lstStyle/>
+          <a:p>
+            <a:pPr algn="ctr"/>
+          </a:p>
+        </p:txBody>
+      </p:sp>
+      <p:sp>
+        <p:nvSpPr>
+          <p:cNvPr id="36" name="TextBox 35"/>
+          <p:cNvSpPr txBox="1"/>
+          <p:nvPr/>
+        </p:nvSpPr>
+        <p:spPr>
+          <a:xfrm>
+            <a:off x="566928" y="5084064"/>
+            <a:ext cx="11055096" cy="292608"/>
+          </a:xfrm>
+          <a:prstGeom prst="rect">
+            <a:avLst/>
+          </a:prstGeom>
+          <a:noFill/>
+        </p:spPr>
+        <p:txBody>
+          <a:bodyPr wrap="square">
+            <a:spAutoFit/>
+          </a:bodyPr>
+          <a:lstStyle/>
+          <a:p>
+            <a:r>
+              <a:rPr sz="1150" b="1">
+                <a:solidFill>
+                  <a:srgbClr val="FFFFFF"/>
+                </a:solidFill>
+                <a:latin typeface="微软雅黑"/>
+              </a:rPr>
+              <a:t>达标自问 · 学没学会，问自己这四句（当堂评分同口径）</a:t>
+            </a:r>
+          </a:p>
+        </p:txBody>
+      </p:sp>
+      <p:sp>
+        <p:nvSpPr>
+          <p:cNvPr id="37" name="TextBox 36"/>
+          <p:cNvSpPr txBox="1"/>
+          <p:nvPr/>
+        </p:nvSpPr>
+        <p:spPr>
+          <a:xfrm>
+            <a:off x="621792" y="5458968"/>
+            <a:ext cx="10972800" cy="768096"/>
+          </a:xfrm>
+          <a:prstGeom prst="rect">
+            <a:avLst/>
+          </a:prstGeom>
+          <a:noFill/>
+        </p:spPr>
+        <p:txBody>
+          <a:bodyPr wrap="square">
+            <a:spAutoFit/>
+          </a:bodyPr>
+          <a:lstStyle/>
+          <a:p>
+            <a:r>
+              <a:rPr sz="900" b="0">
+                <a:solidFill>
+                  <a:srgbClr val="2B2F36"/>
+                </a:solidFill>
+                <a:latin typeface="微软雅黑"/>
+              </a:rPr>
+              <a:t>① 及格线我能过吗——Modbus读+MQTT发布成功</a:t>
+            </a:r>
+          </a:p>
+          <a:p>
+            <a:r>
+              <a:rPr sz="900" b="0">
+                <a:solidFill>
+                  <a:srgbClr val="2B2F36"/>
+                </a:solidFill>
+                <a:latin typeface="微软雅黑"/>
+              </a:rPr>
+              <a:t>② 优秀线我够吗——断线重连+回环验证+规范率≥90%</a:t>
+            </a:r>
+          </a:p>
+          <a:p>
+            <a:r>
+              <a:rPr sz="900" b="0">
+                <a:solidFill>
+                  <a:srgbClr val="2B2F36"/>
+                </a:solidFill>
+                <a:latin typeface="微软雅黑"/>
+              </a:rPr>
+              <a:t>③ 技能点我能独立做出来吗——连接虚拟PLC读取寄存器；paho-mqtt发布JSON消息</a:t>
+            </a:r>
+          </a:p>
+          <a:p>
+            <a:r>
+              <a:rPr sz="900" b="0">
+                <a:solidFill>
+                  <a:srgbClr val="2B2F36"/>
+                </a:solidFill>
+                <a:latin typeface="微软雅黑"/>
+              </a:rPr>
+              <a:t>④ 报错了先查「常见错误速查」页再举手——错误信息逐字读一遍，八成自己能修</a:t>
+            </a:r>
+          </a:p>
+        </p:txBody>
+      </p:sp>
+      <p:sp>
+        <p:nvSpPr>
+          <p:cNvPr id="38" name="TextBox 37"/>
+          <p:cNvSpPr txBox="1"/>
+          <p:nvPr/>
+        </p:nvSpPr>
+        <p:spPr>
+          <a:xfrm>
+            <a:off x="457200" y="6281928"/>
+            <a:ext cx="9601200" cy="182880"/>
+          </a:xfrm>
+          <a:prstGeom prst="rect">
+            <a:avLst/>
+          </a:prstGeom>
+          <a:noFill/>
+        </p:spPr>
+        <p:txBody>
+          <a:bodyPr wrap="square">
+            <a:spAutoFit/>
+          </a:bodyPr>
+          <a:lstStyle/>
+          <a:p>
+            <a:r>
+              <a:rPr sz="900" b="0">
+                <a:solidFill>
+                  <a:srgbClr val="6B7280"/>
+                </a:solidFill>
+                <a:latin typeface="微软雅黑"/>
+              </a:rPr>
+              <a:t>素材来源：同周《第21次课-设备如何在网络上说话》知识卡与避坑清单（逐字摘录）</a:t>
             </a:r>
           </a:p>
         </p:txBody>
@@ -10768,7 +10734,7 @@
           <a:noFill/>
         </p:spPr>
         <p:txBody>
-          <a:bodyPr wrap="square" anchor="t">
+          <a:bodyPr wrap="square" anchor="ctr">
             <a:spAutoFit/>
           </a:bodyPr>
           <a:lstStyle/>
@@ -10788,27 +10754,27 @@
                 </a:solidFill>
                 <a:latin typeface="微软雅黑"/>
               </a:rPr>
-              <a:t>总结评价与课后任务</a:t>
-            </a:r>
-          </a:p>
-        </p:txBody>
-      </p:sp>
-      <p:sp>
-        <p:nvSpPr>
-          <p:cNvPr id="5" name="Rectangle 4"/>
+              <a:t>难点逐个击破 · 零基础照做就能会</a:t>
+            </a:r>
+          </a:p>
+        </p:txBody>
+      </p:sp>
+      <p:sp>
+        <p:nvSpPr>
+          <p:cNvPr id="18" name="Rectangle 17"/>
           <p:cNvSpPr/>
           <p:nvPr/>
         </p:nvSpPr>
         <p:spPr>
           <a:xfrm>
-            <a:off x="800000" y="1950000"/>
-            <a:ext cx="10600000" cy="1500000"/>
+            <a:off x="500000" y="6500000"/>
+            <a:ext cx="11100000" cy="20000"/>
           </a:xfrm>
           <a:prstGeom prst="rect">
             <a:avLst/>
           </a:prstGeom>
           <a:solidFill>
-            <a:srgbClr val="F3F6FD"/>
+            <a:srgbClr val="C9D4EE"/>
           </a:solidFill>
           <a:ln>
             <a:noFill/>
@@ -10839,14 +10805,14 @@
       </p:sp>
       <p:sp>
         <p:nvSpPr>
-          <p:cNvPr id="6" name="TextBox 5"/>
+          <p:cNvPr id="19" name="TextBox 18"/>
           <p:cNvSpPr txBox="1"/>
           <p:nvPr/>
         </p:nvSpPr>
         <p:spPr>
           <a:xfrm>
-            <a:off x="1000000" y="2050000"/>
-            <a:ext cx="10300000" cy="1400000"/>
+            <a:off x="500000" y="6540000"/>
+            <a:ext cx="7000000" cy="300000"/>
           </a:xfrm>
           <a:prstGeom prst="rect">
             <a:avLst/>
@@ -10868,315 +10834,6 @@
               </a:spcAft>
             </a:pPr>
             <a:r>
-              <a:rPr sz="1500" b="1">
-                <a:solidFill>
-                  <a:srgbClr val="0545E8"/>
-                </a:solidFill>
-                <a:latin typeface="微软雅黑"/>
-              </a:rPr>
-              <a:t>评价（10分钟）：</a:t>
-            </a:r>
-          </a:p>
-          <a:p>
-            <a:pPr algn="l">
-              <a:lnSpc>
-                <a:spcPct val="110000"/>
-              </a:lnSpc>
-              <a:spcAft>
-                <a:spcPts val="600"/>
-              </a:spcAft>
-            </a:pPr>
-            <a:r>
-              <a:rPr sz="1400" b="0">
-                <a:solidFill>
-                  <a:srgbClr val="010328"/>
-                </a:solidFill>
-                <a:latin typeface="微软雅黑"/>
-              </a:rPr>
-              <a:t>按D/C/B/A量表当堂评分；工单24小时内反馈评语与改进建议。</a:t>
-            </a:r>
-          </a:p>
-        </p:txBody>
-      </p:sp>
-      <p:sp>
-        <p:nvSpPr>
-          <p:cNvPr id="7" name="TextBox 6"/>
-          <p:cNvSpPr txBox="1"/>
-          <p:nvPr/>
-        </p:nvSpPr>
-        <p:spPr>
-          <a:xfrm>
-            <a:off x="850000" y="3700000"/>
-            <a:ext cx="10600000" cy="700000"/>
-          </a:xfrm>
-          <a:prstGeom prst="rect">
-            <a:avLst/>
-          </a:prstGeom>
-          <a:noFill/>
-        </p:spPr>
-        <p:txBody>
-          <a:bodyPr wrap="square" anchor="t">
-            <a:spAutoFit/>
-          </a:bodyPr>
-          <a:lstStyle/>
-          <a:p>
-            <a:pPr algn="l">
-              <a:lnSpc>
-                <a:spcPct val="120000"/>
-              </a:lnSpc>
-              <a:spcAft>
-                <a:spcPts val="600"/>
-              </a:spcAft>
-            </a:pPr>
-            <a:r>
-              <a:rPr sz="1400" b="1">
-                <a:solidFill>
-                  <a:srgbClr val="F5670F"/>
-                </a:solidFill>
-                <a:latin typeface="微软雅黑"/>
-              </a:rPr>
-              <a:t>1. </a:t>
-            </a:r>
-            <a:r>
-              <a:rPr sz="1400" b="0">
-                <a:solidFill>
-                  <a:srgbClr val="010328"/>
-                </a:solidFill>
-                <a:latin typeface="微软雅黑"/>
-              </a:rPr>
-              <a:t>1. 完成工单项目1.5《工业互联网数据采集系统》：及格标准Modbus读取+MQTT发布基本工作；优秀标准采集完整+消息规范+异常处理完善+规范率≥90%；</a:t>
-            </a:r>
-          </a:p>
-        </p:txBody>
-      </p:sp>
-      <p:sp>
-        <p:nvSpPr>
-          <p:cNvPr id="8" name="TextBox 7"/>
-          <p:cNvSpPr txBox="1"/>
-          <p:nvPr/>
-        </p:nvSpPr>
-        <p:spPr>
-          <a:xfrm>
-            <a:off x="850000" y="4420000"/>
-            <a:ext cx="10600000" cy="700000"/>
-          </a:xfrm>
-          <a:prstGeom prst="rect">
-            <a:avLst/>
-          </a:prstGeom>
-          <a:noFill/>
-        </p:spPr>
-        <p:txBody>
-          <a:bodyPr wrap="square" anchor="t">
-            <a:spAutoFit/>
-          </a:bodyPr>
-          <a:lstStyle/>
-          <a:p>
-            <a:pPr algn="l">
-              <a:lnSpc>
-                <a:spcPct val="120000"/>
-              </a:lnSpc>
-              <a:spcAft>
-                <a:spcPts val="600"/>
-              </a:spcAft>
-            </a:pPr>
-            <a:r>
-              <a:rPr sz="1400" b="1">
-                <a:solidFill>
-                  <a:srgbClr val="F5670F"/>
-                </a:solidFill>
-                <a:latin typeface="微软雅黑"/>
-              </a:rPr>
-              <a:t>2. </a:t>
-            </a:r>
-            <a:r>
-              <a:rPr sz="1400" b="0">
-                <a:solidFill>
-                  <a:srgbClr val="010328"/>
-                </a:solidFill>
-                <a:latin typeface="微软雅黑"/>
-              </a:rPr>
-              <a:t>2. 完成综合项目需求分析与分工计划；</a:t>
-            </a:r>
-          </a:p>
-        </p:txBody>
-      </p:sp>
-      <p:sp>
-        <p:nvSpPr>
-          <p:cNvPr id="9" name="TextBox 8"/>
-          <p:cNvSpPr txBox="1"/>
-          <p:nvPr/>
-        </p:nvSpPr>
-        <p:spPr>
-          <a:xfrm>
-            <a:off x="850000" y="5140000"/>
-            <a:ext cx="10600000" cy="700000"/>
-          </a:xfrm>
-          <a:prstGeom prst="rect">
-            <a:avLst/>
-          </a:prstGeom>
-          <a:noFill/>
-        </p:spPr>
-        <p:txBody>
-          <a:bodyPr wrap="square" anchor="t">
-            <a:spAutoFit/>
-          </a:bodyPr>
-          <a:lstStyle/>
-          <a:p>
-            <a:pPr algn="l">
-              <a:lnSpc>
-                <a:spcPct val="120000"/>
-              </a:lnSpc>
-              <a:spcAft>
-                <a:spcPts val="600"/>
-              </a:spcAft>
-            </a:pPr>
-            <a:r>
-              <a:rPr sz="1400" b="1">
-                <a:solidFill>
-                  <a:srgbClr val="F5670F"/>
-                </a:solidFill>
-                <a:latin typeface="微软雅黑"/>
-              </a:rPr>
-              <a:t>3. </a:t>
-            </a:r>
-            <a:r>
-              <a:rPr sz="1400" b="0">
-                <a:solidFill>
-                  <a:srgbClr val="010328"/>
-                </a:solidFill>
-                <a:latin typeface="微软雅黑"/>
-              </a:rPr>
-              <a:t>3. 复习全课程知识清单，准备综合项目答辩。</a:t>
-            </a:r>
-          </a:p>
-        </p:txBody>
-      </p:sp>
-      <p:sp>
-        <p:nvSpPr>
-          <p:cNvPr id="10" name="TextBox 9"/>
-          <p:cNvSpPr txBox="1"/>
-          <p:nvPr/>
-        </p:nvSpPr>
-        <p:spPr>
-          <a:xfrm>
-            <a:off x="850000" y="5960000"/>
-            <a:ext cx="10600000" cy="500000"/>
-          </a:xfrm>
-          <a:prstGeom prst="rect">
-            <a:avLst/>
-          </a:prstGeom>
-          <a:noFill/>
-        </p:spPr>
-        <p:txBody>
-          <a:bodyPr wrap="square" anchor="t">
-            <a:spAutoFit/>
-          </a:bodyPr>
-          <a:lstStyle/>
-          <a:p>
-            <a:pPr algn="l">
-              <a:lnSpc>
-                <a:spcPct val="110000"/>
-              </a:lnSpc>
-              <a:spcAft>
-                <a:spcPts val="600"/>
-              </a:spcAft>
-            </a:pPr>
-            <a:r>
-              <a:rPr sz="1300" b="1">
-                <a:solidFill>
-                  <a:srgbClr val="0475B6"/>
-                </a:solidFill>
-                <a:latin typeface="微软雅黑"/>
-              </a:rPr>
-              <a:t>下次课预告：</a:t>
-            </a:r>
-            <a:r>
-              <a:rPr sz="1300" b="0">
-                <a:solidFill>
-                  <a:srgbClr val="44546A"/>
-                </a:solidFill>
-                <a:latin typeface="微软雅黑"/>
-              </a:rPr>
-              <a:t>见下次课工单任务书</a:t>
-            </a:r>
-          </a:p>
-        </p:txBody>
-      </p:sp>
-      <p:sp>
-        <p:nvSpPr>
-          <p:cNvPr id="11" name="Rectangle 10"/>
-          <p:cNvSpPr/>
-          <p:nvPr/>
-        </p:nvSpPr>
-        <p:spPr>
-          <a:xfrm>
-            <a:off x="500000" y="6500000"/>
-            <a:ext cx="11100000" cy="20000"/>
-          </a:xfrm>
-          <a:prstGeom prst="rect">
-            <a:avLst/>
-          </a:prstGeom>
-          <a:solidFill>
-            <a:srgbClr val="C9D4EE"/>
-          </a:solidFill>
-          <a:ln>
-            <a:noFill/>
-          </a:ln>
-          <a:effectLst/>
-        </p:spPr>
-        <p:style>
-          <a:lnRef idx="1">
-            <a:schemeClr val="accent1"/>
-          </a:lnRef>
-          <a:fillRef idx="3">
-            <a:schemeClr val="accent1"/>
-          </a:fillRef>
-          <a:effectRef idx="2">
-            <a:schemeClr val="accent1"/>
-          </a:effectRef>
-          <a:fontRef idx="minor">
-            <a:schemeClr val="lt1"/>
-          </a:fontRef>
-        </p:style>
-        <p:txBody>
-          <a:bodyPr rtlCol="0" anchor="ctr"/>
-          <a:lstStyle/>
-          <a:p>
-            <a:pPr algn="ctr"/>
-          </a:p>
-        </p:txBody>
-      </p:sp>
-      <p:sp>
-        <p:nvSpPr>
-          <p:cNvPr id="12" name="TextBox 11"/>
-          <p:cNvSpPr txBox="1"/>
-          <p:nvPr/>
-        </p:nvSpPr>
-        <p:spPr>
-          <a:xfrm>
-            <a:off x="500000" y="6540000"/>
-            <a:ext cx="7000000" cy="300000"/>
-          </a:xfrm>
-          <a:prstGeom prst="rect">
-            <a:avLst/>
-          </a:prstGeom>
-          <a:noFill/>
-        </p:spPr>
-        <p:txBody>
-          <a:bodyPr wrap="square" anchor="t">
-            <a:spAutoFit/>
-          </a:bodyPr>
-          <a:lstStyle/>
-          <a:p>
-            <a:pPr algn="l">
-              <a:lnSpc>
-                <a:spcPct val="110000"/>
-              </a:lnSpc>
-              <a:spcAft>
-                <a:spcPts val="600"/>
-              </a:spcAft>
-            </a:pPr>
-            <a:r>
               <a:rPr sz="1000" b="0">
                 <a:solidFill>
                   <a:srgbClr val="8A97B5"/>
@@ -11190,7 +10847,7 @@
       </p:sp>
       <p:sp>
         <p:nvSpPr>
-          <p:cNvPr id="13" name="TextBox 12"/>
+          <p:cNvPr id="20" name="TextBox 19"/>
           <p:cNvSpPr txBox="1"/>
           <p:nvPr/>
         </p:nvSpPr>
@@ -11225,7 +10882,1025 @@
                 </a:solidFill>
                 <a:latin typeface="微软雅黑"/>
               </a:rPr>
-              <a:t>10 / 14</a:t>
+              <a:t>7 / 16</a:t>
+            </a:r>
+          </a:p>
+        </p:txBody>
+      </p:sp>
+      <p:sp>
+        <p:nvSpPr>
+          <p:cNvPr id="21" name="TextBox 20"/>
+          <p:cNvSpPr txBox="1"/>
+          <p:nvPr/>
+        </p:nvSpPr>
+        <p:spPr>
+          <a:xfrm>
+            <a:off x="457200" y="1389888"/>
+            <a:ext cx="11274552" cy="274320"/>
+          </a:xfrm>
+          <a:prstGeom prst="rect">
+            <a:avLst/>
+          </a:prstGeom>
+          <a:noFill/>
+        </p:spPr>
+        <p:txBody>
+          <a:bodyPr wrap="square">
+            <a:spAutoFit/>
+          </a:bodyPr>
+          <a:lstStyle/>
+          <a:p>
+            <a:r>
+              <a:rPr sz="1050" b="0">
+                <a:solidFill>
+                  <a:srgbClr val="6B7280"/>
+                </a:solidFill>
+                <a:latin typeface="微软雅黑"/>
+              </a:rPr>
+              <a:t>每个难点四步走：先看「为什么容易栽」对号入座 → 记住「一招破解」→ 照「动手验证」做一遍 → 做不出回知识详解页。</a:t>
+            </a:r>
+          </a:p>
+        </p:txBody>
+      </p:sp>
+      <p:sp>
+        <p:nvSpPr>
+          <p:cNvPr id="22" name="Rectangle 21"/>
+          <p:cNvSpPr/>
+          <p:nvPr/>
+        </p:nvSpPr>
+        <p:spPr>
+          <a:xfrm>
+            <a:off x="457200" y="1783080"/>
+            <a:ext cx="11274552" cy="1481328"/>
+          </a:xfrm>
+          <a:prstGeom prst="rect">
+            <a:avLst/>
+          </a:prstGeom>
+          <a:solidFill>
+            <a:srgbClr val="F7F9FC"/>
+          </a:solidFill>
+          <a:ln>
+            <a:solidFill>
+              <a:srgbClr val="D6DCE4"/>
+            </a:solidFill>
+          </a:ln>
+          <a:effectLst/>
+        </p:spPr>
+        <p:style>
+          <a:lnRef idx="1">
+            <a:schemeClr val="accent1"/>
+          </a:lnRef>
+          <a:fillRef idx="3">
+            <a:schemeClr val="accent1"/>
+          </a:fillRef>
+          <a:effectRef idx="2">
+            <a:schemeClr val="accent1"/>
+          </a:effectRef>
+          <a:fontRef idx="minor">
+            <a:schemeClr val="lt1"/>
+          </a:fontRef>
+        </p:style>
+        <p:txBody>
+          <a:bodyPr rtlCol="0" anchor="ctr" wrap="square"/>
+          <a:lstStyle/>
+          <a:p>
+            <a:pPr algn="ctr"/>
+          </a:p>
+        </p:txBody>
+      </p:sp>
+      <p:sp>
+        <p:nvSpPr>
+          <p:cNvPr id="23" name="Rectangle 22"/>
+          <p:cNvSpPr/>
+          <p:nvPr/>
+        </p:nvSpPr>
+        <p:spPr>
+          <a:xfrm>
+            <a:off x="457200" y="1783080"/>
+            <a:ext cx="82296" cy="1481328"/>
+          </a:xfrm>
+          <a:prstGeom prst="rect">
+            <a:avLst/>
+          </a:prstGeom>
+          <a:solidFill>
+            <a:srgbClr val="8A4B2D"/>
+          </a:solidFill>
+          <a:ln>
+            <a:noFill/>
+          </a:ln>
+          <a:effectLst/>
+        </p:spPr>
+        <p:style>
+          <a:lnRef idx="1">
+            <a:schemeClr val="accent1"/>
+          </a:lnRef>
+          <a:fillRef idx="3">
+            <a:schemeClr val="accent1"/>
+          </a:fillRef>
+          <a:effectRef idx="2">
+            <a:schemeClr val="accent1"/>
+          </a:effectRef>
+          <a:fontRef idx="minor">
+            <a:schemeClr val="lt1"/>
+          </a:fontRef>
+        </p:style>
+        <p:txBody>
+          <a:bodyPr rtlCol="0" anchor="ctr" wrap="square"/>
+          <a:lstStyle/>
+          <a:p>
+            <a:pPr algn="ctr"/>
+          </a:p>
+        </p:txBody>
+      </p:sp>
+      <p:sp>
+        <p:nvSpPr>
+          <p:cNvPr id="24" name="TextBox 23"/>
+          <p:cNvSpPr txBox="1"/>
+          <p:nvPr/>
+        </p:nvSpPr>
+        <p:spPr>
+          <a:xfrm>
+            <a:off x="658368" y="1828800"/>
+            <a:ext cx="10972800" cy="274320"/>
+          </a:xfrm>
+          <a:prstGeom prst="rect">
+            <a:avLst/>
+          </a:prstGeom>
+          <a:noFill/>
+        </p:spPr>
+        <p:txBody>
+          <a:bodyPr wrap="square">
+            <a:spAutoFit/>
+          </a:bodyPr>
+          <a:lstStyle/>
+          <a:p>
+            <a:r>
+              <a:rPr sz="1100" b="1">
+                <a:solidFill>
+                  <a:srgbClr val="8A4B2D"/>
+                </a:solidFill>
+                <a:latin typeface="微软雅黑"/>
+              </a:rPr>
+              <a:t>难点1：B01 Modbus寄存器</a:t>
+            </a:r>
+          </a:p>
+        </p:txBody>
+      </p:sp>
+      <p:sp>
+        <p:nvSpPr>
+          <p:cNvPr id="25" name="TextBox 24"/>
+          <p:cNvSpPr txBox="1"/>
+          <p:nvPr/>
+        </p:nvSpPr>
+        <p:spPr>
+          <a:xfrm>
+            <a:off x="658368" y="2148840"/>
+            <a:ext cx="3566160" cy="219456"/>
+          </a:xfrm>
+          <a:prstGeom prst="rect">
+            <a:avLst/>
+          </a:prstGeom>
+          <a:noFill/>
+        </p:spPr>
+        <p:txBody>
+          <a:bodyPr wrap="square">
+            <a:spAutoFit/>
+          </a:bodyPr>
+          <a:lstStyle/>
+          <a:p>
+            <a:r>
+              <a:rPr sz="900" b="1">
+                <a:solidFill>
+                  <a:srgbClr val="B5533A"/>
+                </a:solidFill>
+                <a:latin typeface="微软雅黑"/>
+              </a:rPr>
+              <a:t>为什么容易栽</a:t>
+            </a:r>
+          </a:p>
+        </p:txBody>
+      </p:sp>
+      <p:sp>
+        <p:nvSpPr>
+          <p:cNvPr id="26" name="TextBox 25"/>
+          <p:cNvSpPr txBox="1"/>
+          <p:nvPr/>
+        </p:nvSpPr>
+        <p:spPr>
+          <a:xfrm>
+            <a:off x="658368" y="2386584"/>
+            <a:ext cx="3584448" cy="822960"/>
+          </a:xfrm>
+          <a:prstGeom prst="rect">
+            <a:avLst/>
+          </a:prstGeom>
+          <a:noFill/>
+        </p:spPr>
+        <p:txBody>
+          <a:bodyPr wrap="square">
+            <a:spAutoFit/>
+          </a:bodyPr>
+          <a:lstStyle/>
+          <a:p>
+            <a:r>
+              <a:rPr sz="900" b="0">
+                <a:solidFill>
+                  <a:srgbClr val="2B2F36"/>
+                </a:solidFill>
+                <a:latin typeface="微软雅黑"/>
+              </a:rPr>
+              <a:t>误区：地址从0还是40001起两派之争——以server文档为准</a:t>
+            </a:r>
+          </a:p>
+        </p:txBody>
+      </p:sp>
+      <p:sp>
+        <p:nvSpPr>
+          <p:cNvPr id="27" name="TextBox 26"/>
+          <p:cNvSpPr txBox="1"/>
+          <p:nvPr/>
+        </p:nvSpPr>
+        <p:spPr>
+          <a:xfrm>
+            <a:off x="4334255" y="2148840"/>
+            <a:ext cx="3566160" cy="219456"/>
+          </a:xfrm>
+          <a:prstGeom prst="rect">
+            <a:avLst/>
+          </a:prstGeom>
+          <a:noFill/>
+        </p:spPr>
+        <p:txBody>
+          <a:bodyPr wrap="square">
+            <a:spAutoFit/>
+          </a:bodyPr>
+          <a:lstStyle/>
+          <a:p>
+            <a:r>
+              <a:rPr sz="900" b="1">
+                <a:solidFill>
+                  <a:srgbClr val="2E7D46"/>
+                </a:solidFill>
+                <a:latin typeface="微软雅黑"/>
+              </a:rPr>
+              <a:t>一招破解（记住这句）</a:t>
+            </a:r>
+          </a:p>
+        </p:txBody>
+      </p:sp>
+      <p:sp>
+        <p:nvSpPr>
+          <p:cNvPr id="28" name="TextBox 27"/>
+          <p:cNvSpPr txBox="1"/>
+          <p:nvPr/>
+        </p:nvSpPr>
+        <p:spPr>
+          <a:xfrm>
+            <a:off x="4334255" y="2386584"/>
+            <a:ext cx="3584448" cy="822960"/>
+          </a:xfrm>
+          <a:prstGeom prst="rect">
+            <a:avLst/>
+          </a:prstGeom>
+          <a:noFill/>
+        </p:spPr>
+        <p:txBody>
+          <a:bodyPr wrap="square">
+            <a:spAutoFit/>
+          </a:bodyPr>
+          <a:lstStyle/>
+          <a:p>
+            <a:r>
+              <a:rPr sz="900" b="0">
+                <a:solidFill>
+                  <a:srgbClr val="2B2F36"/>
+                </a:solidFill>
+                <a:latin typeface="微软雅黑"/>
+              </a:rPr>
+              <a:t>寄存器=PLC的储物柜编号：40001起按地址读数</a:t>
+            </a:r>
+          </a:p>
+        </p:txBody>
+      </p:sp>
+      <p:sp>
+        <p:nvSpPr>
+          <p:cNvPr id="29" name="TextBox 28"/>
+          <p:cNvSpPr txBox="1"/>
+          <p:nvPr/>
+        </p:nvSpPr>
+        <p:spPr>
+          <a:xfrm>
+            <a:off x="8010143" y="2148840"/>
+            <a:ext cx="3566160" cy="219456"/>
+          </a:xfrm>
+          <a:prstGeom prst="rect">
+            <a:avLst/>
+          </a:prstGeom>
+          <a:noFill/>
+        </p:spPr>
+        <p:txBody>
+          <a:bodyPr wrap="square">
+            <a:spAutoFit/>
+          </a:bodyPr>
+          <a:lstStyle/>
+          <a:p>
+            <a:r>
+              <a:rPr sz="900" b="1">
+                <a:solidFill>
+                  <a:srgbClr val="35506E"/>
+                </a:solidFill>
+                <a:latin typeface="微软雅黑"/>
+              </a:rPr>
+              <a:t>动手验证（照做一遍）</a:t>
+            </a:r>
+          </a:p>
+        </p:txBody>
+      </p:sp>
+      <p:sp>
+        <p:nvSpPr>
+          <p:cNvPr id="30" name="TextBox 29"/>
+          <p:cNvSpPr txBox="1"/>
+          <p:nvPr/>
+        </p:nvSpPr>
+        <p:spPr>
+          <a:xfrm>
+            <a:off x="8010143" y="2386584"/>
+            <a:ext cx="3584448" cy="822960"/>
+          </a:xfrm>
+          <a:prstGeom prst="rect">
+            <a:avLst/>
+          </a:prstGeom>
+          <a:noFill/>
+        </p:spPr>
+        <p:txBody>
+          <a:bodyPr wrap="square">
+            <a:spAutoFit/>
+          </a:bodyPr>
+          <a:lstStyle/>
+          <a:p>
+            <a:r>
+              <a:rPr sz="900" b="0">
+                <a:solidFill>
+                  <a:srgbClr val="2B2F36"/>
+                </a:solidFill>
+                <a:latin typeface="微软雅黑"/>
+              </a:rPr>
+              <a:t>五测点(温度/压力/振动/转速/状态)固定地址——通信的门牌号 client.read_holding_registers(address=0, count=5)</a:t>
+            </a:r>
+          </a:p>
+        </p:txBody>
+      </p:sp>
+      <p:sp>
+        <p:nvSpPr>
+          <p:cNvPr id="31" name="Rectangle 30"/>
+          <p:cNvSpPr/>
+          <p:nvPr/>
+        </p:nvSpPr>
+        <p:spPr>
+          <a:xfrm>
+            <a:off x="457200" y="3383280"/>
+            <a:ext cx="11274552" cy="1481328"/>
+          </a:xfrm>
+          <a:prstGeom prst="rect">
+            <a:avLst/>
+          </a:prstGeom>
+          <a:solidFill>
+            <a:srgbClr val="F7F9FC"/>
+          </a:solidFill>
+          <a:ln>
+            <a:solidFill>
+              <a:srgbClr val="D6DCE4"/>
+            </a:solidFill>
+          </a:ln>
+          <a:effectLst/>
+        </p:spPr>
+        <p:style>
+          <a:lnRef idx="1">
+            <a:schemeClr val="accent1"/>
+          </a:lnRef>
+          <a:fillRef idx="3">
+            <a:schemeClr val="accent1"/>
+          </a:fillRef>
+          <a:effectRef idx="2">
+            <a:schemeClr val="accent1"/>
+          </a:effectRef>
+          <a:fontRef idx="minor">
+            <a:schemeClr val="lt1"/>
+          </a:fontRef>
+        </p:style>
+        <p:txBody>
+          <a:bodyPr rtlCol="0" anchor="ctr" wrap="square"/>
+          <a:lstStyle/>
+          <a:p>
+            <a:pPr algn="ctr"/>
+          </a:p>
+        </p:txBody>
+      </p:sp>
+      <p:sp>
+        <p:nvSpPr>
+          <p:cNvPr id="32" name="Rectangle 31"/>
+          <p:cNvSpPr/>
+          <p:nvPr/>
+        </p:nvSpPr>
+        <p:spPr>
+          <a:xfrm>
+            <a:off x="457200" y="3383280"/>
+            <a:ext cx="82296" cy="1481328"/>
+          </a:xfrm>
+          <a:prstGeom prst="rect">
+            <a:avLst/>
+          </a:prstGeom>
+          <a:solidFill>
+            <a:srgbClr val="8A4B2D"/>
+          </a:solidFill>
+          <a:ln>
+            <a:noFill/>
+          </a:ln>
+          <a:effectLst/>
+        </p:spPr>
+        <p:style>
+          <a:lnRef idx="1">
+            <a:schemeClr val="accent1"/>
+          </a:lnRef>
+          <a:fillRef idx="3">
+            <a:schemeClr val="accent1"/>
+          </a:fillRef>
+          <a:effectRef idx="2">
+            <a:schemeClr val="accent1"/>
+          </a:effectRef>
+          <a:fontRef idx="minor">
+            <a:schemeClr val="lt1"/>
+          </a:fontRef>
+        </p:style>
+        <p:txBody>
+          <a:bodyPr rtlCol="0" anchor="ctr" wrap="square"/>
+          <a:lstStyle/>
+          <a:p>
+            <a:pPr algn="ctr"/>
+          </a:p>
+        </p:txBody>
+      </p:sp>
+      <p:sp>
+        <p:nvSpPr>
+          <p:cNvPr id="33" name="TextBox 32"/>
+          <p:cNvSpPr txBox="1"/>
+          <p:nvPr/>
+        </p:nvSpPr>
+        <p:spPr>
+          <a:xfrm>
+            <a:off x="658368" y="3429000"/>
+            <a:ext cx="10972800" cy="274320"/>
+          </a:xfrm>
+          <a:prstGeom prst="rect">
+            <a:avLst/>
+          </a:prstGeom>
+          <a:noFill/>
+        </p:spPr>
+        <p:txBody>
+          <a:bodyPr wrap="square">
+            <a:spAutoFit/>
+          </a:bodyPr>
+          <a:lstStyle/>
+          <a:p>
+            <a:r>
+              <a:rPr sz="1100" b="1">
+                <a:solidFill>
+                  <a:srgbClr val="8A4B2D"/>
+                </a:solidFill>
+                <a:latin typeface="微软雅黑"/>
+              </a:rPr>
+              <a:t>难点2：B02 定点存储约定</a:t>
+            </a:r>
+          </a:p>
+        </p:txBody>
+      </p:sp>
+      <p:sp>
+        <p:nvSpPr>
+          <p:cNvPr id="34" name="TextBox 33"/>
+          <p:cNvSpPr txBox="1"/>
+          <p:nvPr/>
+        </p:nvSpPr>
+        <p:spPr>
+          <a:xfrm>
+            <a:off x="658368" y="3749040"/>
+            <a:ext cx="3566160" cy="219456"/>
+          </a:xfrm>
+          <a:prstGeom prst="rect">
+            <a:avLst/>
+          </a:prstGeom>
+          <a:noFill/>
+        </p:spPr>
+        <p:txBody>
+          <a:bodyPr wrap="square">
+            <a:spAutoFit/>
+          </a:bodyPr>
+          <a:lstStyle/>
+          <a:p>
+            <a:r>
+              <a:rPr sz="900" b="1">
+                <a:solidFill>
+                  <a:srgbClr val="B5533A"/>
+                </a:solidFill>
+                <a:latin typeface="微软雅黑"/>
+              </a:rPr>
+              <a:t>为什么容易栽</a:t>
+            </a:r>
+          </a:p>
+        </p:txBody>
+      </p:sp>
+      <p:sp>
+        <p:nvSpPr>
+          <p:cNvPr id="35" name="TextBox 34"/>
+          <p:cNvSpPr txBox="1"/>
+          <p:nvPr/>
+        </p:nvSpPr>
+        <p:spPr>
+          <a:xfrm>
+            <a:off x="658368" y="3986784"/>
+            <a:ext cx="3584448" cy="822960"/>
+          </a:xfrm>
+          <a:prstGeom prst="rect">
+            <a:avLst/>
+          </a:prstGeom>
+          <a:noFill/>
+        </p:spPr>
+        <p:txBody>
+          <a:bodyPr wrap="square">
+            <a:spAutoFit/>
+          </a:bodyPr>
+          <a:lstStyle/>
+          <a:p>
+            <a:r>
+              <a:rPr sz="900" b="0">
+                <a:solidFill>
+                  <a:srgbClr val="2B2F36"/>
+                </a:solidFill>
+                <a:latin typeface="微软雅黑"/>
+              </a:rPr>
+              <a:t>误区：忘除倍率→温度高10倍——对不上先查约定倍率</a:t>
+            </a:r>
+          </a:p>
+        </p:txBody>
+      </p:sp>
+      <p:sp>
+        <p:nvSpPr>
+          <p:cNvPr id="36" name="TextBox 35"/>
+          <p:cNvSpPr txBox="1"/>
+          <p:nvPr/>
+        </p:nvSpPr>
+        <p:spPr>
+          <a:xfrm>
+            <a:off x="4334255" y="3749040"/>
+            <a:ext cx="3566160" cy="219456"/>
+          </a:xfrm>
+          <a:prstGeom prst="rect">
+            <a:avLst/>
+          </a:prstGeom>
+          <a:noFill/>
+        </p:spPr>
+        <p:txBody>
+          <a:bodyPr wrap="square">
+            <a:spAutoFit/>
+          </a:bodyPr>
+          <a:lstStyle/>
+          <a:p>
+            <a:r>
+              <a:rPr sz="900" b="1">
+                <a:solidFill>
+                  <a:srgbClr val="2E7D46"/>
+                </a:solidFill>
+                <a:latin typeface="微软雅黑"/>
+              </a:rPr>
+              <a:t>一招破解（记住这句）</a:t>
+            </a:r>
+          </a:p>
+        </p:txBody>
+      </p:sp>
+      <p:sp>
+        <p:nvSpPr>
+          <p:cNvPr id="37" name="TextBox 36"/>
+          <p:cNvSpPr txBox="1"/>
+          <p:nvPr/>
+        </p:nvSpPr>
+        <p:spPr>
+          <a:xfrm>
+            <a:off x="4334255" y="3986784"/>
+            <a:ext cx="3584448" cy="822960"/>
+          </a:xfrm>
+          <a:prstGeom prst="rect">
+            <a:avLst/>
+          </a:prstGeom>
+          <a:noFill/>
+        </p:spPr>
+        <p:txBody>
+          <a:bodyPr wrap="square">
+            <a:spAutoFit/>
+          </a:bodyPr>
+          <a:lstStyle/>
+          <a:p>
+            <a:r>
+              <a:rPr sz="900" b="0">
+                <a:solidFill>
+                  <a:srgbClr val="2B2F36"/>
+                </a:solidFill>
+                <a:latin typeface="微软雅黑"/>
+              </a:rPr>
+              <a:t>定点=小数×10存整数：678其实是67.8℃——PLC不存小数</a:t>
+            </a:r>
+          </a:p>
+        </p:txBody>
+      </p:sp>
+      <p:sp>
+        <p:nvSpPr>
+          <p:cNvPr id="38" name="TextBox 37"/>
+          <p:cNvSpPr txBox="1"/>
+          <p:nvPr/>
+        </p:nvSpPr>
+        <p:spPr>
+          <a:xfrm>
+            <a:off x="8010143" y="3749040"/>
+            <a:ext cx="3566160" cy="219456"/>
+          </a:xfrm>
+          <a:prstGeom prst="rect">
+            <a:avLst/>
+          </a:prstGeom>
+          <a:noFill/>
+        </p:spPr>
+        <p:txBody>
+          <a:bodyPr wrap="square">
+            <a:spAutoFit/>
+          </a:bodyPr>
+          <a:lstStyle/>
+          <a:p>
+            <a:r>
+              <a:rPr sz="900" b="1">
+                <a:solidFill>
+                  <a:srgbClr val="35506E"/>
+                </a:solidFill>
+                <a:latin typeface="微软雅黑"/>
+              </a:rPr>
+              <a:t>动手验证（照做一遍）</a:t>
+            </a:r>
+          </a:p>
+        </p:txBody>
+      </p:sp>
+      <p:sp>
+        <p:nvSpPr>
+          <p:cNvPr id="39" name="TextBox 38"/>
+          <p:cNvSpPr txBox="1"/>
+          <p:nvPr/>
+        </p:nvSpPr>
+        <p:spPr>
+          <a:xfrm>
+            <a:off x="8010143" y="3986784"/>
+            <a:ext cx="3584448" cy="822960"/>
+          </a:xfrm>
+          <a:prstGeom prst="rect">
+            <a:avLst/>
+          </a:prstGeom>
+          <a:noFill/>
+        </p:spPr>
+        <p:txBody>
+          <a:bodyPr wrap="square">
+            <a:spAutoFit/>
+          </a:bodyPr>
+          <a:lstStyle/>
+          <a:p>
+            <a:r>
+              <a:rPr sz="900" b="0">
+                <a:solidFill>
+                  <a:srgbClr val="2B2F36"/>
+                </a:solidFill>
+                <a:latin typeface="微软雅黑"/>
+              </a:rPr>
+              <a:t>行业惯例：约定小数位，通信只传整数 raw=678 → real=raw/10 → 67.8℃</a:t>
+            </a:r>
+          </a:p>
+        </p:txBody>
+      </p:sp>
+      <p:sp>
+        <p:nvSpPr>
+          <p:cNvPr id="40" name="Rectangle 39"/>
+          <p:cNvSpPr/>
+          <p:nvPr/>
+        </p:nvSpPr>
+        <p:spPr>
+          <a:xfrm>
+            <a:off x="457200" y="4983480"/>
+            <a:ext cx="11274552" cy="1481328"/>
+          </a:xfrm>
+          <a:prstGeom prst="rect">
+            <a:avLst/>
+          </a:prstGeom>
+          <a:solidFill>
+            <a:srgbClr val="F7F9FC"/>
+          </a:solidFill>
+          <a:ln>
+            <a:solidFill>
+              <a:srgbClr val="D6DCE4"/>
+            </a:solidFill>
+          </a:ln>
+          <a:effectLst/>
+        </p:spPr>
+        <p:style>
+          <a:lnRef idx="1">
+            <a:schemeClr val="accent1"/>
+          </a:lnRef>
+          <a:fillRef idx="3">
+            <a:schemeClr val="accent1"/>
+          </a:fillRef>
+          <a:effectRef idx="2">
+            <a:schemeClr val="accent1"/>
+          </a:effectRef>
+          <a:fontRef idx="minor">
+            <a:schemeClr val="lt1"/>
+          </a:fontRef>
+        </p:style>
+        <p:txBody>
+          <a:bodyPr rtlCol="0" anchor="ctr" wrap="square"/>
+          <a:lstStyle/>
+          <a:p>
+            <a:pPr algn="ctr"/>
+          </a:p>
+        </p:txBody>
+      </p:sp>
+      <p:sp>
+        <p:nvSpPr>
+          <p:cNvPr id="41" name="Rectangle 40"/>
+          <p:cNvSpPr/>
+          <p:nvPr/>
+        </p:nvSpPr>
+        <p:spPr>
+          <a:xfrm>
+            <a:off x="457200" y="4983480"/>
+            <a:ext cx="82296" cy="1481328"/>
+          </a:xfrm>
+          <a:prstGeom prst="rect">
+            <a:avLst/>
+          </a:prstGeom>
+          <a:solidFill>
+            <a:srgbClr val="8A4B2D"/>
+          </a:solidFill>
+          <a:ln>
+            <a:noFill/>
+          </a:ln>
+          <a:effectLst/>
+        </p:spPr>
+        <p:style>
+          <a:lnRef idx="1">
+            <a:schemeClr val="accent1"/>
+          </a:lnRef>
+          <a:fillRef idx="3">
+            <a:schemeClr val="accent1"/>
+          </a:fillRef>
+          <a:effectRef idx="2">
+            <a:schemeClr val="accent1"/>
+          </a:effectRef>
+          <a:fontRef idx="minor">
+            <a:schemeClr val="lt1"/>
+          </a:fontRef>
+        </p:style>
+        <p:txBody>
+          <a:bodyPr rtlCol="0" anchor="ctr" wrap="square"/>
+          <a:lstStyle/>
+          <a:p>
+            <a:pPr algn="ctr"/>
+          </a:p>
+        </p:txBody>
+      </p:sp>
+      <p:sp>
+        <p:nvSpPr>
+          <p:cNvPr id="42" name="TextBox 41"/>
+          <p:cNvSpPr txBox="1"/>
+          <p:nvPr/>
+        </p:nvSpPr>
+        <p:spPr>
+          <a:xfrm>
+            <a:off x="658368" y="5029200"/>
+            <a:ext cx="10972800" cy="274320"/>
+          </a:xfrm>
+          <a:prstGeom prst="rect">
+            <a:avLst/>
+          </a:prstGeom>
+          <a:noFill/>
+        </p:spPr>
+        <p:txBody>
+          <a:bodyPr wrap="square">
+            <a:spAutoFit/>
+          </a:bodyPr>
+          <a:lstStyle/>
+          <a:p>
+            <a:r>
+              <a:rPr sz="1100" b="1">
+                <a:solidFill>
+                  <a:srgbClr val="8A4B2D"/>
+                </a:solidFill>
+                <a:latin typeface="微软雅黑"/>
+              </a:rPr>
+              <a:t>难点3：B03 pymodbus读寄存器</a:t>
+            </a:r>
+          </a:p>
+        </p:txBody>
+      </p:sp>
+      <p:sp>
+        <p:nvSpPr>
+          <p:cNvPr id="43" name="TextBox 42"/>
+          <p:cNvSpPr txBox="1"/>
+          <p:nvPr/>
+        </p:nvSpPr>
+        <p:spPr>
+          <a:xfrm>
+            <a:off x="658368" y="5349240"/>
+            <a:ext cx="3566160" cy="219456"/>
+          </a:xfrm>
+          <a:prstGeom prst="rect">
+            <a:avLst/>
+          </a:prstGeom>
+          <a:noFill/>
+        </p:spPr>
+        <p:txBody>
+          <a:bodyPr wrap="square">
+            <a:spAutoFit/>
+          </a:bodyPr>
+          <a:lstStyle/>
+          <a:p>
+            <a:r>
+              <a:rPr sz="900" b="1">
+                <a:solidFill>
+                  <a:srgbClr val="B5533A"/>
+                </a:solidFill>
+                <a:latin typeface="微软雅黑"/>
+              </a:rPr>
+              <a:t>为什么容易栽</a:t>
+            </a:r>
+          </a:p>
+        </p:txBody>
+      </p:sp>
+      <p:sp>
+        <p:nvSpPr>
+          <p:cNvPr id="44" name="TextBox 43"/>
+          <p:cNvSpPr txBox="1"/>
+          <p:nvPr/>
+        </p:nvSpPr>
+        <p:spPr>
+          <a:xfrm>
+            <a:off x="658368" y="5586984"/>
+            <a:ext cx="3584448" cy="822960"/>
+          </a:xfrm>
+          <a:prstGeom prst="rect">
+            <a:avLst/>
+          </a:prstGeom>
+          <a:noFill/>
+        </p:spPr>
+        <p:txBody>
+          <a:bodyPr wrap="square">
+            <a:spAutoFit/>
+          </a:bodyPr>
+          <a:lstStyle/>
+          <a:p>
+            <a:r>
+              <a:rPr sz="900" b="0">
+                <a:solidFill>
+                  <a:srgbClr val="2B2F36"/>
+                </a:solidFill>
+                <a:latin typeface="微软雅黑"/>
+              </a:rPr>
+              <a:t>误区：3.x必须关键字传参(address=/count=)——照2.x旧码抄报错</a:t>
+            </a:r>
+          </a:p>
+        </p:txBody>
+      </p:sp>
+      <p:sp>
+        <p:nvSpPr>
+          <p:cNvPr id="45" name="TextBox 44"/>
+          <p:cNvSpPr txBox="1"/>
+          <p:nvPr/>
+        </p:nvSpPr>
+        <p:spPr>
+          <a:xfrm>
+            <a:off x="4334255" y="5349240"/>
+            <a:ext cx="3566160" cy="219456"/>
+          </a:xfrm>
+          <a:prstGeom prst="rect">
+            <a:avLst/>
+          </a:prstGeom>
+          <a:noFill/>
+        </p:spPr>
+        <p:txBody>
+          <a:bodyPr wrap="square">
+            <a:spAutoFit/>
+          </a:bodyPr>
+          <a:lstStyle/>
+          <a:p>
+            <a:r>
+              <a:rPr sz="900" b="1">
+                <a:solidFill>
+                  <a:srgbClr val="2E7D46"/>
+                </a:solidFill>
+                <a:latin typeface="微软雅黑"/>
+              </a:rPr>
+              <a:t>一招破解（记住这句）</a:t>
+            </a:r>
+          </a:p>
+        </p:txBody>
+      </p:sp>
+      <p:sp>
+        <p:nvSpPr>
+          <p:cNvPr id="46" name="TextBox 45"/>
+          <p:cNvSpPr txBox="1"/>
+          <p:nvPr/>
+        </p:nvSpPr>
+        <p:spPr>
+          <a:xfrm>
+            <a:off x="4334255" y="5586984"/>
+            <a:ext cx="3584448" cy="822960"/>
+          </a:xfrm>
+          <a:prstGeom prst="rect">
+            <a:avLst/>
+          </a:prstGeom>
+          <a:noFill/>
+        </p:spPr>
+        <p:txBody>
+          <a:bodyPr wrap="square">
+            <a:spAutoFit/>
+          </a:bodyPr>
+          <a:lstStyle/>
+          <a:p>
+            <a:r>
+              <a:rPr sz="900" b="0">
+                <a:solidFill>
+                  <a:srgbClr val="2B2F36"/>
+                </a:solidFill>
+                <a:latin typeface="微软雅黑"/>
+              </a:rPr>
+              <a:t>pymodbus=Python的Modbus翻译官——一行读PLC寄存器</a:t>
+            </a:r>
+          </a:p>
+        </p:txBody>
+      </p:sp>
+      <p:sp>
+        <p:nvSpPr>
+          <p:cNvPr id="47" name="TextBox 46"/>
+          <p:cNvSpPr txBox="1"/>
+          <p:nvPr/>
+        </p:nvSpPr>
+        <p:spPr>
+          <a:xfrm>
+            <a:off x="8010143" y="5349240"/>
+            <a:ext cx="3566160" cy="219456"/>
+          </a:xfrm>
+          <a:prstGeom prst="rect">
+            <a:avLst/>
+          </a:prstGeom>
+          <a:noFill/>
+        </p:spPr>
+        <p:txBody>
+          <a:bodyPr wrap="square">
+            <a:spAutoFit/>
+          </a:bodyPr>
+          <a:lstStyle/>
+          <a:p>
+            <a:r>
+              <a:rPr sz="900" b="1">
+                <a:solidFill>
+                  <a:srgbClr val="35506E"/>
+                </a:solidFill>
+                <a:latin typeface="微软雅黑"/>
+              </a:rPr>
+              <a:t>动手验证（照做一遍）</a:t>
+            </a:r>
+          </a:p>
+        </p:txBody>
+      </p:sp>
+      <p:sp>
+        <p:nvSpPr>
+          <p:cNvPr id="48" name="TextBox 47"/>
+          <p:cNvSpPr txBox="1"/>
+          <p:nvPr/>
+        </p:nvSpPr>
+        <p:spPr>
+          <a:xfrm>
+            <a:off x="8010143" y="5586984"/>
+            <a:ext cx="3584448" cy="822960"/>
+          </a:xfrm>
+          <a:prstGeom prst="rect">
+            <a:avLst/>
+          </a:prstGeom>
+          <a:noFill/>
+        </p:spPr>
+        <p:txBody>
+          <a:bodyPr wrap="square">
+            <a:spAutoFit/>
+          </a:bodyPr>
+          <a:lstStyle/>
+          <a:p>
+            <a:r>
+              <a:rPr sz="900" b="0">
+                <a:solidFill>
+                  <a:srgbClr val="2B2F36"/>
+                </a:solidFill>
+                <a:latin typeface="微软雅黑"/>
+              </a:rPr>
+              <a:t>Modbus TCP读PLC保持寄存器——采集主链路 rr = client.read_holding_registers(0,5)</a:t>
             </a:r>
           </a:p>
         </p:txBody>
@@ -11257,7 +11932,7 @@
         <p:spPr>
           <a:xfrm>
             <a:off x="0" y="0"/>
-            <a:ext cx="12192000" cy="6858000"/>
+            <a:ext cx="12192000" cy="1150000"/>
           </a:xfrm>
           <a:prstGeom prst="rect">
             <a:avLst/>
@@ -11300,8 +11975,8 @@
         </p:nvSpPr>
         <p:spPr>
           <a:xfrm>
-            <a:off x="0" y="2880360"/>
-            <a:ext cx="12192000" cy="50000"/>
+            <a:off x="0" y="1150000"/>
+            <a:ext cx="2600000" cy="70000"/>
           </a:xfrm>
           <a:prstGeom prst="rect">
             <a:avLst/>
@@ -11344,8 +12019,8 @@
         </p:nvSpPr>
         <p:spPr>
           <a:xfrm>
-            <a:off x="0" y="1645920"/>
-            <a:ext cx="12192000" cy="1500000"/>
+            <a:off x="700000" y="300000"/>
+            <a:ext cx="10792000" cy="700000"/>
           </a:xfrm>
           <a:prstGeom prst="rect">
             <a:avLst/>
@@ -11353,177 +12028,7 @@
           <a:noFill/>
         </p:spPr>
         <p:txBody>
-          <a:bodyPr wrap="square" anchor="t">
-            <a:spAutoFit/>
-          </a:bodyPr>
-          <a:lstStyle/>
-          <a:p>
-            <a:pPr algn="ctr">
-              <a:lnSpc>
-                <a:spcPct val="110000"/>
-              </a:lnSpc>
-              <a:spcAft>
-                <a:spcPts val="600"/>
-              </a:spcAft>
-            </a:pPr>
-            <a:r>
-              <a:rPr sz="5400" b="1">
-                <a:solidFill>
-                  <a:srgbClr val="FFFFFF"/>
-                </a:solidFill>
-                <a:latin typeface="微软雅黑"/>
-              </a:rPr>
-              <a:t>THANKS</a:t>
-            </a:r>
-          </a:p>
-        </p:txBody>
-      </p:sp>
-      <p:sp>
-        <p:nvSpPr>
-          <p:cNvPr id="5" name="TextBox 4"/>
-          <p:cNvSpPr txBox="1"/>
-          <p:nvPr/>
-        </p:nvSpPr>
-        <p:spPr>
-          <a:xfrm>
-            <a:off x="0" y="3429000"/>
-            <a:ext cx="12192000" cy="800000"/>
-          </a:xfrm>
-          <a:prstGeom prst="rect">
-            <a:avLst/>
-          </a:prstGeom>
-          <a:noFill/>
-        </p:spPr>
-        <p:txBody>
-          <a:bodyPr wrap="square" anchor="t">
-            <a:spAutoFit/>
-          </a:bodyPr>
-          <a:lstStyle/>
-          <a:p>
-            <a:pPr algn="ctr">
-              <a:lnSpc>
-                <a:spcPct val="110000"/>
-              </a:lnSpc>
-              <a:spcAft>
-                <a:spcPts val="600"/>
-              </a:spcAft>
-            </a:pPr>
-            <a:r>
-              <a:rPr sz="2200" b="1">
-                <a:solidFill>
-                  <a:srgbClr val="F5670F"/>
-                </a:solidFill>
-                <a:latin typeface="微软雅黑"/>
-              </a:rPr>
-              <a:t>感谢聆听 · 动手实践出真知</a:t>
-            </a:r>
-          </a:p>
-        </p:txBody>
-      </p:sp>
-      <p:sp>
-        <p:nvSpPr>
-          <p:cNvPr id="6" name="TextBox 5"/>
-          <p:cNvSpPr txBox="1"/>
-          <p:nvPr/>
-        </p:nvSpPr>
-        <p:spPr>
-          <a:xfrm>
-            <a:off x="0" y="4526280"/>
-            <a:ext cx="12192000" cy="600000"/>
-          </a:xfrm>
-          <a:prstGeom prst="rect">
-            <a:avLst/>
-          </a:prstGeom>
-          <a:noFill/>
-        </p:spPr>
-        <p:txBody>
-          <a:bodyPr wrap="square" anchor="t">
-            <a:spAutoFit/>
-          </a:bodyPr>
-          <a:lstStyle/>
-          <a:p>
-            <a:pPr algn="ctr">
-              <a:lnSpc>
-                <a:spcPct val="110000"/>
-              </a:lnSpc>
-              <a:spcAft>
-                <a:spcPts val="600"/>
-              </a:spcAft>
-            </a:pPr>
-            <a:r>
-              <a:rPr sz="1400" b="0">
-                <a:solidFill>
-                  <a:srgbClr val="BBC6E6"/>
-                </a:solidFill>
-                <a:latin typeface="微软雅黑"/>
-              </a:rPr>
-              <a:t>以生为本   |   做中学 · 学中做</a:t>
-            </a:r>
-          </a:p>
-        </p:txBody>
-      </p:sp>
-      <p:sp>
-        <p:nvSpPr>
-          <p:cNvPr id="7" name="Rectangle 6"/>
-          <p:cNvSpPr/>
-          <p:nvPr/>
-        </p:nvSpPr>
-        <p:spPr>
-          <a:xfrm>
-            <a:off x="500000" y="6500000"/>
-            <a:ext cx="11100000" cy="20000"/>
-          </a:xfrm>
-          <a:prstGeom prst="rect">
-            <a:avLst/>
-          </a:prstGeom>
-          <a:solidFill>
-            <a:srgbClr val="C9D4EE"/>
-          </a:solidFill>
-          <a:ln>
-            <a:noFill/>
-          </a:ln>
-          <a:effectLst/>
-        </p:spPr>
-        <p:style>
-          <a:lnRef idx="1">
-            <a:schemeClr val="accent1"/>
-          </a:lnRef>
-          <a:fillRef idx="3">
-            <a:schemeClr val="accent1"/>
-          </a:fillRef>
-          <a:effectRef idx="2">
-            <a:schemeClr val="accent1"/>
-          </a:effectRef>
-          <a:fontRef idx="minor">
-            <a:schemeClr val="lt1"/>
-          </a:fontRef>
-        </p:style>
-        <p:txBody>
-          <a:bodyPr rtlCol="0" anchor="ctr"/>
-          <a:lstStyle/>
-          <a:p>
-            <a:pPr algn="ctr"/>
-          </a:p>
-        </p:txBody>
-      </p:sp>
-      <p:sp>
-        <p:nvSpPr>
-          <p:cNvPr id="8" name="TextBox 7"/>
-          <p:cNvSpPr txBox="1"/>
-          <p:nvPr/>
-        </p:nvSpPr>
-        <p:spPr>
-          <a:xfrm>
-            <a:off x="500000" y="6540000"/>
-            <a:ext cx="7000000" cy="300000"/>
-          </a:xfrm>
-          <a:prstGeom prst="rect">
-            <a:avLst/>
-          </a:prstGeom>
-          <a:noFill/>
-        </p:spPr>
-        <p:txBody>
-          <a:bodyPr wrap="square" anchor="t">
+          <a:bodyPr wrap="square" anchor="ctr">
             <a:spAutoFit/>
           </a:bodyPr>
           <a:lstStyle/>
@@ -11537,6 +12042,92 @@
               </a:spcAft>
             </a:pPr>
             <a:r>
+              <a:rPr sz="2400" b="1">
+                <a:solidFill>
+                  <a:srgbClr val="FFFFFF"/>
+                </a:solidFill>
+                <a:latin typeface="微软雅黑"/>
+              </a:rPr>
+              <a:t>承上启下 · 动手前避坑清单</a:t>
+            </a:r>
+          </a:p>
+        </p:txBody>
+      </p:sp>
+      <p:sp>
+        <p:nvSpPr>
+          <p:cNvPr id="18" name="Rectangle 17"/>
+          <p:cNvSpPr/>
+          <p:nvPr/>
+        </p:nvSpPr>
+        <p:spPr>
+          <a:xfrm>
+            <a:off x="500000" y="6500000"/>
+            <a:ext cx="11100000" cy="20000"/>
+          </a:xfrm>
+          <a:prstGeom prst="rect">
+            <a:avLst/>
+          </a:prstGeom>
+          <a:solidFill>
+            <a:srgbClr val="C9D4EE"/>
+          </a:solidFill>
+          <a:ln>
+            <a:noFill/>
+          </a:ln>
+          <a:effectLst/>
+        </p:spPr>
+        <p:style>
+          <a:lnRef idx="1">
+            <a:schemeClr val="accent1"/>
+          </a:lnRef>
+          <a:fillRef idx="3">
+            <a:schemeClr val="accent1"/>
+          </a:fillRef>
+          <a:effectRef idx="2">
+            <a:schemeClr val="accent1"/>
+          </a:effectRef>
+          <a:fontRef idx="minor">
+            <a:schemeClr val="lt1"/>
+          </a:fontRef>
+        </p:style>
+        <p:txBody>
+          <a:bodyPr rtlCol="0" anchor="ctr"/>
+          <a:lstStyle/>
+          <a:p>
+            <a:pPr algn="ctr"/>
+          </a:p>
+        </p:txBody>
+      </p:sp>
+      <p:sp>
+        <p:nvSpPr>
+          <p:cNvPr id="19" name="TextBox 18"/>
+          <p:cNvSpPr txBox="1"/>
+          <p:nvPr/>
+        </p:nvSpPr>
+        <p:spPr>
+          <a:xfrm>
+            <a:off x="500000" y="6540000"/>
+            <a:ext cx="7000000" cy="300000"/>
+          </a:xfrm>
+          <a:prstGeom prst="rect">
+            <a:avLst/>
+          </a:prstGeom>
+          <a:noFill/>
+        </p:spPr>
+        <p:txBody>
+          <a:bodyPr wrap="square" anchor="t">
+            <a:spAutoFit/>
+          </a:bodyPr>
+          <a:lstStyle/>
+          <a:p>
+            <a:pPr algn="l">
+              <a:lnSpc>
+                <a:spcPct val="110000"/>
+              </a:lnSpc>
+              <a:spcAft>
+                <a:spcPts val="600"/>
+              </a:spcAft>
+            </a:pPr>
+            <a:r>
               <a:rPr sz="1000" b="0">
                 <a:solidFill>
                   <a:srgbClr val="8A97B5"/>
@@ -11550,7 +12141,7 @@
       </p:sp>
       <p:sp>
         <p:nvSpPr>
-          <p:cNvPr id="9" name="TextBox 8"/>
+          <p:cNvPr id="20" name="TextBox 19"/>
           <p:cNvSpPr txBox="1"/>
           <p:nvPr/>
         </p:nvSpPr>
@@ -11565,7 +12156,7 @@
           <a:noFill/>
         </p:spPr>
         <p:txBody>
-          <a:bodyPr wrap="square" anchor="ctr">
+          <a:bodyPr wrap="square" anchor="t">
             <a:spAutoFit/>
           </a:bodyPr>
           <a:lstStyle/>
@@ -11585,7 +12176,582 @@
                 </a:solidFill>
                 <a:latin typeface="微软雅黑"/>
               </a:rPr>
-              <a:t>11 / 14</a:t>
+              <a:t>8 / 16</a:t>
+            </a:r>
+          </a:p>
+        </p:txBody>
+      </p:sp>
+      <p:sp>
+        <p:nvSpPr>
+          <p:cNvPr id="21" name="TextBox 20"/>
+          <p:cNvSpPr txBox="1"/>
+          <p:nvPr/>
+        </p:nvSpPr>
+        <p:spPr>
+          <a:xfrm>
+            <a:off x="457200" y="1389888"/>
+            <a:ext cx="11274552" cy="274320"/>
+          </a:xfrm>
+          <a:prstGeom prst="rect">
+            <a:avLst/>
+          </a:prstGeom>
+          <a:noFill/>
+        </p:spPr>
+        <p:txBody>
+          <a:bodyPr wrap="square">
+            <a:spAutoFit/>
+          </a:bodyPr>
+          <a:lstStyle/>
+          <a:p>
+            <a:r>
+              <a:rPr sz="1050" b="0">
+                <a:solidFill>
+                  <a:srgbClr val="6B7280"/>
+                </a:solidFill>
+                <a:latin typeface="微软雅黑"/>
+              </a:rPr>
+              <a:t>本讲是动手冲刺课：先把上周完整讲解里的高频翻车点过一遍，再开工——每条都是历届学生真实踩过的坑。</a:t>
+            </a:r>
+          </a:p>
+        </p:txBody>
+      </p:sp>
+      <p:sp>
+        <p:nvSpPr>
+          <p:cNvPr id="22" name="Rectangle 21"/>
+          <p:cNvSpPr/>
+          <p:nvPr/>
+        </p:nvSpPr>
+        <p:spPr>
+          <a:xfrm>
+            <a:off x="457200" y="1783080"/>
+            <a:ext cx="5532120" cy="2061972"/>
+          </a:xfrm>
+          <a:prstGeom prst="rect">
+            <a:avLst/>
+          </a:prstGeom>
+          <a:solidFill>
+            <a:srgbClr val="FFFFFF"/>
+          </a:solidFill>
+          <a:ln>
+            <a:solidFill>
+              <a:srgbClr val="D6DCE4"/>
+            </a:solidFill>
+          </a:ln>
+          <a:effectLst/>
+        </p:spPr>
+        <p:style>
+          <a:lnRef idx="1">
+            <a:schemeClr val="accent1"/>
+          </a:lnRef>
+          <a:fillRef idx="3">
+            <a:schemeClr val="accent1"/>
+          </a:fillRef>
+          <a:effectRef idx="2">
+            <a:schemeClr val="accent1"/>
+          </a:effectRef>
+          <a:fontRef idx="minor">
+            <a:schemeClr val="lt1"/>
+          </a:fontRef>
+        </p:style>
+        <p:txBody>
+          <a:bodyPr rtlCol="0" anchor="ctr" wrap="square"/>
+          <a:lstStyle/>
+          <a:p>
+            <a:pPr algn="ctr"/>
+          </a:p>
+        </p:txBody>
+      </p:sp>
+      <p:sp>
+        <p:nvSpPr>
+          <p:cNvPr id="23" name="Rectangle 22"/>
+          <p:cNvSpPr/>
+          <p:nvPr/>
+        </p:nvSpPr>
+        <p:spPr>
+          <a:xfrm>
+            <a:off x="457200" y="1783080"/>
+            <a:ext cx="82296" cy="2061972"/>
+          </a:xfrm>
+          <a:prstGeom prst="rect">
+            <a:avLst/>
+          </a:prstGeom>
+          <a:solidFill>
+            <a:srgbClr val="9A3B3B"/>
+          </a:solidFill>
+          <a:ln>
+            <a:noFill/>
+          </a:ln>
+          <a:effectLst/>
+        </p:spPr>
+        <p:style>
+          <a:lnRef idx="1">
+            <a:schemeClr val="accent1"/>
+          </a:lnRef>
+          <a:fillRef idx="3">
+            <a:schemeClr val="accent1"/>
+          </a:fillRef>
+          <a:effectRef idx="2">
+            <a:schemeClr val="accent1"/>
+          </a:effectRef>
+          <a:fontRef idx="minor">
+            <a:schemeClr val="lt1"/>
+          </a:fontRef>
+        </p:style>
+        <p:txBody>
+          <a:bodyPr rtlCol="0" anchor="ctr" wrap="square"/>
+          <a:lstStyle/>
+          <a:p>
+            <a:pPr algn="ctr"/>
+          </a:p>
+        </p:txBody>
+      </p:sp>
+      <p:sp>
+        <p:nvSpPr>
+          <p:cNvPr id="24" name="TextBox 23"/>
+          <p:cNvSpPr txBox="1"/>
+          <p:nvPr/>
+        </p:nvSpPr>
+        <p:spPr>
+          <a:xfrm>
+            <a:off x="658368" y="1847088"/>
+            <a:ext cx="5166359" cy="274320"/>
+          </a:xfrm>
+          <a:prstGeom prst="rect">
+            <a:avLst/>
+          </a:prstGeom>
+          <a:noFill/>
+        </p:spPr>
+        <p:txBody>
+          <a:bodyPr wrap="square">
+            <a:spAutoFit/>
+          </a:bodyPr>
+          <a:lstStyle/>
+          <a:p>
+            <a:r>
+              <a:rPr sz="1050" b="1">
+                <a:solidFill>
+                  <a:srgbClr val="B5533A"/>
+                </a:solidFill>
+                <a:latin typeface="微软雅黑"/>
+              </a:rPr>
+              <a:t>✗ 连不上PLC</a:t>
+            </a:r>
+          </a:p>
+        </p:txBody>
+      </p:sp>
+      <p:sp>
+        <p:nvSpPr>
+          <p:cNvPr id="25" name="TextBox 24"/>
+          <p:cNvSpPr txBox="1"/>
+          <p:nvPr/>
+        </p:nvSpPr>
+        <p:spPr>
+          <a:xfrm>
+            <a:off x="658368" y="2167128"/>
+            <a:ext cx="5166359" cy="868680"/>
+          </a:xfrm>
+          <a:prstGeom prst="rect">
+            <a:avLst/>
+          </a:prstGeom>
+          <a:noFill/>
+        </p:spPr>
+        <p:txBody>
+          <a:bodyPr wrap="square">
+            <a:spAutoFit/>
+          </a:bodyPr>
+          <a:lstStyle/>
+          <a:p>
+            <a:r>
+              <a:rPr sz="900" b="0">
+                <a:solidFill>
+                  <a:srgbClr val="2B2F36"/>
+                </a:solidFill>
+                <a:latin typeface="微软雅黑"/>
+              </a:rPr>
+              <a:t>原因：模拟器没启动</a:t>
+            </a:r>
+          </a:p>
+          <a:p>
+            <a:r>
+              <a:rPr sz="900" b="0">
+                <a:solidFill>
+                  <a:srgbClr val="2B2F36"/>
+                </a:solidFill>
+                <a:latin typeface="微软雅黑"/>
+              </a:rPr>
+              <a:t>✔ 解决：先跑虚拟产线--check</a:t>
+            </a:r>
+          </a:p>
+        </p:txBody>
+      </p:sp>
+      <p:sp>
+        <p:nvSpPr>
+          <p:cNvPr id="26" name="Rectangle 25"/>
+          <p:cNvSpPr/>
+          <p:nvPr/>
+        </p:nvSpPr>
+        <p:spPr>
+          <a:xfrm>
+            <a:off x="6199632" y="1783080"/>
+            <a:ext cx="5532120" cy="2061972"/>
+          </a:xfrm>
+          <a:prstGeom prst="rect">
+            <a:avLst/>
+          </a:prstGeom>
+          <a:solidFill>
+            <a:srgbClr val="FFFFFF"/>
+          </a:solidFill>
+          <a:ln>
+            <a:solidFill>
+              <a:srgbClr val="D6DCE4"/>
+            </a:solidFill>
+          </a:ln>
+          <a:effectLst/>
+        </p:spPr>
+        <p:style>
+          <a:lnRef idx="1">
+            <a:schemeClr val="accent1"/>
+          </a:lnRef>
+          <a:fillRef idx="3">
+            <a:schemeClr val="accent1"/>
+          </a:fillRef>
+          <a:effectRef idx="2">
+            <a:schemeClr val="accent1"/>
+          </a:effectRef>
+          <a:fontRef idx="minor">
+            <a:schemeClr val="lt1"/>
+          </a:fontRef>
+        </p:style>
+        <p:txBody>
+          <a:bodyPr rtlCol="0" anchor="ctr" wrap="square"/>
+          <a:lstStyle/>
+          <a:p>
+            <a:pPr algn="ctr"/>
+          </a:p>
+        </p:txBody>
+      </p:sp>
+      <p:sp>
+        <p:nvSpPr>
+          <p:cNvPr id="27" name="Rectangle 26"/>
+          <p:cNvSpPr/>
+          <p:nvPr/>
+        </p:nvSpPr>
+        <p:spPr>
+          <a:xfrm>
+            <a:off x="6199632" y="1783080"/>
+            <a:ext cx="82296" cy="2061972"/>
+          </a:xfrm>
+          <a:prstGeom prst="rect">
+            <a:avLst/>
+          </a:prstGeom>
+          <a:solidFill>
+            <a:srgbClr val="9A3B3B"/>
+          </a:solidFill>
+          <a:ln>
+            <a:noFill/>
+          </a:ln>
+          <a:effectLst/>
+        </p:spPr>
+        <p:style>
+          <a:lnRef idx="1">
+            <a:schemeClr val="accent1"/>
+          </a:lnRef>
+          <a:fillRef idx="3">
+            <a:schemeClr val="accent1"/>
+          </a:fillRef>
+          <a:effectRef idx="2">
+            <a:schemeClr val="accent1"/>
+          </a:effectRef>
+          <a:fontRef idx="minor">
+            <a:schemeClr val="lt1"/>
+          </a:fontRef>
+        </p:style>
+        <p:txBody>
+          <a:bodyPr rtlCol="0" anchor="ctr" wrap="square"/>
+          <a:lstStyle/>
+          <a:p>
+            <a:pPr algn="ctr"/>
+          </a:p>
+        </p:txBody>
+      </p:sp>
+      <p:sp>
+        <p:nvSpPr>
+          <p:cNvPr id="28" name="TextBox 27"/>
+          <p:cNvSpPr txBox="1"/>
+          <p:nvPr/>
+        </p:nvSpPr>
+        <p:spPr>
+          <a:xfrm>
+            <a:off x="6400800" y="1847088"/>
+            <a:ext cx="5166359" cy="274320"/>
+          </a:xfrm>
+          <a:prstGeom prst="rect">
+            <a:avLst/>
+          </a:prstGeom>
+          <a:noFill/>
+        </p:spPr>
+        <p:txBody>
+          <a:bodyPr wrap="square">
+            <a:spAutoFit/>
+          </a:bodyPr>
+          <a:lstStyle/>
+          <a:p>
+            <a:r>
+              <a:rPr sz="1050" b="1">
+                <a:solidFill>
+                  <a:srgbClr val="B5533A"/>
+                </a:solidFill>
+                <a:latin typeface="微软雅黑"/>
+              </a:rPr>
+              <a:t>✗ 数值大10倍</a:t>
+            </a:r>
+          </a:p>
+        </p:txBody>
+      </p:sp>
+      <p:sp>
+        <p:nvSpPr>
+          <p:cNvPr id="29" name="TextBox 28"/>
+          <p:cNvSpPr txBox="1"/>
+          <p:nvPr/>
+        </p:nvSpPr>
+        <p:spPr>
+          <a:xfrm>
+            <a:off x="6400800" y="2167128"/>
+            <a:ext cx="5166359" cy="868680"/>
+          </a:xfrm>
+          <a:prstGeom prst="rect">
+            <a:avLst/>
+          </a:prstGeom>
+          <a:noFill/>
+        </p:spPr>
+        <p:txBody>
+          <a:bodyPr wrap="square">
+            <a:spAutoFit/>
+          </a:bodyPr>
+          <a:lstStyle/>
+          <a:p>
+            <a:r>
+              <a:rPr sz="900" b="0">
+                <a:solidFill>
+                  <a:srgbClr val="2B2F36"/>
+                </a:solidFill>
+                <a:latin typeface="微软雅黑"/>
+              </a:rPr>
+              <a:t>原因：忘了÷10</a:t>
+            </a:r>
+          </a:p>
+          <a:p>
+            <a:r>
+              <a:rPr sz="900" b="0">
+                <a:solidFill>
+                  <a:srgbClr val="2B2F36"/>
+                </a:solidFill>
+                <a:latin typeface="微软雅黑"/>
+              </a:rPr>
+              <a:t>✔ 解决：寄存器定点换算</a:t>
+            </a:r>
+          </a:p>
+        </p:txBody>
+      </p:sp>
+      <p:sp>
+        <p:nvSpPr>
+          <p:cNvPr id="30" name="Rectangle 29"/>
+          <p:cNvSpPr/>
+          <p:nvPr/>
+        </p:nvSpPr>
+        <p:spPr>
+          <a:xfrm>
+            <a:off x="457200" y="3973068"/>
+            <a:ext cx="5532120" cy="2061972"/>
+          </a:xfrm>
+          <a:prstGeom prst="rect">
+            <a:avLst/>
+          </a:prstGeom>
+          <a:solidFill>
+            <a:srgbClr val="FFFFFF"/>
+          </a:solidFill>
+          <a:ln>
+            <a:solidFill>
+              <a:srgbClr val="D6DCE4"/>
+            </a:solidFill>
+          </a:ln>
+          <a:effectLst/>
+        </p:spPr>
+        <p:style>
+          <a:lnRef idx="1">
+            <a:schemeClr val="accent1"/>
+          </a:lnRef>
+          <a:fillRef idx="3">
+            <a:schemeClr val="accent1"/>
+          </a:fillRef>
+          <a:effectRef idx="2">
+            <a:schemeClr val="accent1"/>
+          </a:effectRef>
+          <a:fontRef idx="minor">
+            <a:schemeClr val="lt1"/>
+          </a:fontRef>
+        </p:style>
+        <p:txBody>
+          <a:bodyPr rtlCol="0" anchor="ctr" wrap="square"/>
+          <a:lstStyle/>
+          <a:p>
+            <a:pPr algn="ctr"/>
+          </a:p>
+        </p:txBody>
+      </p:sp>
+      <p:sp>
+        <p:nvSpPr>
+          <p:cNvPr id="31" name="Rectangle 30"/>
+          <p:cNvSpPr/>
+          <p:nvPr/>
+        </p:nvSpPr>
+        <p:spPr>
+          <a:xfrm>
+            <a:off x="457200" y="3973068"/>
+            <a:ext cx="82296" cy="2061972"/>
+          </a:xfrm>
+          <a:prstGeom prst="rect">
+            <a:avLst/>
+          </a:prstGeom>
+          <a:solidFill>
+            <a:srgbClr val="9A3B3B"/>
+          </a:solidFill>
+          <a:ln>
+            <a:noFill/>
+          </a:ln>
+          <a:effectLst/>
+        </p:spPr>
+        <p:style>
+          <a:lnRef idx="1">
+            <a:schemeClr val="accent1"/>
+          </a:lnRef>
+          <a:fillRef idx="3">
+            <a:schemeClr val="accent1"/>
+          </a:fillRef>
+          <a:effectRef idx="2">
+            <a:schemeClr val="accent1"/>
+          </a:effectRef>
+          <a:fontRef idx="minor">
+            <a:schemeClr val="lt1"/>
+          </a:fontRef>
+        </p:style>
+        <p:txBody>
+          <a:bodyPr rtlCol="0" anchor="ctr" wrap="square"/>
+          <a:lstStyle/>
+          <a:p>
+            <a:pPr algn="ctr"/>
+          </a:p>
+        </p:txBody>
+      </p:sp>
+      <p:sp>
+        <p:nvSpPr>
+          <p:cNvPr id="32" name="TextBox 31"/>
+          <p:cNvSpPr txBox="1"/>
+          <p:nvPr/>
+        </p:nvSpPr>
+        <p:spPr>
+          <a:xfrm>
+            <a:off x="658368" y="4037076"/>
+            <a:ext cx="5166359" cy="274320"/>
+          </a:xfrm>
+          <a:prstGeom prst="rect">
+            <a:avLst/>
+          </a:prstGeom>
+          <a:noFill/>
+        </p:spPr>
+        <p:txBody>
+          <a:bodyPr wrap="square">
+            <a:spAutoFit/>
+          </a:bodyPr>
+          <a:lstStyle/>
+          <a:p>
+            <a:r>
+              <a:rPr sz="1050" b="1">
+                <a:solidFill>
+                  <a:srgbClr val="B5533A"/>
+                </a:solidFill>
+                <a:latin typeface="微软雅黑"/>
+              </a:rPr>
+              <a:t>✗ publish后无消息</a:t>
+            </a:r>
+          </a:p>
+        </p:txBody>
+      </p:sp>
+      <p:sp>
+        <p:nvSpPr>
+          <p:cNvPr id="33" name="TextBox 32"/>
+          <p:cNvSpPr txBox="1"/>
+          <p:nvPr/>
+        </p:nvSpPr>
+        <p:spPr>
+          <a:xfrm>
+            <a:off x="658368" y="4357116"/>
+            <a:ext cx="5166359" cy="868680"/>
+          </a:xfrm>
+          <a:prstGeom prst="rect">
+            <a:avLst/>
+          </a:prstGeom>
+          <a:noFill/>
+        </p:spPr>
+        <p:txBody>
+          <a:bodyPr wrap="square">
+            <a:spAutoFit/>
+          </a:bodyPr>
+          <a:lstStyle/>
+          <a:p>
+            <a:r>
+              <a:rPr sz="900" b="0">
+                <a:solidFill>
+                  <a:srgbClr val="2B2F36"/>
+                </a:solidFill>
+                <a:latin typeface="微软雅黑"/>
+              </a:rPr>
+              <a:t>原因：立刻退出</a:t>
+            </a:r>
+          </a:p>
+          <a:p>
+            <a:r>
+              <a:rPr sz="900" b="0">
+                <a:solidFill>
+                  <a:srgbClr val="2B2F36"/>
+                </a:solidFill>
+                <a:latin typeface="微软雅黑"/>
+              </a:rPr>
+              <a:t>✔ 解决：sleep 0.3再退</a:t>
+            </a:r>
+          </a:p>
+        </p:txBody>
+      </p:sp>
+      <p:sp>
+        <p:nvSpPr>
+          <p:cNvPr id="34" name="TextBox 33"/>
+          <p:cNvSpPr txBox="1"/>
+          <p:nvPr/>
+        </p:nvSpPr>
+        <p:spPr>
+          <a:xfrm>
+            <a:off x="457200" y="6281928"/>
+            <a:ext cx="9601200" cy="182880"/>
+          </a:xfrm>
+          <a:prstGeom prst="rect">
+            <a:avLst/>
+          </a:prstGeom>
+          <a:noFill/>
+        </p:spPr>
+        <p:txBody>
+          <a:bodyPr wrap="square">
+            <a:spAutoFit/>
+          </a:bodyPr>
+          <a:lstStyle/>
+          <a:p>
+            <a:r>
+              <a:rPr sz="900" b="0">
+                <a:solidFill>
+                  <a:srgbClr val="6B7280"/>
+                </a:solidFill>
+                <a:latin typeface="微软雅黑"/>
+              </a:rPr>
+              <a:t>素材来源：同周《第21次课-设备如何在网络上说话》知识卡与避坑清单（逐字摘录）</a:t>
             </a:r>
           </a:p>
         </p:txBody>
@@ -11713,7 +12879,7 @@
           <a:noFill/>
         </p:spPr>
         <p:txBody>
-          <a:bodyPr wrap="square" anchor="t">
+          <a:bodyPr wrap="square" anchor="ctr">
             <a:spAutoFit/>
           </a:bodyPr>
           <a:lstStyle/>
@@ -11733,27 +12899,27 @@
                 </a:solidFill>
                 <a:latin typeface="微软雅黑"/>
               </a:rPr>
-              <a:t>下次课预告（第12周）</a:t>
-            </a:r>
-          </a:p>
-        </p:txBody>
-      </p:sp>
-      <p:sp>
-        <p:nvSpPr>
-          <p:cNvPr id="5" name="Rectangle 4"/>
+              <a:t>本课知识速览卡 · 边做边对照</a:t>
+            </a:r>
+          </a:p>
+        </p:txBody>
+      </p:sp>
+      <p:sp>
+        <p:nvSpPr>
+          <p:cNvPr id="18" name="Rectangle 17"/>
           <p:cNvSpPr/>
           <p:nvPr/>
         </p:nvSpPr>
         <p:spPr>
           <a:xfrm>
-            <a:off x="760000" y="1900000"/>
-            <a:ext cx="10900000" cy="1600000"/>
+            <a:off x="500000" y="6500000"/>
+            <a:ext cx="11100000" cy="20000"/>
           </a:xfrm>
           <a:prstGeom prst="rect">
             <a:avLst/>
           </a:prstGeom>
           <a:solidFill>
-            <a:srgbClr val="F3F6FD"/>
+            <a:srgbClr val="C9D4EE"/>
           </a:solidFill>
           <a:ln>
             <a:noFill/>
@@ -11784,58 +12950,14 @@
       </p:sp>
       <p:sp>
         <p:nvSpPr>
-          <p:cNvPr id="6" name="Rectangle 5"/>
-          <p:cNvSpPr/>
-          <p:nvPr/>
-        </p:nvSpPr>
-        <p:spPr>
-          <a:xfrm>
-            <a:off x="760000" y="1900000"/>
-            <a:ext cx="150000" cy="1600000"/>
-          </a:xfrm>
-          <a:prstGeom prst="rect">
-            <a:avLst/>
-          </a:prstGeom>
-          <a:solidFill>
-            <a:srgbClr val="F5670F"/>
-          </a:solidFill>
-          <a:ln>
-            <a:noFill/>
-          </a:ln>
-          <a:effectLst/>
-        </p:spPr>
-        <p:style>
-          <a:lnRef idx="1">
-            <a:schemeClr val="accent1"/>
-          </a:lnRef>
-          <a:fillRef idx="3">
-            <a:schemeClr val="accent1"/>
-          </a:fillRef>
-          <a:effectRef idx="2">
-            <a:schemeClr val="accent1"/>
-          </a:effectRef>
-          <a:fontRef idx="minor">
-            <a:schemeClr val="lt1"/>
-          </a:fontRef>
-        </p:style>
-        <p:txBody>
-          <a:bodyPr rtlCol="0" anchor="ctr"/>
-          <a:lstStyle/>
-          <a:p>
-            <a:pPr algn="ctr"/>
-          </a:p>
-        </p:txBody>
-      </p:sp>
-      <p:sp>
-        <p:nvSpPr>
-          <p:cNvPr id="7" name="TextBox 6"/>
+          <p:cNvPr id="19" name="TextBox 18"/>
           <p:cNvSpPr txBox="1"/>
           <p:nvPr/>
         </p:nvSpPr>
         <p:spPr>
           <a:xfrm>
-            <a:off x="1020000" y="2050000"/>
-            <a:ext cx="10500000" cy="1400000"/>
+            <a:off x="500000" y="6540000"/>
+            <a:ext cx="7000000" cy="300000"/>
           </a:xfrm>
           <a:prstGeom prst="rect">
             <a:avLst/>
@@ -11857,17 +12979,40 @@
               </a:spcAft>
             </a:pPr>
             <a:r>
-              <a:rPr sz="1700" b="1">
-                <a:solidFill>
-                  <a:srgbClr val="010328"/>
-                </a:solidFill>
-                <a:latin typeface="微软雅黑"/>
-              </a:rPr>
-              <a:t>主题: 按checklist完成终验自查——应用：见工单</a:t>
-            </a:r>
-          </a:p>
-          <a:p>
-            <a:pPr algn="l">
+              <a:rPr sz="1000" b="0">
+                <a:solidFill>
+                  <a:srgbClr val="8A97B5"/>
+                </a:solidFill>
+                <a:latin typeface="微软雅黑"/>
+              </a:rPr>
+              <a:t>两江智造集团 · Python编程基础</a:t>
+            </a:r>
+          </a:p>
+        </p:txBody>
+      </p:sp>
+      <p:sp>
+        <p:nvSpPr>
+          <p:cNvPr id="20" name="TextBox 19"/>
+          <p:cNvSpPr txBox="1"/>
+          <p:nvPr/>
+        </p:nvSpPr>
+        <p:spPr>
+          <a:xfrm>
+            <a:off x="10600000" y="6540000"/>
+            <a:ext cx="1000000" cy="300000"/>
+          </a:xfrm>
+          <a:prstGeom prst="rect">
+            <a:avLst/>
+          </a:prstGeom>
+          <a:noFill/>
+        </p:spPr>
+        <p:txBody>
+          <a:bodyPr wrap="square" anchor="t">
+            <a:spAutoFit/>
+          </a:bodyPr>
+          <a:lstStyle/>
+          <a:p>
+            <a:pPr algn="r">
               <a:lnSpc>
                 <a:spcPct val="110000"/>
               </a:lnSpc>
@@ -11876,27 +13021,27 @@
               </a:spcAft>
             </a:pPr>
             <a:r>
-              <a:rPr sz="1300" b="0">
-                <a:solidFill>
-                  <a:srgbClr val="44546A"/>
-                </a:solidFill>
-                <a:latin typeface="微软雅黑"/>
-              </a:rPr>
-              <a:t>预习快问: checklist三清单(功能/规范/演示)你组还差哪几项？</a:t>
-            </a:r>
-          </a:p>
-        </p:txBody>
-      </p:sp>
-      <p:sp>
-        <p:nvSpPr>
-          <p:cNvPr id="8" name="TextBox 7"/>
+              <a:rPr sz="1000" b="0">
+                <a:solidFill>
+                  <a:srgbClr val="8A97B5"/>
+                </a:solidFill>
+                <a:latin typeface="微软雅黑"/>
+              </a:rPr>
+              <a:t>9 / 16</a:t>
+            </a:r>
+          </a:p>
+        </p:txBody>
+      </p:sp>
+      <p:sp>
+        <p:nvSpPr>
+          <p:cNvPr id="21" name="TextBox 20"/>
           <p:cNvSpPr txBox="1"/>
           <p:nvPr/>
         </p:nvSpPr>
         <p:spPr>
           <a:xfrm>
-            <a:off x="760000" y="3900000"/>
-            <a:ext cx="10900000" cy="900000"/>
+            <a:off x="457200" y="1389888"/>
+            <a:ext cx="11274552" cy="274320"/>
           </a:xfrm>
           <a:prstGeom prst="rect">
             <a:avLst/>
@@ -11904,46 +13049,615 @@
           <a:noFill/>
         </p:spPr>
         <p:txBody>
-          <a:bodyPr wrap="square" anchor="t">
+          <a:bodyPr wrap="square">
             <a:spAutoFit/>
           </a:bodyPr>
           <a:lstStyle/>
           <a:p>
-            <a:pPr algn="l">
-              <a:lnSpc>
-                <a:spcPct val="110000"/>
-              </a:lnSpc>
-              <a:spcAft>
-                <a:spcPts val="600"/>
-              </a:spcAft>
-            </a:pPr>
-            <a:r>
-              <a:rPr sz="1400" b="1">
-                <a:solidFill>
-                  <a:srgbClr val="0545E8"/>
-                </a:solidFill>
-                <a:latin typeface="微软雅黑"/>
-              </a:rPr>
-              <a:t>课前完成：导学单 + 预习自测 + starter环境自检</a:t>
-            </a:r>
-          </a:p>
-          <a:p>
-            <a:pPr algn="l">
-              <a:lnSpc>
-                <a:spcPct val="110000"/>
-              </a:lnSpc>
-              <a:spcAft>
-                <a:spcPts val="600"/>
-              </a:spcAft>
-            </a:pPr>
-            <a:r>
-              <a:rPr sz="1250" b="0">
-                <a:solidFill>
-                  <a:srgbClr val="44546A"/>
-                </a:solidFill>
-                <a:latin typeface="微软雅黑"/>
-              </a:rPr>
-              <a:t>带着问题来上课——Predict先于Run</a:t>
+            <a:r>
+              <a:rPr sz="1050" b="0">
+                <a:solidFill>
+                  <a:srgbClr val="6B7280"/>
+                </a:solidFill>
+                <a:latin typeface="微软雅黑"/>
+              </a:rPr>
+              <a:t>本讲是动手冲刺课：知识点在完整讲解课已细讲——这页把它们浓缩成一张速览卡，边做边对照。</a:t>
+            </a:r>
+          </a:p>
+        </p:txBody>
+      </p:sp>
+      <p:sp>
+        <p:nvSpPr>
+          <p:cNvPr id="22" name="Rectangle 21"/>
+          <p:cNvSpPr/>
+          <p:nvPr/>
+        </p:nvSpPr>
+        <p:spPr>
+          <a:xfrm>
+            <a:off x="457200" y="1783080"/>
+            <a:ext cx="6309360" cy="4114800"/>
+          </a:xfrm>
+          <a:prstGeom prst="rect">
+            <a:avLst/>
+          </a:prstGeom>
+          <a:solidFill>
+            <a:srgbClr val="FFFFFF"/>
+          </a:solidFill>
+          <a:ln>
+            <a:solidFill>
+              <a:srgbClr val="D6DCE4"/>
+            </a:solidFill>
+          </a:ln>
+          <a:effectLst/>
+        </p:spPr>
+        <p:style>
+          <a:lnRef idx="1">
+            <a:schemeClr val="accent1"/>
+          </a:lnRef>
+          <a:fillRef idx="3">
+            <a:schemeClr val="accent1"/>
+          </a:fillRef>
+          <a:effectRef idx="2">
+            <a:schemeClr val="accent1"/>
+          </a:effectRef>
+          <a:fontRef idx="minor">
+            <a:schemeClr val="lt1"/>
+          </a:fontRef>
+        </p:style>
+        <p:txBody>
+          <a:bodyPr rtlCol="0" anchor="ctr" wrap="square"/>
+          <a:lstStyle/>
+          <a:p>
+            <a:pPr algn="ctr"/>
+          </a:p>
+        </p:txBody>
+      </p:sp>
+      <p:sp>
+        <p:nvSpPr>
+          <p:cNvPr id="23" name="Rectangle 22"/>
+          <p:cNvSpPr/>
+          <p:nvPr/>
+        </p:nvSpPr>
+        <p:spPr>
+          <a:xfrm>
+            <a:off x="457200" y="1783080"/>
+            <a:ext cx="6309360" cy="365760"/>
+          </a:xfrm>
+          <a:prstGeom prst="rect">
+            <a:avLst/>
+          </a:prstGeom>
+          <a:solidFill>
+            <a:srgbClr val="2F5D8C"/>
+          </a:solidFill>
+          <a:ln>
+            <a:noFill/>
+          </a:ln>
+          <a:effectLst/>
+        </p:spPr>
+        <p:style>
+          <a:lnRef idx="1">
+            <a:schemeClr val="accent1"/>
+          </a:lnRef>
+          <a:fillRef idx="3">
+            <a:schemeClr val="accent1"/>
+          </a:fillRef>
+          <a:effectRef idx="2">
+            <a:schemeClr val="accent1"/>
+          </a:effectRef>
+          <a:fontRef idx="minor">
+            <a:schemeClr val="lt1"/>
+          </a:fontRef>
+        </p:style>
+        <p:txBody>
+          <a:bodyPr rtlCol="0" anchor="ctr" wrap="square"/>
+          <a:lstStyle/>
+          <a:p>
+            <a:pPr algn="ctr"/>
+          </a:p>
+        </p:txBody>
+      </p:sp>
+      <p:sp>
+        <p:nvSpPr>
+          <p:cNvPr id="24" name="TextBox 23"/>
+          <p:cNvSpPr txBox="1"/>
+          <p:nvPr/>
+        </p:nvSpPr>
+        <p:spPr>
+          <a:xfrm>
+            <a:off x="566928" y="1819656"/>
+            <a:ext cx="6089904" cy="292608"/>
+          </a:xfrm>
+          <a:prstGeom prst="rect">
+            <a:avLst/>
+          </a:prstGeom>
+          <a:noFill/>
+        </p:spPr>
+        <p:txBody>
+          <a:bodyPr wrap="square">
+            <a:spAutoFit/>
+          </a:bodyPr>
+          <a:lstStyle/>
+          <a:p>
+            <a:r>
+              <a:rPr sz="1150" b="1">
+                <a:solidFill>
+                  <a:srgbClr val="FFFFFF"/>
+                </a:solidFill>
+                <a:latin typeface="微软雅黑"/>
+              </a:rPr>
+              <a:t>知识点速览（逐字摘自同周完整讲解课知识卡）</a:t>
+            </a:r>
+          </a:p>
+        </p:txBody>
+      </p:sp>
+      <p:sp>
+        <p:nvSpPr>
+          <p:cNvPr id="25" name="TextBox 24"/>
+          <p:cNvSpPr txBox="1"/>
+          <p:nvPr/>
+        </p:nvSpPr>
+        <p:spPr>
+          <a:xfrm>
+            <a:off x="621792" y="2267712"/>
+            <a:ext cx="6035040" cy="3474720"/>
+          </a:xfrm>
+          <a:prstGeom prst="rect">
+            <a:avLst/>
+          </a:prstGeom>
+          <a:noFill/>
+        </p:spPr>
+        <p:txBody>
+          <a:bodyPr wrap="square">
+            <a:spAutoFit/>
+          </a:bodyPr>
+          <a:lstStyle/>
+          <a:p>
+            <a:r>
+              <a:rPr sz="950" b="0">
+                <a:solidFill>
+                  <a:srgbClr val="2B2F36"/>
+                </a:solidFill>
+                <a:latin typeface="微软雅黑"/>
+              </a:rPr>
+              <a:t>◆ B01 Modbus寄存器｜寄存器=PLC的储物柜编号：40001起按地址读数</a:t>
+            </a:r>
+          </a:p>
+          <a:p>
+            <a:r>
+              <a:rPr sz="950" b="0">
+                <a:solidFill>
+                  <a:srgbClr val="2B2F36"/>
+                </a:solidFill>
+                <a:latin typeface="微软雅黑"/>
+              </a:rPr>
+              <a:t>◆ B02 定点存储约定｜定点=小数×10存整数：678其实是67.8℃——PLC不存小数</a:t>
+            </a:r>
+          </a:p>
+          <a:p>
+            <a:r>
+              <a:rPr sz="950" b="0">
+                <a:solidFill>
+                  <a:srgbClr val="2B2F36"/>
+                </a:solidFill>
+                <a:latin typeface="微软雅黑"/>
+              </a:rPr>
+              <a:t>◆ B03 pymodbus读寄存器｜pymodbus=Python的Modbus翻译官——一行读PLC寄存器</a:t>
+            </a:r>
+          </a:p>
+          <a:p>
+            <a:r>
+              <a:rPr sz="950" b="0">
+                <a:solidFill>
+                  <a:srgbClr val="2B2F36"/>
+                </a:solidFill>
+                <a:latin typeface="微软雅黑"/>
+              </a:rPr>
+              <a:t>◆ B04 MQTT主题路由｜MQTT=广播电台：主题=频道，发布订阅各取所需</a:t>
+            </a:r>
+          </a:p>
+          <a:p>
+            <a:r>
+              <a:rPr sz="950" b="0">
+                <a:solidFill>
+                  <a:srgbClr val="2B2F36"/>
+                </a:solidFill>
+                <a:latin typeface="微软雅黑"/>
+              </a:rPr>
+              <a:t>◆ B05 JSON消息含时间戳｜ts时间戳=消息的出生证明——排序追溯全靠它</a:t>
+            </a:r>
+          </a:p>
+          <a:p>
+            <a:r>
+              <a:rPr sz="950" b="0">
+                <a:solidFill>
+                  <a:srgbClr val="2B2F36"/>
+                </a:solidFill>
+                <a:latin typeface="微软雅黑"/>
+              </a:rPr>
+              <a:t>◆ B06 排错三步法｜排错三步=从外到内剥洋葱：ping通→端口通→代码通</a:t>
+            </a:r>
+          </a:p>
+        </p:txBody>
+      </p:sp>
+      <p:sp>
+        <p:nvSpPr>
+          <p:cNvPr id="26" name="Rectangle 25"/>
+          <p:cNvSpPr/>
+          <p:nvPr/>
+        </p:nvSpPr>
+        <p:spPr>
+          <a:xfrm>
+            <a:off x="6903720" y="1783080"/>
+            <a:ext cx="4828032" cy="1965960"/>
+          </a:xfrm>
+          <a:prstGeom prst="rect">
+            <a:avLst/>
+          </a:prstGeom>
+          <a:solidFill>
+            <a:srgbClr val="FFFFFF"/>
+          </a:solidFill>
+          <a:ln>
+            <a:solidFill>
+              <a:srgbClr val="D6DCE4"/>
+            </a:solidFill>
+          </a:ln>
+          <a:effectLst/>
+        </p:spPr>
+        <p:style>
+          <a:lnRef idx="1">
+            <a:schemeClr val="accent1"/>
+          </a:lnRef>
+          <a:fillRef idx="3">
+            <a:schemeClr val="accent1"/>
+          </a:fillRef>
+          <a:effectRef idx="2">
+            <a:schemeClr val="accent1"/>
+          </a:effectRef>
+          <a:fontRef idx="minor">
+            <a:schemeClr val="lt1"/>
+          </a:fontRef>
+        </p:style>
+        <p:txBody>
+          <a:bodyPr rtlCol="0" anchor="ctr" wrap="square"/>
+          <a:lstStyle/>
+          <a:p>
+            <a:pPr algn="ctr"/>
+          </a:p>
+        </p:txBody>
+      </p:sp>
+      <p:sp>
+        <p:nvSpPr>
+          <p:cNvPr id="27" name="Rectangle 26"/>
+          <p:cNvSpPr/>
+          <p:nvPr/>
+        </p:nvSpPr>
+        <p:spPr>
+          <a:xfrm>
+            <a:off x="6903720" y="1783080"/>
+            <a:ext cx="4828032" cy="365760"/>
+          </a:xfrm>
+          <a:prstGeom prst="rect">
+            <a:avLst/>
+          </a:prstGeom>
+          <a:solidFill>
+            <a:srgbClr val="2E7D46"/>
+          </a:solidFill>
+          <a:ln>
+            <a:noFill/>
+          </a:ln>
+          <a:effectLst/>
+        </p:spPr>
+        <p:style>
+          <a:lnRef idx="1">
+            <a:schemeClr val="accent1"/>
+          </a:lnRef>
+          <a:fillRef idx="3">
+            <a:schemeClr val="accent1"/>
+          </a:fillRef>
+          <a:effectRef idx="2">
+            <a:schemeClr val="accent1"/>
+          </a:effectRef>
+          <a:fontRef idx="minor">
+            <a:schemeClr val="lt1"/>
+          </a:fontRef>
+        </p:style>
+        <p:txBody>
+          <a:bodyPr rtlCol="0" anchor="ctr" wrap="square"/>
+          <a:lstStyle/>
+          <a:p>
+            <a:pPr algn="ctr"/>
+          </a:p>
+        </p:txBody>
+      </p:sp>
+      <p:sp>
+        <p:nvSpPr>
+          <p:cNvPr id="28" name="TextBox 27"/>
+          <p:cNvSpPr txBox="1"/>
+          <p:nvPr/>
+        </p:nvSpPr>
+        <p:spPr>
+          <a:xfrm>
+            <a:off x="7013448" y="1819656"/>
+            <a:ext cx="4608576" cy="292608"/>
+          </a:xfrm>
+          <a:prstGeom prst="rect">
+            <a:avLst/>
+          </a:prstGeom>
+          <a:noFill/>
+        </p:spPr>
+        <p:txBody>
+          <a:bodyPr wrap="square">
+            <a:spAutoFit/>
+          </a:bodyPr>
+          <a:lstStyle/>
+          <a:p>
+            <a:r>
+              <a:rPr sz="1150" b="1">
+                <a:solidFill>
+                  <a:srgbClr val="FFFFFF"/>
+                </a:solidFill>
+                <a:latin typeface="微软雅黑"/>
+              </a:rPr>
+              <a:t>本讲达标线（当堂评分同口径）</a:t>
+            </a:r>
+          </a:p>
+        </p:txBody>
+      </p:sp>
+      <p:sp>
+        <p:nvSpPr>
+          <p:cNvPr id="29" name="TextBox 28"/>
+          <p:cNvSpPr txBox="1"/>
+          <p:nvPr/>
+        </p:nvSpPr>
+        <p:spPr>
+          <a:xfrm>
+            <a:off x="7068312" y="2249424"/>
+            <a:ext cx="4526280" cy="1371600"/>
+          </a:xfrm>
+          <a:prstGeom prst="rect">
+            <a:avLst/>
+          </a:prstGeom>
+          <a:noFill/>
+        </p:spPr>
+        <p:txBody>
+          <a:bodyPr wrap="square">
+            <a:spAutoFit/>
+          </a:bodyPr>
+          <a:lstStyle/>
+          <a:p>
+            <a:r>
+              <a:rPr sz="900" b="0">
+                <a:solidFill>
+                  <a:srgbClr val="2B2F36"/>
+                </a:solidFill>
+                <a:latin typeface="微软雅黑"/>
+              </a:rPr>
+              <a:t>① 及格(D)：Modbus读+MQTT发布成功</a:t>
+            </a:r>
+          </a:p>
+          <a:p>
+            <a:r>
+              <a:rPr sz="900" b="0">
+                <a:solidFill>
+                  <a:srgbClr val="2B2F36"/>
+                </a:solidFill>
+                <a:latin typeface="微软雅黑"/>
+              </a:rPr>
+              <a:t>② 优秀(B+)：断线重连+回环验证+规范率≥90%</a:t>
+            </a:r>
+          </a:p>
+        </p:txBody>
+      </p:sp>
+      <p:sp>
+        <p:nvSpPr>
+          <p:cNvPr id="30" name="Rectangle 29"/>
+          <p:cNvSpPr/>
+          <p:nvPr/>
+        </p:nvSpPr>
+        <p:spPr>
+          <a:xfrm>
+            <a:off x="6903720" y="3886200"/>
+            <a:ext cx="4828032" cy="2011680"/>
+          </a:xfrm>
+          <a:prstGeom prst="rect">
+            <a:avLst/>
+          </a:prstGeom>
+          <a:solidFill>
+            <a:srgbClr val="FFFFFF"/>
+          </a:solidFill>
+          <a:ln>
+            <a:solidFill>
+              <a:srgbClr val="D6DCE4"/>
+            </a:solidFill>
+          </a:ln>
+          <a:effectLst/>
+        </p:spPr>
+        <p:style>
+          <a:lnRef idx="1">
+            <a:schemeClr val="accent1"/>
+          </a:lnRef>
+          <a:fillRef idx="3">
+            <a:schemeClr val="accent1"/>
+          </a:fillRef>
+          <a:effectRef idx="2">
+            <a:schemeClr val="accent1"/>
+          </a:effectRef>
+          <a:fontRef idx="minor">
+            <a:schemeClr val="lt1"/>
+          </a:fontRef>
+        </p:style>
+        <p:txBody>
+          <a:bodyPr rtlCol="0" anchor="ctr" wrap="square"/>
+          <a:lstStyle/>
+          <a:p>
+            <a:pPr algn="ctr"/>
+          </a:p>
+        </p:txBody>
+      </p:sp>
+      <p:sp>
+        <p:nvSpPr>
+          <p:cNvPr id="31" name="Rectangle 30"/>
+          <p:cNvSpPr/>
+          <p:nvPr/>
+        </p:nvSpPr>
+        <p:spPr>
+          <a:xfrm>
+            <a:off x="6903720" y="3886200"/>
+            <a:ext cx="4828032" cy="365760"/>
+          </a:xfrm>
+          <a:prstGeom prst="rect">
+            <a:avLst/>
+          </a:prstGeom>
+          <a:solidFill>
+            <a:srgbClr val="8A4B2D"/>
+          </a:solidFill>
+          <a:ln>
+            <a:noFill/>
+          </a:ln>
+          <a:effectLst/>
+        </p:spPr>
+        <p:style>
+          <a:lnRef idx="1">
+            <a:schemeClr val="accent1"/>
+          </a:lnRef>
+          <a:fillRef idx="3">
+            <a:schemeClr val="accent1"/>
+          </a:fillRef>
+          <a:effectRef idx="2">
+            <a:schemeClr val="accent1"/>
+          </a:effectRef>
+          <a:fontRef idx="minor">
+            <a:schemeClr val="lt1"/>
+          </a:fontRef>
+        </p:style>
+        <p:txBody>
+          <a:bodyPr rtlCol="0" anchor="ctr" wrap="square"/>
+          <a:lstStyle/>
+          <a:p>
+            <a:pPr algn="ctr"/>
+          </a:p>
+        </p:txBody>
+      </p:sp>
+      <p:sp>
+        <p:nvSpPr>
+          <p:cNvPr id="32" name="TextBox 31"/>
+          <p:cNvSpPr txBox="1"/>
+          <p:nvPr/>
+        </p:nvSpPr>
+        <p:spPr>
+          <a:xfrm>
+            <a:off x="7013448" y="3922776"/>
+            <a:ext cx="4608576" cy="292608"/>
+          </a:xfrm>
+          <a:prstGeom prst="rect">
+            <a:avLst/>
+          </a:prstGeom>
+          <a:noFill/>
+        </p:spPr>
+        <p:txBody>
+          <a:bodyPr wrap="square">
+            <a:spAutoFit/>
+          </a:bodyPr>
+          <a:lstStyle/>
+          <a:p>
+            <a:r>
+              <a:rPr sz="1150" b="1">
+                <a:solidFill>
+                  <a:srgbClr val="FFFFFF"/>
+                </a:solidFill>
+                <a:latin typeface="微软雅黑"/>
+              </a:rPr>
+              <a:t>动手前三个提醒（踩坑点摘录）</a:t>
+            </a:r>
+          </a:p>
+        </p:txBody>
+      </p:sp>
+      <p:sp>
+        <p:nvSpPr>
+          <p:cNvPr id="33" name="TextBox 32"/>
+          <p:cNvSpPr txBox="1"/>
+          <p:nvPr/>
+        </p:nvSpPr>
+        <p:spPr>
+          <a:xfrm>
+            <a:off x="7068312" y="4352544"/>
+            <a:ext cx="4526280" cy="1463040"/>
+          </a:xfrm>
+          <a:prstGeom prst="rect">
+            <a:avLst/>
+          </a:prstGeom>
+          <a:noFill/>
+        </p:spPr>
+        <p:txBody>
+          <a:bodyPr wrap="square">
+            <a:spAutoFit/>
+          </a:bodyPr>
+          <a:lstStyle/>
+          <a:p>
+            <a:r>
+              <a:rPr sz="900" b="0">
+                <a:solidFill>
+                  <a:srgbClr val="2B2F36"/>
+                </a:solidFill>
+                <a:latin typeface="微软雅黑"/>
+              </a:rPr>
+              <a:t>⚠ 先跑虚拟产线--check</a:t>
+            </a:r>
+          </a:p>
+          <a:p>
+            <a:r>
+              <a:rPr sz="900" b="0">
+                <a:solidFill>
+                  <a:srgbClr val="2B2F36"/>
+                </a:solidFill>
+                <a:latin typeface="微软雅黑"/>
+              </a:rPr>
+              <a:t>⚠ 寄存器定点换算</a:t>
+            </a:r>
+          </a:p>
+          <a:p>
+            <a:r>
+              <a:rPr sz="900" b="0">
+                <a:solidFill>
+                  <a:srgbClr val="2B2F36"/>
+                </a:solidFill>
+                <a:latin typeface="微软雅黑"/>
+              </a:rPr>
+              <a:t>⚠ sleep 0.3再退</a:t>
+            </a:r>
+          </a:p>
+        </p:txBody>
+      </p:sp>
+      <p:sp>
+        <p:nvSpPr>
+          <p:cNvPr id="34" name="TextBox 33"/>
+          <p:cNvSpPr txBox="1"/>
+          <p:nvPr/>
+        </p:nvSpPr>
+        <p:spPr>
+          <a:xfrm>
+            <a:off x="457200" y="6281928"/>
+            <a:ext cx="9601200" cy="182880"/>
+          </a:xfrm>
+          <a:prstGeom prst="rect">
+            <a:avLst/>
+          </a:prstGeom>
+          <a:noFill/>
+        </p:spPr>
+        <p:txBody>
+          <a:bodyPr wrap="square">
+            <a:spAutoFit/>
+          </a:bodyPr>
+          <a:lstStyle/>
+          <a:p>
+            <a:r>
+              <a:rPr sz="900" b="0">
+                <a:solidFill>
+                  <a:srgbClr val="6B7280"/>
+                </a:solidFill>
+                <a:latin typeface="微软雅黑"/>
+              </a:rPr>
+              <a:t>素材来源：同周《第21次课-设备如何在网络上说话》知识卡与避坑清单（逐字摘录）</a:t>
             </a:r>
           </a:p>
         </p:txBody>
